--- a/decks/05-document-and-chunking-lab.pptx
+++ b/decks/05-document-and-chunking-lab.pptx
@@ -2,20 +2,20 @@
 <file path=ppt/presentation.xml><?xml version="1.0" encoding="utf-8"?>
 <p:presentation xmlns:p="http://schemas.openxmlformats.org/presentationml/2006/main">
   <p:sldMasterIdLst>
-    <p:sldMasterId xmlns:r="http://schemas.openxmlformats.org/officeDocument/2006/relationships" id="2147483648" r:id="R45edbdd840124414"/>
+    <p:sldMasterId xmlns:r="http://schemas.openxmlformats.org/officeDocument/2006/relationships" id="2147483648" r:id="Rcc0839dc76bd4699"/>
   </p:sldMasterIdLst>
   <p:notesMasterIdLst>
-    <p:notesMasterId xmlns:r="http://schemas.openxmlformats.org/officeDocument/2006/relationships" r:id="R98038520255f4d89"/>
+    <p:notesMasterId xmlns:r="http://schemas.openxmlformats.org/officeDocument/2006/relationships" r:id="R016fcb1d279e4465"/>
   </p:notesMasterIdLst>
   <p:sldIdLst>
-    <p:sldId xmlns:r="http://schemas.openxmlformats.org/officeDocument/2006/relationships" id="256" r:id="R0353ba52e27c44ec"/>
-    <p:sldId xmlns:r="http://schemas.openxmlformats.org/officeDocument/2006/relationships" id="257" r:id="R53748089cf1441e0"/>
-    <p:sldId xmlns:r="http://schemas.openxmlformats.org/officeDocument/2006/relationships" id="258" r:id="Rcd8ecda44af74713"/>
-    <p:sldId xmlns:r="http://schemas.openxmlformats.org/officeDocument/2006/relationships" id="259" r:id="R002671e268a74e6f"/>
-    <p:sldId xmlns:r="http://schemas.openxmlformats.org/officeDocument/2006/relationships" id="260" r:id="Rca1820ad07714e41"/>
-    <p:sldId xmlns:r="http://schemas.openxmlformats.org/officeDocument/2006/relationships" id="261" r:id="R92461eba96d44f0e"/>
-    <p:sldId xmlns:r="http://schemas.openxmlformats.org/officeDocument/2006/relationships" id="262" r:id="R9da03e5aa3d545ed"/>
-    <p:sldId xmlns:r="http://schemas.openxmlformats.org/officeDocument/2006/relationships" id="263" r:id="R10e9ffe7040147b7"/>
+    <p:sldId xmlns:r="http://schemas.openxmlformats.org/officeDocument/2006/relationships" id="256" r:id="R28b58dbd83c6442a"/>
+    <p:sldId xmlns:r="http://schemas.openxmlformats.org/officeDocument/2006/relationships" id="257" r:id="R4ea80f206c094faf"/>
+    <p:sldId xmlns:r="http://schemas.openxmlformats.org/officeDocument/2006/relationships" id="258" r:id="Re24f841d7e6d42ff"/>
+    <p:sldId xmlns:r="http://schemas.openxmlformats.org/officeDocument/2006/relationships" id="259" r:id="Re8be3596dfc84d43"/>
+    <p:sldId xmlns:r="http://schemas.openxmlformats.org/officeDocument/2006/relationships" id="260" r:id="R7e814073f17d4fad"/>
+    <p:sldId xmlns:r="http://schemas.openxmlformats.org/officeDocument/2006/relationships" id="261" r:id="R4b391109446d4bfc"/>
+    <p:sldId xmlns:r="http://schemas.openxmlformats.org/officeDocument/2006/relationships" id="262" r:id="R1e25e06be2a0499e"/>
+    <p:sldId xmlns:r="http://schemas.openxmlformats.org/officeDocument/2006/relationships" id="263" r:id="Rfdeb9179498b4fde"/>
   </p:sldIdLst>
   <p:sldSz cx="15240000" cy="8572500"/>
   <p:notesSz cx="6858000" cy="9144000"/>
@@ -644,12 +644,7 @@
           <a:lstStyle xmlns:a="http://schemas.openxmlformats.org/drawingml/2006/main"/>
           <a:p xmlns:a="http://schemas.openxmlformats.org/drawingml/2006/main">
             <a:r>
-              <a:t>Separate the parser contract from the chunking policy.</a:t>
-            </a:r>
-          </a:p>
-          <a:p xmlns:a="http://schemas.openxmlformats.org/drawingml/2006/main">
-            <a:r>
-              <a:t>The canonical block model is the stable boundary between them.</a:t>
+              <a:t>Use the five stages as a parser-quality ladder: source bytes, text extraction, layout recovery, canonical blocks, then a quality gate. Chunking starts only after the evidence unit is trustworthy.</a:t>
             </a:r>
           </a:p>
           <a:p xmlns:a="http://schemas.openxmlformats.org/drawingml/2006/main">
@@ -939,17 +934,7 @@
           <a:lstStyle xmlns:a="http://schemas.openxmlformats.org/drawingml/2006/main"/>
           <a:p xmlns:a="http://schemas.openxmlformats.org/drawingml/2006/main">
             <a:r>
-              <a:t>Semantic chunking requires both a representation and a boundary threshold.</a:t>
-            </a:r>
-          </a:p>
-          <a:p xmlns:a="http://schemas.openxmlformats.org/drawingml/2006/main">
-            <a:r>
-              <a:t>Hierarchical chunking separates matching granularity from reading context.</a:t>
-            </a:r>
-          </a:p>
-          <a:p xmlns:a="http://schemas.openxmlformats.org/drawingml/2006/main">
-            <a:r>
-              <a:t>Contextual prefixes and LLM propositions add cost and must be evaluated against original evidence.</a:t>
+              <a:t>Separate three decisions. Embedding model plus threshold creates semantic boundaries. Parent-child links separate matching from reading. Contextual enrichment is one bounded JSON transformation, not agentic chunking; generated context augments immutable raw_text. The 1.37x token ratio is the deterministic Notebook 05 offline measurement.</a:t>
             </a:r>
           </a:p>
           <a:p xmlns:a="http://schemas.openxmlformats.org/drawingml/2006/main">
@@ -964,7 +949,17 @@
           </a:p>
           <a:p xmlns:a="http://schemas.openxmlformats.org/drawingml/2006/main">
             <a:r>
-              <a:t>- https://scikit-learn.org/stable/modules/generated/sklearn.feature_extraction.text.TfidfVectorizer.html</a:t>
+              <a:t>- https://platform.openai.com/docs/guides/embeddings</a:t>
+            </a:r>
+          </a:p>
+          <a:p xmlns:a="http://schemas.openxmlformats.org/drawingml/2006/main">
+            <a:r>
+              <a:t>- https://docs.ollama.com/capabilities/embeddings</a:t>
+            </a:r>
+          </a:p>
+          <a:p xmlns:a="http://schemas.openxmlformats.org/drawingml/2006/main">
+            <a:r>
+              <a:t>- Course Notebook 05 offline execution, contextual-chunks-v1</a:t>
             </a:r>
           </a:p>
           <a:p xmlns:a="http://schemas.openxmlformats.org/drawingml/2006/main">
@@ -1139,17 +1134,7 @@
           <a:lstStyle xmlns:a="http://schemas.openxmlformats.org/drawingml/2006/main"/>
           <a:p xmlns:a="http://schemas.openxmlformats.org/drawingml/2006/main">
             <a:r>
-              <a:t>Recommend a structure-aware child representation as the initial policy, not a universal final answer.</a:t>
-            </a:r>
-          </a:p>
-          <a:p xmlns:a="http://schemas.openxmlformats.org/drawingml/2006/main">
-            <a:r>
-              <a:t>Parent links restore context after retrieval while keeping the index granular.</a:t>
-            </a:r>
-          </a:p>
-          <a:p xmlns:a="http://schemas.openxmlformats.org/drawingml/2006/main">
-            <a:r>
-              <a:t>Lesson 06 holds these chunks constant and improves representation and ranking.</a:t>
+              <a:t>Use structure-aware chunks as the filing baseline. Add semantic boundaries or hierarchy when matching is weak; add LLM contextual enrichment only when passages remain ambiguous and measured retrieval improves enough to justify tokens, latency and transformation risk.</a:t>
             </a:r>
           </a:p>
           <a:p xmlns:a="http://schemas.openxmlformats.org/drawingml/2006/main">
@@ -1164,7 +1149,12 @@
           </a:p>
           <a:p xmlns:a="http://schemas.openxmlformats.org/drawingml/2006/main">
             <a:r>
-              <a:t>- Course-owned diagram and copy.</a:t>
+              <a:t>- Course-owned decision matrix</a:t>
+            </a:r>
+          </a:p>
+          <a:p xmlns:a="http://schemas.openxmlformats.org/drawingml/2006/main">
+            <a:r>
+              <a:t>- Course Notebook 05 offline execution</a:t>
             </a:r>
           </a:p>
           <a:p xmlns:a="http://schemas.openxmlformats.org/drawingml/2006/main">
@@ -1237,7 +1227,7 @@
   </p:cSld>
   <p:clrMap bg1="lt1" tx1="dk1" bg2="lt2" tx2="dk2" accent1="accent1" accent2="accent2" accent3="accent3" accent4="accent4" accent5="accent5" accent6="accent6" hlink="hlink" folHlink="folHlink"/>
   <p:sldLayoutIdLst>
-    <p:sldLayoutId xmlns:r="http://schemas.openxmlformats.org/officeDocument/2006/relationships" id="2147483649" r:id="R3afdb4cdc0394479"/>
+    <p:sldLayoutId xmlns:r="http://schemas.openxmlformats.org/officeDocument/2006/relationships" id="2147483649" r:id="R2c879c68dfea4606"/>
   </p:sldLayoutIdLst>
   <p:txStyles>
     <p:titleStyle>
@@ -3984,7 +3974,7 @@
       </p:sp>
       <p:cxnSp>
         <p:nvCxnSpPr>
-          <p:cNvPr id="80" name=""/>
+          <p:cNvPr id="154" name=""/>
           <p:cNvCxnSpPr>
             <a:stCxn xmlns:a="http://schemas.openxmlformats.org/drawingml/2006/main" id="4" idx="3"/>
             <a:endCxn xmlns:a="http://schemas.openxmlformats.org/drawingml/2006/main" id="30" idx="1"/>
@@ -4408,7 +4398,7 @@
                 <a:ea typeface="Calibri"/>
                 <a:cs typeface="Calibri"/>
               </a:rPr>
-              <a:t>INGESTION BOUNDARY</a:t>
+              <a:t>PARSER LADDER</a:t>
             </a:r>
           </a:p>
         </p:txBody>
@@ -4470,7 +4460,7 @@
                 <a:ea typeface="Calibri"/>
                 <a:cs typeface="Calibri"/>
               </a:rPr>
-              <a:t>Normalize format-specific inputs before choosing chunks</a:t>
+              <a:t>Verify extraction quality before choosing chunk boundaries</a:t>
             </a:r>
           </a:p>
         </p:txBody>
@@ -4629,7 +4619,7 @@
                 <a:ea typeface="Calibri"/>
                 <a:cs typeface="Calibri"/>
               </a:rPr>
-              <a:t>Official source</a:t>
+              <a:t>Raw source</a:t>
             </a:r>
           </a:p>
         </p:txBody>
@@ -4691,7 +4681,7 @@
                 <a:ea typeface="Calibri"/>
                 <a:cs typeface="Calibri"/>
               </a:rPr>
-              <a:t>SEC HTML or PDF</a:t>
+              <a:t>HTML · PDF</a:t>
             </a:r>
           </a:p>
         </p:txBody>
@@ -4850,7 +4840,7 @@
                 <a:ea typeface="Calibri"/>
                 <a:cs typeface="Calibri"/>
               </a:rPr>
-              <a:t>Parser</a:t>
+              <a:t>Text extraction</a:t>
             </a:r>
           </a:p>
         </p:txBody>
@@ -4912,7 +4902,7 @@
                 <a:ea typeface="Calibri"/>
                 <a:cs typeface="Calibri"/>
               </a:rPr>
-              <a:t>elements · pages · tables</a:t>
+              <a:t>characters · words · lines</a:t>
             </a:r>
           </a:p>
         </p:txBody>
@@ -5071,7 +5061,7 @@
                 <a:ea typeface="Calibri"/>
                 <a:cs typeface="Calibri"/>
               </a:rPr>
-              <a:t>DocumentBlock</a:t>
+              <a:t>Layout recovery</a:t>
             </a:r>
           </a:p>
         </p:txBody>
@@ -5133,7 +5123,7 @@
                 <a:ea typeface="Calibri"/>
                 <a:cs typeface="Calibri"/>
               </a:rPr>
-              <a:t>order · structure · source</a:t>
+              <a:t>tables · headings · order</a:t>
             </a:r>
           </a:p>
         </p:txBody>
@@ -5292,7 +5282,7 @@
                 <a:ea typeface="Calibri"/>
                 <a:cs typeface="Calibri"/>
               </a:rPr>
-              <a:t>Quality checks</a:t>
+              <a:t>DocumentBlock</a:t>
             </a:r>
           </a:p>
         </p:txBody>
@@ -5354,7 +5344,7 @@
                 <a:ea typeface="Calibri"/>
                 <a:cs typeface="Calibri"/>
               </a:rPr>
-              <a:t>tables · headings · provenance</a:t>
+              <a:t>text · structure · provenance</a:t>
             </a:r>
           </a:p>
         </p:txBody>
@@ -5513,7 +5503,7 @@
                 <a:ea typeface="Calibri"/>
                 <a:cs typeface="Calibri"/>
               </a:rPr>
-              <a:t>Chunk strategy</a:t>
+              <a:t>Quality gate</a:t>
             </a:r>
           </a:p>
         </p:txBody>
@@ -5575,14 +5565,14 @@
                 <a:ea typeface="Calibri"/>
                 <a:cs typeface="Calibri"/>
               </a:rPr>
-              <a:t>controlled evidence units</a:t>
+              <a:t>visual checks · integrity</a:t>
             </a:r>
           </a:p>
         </p:txBody>
       </p:sp>
       <p:cxnSp>
         <p:nvCxnSpPr>
-          <p:cNvPr id="57" name=""/>
+          <p:cNvPr id="109" name=""/>
           <p:cNvCxnSpPr>
             <a:stCxn xmlns:a="http://schemas.openxmlformats.org/drawingml/2006/main" id="3" idx="3"/>
             <a:endCxn xmlns:a="http://schemas.openxmlformats.org/drawingml/2006/main" id="7" idx="1"/>
@@ -5608,7 +5598,7 @@
       </p:cxnSp>
       <p:cxnSp>
         <p:nvCxnSpPr>
-          <p:cNvPr id="58" name=""/>
+          <p:cNvPr id="110" name=""/>
           <p:cNvCxnSpPr>
             <a:stCxn xmlns:a="http://schemas.openxmlformats.org/drawingml/2006/main" id="7" idx="3"/>
             <a:endCxn xmlns:a="http://schemas.openxmlformats.org/drawingml/2006/main" id="11" idx="1"/>
@@ -5634,7 +5624,7 @@
       </p:cxnSp>
       <p:cxnSp>
         <p:nvCxnSpPr>
-          <p:cNvPr id="59" name=""/>
+          <p:cNvPr id="111" name=""/>
           <p:cNvCxnSpPr>
             <a:stCxn xmlns:a="http://schemas.openxmlformats.org/drawingml/2006/main" id="11" idx="3"/>
             <a:endCxn xmlns:a="http://schemas.openxmlformats.org/drawingml/2006/main" id="15" idx="1"/>
@@ -5660,7 +5650,7 @@
       </p:cxnSp>
       <p:cxnSp>
         <p:nvCxnSpPr>
-          <p:cNvPr id="60" name=""/>
+          <p:cNvPr id="112" name=""/>
           <p:cNvCxnSpPr>
             <a:stCxn xmlns:a="http://schemas.openxmlformats.org/drawingml/2006/main" id="15" idx="3"/>
             <a:endCxn xmlns:a="http://schemas.openxmlformats.org/drawingml/2006/main" id="19" idx="1"/>
@@ -5741,7 +5731,7 @@
                 <a:ea typeface="Calibri"/>
                 <a:cs typeface="Calibri"/>
               </a:rPr>
-              <a:t>One canonical block model lets parsing and chunking evolve independently.</a:t>
+              <a:t>Chunking begins only after extraction, layout and provenance pass.</a:t>
             </a:r>
           </a:p>
         </p:txBody>
@@ -5803,7 +5793,7 @@
                 <a:ea typeface="Calibri"/>
                 <a:cs typeface="Calibri"/>
               </a:rPr>
-              <a:t>Parser describes the document</a:t>
+              <a:t>Extraction recovers document signals</a:t>
             </a:r>
           </a:p>
         </p:txBody>
@@ -5865,7 +5855,7 @@
                 <a:ea typeface="Calibri"/>
                 <a:cs typeface="Calibri"/>
               </a:rPr>
-              <a:t>Chunker chooses retrievable evidence units</a:t>
+              <a:t>Quality gate protects evidence units</a:t>
             </a:r>
           </a:p>
         </p:txBody>
@@ -7512,7 +7502,7 @@
       </p:sp>
       <p:cxnSp>
         <p:nvCxnSpPr>
-          <p:cNvPr id="63" name=""/>
+          <p:cNvPr id="125" name=""/>
           <p:cNvCxnSpPr>
             <a:stCxn xmlns:a="http://schemas.openxmlformats.org/drawingml/2006/main" id="8" idx="3"/>
             <a:endCxn xmlns:a="http://schemas.openxmlformats.org/drawingml/2006/main" id="3" idx="1"/>
@@ -7538,7 +7528,7 @@
       </p:cxnSp>
       <p:cxnSp>
         <p:nvCxnSpPr>
-          <p:cNvPr id="64" name=""/>
+          <p:cNvPr id="126" name=""/>
           <p:cNvCxnSpPr>
             <a:stCxn xmlns:a="http://schemas.openxmlformats.org/drawingml/2006/main" id="11" idx="3"/>
             <a:endCxn xmlns:a="http://schemas.openxmlformats.org/drawingml/2006/main" id="3" idx="1"/>
@@ -7564,7 +7554,7 @@
       </p:cxnSp>
       <p:cxnSp>
         <p:nvCxnSpPr>
-          <p:cNvPr id="65" name=""/>
+          <p:cNvPr id="127" name=""/>
           <p:cNvCxnSpPr>
             <a:stCxn xmlns:a="http://schemas.openxmlformats.org/drawingml/2006/main" id="14" idx="3"/>
             <a:endCxn xmlns:a="http://schemas.openxmlformats.org/drawingml/2006/main" id="3" idx="1"/>
@@ -7590,7 +7580,7 @@
       </p:cxnSp>
       <p:cxnSp>
         <p:nvCxnSpPr>
-          <p:cNvPr id="66" name=""/>
+          <p:cNvPr id="128" name=""/>
           <p:cNvCxnSpPr>
             <a:stCxn xmlns:a="http://schemas.openxmlformats.org/drawingml/2006/main" id="3" idx="3"/>
             <a:endCxn xmlns:a="http://schemas.openxmlformats.org/drawingml/2006/main" id="17" idx="1"/>
@@ -7616,7 +7606,7 @@
       </p:cxnSp>
       <p:cxnSp>
         <p:nvCxnSpPr>
-          <p:cNvPr id="67" name=""/>
+          <p:cNvPr id="129" name=""/>
           <p:cNvCxnSpPr>
             <a:stCxn xmlns:a="http://schemas.openxmlformats.org/drawingml/2006/main" id="3" idx="3"/>
             <a:endCxn xmlns:a="http://schemas.openxmlformats.org/drawingml/2006/main" id="20" idx="1"/>
@@ -7642,7 +7632,7 @@
       </p:cxnSp>
       <p:cxnSp>
         <p:nvCxnSpPr>
-          <p:cNvPr id="68" name=""/>
+          <p:cNvPr id="130" name=""/>
           <p:cNvCxnSpPr>
             <a:stCxn xmlns:a="http://schemas.openxmlformats.org/drawingml/2006/main" id="3" idx="3"/>
             <a:endCxn xmlns:a="http://schemas.openxmlformats.org/drawingml/2006/main" id="23" idx="1"/>
@@ -9846,7 +9836,7 @@
                 <a:ea typeface="Calibri"/>
                 <a:cs typeface="Calibri"/>
               </a:rPr>
-              <a:t>ADVANCED PATTERNS</a:t>
+              <a:t>SEMANTIC + CONTEXTUAL</a:t>
             </a:r>
           </a:p>
         </p:txBody>
@@ -9881,7 +9871,7 @@
         </p:spPr>
         <p:txBody>
           <a:bodyPr xmlns:a="http://schemas.openxmlformats.org/drawingml/2006/main" wrap="none" lIns="0" tIns="0" rIns="0" bIns="0" anchor="ctr">
-            <a:normAutofit fontScale="83164"/>
+            <a:normAutofit fontScale="88682"/>
           </a:bodyPr>
           <a:lstStyle xmlns:a="http://schemas.openxmlformats.org/drawingml/2006/main"/>
           <a:p xmlns:a="http://schemas.openxmlformats.org/drawingml/2006/main">
@@ -9908,7 +9898,7 @@
                 <a:ea typeface="Calibri"/>
                 <a:cs typeface="Calibri"/>
               </a:rPr>
-              <a:t>Semantic, hierarchical and LLM-assisted chunks solve different problems</a:t>
+              <a:t>Embedding boundaries, hierarchy and context solve different failures</a:t>
             </a:r>
           </a:p>
         </p:txBody>
@@ -9970,7 +9960,7 @@
                 <a:ea typeface="Calibri"/>
                 <a:cs typeface="Calibri"/>
               </a:rPr>
-              <a:t>SEMANTIC BOUNDARY</a:t>
+              <a:t>EMBEDDING BOUNDARY</a:t>
             </a:r>
           </a:p>
         </p:txBody>
@@ -10296,7 +10286,7 @@
                 <a:ea typeface="Calibri"/>
                 <a:cs typeface="Calibri"/>
               </a:rPr>
-              <a:t>low similarity → boundary</a:t>
+              <a:t>model + threshold → boundary</a:t>
             </a:r>
           </a:p>
         </p:txBody>
@@ -10753,7 +10743,7 @@
       </p:sp>
       <p:cxnSp>
         <p:nvCxnSpPr>
-          <p:cNvPr id="62" name=""/>
+          <p:cNvPr id="110" name=""/>
           <p:cNvCxnSpPr>
             <a:stCxn xmlns:a="http://schemas.openxmlformats.org/drawingml/2006/main" id="14" idx="2"/>
             <a:endCxn xmlns:a="http://schemas.openxmlformats.org/drawingml/2006/main" id="16" idx="0"/>
@@ -10779,7 +10769,7 @@
       </p:cxnSp>
       <p:cxnSp>
         <p:nvCxnSpPr>
-          <p:cNvPr id="63" name=""/>
+          <p:cNvPr id="111" name=""/>
           <p:cNvCxnSpPr>
             <a:stCxn xmlns:a="http://schemas.openxmlformats.org/drawingml/2006/main" id="14" idx="2"/>
             <a:endCxn xmlns:a="http://schemas.openxmlformats.org/drawingml/2006/main" id="18" idx="0"/>
@@ -10805,7 +10795,7 @@
       </p:cxnSp>
       <p:cxnSp>
         <p:nvCxnSpPr>
-          <p:cNvPr id="64" name=""/>
+          <p:cNvPr id="112" name=""/>
           <p:cNvCxnSpPr>
             <a:stCxn xmlns:a="http://schemas.openxmlformats.org/drawingml/2006/main" id="14" idx="2"/>
             <a:endCxn xmlns:a="http://schemas.openxmlformats.org/drawingml/2006/main" id="20" idx="0"/>
@@ -10948,7 +10938,7 @@
                 <a:ea typeface="Calibri"/>
                 <a:cs typeface="Calibri"/>
               </a:rPr>
-              <a:t>CONTEXT + PROPOSITIONS</a:t>
+              <a:t>RAW + GENERATED CONTEXT</a:t>
             </a:r>
           </a:p>
         </p:txBody>
@@ -11045,7 +11035,7 @@
                 <a:ea typeface="Calibri"/>
                 <a:cs typeface="Calibri"/>
               </a:rPr>
-              <a:t>NVIDIA | FY2026 | Data Center</a:t>
+              <a:t>RAW EVIDENCE</a:t>
             </a:r>
           </a:p>
         </p:txBody>
@@ -11107,7 +11097,7 @@
                 <a:ea typeface="Calibri"/>
                 <a:cs typeface="Calibri"/>
               </a:rPr>
-              <a:t>+ original evidence chunk</a:t>
+              <a:t>NVIDIA FY2026 · stable source text</a:t>
             </a:r>
           </a:p>
         </p:txBody>
@@ -11204,7 +11194,7 @@
                 <a:ea typeface="Calibri"/>
                 <a:cs typeface="Calibri"/>
               </a:rPr>
-              <a:t>ATOMIC CLAIM</a:t>
+              <a:t>GENERATED CONTEXT</a:t>
             </a:r>
           </a:p>
         </p:txBody>
@@ -11266,7 +11256,7 @@
                 <a:ea typeface="Calibri"/>
                 <a:cs typeface="Calibri"/>
               </a:rPr>
-              <a:t>Data Center revenue was</a:t>
+              <a:t>Fiscal 2026 revenue context</a:t>
             </a:r>
           </a:p>
           <a:p xmlns:a="http://schemas.openxmlformats.org/drawingml/2006/main">
@@ -11293,7 +11283,7 @@
                 <a:ea typeface="Calibri"/>
                 <a:cs typeface="Calibri"/>
               </a:rPr>
-              <a:t>USD 193.7bn in FY2026</a:t>
+              <a:t>+ raw evidence at retrieval</a:t>
             </a:r>
           </a:p>
         </p:txBody>
@@ -11328,7 +11318,7 @@
         </p:spPr>
         <p:txBody>
           <a:bodyPr xmlns:a="http://schemas.openxmlformats.org/drawingml/2006/main" wrap="square" lIns="0" tIns="0" rIns="0" bIns="0" anchor="ctr">
-            <a:normAutofit fontScale="97222"/>
+            <a:normAutofit fontScale="100000"/>
           </a:bodyPr>
           <a:lstStyle xmlns:a="http://schemas.openxmlformats.org/drawingml/2006/main"/>
           <a:p xmlns:a="http://schemas.openxmlformats.org/drawingml/2006/main">
@@ -11355,7 +11345,7 @@
                 <a:ea typeface="Calibri"/>
                 <a:cs typeface="Calibri"/>
               </a:rPr>
-              <a:t>extra tokens · model cost · transformation risk</a:t>
+              <a:t>offline: 1.37× tokens · latency · retrieval gain</a:t>
             </a:r>
           </a:p>
         </p:txBody>
@@ -11452,7 +11442,7 @@
                 <a:ea typeface="Calibri"/>
                 <a:cs typeface="Calibri"/>
               </a:rPr>
-              <a:t>No strategy is universally best: version the representation, threshold and evaluation set.</a:t>
+              <a:t>Generated context augments raw_text; preserve IDs, pages and provenance.</a:t>
             </a:r>
           </a:p>
         </p:txBody>
@@ -14160,7 +14150,7 @@
                 <a:ea typeface="Calibri"/>
                 <a:cs typeface="Calibri"/>
               </a:rPr>
-              <a:t>ENGINEERING DECISION</a:t>
+              <a:t>STRATEGY DECISION</a:t>
             </a:r>
           </a:p>
         </p:txBody>
@@ -14195,7 +14185,7 @@
         </p:spPr>
         <p:txBody>
           <a:bodyPr xmlns:a="http://schemas.openxmlformats.org/drawingml/2006/main" wrap="none" lIns="0" tIns="0" rIns="0" bIns="0" anchor="ctr">
-            <a:normAutofit fontScale="100000"/>
+            <a:normAutofit fontScale="98845"/>
           </a:bodyPr>
           <a:lstStyle xmlns:a="http://schemas.openxmlformats.org/drawingml/2006/main"/>
           <a:p xmlns:a="http://schemas.openxmlformats.org/drawingml/2006/main">
@@ -14222,7 +14212,7 @@
                 <a:ea typeface="Calibri"/>
                 <a:cs typeface="Calibri"/>
               </a:rPr>
-              <a:t>Start with structural children and preserve a verified parent</a:t>
+              <a:t>Escalate chunking complexity only when evaluation justifies it</a:t>
             </a:r>
           </a:p>
         </p:txBody>
@@ -14319,7 +14309,7 @@
                 <a:ea typeface="Calibri"/>
                 <a:cs typeface="Calibri"/>
               </a:rPr>
-              <a:t>CANONICAL BLOCKS</a:t>
+              <a:t>STRUCTURE-AWARE</a:t>
             </a:r>
           </a:p>
         </p:txBody>
@@ -14354,7 +14344,7 @@
         </p:spPr>
         <p:txBody>
           <a:bodyPr xmlns:a="http://schemas.openxmlformats.org/drawingml/2006/main" wrap="square" lIns="0" tIns="0" rIns="0" bIns="0" anchor="ctr">
-            <a:normAutofit fontScale="91520"/>
+            <a:normAutofit fontScale="91720"/>
           </a:bodyPr>
           <a:lstStyle xmlns:a="http://schemas.openxmlformats.org/drawingml/2006/main"/>
           <a:p xmlns:a="http://schemas.openxmlformats.org/drawingml/2006/main">
@@ -14381,7 +14371,7 @@
                 <a:ea typeface="Calibri"/>
                 <a:cs typeface="Calibri"/>
               </a:rPr>
-              <a:t>order · page · section</a:t>
+              <a:t>tables + headings intact</a:t>
             </a:r>
           </a:p>
           <a:p xmlns:a="http://schemas.openxmlformats.org/drawingml/2006/main">
@@ -14408,7 +14398,7 @@
                 <a:ea typeface="Calibri"/>
                 <a:cs typeface="Calibri"/>
               </a:rPr>
-              <a:t>table rows · source URL</a:t>
+              <a:t>default for filings</a:t>
             </a:r>
           </a:p>
         </p:txBody>
@@ -14505,7 +14495,7 @@
                 <a:ea typeface="Calibri"/>
                 <a:cs typeface="Calibri"/>
               </a:rPr>
-              <a:t>INDEX</a:t>
+              <a:t>SEMANTIC + HIERARCHICAL</a:t>
             </a:r>
           </a:p>
         </p:txBody>
@@ -14540,7 +14530,7 @@
         </p:spPr>
         <p:txBody>
           <a:bodyPr xmlns:a="http://schemas.openxmlformats.org/drawingml/2006/main" wrap="square" lIns="0" tIns="0" rIns="0" bIns="0" anchor="ctr">
-            <a:normAutofit fontScale="100000"/>
+            <a:normAutofit fontScale="94502"/>
           </a:bodyPr>
           <a:lstStyle xmlns:a="http://schemas.openxmlformats.org/drawingml/2006/main"/>
           <a:p xmlns:a="http://schemas.openxmlformats.org/drawingml/2006/main">
@@ -14567,7 +14557,7 @@
                 <a:ea typeface="Calibri"/>
                 <a:cs typeface="Calibri"/>
               </a:rPr>
-              <a:t>Structure-aware</a:t>
+              <a:t>embedding boundary</a:t>
             </a:r>
           </a:p>
           <a:p xmlns:a="http://schemas.openxmlformats.org/drawingml/2006/main">
@@ -14594,7 +14584,7 @@
                 <a:ea typeface="Calibri"/>
                 <a:cs typeface="Calibri"/>
               </a:rPr>
-              <a:t>child chunks</a:t>
+              <a:t>+ verified parent</a:t>
             </a:r>
           </a:p>
         </p:txBody>
@@ -14656,7 +14646,7 @@
                 <a:ea typeface="Calibri"/>
                 <a:cs typeface="Calibri"/>
               </a:rPr>
-              <a:t>company · period · section</a:t>
+              <a:t>when matching is weak</a:t>
             </a:r>
           </a:p>
         </p:txBody>
@@ -14753,7 +14743,7 @@
                 <a:ea typeface="Calibri"/>
                 <a:cs typeface="Calibri"/>
               </a:rPr>
-              <a:t>AFTER RETRIEVAL</a:t>
+              <a:t>LLM CONTEXTUAL</a:t>
             </a:r>
           </a:p>
         </p:txBody>
@@ -14815,7 +14805,7 @@
                 <a:ea typeface="Calibri"/>
                 <a:cs typeface="Calibri"/>
               </a:rPr>
-              <a:t>Expand the verified</a:t>
+              <a:t>generated context</a:t>
             </a:r>
           </a:p>
           <a:p xmlns:a="http://schemas.openxmlformats.org/drawingml/2006/main">
@@ -14842,14 +14832,14 @@
                 <a:ea typeface="Calibri"/>
                 <a:cs typeface="Calibri"/>
               </a:rPr>
-              <a:t>parent section</a:t>
+              <a:t>+ immutable raw_text</a:t>
             </a:r>
           </a:p>
         </p:txBody>
       </p:sp>
       <p:cxnSp>
         <p:nvCxnSpPr>
-          <p:cNvPr id="40" name=""/>
+          <p:cNvPr id="68" name=""/>
           <p:cNvCxnSpPr>
             <a:stCxn xmlns:a="http://schemas.openxmlformats.org/drawingml/2006/main" id="3" idx="3"/>
             <a:endCxn xmlns:a="http://schemas.openxmlformats.org/drawingml/2006/main" id="6" idx="1"/>
@@ -14875,7 +14865,7 @@
       </p:cxnSp>
       <p:cxnSp>
         <p:nvCxnSpPr>
-          <p:cNvPr id="41" name=""/>
+          <p:cNvPr id="69" name=""/>
           <p:cNvCxnSpPr>
             <a:stCxn xmlns:a="http://schemas.openxmlformats.org/drawingml/2006/main" id="6" idx="3"/>
             <a:endCxn xmlns:a="http://schemas.openxmlformats.org/drawingml/2006/main" id="10" idx="1"/>
@@ -14991,7 +14981,7 @@
                 <a:ea typeface="Calibri"/>
                 <a:cs typeface="Calibri"/>
               </a:rPr>
-              <a:t>HARD CONSTRAINTS</a:t>
+              <a:t>NON-NEGOTIABLE</a:t>
             </a:r>
           </a:p>
         </p:txBody>
@@ -15026,7 +15016,7 @@
         </p:spPr>
         <p:txBody>
           <a:bodyPr xmlns:a="http://schemas.openxmlformats.org/drawingml/2006/main" wrap="square" lIns="0" tIns="0" rIns="0" bIns="0" anchor="ctr">
-            <a:normAutofit fontScale="86434"/>
+            <a:normAutofit fontScale="100000"/>
           </a:bodyPr>
           <a:lstStyle xmlns:a="http://schemas.openxmlformats.org/drawingml/2006/main"/>
           <a:p xmlns:a="http://schemas.openxmlformats.org/drawingml/2006/main">
@@ -15053,7 +15043,7 @@
                 <a:ea typeface="Calibri"/>
                 <a:cs typeface="Calibri"/>
               </a:rPr>
-              <a:t>table integrity · complete provenance · stable parent links</a:t>
+              <a:t>table integrity · provenance · stable IDs</a:t>
             </a:r>
           </a:p>
         </p:txBody>
@@ -15148,7 +15138,7 @@
                 <a:ea typeface="Calibri"/>
                 <a:cs typeface="Calibri"/>
               </a:rPr>
-              <a:t>OPTIMIZE WITH EVALUATION</a:t>
+              <a:t>MEASURE BEFORE ADDING</a:t>
             </a:r>
           </a:p>
         </p:txBody>
@@ -15210,7 +15200,7 @@
                 <a:ea typeface="Calibri"/>
                 <a:cs typeface="Calibri"/>
               </a:rPr>
-              <a:t>chunk size · context tokens · recall · cost</a:t>
+              <a:t>tokens · latency · recall · transformation risk</a:t>
             </a:r>
           </a:p>
         </p:txBody>
@@ -15245,7 +15235,7 @@
         </p:spPr>
         <p:txBody>
           <a:bodyPr xmlns:a="http://schemas.openxmlformats.org/drawingml/2006/main" wrap="square" lIns="0" tIns="0" rIns="0" bIns="0" anchor="ctr">
-            <a:normAutofit fontScale="100000"/>
+            <a:normAutofit fontScale="99269"/>
           </a:bodyPr>
           <a:lstStyle xmlns:a="http://schemas.openxmlformats.org/drawingml/2006/main"/>
           <a:p xmlns:a="http://schemas.openxmlformats.org/drawingml/2006/main">
@@ -15272,7 +15262,7 @@
                 <a:ea typeface="Calibri"/>
                 <a:cs typeface="Calibri"/>
               </a:rPr>
-              <a:t>LESSON 06</a:t>
+              <a:t>NEXT · LESSON 06</a:t>
             </a:r>
           </a:p>
         </p:txBody>
@@ -15307,7 +15297,7 @@
         </p:spPr>
         <p:txBody>
           <a:bodyPr xmlns:a="http://schemas.openxmlformats.org/drawingml/2006/main" wrap="square" lIns="0" tIns="0" rIns="0" bIns="0" anchor="ctr">
-            <a:normAutofit fontScale="99778"/>
+            <a:normAutofit fontScale="100000"/>
           </a:bodyPr>
           <a:lstStyle xmlns:a="http://schemas.openxmlformats.org/drawingml/2006/main"/>
           <a:p xmlns:a="http://schemas.openxmlformats.org/drawingml/2006/main">
@@ -15334,7 +15324,7 @@
                 <a:ea typeface="Calibri"/>
                 <a:cs typeface="Calibri"/>
               </a:rPr>
-              <a:t>Keep the chunks; improve representation and ranking with embeddings, filters, fusion and reranking.</a:t>
+              <a:t>Keep the chunks; improve candidate retrieval with embeddings, filters, fusion and reranking.</a:t>
             </a:r>
           </a:p>
         </p:txBody>

--- a/decks/05-document-and-chunking-lab.pptx
+++ b/decks/05-document-and-chunking-lab.pptx
@@ -2,20 +2,20 @@
 <file path=ppt/presentation.xml><?xml version="1.0" encoding="utf-8"?>
 <p:presentation xmlns:p="http://schemas.openxmlformats.org/presentationml/2006/main">
   <p:sldMasterIdLst>
-    <p:sldMasterId xmlns:r="http://schemas.openxmlformats.org/officeDocument/2006/relationships" id="2147483648" r:id="Rcc0839dc76bd4699"/>
+    <p:sldMasterId xmlns:r="http://schemas.openxmlformats.org/officeDocument/2006/relationships" id="2147483648" r:id="R213188a10c3f45e5"/>
   </p:sldMasterIdLst>
   <p:notesMasterIdLst>
-    <p:notesMasterId xmlns:r="http://schemas.openxmlformats.org/officeDocument/2006/relationships" r:id="R016fcb1d279e4465"/>
+    <p:notesMasterId xmlns:r="http://schemas.openxmlformats.org/officeDocument/2006/relationships" r:id="R90dc52d0142249a2"/>
   </p:notesMasterIdLst>
   <p:sldIdLst>
-    <p:sldId xmlns:r="http://schemas.openxmlformats.org/officeDocument/2006/relationships" id="256" r:id="R28b58dbd83c6442a"/>
-    <p:sldId xmlns:r="http://schemas.openxmlformats.org/officeDocument/2006/relationships" id="257" r:id="R4ea80f206c094faf"/>
-    <p:sldId xmlns:r="http://schemas.openxmlformats.org/officeDocument/2006/relationships" id="258" r:id="Re24f841d7e6d42ff"/>
-    <p:sldId xmlns:r="http://schemas.openxmlformats.org/officeDocument/2006/relationships" id="259" r:id="Re8be3596dfc84d43"/>
-    <p:sldId xmlns:r="http://schemas.openxmlformats.org/officeDocument/2006/relationships" id="260" r:id="R7e814073f17d4fad"/>
-    <p:sldId xmlns:r="http://schemas.openxmlformats.org/officeDocument/2006/relationships" id="261" r:id="R4b391109446d4bfc"/>
-    <p:sldId xmlns:r="http://schemas.openxmlformats.org/officeDocument/2006/relationships" id="262" r:id="R1e25e06be2a0499e"/>
-    <p:sldId xmlns:r="http://schemas.openxmlformats.org/officeDocument/2006/relationships" id="263" r:id="Rfdeb9179498b4fde"/>
+    <p:sldId xmlns:r="http://schemas.openxmlformats.org/officeDocument/2006/relationships" id="256" r:id="Ra13827ad11da4756"/>
+    <p:sldId xmlns:r="http://schemas.openxmlformats.org/officeDocument/2006/relationships" id="257" r:id="Rbd951f9f63b94cd4"/>
+    <p:sldId xmlns:r="http://schemas.openxmlformats.org/officeDocument/2006/relationships" id="258" r:id="Rbf91311626d04046"/>
+    <p:sldId xmlns:r="http://schemas.openxmlformats.org/officeDocument/2006/relationships" id="259" r:id="R4c9a9809383d4509"/>
+    <p:sldId xmlns:r="http://schemas.openxmlformats.org/officeDocument/2006/relationships" id="260" r:id="R0f400eb853004e3c"/>
+    <p:sldId xmlns:r="http://schemas.openxmlformats.org/officeDocument/2006/relationships" id="261" r:id="R34c98fd363664357"/>
+    <p:sldId xmlns:r="http://schemas.openxmlformats.org/officeDocument/2006/relationships" id="262" r:id="R41e35d85fb9a4daf"/>
+    <p:sldId xmlns:r="http://schemas.openxmlformats.org/officeDocument/2006/relationships" id="263" r:id="R6eb4d29fc4f24175"/>
   </p:sldIdLst>
   <p:sldSz cx="15240000" cy="8572500"/>
   <p:notesSz cx="6858000" cy="9144000"/>
@@ -1227,7 +1227,7 @@
   </p:cSld>
   <p:clrMap bg1="lt1" tx1="dk1" bg2="lt2" tx2="dk2" accent1="accent1" accent2="accent2" accent3="accent3" accent4="accent4" accent5="accent5" accent6="accent6" hlink="hlink" folHlink="folHlink"/>
   <p:sldLayoutIdLst>
-    <p:sldLayoutId xmlns:r="http://schemas.openxmlformats.org/officeDocument/2006/relationships" id="2147483649" r:id="R2c879c68dfea4606"/>
+    <p:sldLayoutId xmlns:r="http://schemas.openxmlformats.org/officeDocument/2006/relationships" id="2147483649" r:id="R390c388439d140c4"/>
   </p:sldLayoutIdLst>
   <p:txStyles>
     <p:titleStyle>
@@ -2111,7 +2111,7 @@
                 <a:ea typeface="Calibri"/>
                 <a:cs typeface="Calibri"/>
               </a:rPr>
-              <a:t>Financial Analyst Copilot</a:t>
+              <a:t>First Finance - Arnaud Demes</a:t>
             </a:r>
           </a:p>
         </p:txBody>
@@ -3974,7 +3974,7 @@
       </p:sp>
       <p:cxnSp>
         <p:nvCxnSpPr>
-          <p:cNvPr id="154" name=""/>
+          <p:cNvPr id="191" name=""/>
           <p:cNvCxnSpPr>
             <a:stCxn xmlns:a="http://schemas.openxmlformats.org/drawingml/2006/main" id="4" idx="3"/>
             <a:endCxn xmlns:a="http://schemas.openxmlformats.org/drawingml/2006/main" id="30" idx="1"/>
@@ -5572,7 +5572,7 @@
       </p:sp>
       <p:cxnSp>
         <p:nvCxnSpPr>
-          <p:cNvPr id="109" name=""/>
+          <p:cNvPr id="135" name=""/>
           <p:cNvCxnSpPr>
             <a:stCxn xmlns:a="http://schemas.openxmlformats.org/drawingml/2006/main" id="3" idx="3"/>
             <a:endCxn xmlns:a="http://schemas.openxmlformats.org/drawingml/2006/main" id="7" idx="1"/>
@@ -5598,7 +5598,7 @@
       </p:cxnSp>
       <p:cxnSp>
         <p:nvCxnSpPr>
-          <p:cNvPr id="110" name=""/>
+          <p:cNvPr id="136" name=""/>
           <p:cNvCxnSpPr>
             <a:stCxn xmlns:a="http://schemas.openxmlformats.org/drawingml/2006/main" id="7" idx="3"/>
             <a:endCxn xmlns:a="http://schemas.openxmlformats.org/drawingml/2006/main" id="11" idx="1"/>
@@ -5624,7 +5624,7 @@
       </p:cxnSp>
       <p:cxnSp>
         <p:nvCxnSpPr>
-          <p:cNvPr id="111" name=""/>
+          <p:cNvPr id="137" name=""/>
           <p:cNvCxnSpPr>
             <a:stCxn xmlns:a="http://schemas.openxmlformats.org/drawingml/2006/main" id="11" idx="3"/>
             <a:endCxn xmlns:a="http://schemas.openxmlformats.org/drawingml/2006/main" id="15" idx="1"/>
@@ -5650,7 +5650,7 @@
       </p:cxnSp>
       <p:cxnSp>
         <p:nvCxnSpPr>
-          <p:cNvPr id="112" name=""/>
+          <p:cNvPr id="138" name=""/>
           <p:cNvCxnSpPr>
             <a:stCxn xmlns:a="http://schemas.openxmlformats.org/drawingml/2006/main" id="15" idx="3"/>
             <a:endCxn xmlns:a="http://schemas.openxmlformats.org/drawingml/2006/main" id="19" idx="1"/>
@@ -7502,7 +7502,7 @@
       </p:sp>
       <p:cxnSp>
         <p:nvCxnSpPr>
-          <p:cNvPr id="125" name=""/>
+          <p:cNvPr id="156" name=""/>
           <p:cNvCxnSpPr>
             <a:stCxn xmlns:a="http://schemas.openxmlformats.org/drawingml/2006/main" id="8" idx="3"/>
             <a:endCxn xmlns:a="http://schemas.openxmlformats.org/drawingml/2006/main" id="3" idx="1"/>
@@ -7528,7 +7528,7 @@
       </p:cxnSp>
       <p:cxnSp>
         <p:nvCxnSpPr>
-          <p:cNvPr id="126" name=""/>
+          <p:cNvPr id="157" name=""/>
           <p:cNvCxnSpPr>
             <a:stCxn xmlns:a="http://schemas.openxmlformats.org/drawingml/2006/main" id="11" idx="3"/>
             <a:endCxn xmlns:a="http://schemas.openxmlformats.org/drawingml/2006/main" id="3" idx="1"/>
@@ -7554,7 +7554,7 @@
       </p:cxnSp>
       <p:cxnSp>
         <p:nvCxnSpPr>
-          <p:cNvPr id="127" name=""/>
+          <p:cNvPr id="158" name=""/>
           <p:cNvCxnSpPr>
             <a:stCxn xmlns:a="http://schemas.openxmlformats.org/drawingml/2006/main" id="14" idx="3"/>
             <a:endCxn xmlns:a="http://schemas.openxmlformats.org/drawingml/2006/main" id="3" idx="1"/>
@@ -7580,7 +7580,7 @@
       </p:cxnSp>
       <p:cxnSp>
         <p:nvCxnSpPr>
-          <p:cNvPr id="128" name=""/>
+          <p:cNvPr id="159" name=""/>
           <p:cNvCxnSpPr>
             <a:stCxn xmlns:a="http://schemas.openxmlformats.org/drawingml/2006/main" id="3" idx="3"/>
             <a:endCxn xmlns:a="http://schemas.openxmlformats.org/drawingml/2006/main" id="17" idx="1"/>
@@ -7606,7 +7606,7 @@
       </p:cxnSp>
       <p:cxnSp>
         <p:nvCxnSpPr>
-          <p:cNvPr id="129" name=""/>
+          <p:cNvPr id="160" name=""/>
           <p:cNvCxnSpPr>
             <a:stCxn xmlns:a="http://schemas.openxmlformats.org/drawingml/2006/main" id="3" idx="3"/>
             <a:endCxn xmlns:a="http://schemas.openxmlformats.org/drawingml/2006/main" id="20" idx="1"/>
@@ -7632,7 +7632,7 @@
       </p:cxnSp>
       <p:cxnSp>
         <p:nvCxnSpPr>
-          <p:cNvPr id="130" name=""/>
+          <p:cNvPr id="161" name=""/>
           <p:cNvCxnSpPr>
             <a:stCxn xmlns:a="http://schemas.openxmlformats.org/drawingml/2006/main" id="3" idx="3"/>
             <a:endCxn xmlns:a="http://schemas.openxmlformats.org/drawingml/2006/main" id="23" idx="1"/>
@@ -10743,7 +10743,7 @@
       </p:sp>
       <p:cxnSp>
         <p:nvCxnSpPr>
-          <p:cNvPr id="110" name=""/>
+          <p:cNvPr id="134" name=""/>
           <p:cNvCxnSpPr>
             <a:stCxn xmlns:a="http://schemas.openxmlformats.org/drawingml/2006/main" id="14" idx="2"/>
             <a:endCxn xmlns:a="http://schemas.openxmlformats.org/drawingml/2006/main" id="16" idx="0"/>
@@ -10769,7 +10769,7 @@
       </p:cxnSp>
       <p:cxnSp>
         <p:nvCxnSpPr>
-          <p:cNvPr id="111" name=""/>
+          <p:cNvPr id="135" name=""/>
           <p:cNvCxnSpPr>
             <a:stCxn xmlns:a="http://schemas.openxmlformats.org/drawingml/2006/main" id="14" idx="2"/>
             <a:endCxn xmlns:a="http://schemas.openxmlformats.org/drawingml/2006/main" id="18" idx="0"/>
@@ -10795,7 +10795,7 @@
       </p:cxnSp>
       <p:cxnSp>
         <p:nvCxnSpPr>
-          <p:cNvPr id="112" name=""/>
+          <p:cNvPr id="136" name=""/>
           <p:cNvCxnSpPr>
             <a:stCxn xmlns:a="http://schemas.openxmlformats.org/drawingml/2006/main" id="14" idx="2"/>
             <a:endCxn xmlns:a="http://schemas.openxmlformats.org/drawingml/2006/main" id="20" idx="0"/>
@@ -14839,7 +14839,7 @@
       </p:sp>
       <p:cxnSp>
         <p:nvCxnSpPr>
-          <p:cNvPr id="68" name=""/>
+          <p:cNvPr id="82" name=""/>
           <p:cNvCxnSpPr>
             <a:stCxn xmlns:a="http://schemas.openxmlformats.org/drawingml/2006/main" id="3" idx="3"/>
             <a:endCxn xmlns:a="http://schemas.openxmlformats.org/drawingml/2006/main" id="6" idx="1"/>
@@ -14865,7 +14865,7 @@
       </p:cxnSp>
       <p:cxnSp>
         <p:nvCxnSpPr>
-          <p:cNvPr id="69" name=""/>
+          <p:cNvPr id="83" name=""/>
           <p:cNvCxnSpPr>
             <a:stCxn xmlns:a="http://schemas.openxmlformats.org/drawingml/2006/main" id="6" idx="3"/>
             <a:endCxn xmlns:a="http://schemas.openxmlformats.org/drawingml/2006/main" id="10" idx="1"/>

--- a/decks/05-document-and-chunking-lab.pptx
+++ b/decks/05-document-and-chunking-lab.pptx
@@ -2,20 +2,22 @@
 <file path=ppt/presentation.xml><?xml version="1.0" encoding="utf-8"?>
 <p:presentation xmlns:p="http://schemas.openxmlformats.org/presentationml/2006/main">
   <p:sldMasterIdLst>
-    <p:sldMasterId xmlns:r="http://schemas.openxmlformats.org/officeDocument/2006/relationships" id="2147483648" r:id="R213188a10c3f45e5"/>
+    <p:sldMasterId xmlns:r="http://schemas.openxmlformats.org/officeDocument/2006/relationships" id="2147483648" r:id="Rd5df414d6cd94959"/>
   </p:sldMasterIdLst>
   <p:notesMasterIdLst>
-    <p:notesMasterId xmlns:r="http://schemas.openxmlformats.org/officeDocument/2006/relationships" r:id="R90dc52d0142249a2"/>
+    <p:notesMasterId xmlns:r="http://schemas.openxmlformats.org/officeDocument/2006/relationships" r:id="Re5c21e1998f94f17"/>
   </p:notesMasterIdLst>
   <p:sldIdLst>
-    <p:sldId xmlns:r="http://schemas.openxmlformats.org/officeDocument/2006/relationships" id="256" r:id="Ra13827ad11da4756"/>
-    <p:sldId xmlns:r="http://schemas.openxmlformats.org/officeDocument/2006/relationships" id="257" r:id="Rbd951f9f63b94cd4"/>
-    <p:sldId xmlns:r="http://schemas.openxmlformats.org/officeDocument/2006/relationships" id="258" r:id="Rbf91311626d04046"/>
-    <p:sldId xmlns:r="http://schemas.openxmlformats.org/officeDocument/2006/relationships" id="259" r:id="R4c9a9809383d4509"/>
-    <p:sldId xmlns:r="http://schemas.openxmlformats.org/officeDocument/2006/relationships" id="260" r:id="R0f400eb853004e3c"/>
-    <p:sldId xmlns:r="http://schemas.openxmlformats.org/officeDocument/2006/relationships" id="261" r:id="R34c98fd363664357"/>
-    <p:sldId xmlns:r="http://schemas.openxmlformats.org/officeDocument/2006/relationships" id="262" r:id="R41e35d85fb9a4daf"/>
-    <p:sldId xmlns:r="http://schemas.openxmlformats.org/officeDocument/2006/relationships" id="263" r:id="R6eb4d29fc4f24175"/>
+    <p:sldId xmlns:r="http://schemas.openxmlformats.org/officeDocument/2006/relationships" id="256" r:id="R6f8288c3715744ec"/>
+    <p:sldId xmlns:r="http://schemas.openxmlformats.org/officeDocument/2006/relationships" id="257" r:id="R92fa83841cb54286"/>
+    <p:sldId xmlns:r="http://schemas.openxmlformats.org/officeDocument/2006/relationships" id="258" r:id="Rcb380a960478469f"/>
+    <p:sldId xmlns:r="http://schemas.openxmlformats.org/officeDocument/2006/relationships" id="259" r:id="Rf5557cb082484401"/>
+    <p:sldId xmlns:r="http://schemas.openxmlformats.org/officeDocument/2006/relationships" id="260" r:id="R0d78293708484ef7"/>
+    <p:sldId xmlns:r="http://schemas.openxmlformats.org/officeDocument/2006/relationships" id="261" r:id="R64b5fbbed1f94184"/>
+    <p:sldId xmlns:r="http://schemas.openxmlformats.org/officeDocument/2006/relationships" id="262" r:id="Rc367652ed26d42e8"/>
+    <p:sldId xmlns:r="http://schemas.openxmlformats.org/officeDocument/2006/relationships" id="263" r:id="Rd03abfd28ab94cc5"/>
+    <p:sldId xmlns:r="http://schemas.openxmlformats.org/officeDocument/2006/relationships" id="264" r:id="R4371685353c84940"/>
+    <p:sldId xmlns:r="http://schemas.openxmlformats.org/officeDocument/2006/relationships" id="265" r:id="Raa296bcd3abf4963"/>
   </p:sldIdLst>
   <p:sldSz cx="15240000" cy="8572500"/>
   <p:notesSz cx="6858000" cy="9144000"/>
@@ -504,6 +506,101 @@
 </p:notes>
 </file>
 
+<file path=ppt/notesSlides/notesSlide10.xml><?xml version="1.0" encoding="utf-8"?>
+<p:notes xmlns:p="http://schemas.openxmlformats.org/presentationml/2006/main">
+  <p:cSld>
+    <p:spTree>
+      <p:nvGrpSpPr>
+        <p:cNvPr id="1" name=""/>
+        <p:cNvGrpSpPr/>
+        <p:nvPr/>
+      </p:nvGrpSpPr>
+      <p:grpSpPr>
+        <a:xfrm xmlns:a="http://schemas.openxmlformats.org/drawingml/2006/main"/>
+      </p:grpSpPr>
+      <p:sp>
+        <p:nvSpPr>
+          <p:cNvPr id="2" name="Slide Image Placeholder 1"/>
+          <p:cNvSpPr>
+            <a:spLocks xmlns:a="http://schemas.openxmlformats.org/drawingml/2006/main" noGrp="1"/>
+          </p:cNvSpPr>
+          <p:nvPr>
+            <p:ph type="sldImg" idx="0"/>
+          </p:nvPr>
+        </p:nvSpPr>
+        <p:spPr/>
+      </p:sp>
+      <p:sp>
+        <p:nvSpPr>
+          <p:cNvPr id="3" name="Notes Placeholder 2"/>
+          <p:cNvSpPr>
+            <a:spLocks xmlns:a="http://schemas.openxmlformats.org/drawingml/2006/main" noGrp="1"/>
+          </p:cNvSpPr>
+          <p:nvPr>
+            <p:ph type="body" idx="1"/>
+          </p:nvPr>
+        </p:nvSpPr>
+        <p:spPr/>
+        <p:txBody>
+          <a:bodyPr xmlns:a="http://schemas.openxmlformats.org/drawingml/2006/main"/>
+          <a:lstStyle xmlns:a="http://schemas.openxmlformats.org/drawingml/2006/main"/>
+          <a:p xmlns:a="http://schemas.openxmlformats.org/drawingml/2006/main">
+            <a:r>
+              <a:t>Instructor purpose: Correct the quiz and restate the practical rule behind each answer.</a:t>
+            </a:r>
+          </a:p>
+          <a:p xmlns:a="http://schemas.openxmlformats.org/drawingml/2006/main">
+            <a:r>
+              <a:t>Planned timing: 3 minutes.</a:t>
+            </a:r>
+          </a:p>
+          <a:p xmlns:a="http://schemas.openxmlformats.org/drawingml/2006/main">
+            <a:r>
+              <a:t>Facilitation: ask learners to explain each rule in their own words.</a:t>
+            </a:r>
+          </a:p>
+          <a:p xmlns:a="http://schemas.openxmlformats.org/drawingml/2006/main">
+            <a:r>
+              <a:t>[Sources]</a:t>
+            </a:r>
+          </a:p>
+          <a:p xmlns:a="http://schemas.openxmlformats.org/drawingml/2006/main">
+            <a:r>
+              <a:t>- chapters/05-document-and-chunking-lab.md</a:t>
+            </a:r>
+          </a:p>
+          <a:p xmlns:a="http://schemas.openxmlformats.org/drawingml/2006/main">
+            <a:r>
+              <a:t>[/Sources]</a:t>
+            </a:r>
+          </a:p>
+        </p:txBody>
+      </p:sp>
+      <p:sp>
+        <p:nvSpPr>
+          <p:cNvPr id="4" name="Slide Number Placeholder 3"/>
+          <p:cNvSpPr>
+            <a:spLocks xmlns:a="http://schemas.openxmlformats.org/drawingml/2006/main" noGrp="1"/>
+          </p:cNvSpPr>
+          <p:nvPr>
+            <p:ph type="sldNum" idx="5"/>
+          </p:nvPr>
+        </p:nvSpPr>
+        <p:spPr/>
+        <p:txBody>
+          <a:bodyPr xmlns:a="http://schemas.openxmlformats.org/drawingml/2006/main"/>
+          <a:lstStyle xmlns:a="http://schemas.openxmlformats.org/drawingml/2006/main"/>
+          <a:p xmlns:a="http://schemas.openxmlformats.org/drawingml/2006/main"/>
+        </p:txBody>
+      </p:sp>
+    </p:spTree>
+  </p:cSld>
+  <p:clrMapOvr>
+    <a:masterClrMapping xmlns:a="http://schemas.openxmlformats.org/drawingml/2006/main"/>
+  </p:clrMapOvr>
+</p:notes>
+</file>
+
 <file path=ppt/notesSlides/notesSlide2.xml><?xml version="1.0" encoding="utf-8"?>
 <p:notes xmlns:p="http://schemas.openxmlformats.org/presentationml/2006/main">
   <p:cSld>
@@ -1155,6 +1252,101 @@
           <a:p xmlns:a="http://schemas.openxmlformats.org/drawingml/2006/main">
             <a:r>
               <a:t>- Course Notebook 05 offline execution</a:t>
+            </a:r>
+          </a:p>
+          <a:p xmlns:a="http://schemas.openxmlformats.org/drawingml/2006/main">
+            <a:r>
+              <a:t>[/Sources]</a:t>
+            </a:r>
+          </a:p>
+        </p:txBody>
+      </p:sp>
+      <p:sp>
+        <p:nvSpPr>
+          <p:cNvPr id="4" name="Slide Number Placeholder 3"/>
+          <p:cNvSpPr>
+            <a:spLocks xmlns:a="http://schemas.openxmlformats.org/drawingml/2006/main" noGrp="1"/>
+          </p:cNvSpPr>
+          <p:nvPr>
+            <p:ph type="sldNum" idx="5"/>
+          </p:nvPr>
+        </p:nvSpPr>
+        <p:spPr/>
+        <p:txBody>
+          <a:bodyPr xmlns:a="http://schemas.openxmlformats.org/drawingml/2006/main"/>
+          <a:lstStyle xmlns:a="http://schemas.openxmlformats.org/drawingml/2006/main"/>
+          <a:p xmlns:a="http://schemas.openxmlformats.org/drawingml/2006/main"/>
+        </p:txBody>
+      </p:sp>
+    </p:spTree>
+  </p:cSld>
+  <p:clrMapOvr>
+    <a:masterClrMapping xmlns:a="http://schemas.openxmlformats.org/drawingml/2006/main"/>
+  </p:clrMapOvr>
+</p:notes>
+</file>
+
+<file path=ppt/notesSlides/notesSlide9.xml><?xml version="1.0" encoding="utf-8"?>
+<p:notes xmlns:p="http://schemas.openxmlformats.org/presentationml/2006/main">
+  <p:cSld>
+    <p:spTree>
+      <p:nvGrpSpPr>
+        <p:cNvPr id="1" name=""/>
+        <p:cNvGrpSpPr/>
+        <p:nvPr/>
+      </p:nvGrpSpPr>
+      <p:grpSpPr>
+        <a:xfrm xmlns:a="http://schemas.openxmlformats.org/drawingml/2006/main"/>
+      </p:grpSpPr>
+      <p:sp>
+        <p:nvSpPr>
+          <p:cNvPr id="2" name="Slide Image Placeholder 1"/>
+          <p:cNvSpPr>
+            <a:spLocks xmlns:a="http://schemas.openxmlformats.org/drawingml/2006/main" noGrp="1"/>
+          </p:cNvSpPr>
+          <p:nvPr>
+            <p:ph type="sldImg" idx="0"/>
+          </p:nvPr>
+        </p:nvSpPr>
+        <p:spPr/>
+      </p:sp>
+      <p:sp>
+        <p:nvSpPr>
+          <p:cNvPr id="3" name="Notes Placeholder 2"/>
+          <p:cNvSpPr>
+            <a:spLocks xmlns:a="http://schemas.openxmlformats.org/drawingml/2006/main" noGrp="1"/>
+          </p:cNvSpPr>
+          <p:nvPr>
+            <p:ph type="body" idx="1"/>
+          </p:nvPr>
+        </p:nvSpPr>
+        <p:spPr/>
+        <p:txBody>
+          <a:bodyPr xmlns:a="http://schemas.openxmlformats.org/drawingml/2006/main"/>
+          <a:lstStyle xmlns:a="http://schemas.openxmlformats.org/drawingml/2006/main"/>
+          <a:p xmlns:a="http://schemas.openxmlformats.org/drawingml/2006/main">
+            <a:r>
+              <a:t>Instructor purpose: Check the three core decisions before the lesson closes.</a:t>
+            </a:r>
+          </a:p>
+          <a:p xmlns:a="http://schemas.openxmlformats.org/drawingml/2006/main">
+            <a:r>
+              <a:t>Planned timing: 3 minutes.</a:t>
+            </a:r>
+          </a:p>
+          <a:p xmlns:a="http://schemas.openxmlformats.org/drawingml/2006/main">
+            <a:r>
+              <a:t>Facilitation: ask for one letter per question.</a:t>
+            </a:r>
+          </a:p>
+          <a:p xmlns:a="http://schemas.openxmlformats.org/drawingml/2006/main">
+            <a:r>
+              <a:t>[Sources]</a:t>
+            </a:r>
+          </a:p>
+          <a:p xmlns:a="http://schemas.openxmlformats.org/drawingml/2006/main">
+            <a:r>
+              <a:t>- chapters/05-document-and-chunking-lab.md</a:t>
             </a:r>
           </a:p>
           <a:p xmlns:a="http://schemas.openxmlformats.org/drawingml/2006/main">
@@ -1227,7 +1419,7 @@
   </p:cSld>
   <p:clrMap bg1="lt1" tx1="dk1" bg2="lt2" tx2="dk2" accent1="accent1" accent2="accent2" accent3="accent3" accent4="accent4" accent5="accent5" accent6="accent6" hlink="hlink" folHlink="folHlink"/>
   <p:sldLayoutIdLst>
-    <p:sldLayoutId xmlns:r="http://schemas.openxmlformats.org/officeDocument/2006/relationships" id="2147483649" r:id="R390c388439d140c4"/>
+    <p:sldLayoutId xmlns:r="http://schemas.openxmlformats.org/officeDocument/2006/relationships" id="2147483649" r:id="R449ddde6f2404151"/>
   </p:sldLayoutIdLst>
   <p:txStyles>
     <p:titleStyle>
@@ -2126,6 +2318,678 @@
 </p:sld>
 </file>
 
+<file path=ppt/slides/slide10.xml><?xml version="1.0" encoding="utf-8"?>
+<p:sld xmlns:p="http://schemas.openxmlformats.org/presentationml/2006/main">
+  <p:cSld>
+    <p:bg>
+      <p:bgPr>
+        <a:solidFill xmlns:a="http://schemas.openxmlformats.org/drawingml/2006/main">
+          <a:srgbClr val="F5F5F5"/>
+        </a:solidFill>
+      </p:bgPr>
+    </p:bg>
+    <p:spTree>
+      <p:nvGrpSpPr>
+        <p:cNvPr id="1" name=""/>
+        <p:cNvGrpSpPr/>
+        <p:nvPr/>
+      </p:nvGrpSpPr>
+      <p:grpSpPr>
+        <a:xfrm xmlns:a="http://schemas.openxmlformats.org/drawingml/2006/main"/>
+      </p:grpSpPr>
+      <p:sp>
+        <p:nvSpPr>
+          <p:cNvPr id="7" name="">
+            <a:extLst xmlns:a="http://schemas.openxmlformats.org/drawingml/2006/main">
+              <a:ext uri="{FF2B5EF4-FFF2-40B4-BE49-F238E27FC236}">
+                <a16:creationId xmlns:a16="http://schemas.microsoft.com/office/drawing/2014/main" id="{2E1E88F9-4976-411E-8732-D45BE311BBD2}"/>
+              </a:ext>
+            </a:extLst>
+          </p:cNvPr>
+          <p:cNvSpPr>
+            <a:spLocks xmlns:a="http://schemas.openxmlformats.org/drawingml/2006/main" noGrp="1"/>
+          </p:cNvSpPr>
+          <p:nvPr/>
+        </p:nvSpPr>
+        <p:spPr>
+          <a:xfrm xmlns:a="http://schemas.openxmlformats.org/drawingml/2006/main">
+            <a:off x="971550" y="781050"/>
+            <a:ext cx="1257300" cy="76200"/>
+          </a:xfrm>
+          <a:prstGeom xmlns:a="http://schemas.openxmlformats.org/drawingml/2006/main" prst="rect">
+            <a:avLst/>
+          </a:prstGeom>
+          <a:solidFill xmlns:a="http://schemas.openxmlformats.org/drawingml/2006/main">
+            <a:srgbClr val="00A2EB"/>
+          </a:solidFill>
+          <a:ln xmlns:a="http://schemas.openxmlformats.org/drawingml/2006/main" w="0">
+            <a:solidFill>
+              <a:srgbClr val="00A2EB"/>
+            </a:solidFill>
+            <a:prstDash val="solid"/>
+          </a:ln>
+        </p:spPr>
+      </p:sp>
+      <p:sp>
+        <p:nvSpPr>
+          <p:cNvPr id="2" name="">
+            <a:extLst xmlns:a="http://schemas.openxmlformats.org/drawingml/2006/main">
+              <a:ext uri="{FF2B5EF4-FFF2-40B4-BE49-F238E27FC236}">
+                <a16:creationId xmlns:a16="http://schemas.microsoft.com/office/drawing/2014/main" id="{35C43047-00B1-4B7A-BB36-D272D2C9B6CA}"/>
+              </a:ext>
+            </a:extLst>
+          </p:cNvPr>
+          <p:cNvSpPr>
+            <a:spLocks xmlns:a="http://schemas.openxmlformats.org/drawingml/2006/main" noGrp="1"/>
+          </p:cNvSpPr>
+          <p:nvPr/>
+        </p:nvSpPr>
+        <p:spPr>
+          <a:xfrm xmlns:a="http://schemas.openxmlformats.org/drawingml/2006/main">
+            <a:off x="971550" y="1066800"/>
+            <a:ext cx="2857500" cy="419100"/>
+          </a:xfrm>
+          <a:prstGeom xmlns:a="http://schemas.openxmlformats.org/drawingml/2006/main" prst="rect">
+            <a:avLst/>
+          </a:prstGeom>
+          <a:noFill xmlns:a="http://schemas.openxmlformats.org/drawingml/2006/main"/>
+          <a:ln xmlns:a="http://schemas.openxmlformats.org/drawingml/2006/main" w="0">
+            <a:noFill/>
+            <a:prstDash val="solid"/>
+          </a:ln>
+        </p:spPr>
+        <p:txBody>
+          <a:bodyPr xmlns:a="http://schemas.openxmlformats.org/drawingml/2006/main" wrap="square" lIns="0" tIns="0" rIns="0" bIns="0" anchor="ctr">
+            <a:normAutofit fontScale="100000"/>
+          </a:bodyPr>
+          <a:lstStyle xmlns:a="http://schemas.openxmlformats.org/drawingml/2006/main"/>
+          <a:p xmlns:a="http://schemas.openxmlformats.org/drawingml/2006/main">
+            <a:pPr algn="l">
+              <a:lnSpc>
+                <a:spcPct val="100000"/>
+              </a:lnSpc>
+              <a:buNone/>
+              <a:defRPr sz="1575" b="1">
+                <a:solidFill>
+                  <a:srgbClr val="1F40CB"/>
+                </a:solidFill>
+                <a:latin typeface="Calibri"/>
+                <a:ea typeface="Calibri"/>
+                <a:cs typeface="Calibri"/>
+              </a:defRPr>
+            </a:pPr>
+            <a:r>
+              <a:rPr sz="1575" b="1">
+                <a:solidFill>
+                  <a:srgbClr val="1F40CB"/>
+                </a:solidFill>
+                <a:latin typeface="Calibri"/>
+                <a:ea typeface="Calibri"/>
+                <a:cs typeface="Calibri"/>
+              </a:rPr>
+              <a:t>FIRST FINANCE</a:t>
+            </a:r>
+          </a:p>
+        </p:txBody>
+      </p:sp>
+      <p:sp>
+        <p:nvSpPr>
+          <p:cNvPr id="3" name="">
+            <a:extLst xmlns:a="http://schemas.openxmlformats.org/drawingml/2006/main">
+              <a:ext uri="{FF2B5EF4-FFF2-40B4-BE49-F238E27FC236}">
+                <a16:creationId xmlns:a16="http://schemas.microsoft.com/office/drawing/2014/main" id="{2EBB9B00-5773-4D90-9774-8BB7FE35221F}"/>
+              </a:ext>
+            </a:extLst>
+          </p:cNvPr>
+          <p:cNvSpPr>
+            <a:spLocks xmlns:a="http://schemas.openxmlformats.org/drawingml/2006/main" noGrp="1"/>
+          </p:cNvSpPr>
+          <p:nvPr/>
+        </p:nvSpPr>
+        <p:spPr>
+          <a:xfrm xmlns:a="http://schemas.openxmlformats.org/drawingml/2006/main">
+            <a:off x="971550" y="2362200"/>
+            <a:ext cx="13296900" cy="895350"/>
+          </a:xfrm>
+          <a:prstGeom xmlns:a="http://schemas.openxmlformats.org/drawingml/2006/main" prst="rect">
+            <a:avLst/>
+          </a:prstGeom>
+          <a:noFill xmlns:a="http://schemas.openxmlformats.org/drawingml/2006/main"/>
+          <a:ln xmlns:a="http://schemas.openxmlformats.org/drawingml/2006/main" w="0">
+            <a:noFill/>
+            <a:prstDash val="solid"/>
+          </a:ln>
+        </p:spPr>
+        <p:txBody>
+          <a:bodyPr xmlns:a="http://schemas.openxmlformats.org/drawingml/2006/main" wrap="none" lIns="0" tIns="0" rIns="0" bIns="0" anchor="ctr">
+            <a:normAutofit fontScale="100000"/>
+          </a:bodyPr>
+          <a:lstStyle xmlns:a="http://schemas.openxmlformats.org/drawingml/2006/main"/>
+          <a:p xmlns:a="http://schemas.openxmlformats.org/drawingml/2006/main">
+            <a:pPr algn="l">
+              <a:lnSpc>
+                <a:spcPct val="100000"/>
+              </a:lnSpc>
+              <a:buNone/>
+              <a:defRPr sz="4800" b="1">
+                <a:solidFill>
+                  <a:srgbClr val="051C2A"/>
+                </a:solidFill>
+                <a:latin typeface="Calibri"/>
+                <a:ea typeface="Calibri"/>
+                <a:cs typeface="Calibri"/>
+              </a:defRPr>
+            </a:pPr>
+            <a:r>
+              <a:rPr sz="4800" b="1">
+                <a:solidFill>
+                  <a:srgbClr val="051C2A"/>
+                </a:solidFill>
+                <a:latin typeface="Calibri"/>
+                <a:ea typeface="Calibri"/>
+                <a:cs typeface="Calibri"/>
+              </a:rPr>
+              <a:t>Answers</a:t>
+            </a:r>
+          </a:p>
+        </p:txBody>
+      </p:sp>
+      <p:sp>
+        <p:nvSpPr>
+          <p:cNvPr id="4" name="">
+            <a:extLst xmlns:a="http://schemas.openxmlformats.org/drawingml/2006/main">
+              <a:ext uri="{FF2B5EF4-FFF2-40B4-BE49-F238E27FC236}">
+                <a16:creationId xmlns:a16="http://schemas.microsoft.com/office/drawing/2014/main" id="{601F96F8-8EA3-4B69-A3AF-EBD5CBCD09C1}"/>
+              </a:ext>
+            </a:extLst>
+          </p:cNvPr>
+          <p:cNvSpPr>
+            <a:spLocks xmlns:a="http://schemas.openxmlformats.org/drawingml/2006/main" noGrp="1"/>
+          </p:cNvSpPr>
+          <p:nvPr/>
+        </p:nvSpPr>
+        <p:spPr>
+          <a:xfrm xmlns:a="http://schemas.openxmlformats.org/drawingml/2006/main">
+            <a:off x="971550" y="3562350"/>
+            <a:ext cx="11239500" cy="514350"/>
+          </a:xfrm>
+          <a:prstGeom xmlns:a="http://schemas.openxmlformats.org/drawingml/2006/main" prst="rect">
+            <a:avLst/>
+          </a:prstGeom>
+          <a:noFill xmlns:a="http://schemas.openxmlformats.org/drawingml/2006/main"/>
+          <a:ln xmlns:a="http://schemas.openxmlformats.org/drawingml/2006/main" w="0">
+            <a:noFill/>
+            <a:prstDash val="solid"/>
+          </a:ln>
+        </p:spPr>
+        <p:txBody>
+          <a:bodyPr xmlns:a="http://schemas.openxmlformats.org/drawingml/2006/main" wrap="square" lIns="0" tIns="0" rIns="0" bIns="0" anchor="ctr">
+            <a:normAutofit fontScale="100000"/>
+          </a:bodyPr>
+          <a:lstStyle xmlns:a="http://schemas.openxmlformats.org/drawingml/2006/main"/>
+          <a:p xmlns:a="http://schemas.openxmlformats.org/drawingml/2006/main">
+            <a:pPr algn="l">
+              <a:lnSpc>
+                <a:spcPct val="100000"/>
+              </a:lnSpc>
+              <a:buNone/>
+              <a:defRPr sz="2400" b="0">
+                <a:solidFill>
+                  <a:srgbClr val="3F3F42"/>
+                </a:solidFill>
+                <a:latin typeface="Calibri"/>
+                <a:ea typeface="Calibri"/>
+                <a:cs typeface="Calibri"/>
+              </a:defRPr>
+            </a:pPr>
+            <a:r>
+              <a:rPr sz="2400" b="0">
+                <a:solidFill>
+                  <a:srgbClr val="3F3F42"/>
+                </a:solidFill>
+                <a:latin typeface="Calibri"/>
+                <a:ea typeface="Calibri"/>
+                <a:cs typeface="Calibri"/>
+              </a:rPr>
+              <a:t>Check the idea, not only the letter.</a:t>
+            </a:r>
+          </a:p>
+        </p:txBody>
+      </p:sp>
+      <p:sp>
+        <p:nvSpPr>
+          <p:cNvPr id="5" name="">
+            <a:extLst xmlns:a="http://schemas.openxmlformats.org/drawingml/2006/main">
+              <a:ext uri="{FF2B5EF4-FFF2-40B4-BE49-F238E27FC236}">
+                <a16:creationId xmlns:a16="http://schemas.microsoft.com/office/drawing/2014/main" id="{D4A6E89B-2708-4600-B820-727EF660DE6B}"/>
+              </a:ext>
+            </a:extLst>
+          </p:cNvPr>
+          <p:cNvSpPr>
+            <a:spLocks xmlns:a="http://schemas.openxmlformats.org/drawingml/2006/main" noGrp="1"/>
+          </p:cNvSpPr>
+          <p:nvPr/>
+        </p:nvSpPr>
+        <p:spPr>
+          <a:xfrm xmlns:a="http://schemas.openxmlformats.org/drawingml/2006/main">
+            <a:off x="971550" y="6477000"/>
+            <a:ext cx="9525000" cy="400050"/>
+          </a:xfrm>
+          <a:prstGeom xmlns:a="http://schemas.openxmlformats.org/drawingml/2006/main" prst="rect">
+            <a:avLst/>
+          </a:prstGeom>
+          <a:noFill xmlns:a="http://schemas.openxmlformats.org/drawingml/2006/main"/>
+          <a:ln xmlns:a="http://schemas.openxmlformats.org/drawingml/2006/main" w="0">
+            <a:noFill/>
+            <a:prstDash val="solid"/>
+          </a:ln>
+        </p:spPr>
+        <p:txBody>
+          <a:bodyPr xmlns:a="http://schemas.openxmlformats.org/drawingml/2006/main" wrap="square" lIns="0" tIns="0" rIns="0" bIns="0" anchor="ctr">
+            <a:normAutofit fontScale="100000"/>
+          </a:bodyPr>
+          <a:lstStyle xmlns:a="http://schemas.openxmlformats.org/drawingml/2006/main"/>
+          <a:p xmlns:a="http://schemas.openxmlformats.org/drawingml/2006/main">
+            <a:pPr algn="l">
+              <a:lnSpc>
+                <a:spcPct val="100000"/>
+              </a:lnSpc>
+              <a:buNone/>
+              <a:defRPr sz="1350" b="1">
+                <a:solidFill>
+                  <a:srgbClr val="1F40CB"/>
+                </a:solidFill>
+                <a:latin typeface="Calibri"/>
+                <a:ea typeface="Calibri"/>
+                <a:cs typeface="Calibri"/>
+              </a:defRPr>
+            </a:pPr>
+            <a:r>
+              <a:rPr sz="1350" b="1">
+                <a:solidFill>
+                  <a:srgbClr val="1F40CB"/>
+                </a:solidFill>
+                <a:latin typeface="Calibri"/>
+                <a:ea typeface="Calibri"/>
+                <a:cs typeface="Calibri"/>
+              </a:rPr>
+              <a:t>LESSON 05  ·  CORRECTION</a:t>
+            </a:r>
+          </a:p>
+        </p:txBody>
+      </p:sp>
+      <p:sp>
+        <p:nvSpPr>
+          <p:cNvPr id="6" name="">
+            <a:extLst xmlns:a="http://schemas.openxmlformats.org/drawingml/2006/main">
+              <a:ext uri="{FF2B5EF4-FFF2-40B4-BE49-F238E27FC236}">
+                <a16:creationId xmlns:a16="http://schemas.microsoft.com/office/drawing/2014/main" id="{053831D6-7D46-4F1A-929F-D2CAD97F1627}"/>
+              </a:ext>
+            </a:extLst>
+          </p:cNvPr>
+          <p:cNvSpPr>
+            <a:spLocks xmlns:a="http://schemas.openxmlformats.org/drawingml/2006/main" noGrp="1"/>
+          </p:cNvSpPr>
+          <p:nvPr/>
+        </p:nvSpPr>
+        <p:spPr>
+          <a:xfrm xmlns:a="http://schemas.openxmlformats.org/drawingml/2006/main">
+            <a:off x="971550" y="7067550"/>
+            <a:ext cx="4762500" cy="381000"/>
+          </a:xfrm>
+          <a:prstGeom xmlns:a="http://schemas.openxmlformats.org/drawingml/2006/main" prst="rect">
+            <a:avLst/>
+          </a:prstGeom>
+          <a:noFill xmlns:a="http://schemas.openxmlformats.org/drawingml/2006/main"/>
+          <a:ln xmlns:a="http://schemas.openxmlformats.org/drawingml/2006/main" w="0">
+            <a:noFill/>
+            <a:prstDash val="solid"/>
+          </a:ln>
+        </p:spPr>
+        <p:txBody>
+          <a:bodyPr xmlns:a="http://schemas.openxmlformats.org/drawingml/2006/main" wrap="square" lIns="0" tIns="0" rIns="0" bIns="0" anchor="ctr">
+            <a:normAutofit fontScale="100000"/>
+          </a:bodyPr>
+          <a:lstStyle xmlns:a="http://schemas.openxmlformats.org/drawingml/2006/main"/>
+          <a:p xmlns:a="http://schemas.openxmlformats.org/drawingml/2006/main">
+            <a:pPr algn="l">
+              <a:lnSpc>
+                <a:spcPct val="100000"/>
+              </a:lnSpc>
+              <a:buNone/>
+              <a:defRPr sz="1725" b="0">
+                <a:solidFill>
+                  <a:srgbClr val="051C2A"/>
+                </a:solidFill>
+                <a:latin typeface="Calibri"/>
+                <a:ea typeface="Calibri"/>
+                <a:cs typeface="Calibri"/>
+              </a:defRPr>
+            </a:pPr>
+            <a:r>
+              <a:rPr sz="1725" b="0">
+                <a:solidFill>
+                  <a:srgbClr val="051C2A"/>
+                </a:solidFill>
+                <a:latin typeface="Calibri"/>
+                <a:ea typeface="Calibri"/>
+                <a:cs typeface="Calibri"/>
+              </a:rPr>
+              <a:t>First Finance - Arnaud Demes</a:t>
+            </a:r>
+          </a:p>
+        </p:txBody>
+      </p:sp>
+      <p:sp>
+        <p:nvSpPr>
+          <p:cNvPr id="8" name="quiz-answer-1">
+            <a:extLst xmlns:a="http://schemas.openxmlformats.org/drawingml/2006/main">
+              <a:ext uri="{FF2B5EF4-FFF2-40B4-BE49-F238E27FC236}">
+                <a16:creationId xmlns:a16="http://schemas.microsoft.com/office/drawing/2014/main" id="{DCC03A50-B4E0-4A33-8660-4303A3EB00FB}"/>
+              </a:ext>
+            </a:extLst>
+          </p:cNvPr>
+          <p:cNvSpPr>
+            <a:spLocks xmlns:a="http://schemas.openxmlformats.org/drawingml/2006/main" noGrp="1"/>
+          </p:cNvSpPr>
+          <p:nvPr/>
+        </p:nvSpPr>
+        <p:spPr>
+          <a:xfrm xmlns:a="http://schemas.openxmlformats.org/drawingml/2006/main">
+            <a:off x="971550" y="4400550"/>
+            <a:ext cx="13296900" cy="285750"/>
+          </a:xfrm>
+          <a:prstGeom xmlns:a="http://schemas.openxmlformats.org/drawingml/2006/main" prst="rect">
+            <a:avLst/>
+          </a:prstGeom>
+          <a:noFill xmlns:a="http://schemas.openxmlformats.org/drawingml/2006/main"/>
+          <a:ln xmlns:a="http://schemas.openxmlformats.org/drawingml/2006/main" w="0">
+            <a:noFill/>
+            <a:prstDash val="solid"/>
+          </a:ln>
+        </p:spPr>
+        <p:txBody>
+          <a:bodyPr xmlns:a="http://schemas.openxmlformats.org/drawingml/2006/main"/>
+          <a:lstStyle xmlns:a="http://schemas.openxmlformats.org/drawingml/2006/main"/>
+          <a:p xmlns:a="http://schemas.openxmlformats.org/drawingml/2006/main">
+            <a:pPr>
+              <a:defRPr sz="1500" b="1">
+                <a:solidFill>
+                  <a:srgbClr val="1F40CB"/>
+                </a:solidFill>
+              </a:defRPr>
+            </a:pPr>
+            <a:r>
+              <a:rPr sz="1500" b="1">
+                <a:solidFill>
+                  <a:srgbClr val="1F40CB"/>
+                </a:solidFill>
+              </a:rPr>
+              <a:t>1. A. Extraction quality</a:t>
+            </a:r>
+          </a:p>
+        </p:txBody>
+      </p:sp>
+      <p:sp>
+        <p:nvSpPr>
+          <p:cNvPr id="9" name="quiz-explanation-1">
+            <a:extLst xmlns:a="http://schemas.openxmlformats.org/drawingml/2006/main">
+              <a:ext uri="{FF2B5EF4-FFF2-40B4-BE49-F238E27FC236}">
+                <a16:creationId xmlns:a16="http://schemas.microsoft.com/office/drawing/2014/main" id="{2E4A872E-CE1D-4F25-8FD3-C85259ACF4F9}"/>
+              </a:ext>
+            </a:extLst>
+          </p:cNvPr>
+          <p:cNvSpPr>
+            <a:spLocks xmlns:a="http://schemas.openxmlformats.org/drawingml/2006/main" noGrp="1"/>
+          </p:cNvSpPr>
+          <p:nvPr/>
+        </p:nvSpPr>
+        <p:spPr>
+          <a:xfrm xmlns:a="http://schemas.openxmlformats.org/drawingml/2006/main">
+            <a:off x="1257300" y="4705350"/>
+            <a:ext cx="13011150" cy="247650"/>
+          </a:xfrm>
+          <a:prstGeom xmlns:a="http://schemas.openxmlformats.org/drawingml/2006/main" prst="rect">
+            <a:avLst/>
+          </a:prstGeom>
+          <a:noFill xmlns:a="http://schemas.openxmlformats.org/drawingml/2006/main"/>
+          <a:ln xmlns:a="http://schemas.openxmlformats.org/drawingml/2006/main" w="0">
+            <a:noFill/>
+            <a:prstDash val="solid"/>
+          </a:ln>
+        </p:spPr>
+        <p:txBody>
+          <a:bodyPr xmlns:a="http://schemas.openxmlformats.org/drawingml/2006/main"/>
+          <a:lstStyle xmlns:a="http://schemas.openxmlformats.org/drawingml/2006/main"/>
+          <a:p xmlns:a="http://schemas.openxmlformats.org/drawingml/2006/main">
+            <a:pPr>
+              <a:defRPr sz="1200" b="0">
+                <a:solidFill>
+                  <a:srgbClr val="334155"/>
+                </a:solidFill>
+              </a:defRPr>
+            </a:pPr>
+            <a:r>
+              <a:rPr sz="1200" b="0">
+                <a:solidFill>
+                  <a:srgbClr val="334155"/>
+                </a:solidFill>
+              </a:rPr>
+              <a:t>Bad reading order or lost tables cannot be repaired by better chunk sizes.</a:t>
+            </a:r>
+          </a:p>
+        </p:txBody>
+      </p:sp>
+      <p:sp>
+        <p:nvSpPr>
+          <p:cNvPr id="10" name="quiz-answer-2">
+            <a:extLst xmlns:a="http://schemas.openxmlformats.org/drawingml/2006/main">
+              <a:ext uri="{FF2B5EF4-FFF2-40B4-BE49-F238E27FC236}">
+                <a16:creationId xmlns:a16="http://schemas.microsoft.com/office/drawing/2014/main" id="{8E7C3092-6CBB-4D43-838A-C4FBEE8C5334}"/>
+              </a:ext>
+            </a:extLst>
+          </p:cNvPr>
+          <p:cNvSpPr>
+            <a:spLocks xmlns:a="http://schemas.openxmlformats.org/drawingml/2006/main" noGrp="1"/>
+          </p:cNvSpPr>
+          <p:nvPr/>
+        </p:nvSpPr>
+        <p:spPr>
+          <a:xfrm xmlns:a="http://schemas.openxmlformats.org/drawingml/2006/main">
+            <a:off x="971550" y="5086350"/>
+            <a:ext cx="13296900" cy="285750"/>
+          </a:xfrm>
+          <a:prstGeom xmlns:a="http://schemas.openxmlformats.org/drawingml/2006/main" prst="rect">
+            <a:avLst/>
+          </a:prstGeom>
+          <a:noFill xmlns:a="http://schemas.openxmlformats.org/drawingml/2006/main"/>
+          <a:ln xmlns:a="http://schemas.openxmlformats.org/drawingml/2006/main" w="0">
+            <a:noFill/>
+            <a:prstDash val="solid"/>
+          </a:ln>
+        </p:spPr>
+        <p:txBody>
+          <a:bodyPr xmlns:a="http://schemas.openxmlformats.org/drawingml/2006/main"/>
+          <a:lstStyle xmlns:a="http://schemas.openxmlformats.org/drawingml/2006/main"/>
+          <a:p xmlns:a="http://schemas.openxmlformats.org/drawingml/2006/main">
+            <a:pPr>
+              <a:defRPr sz="1500" b="1">
+                <a:solidFill>
+                  <a:srgbClr val="1F40CB"/>
+                </a:solidFill>
+              </a:defRPr>
+            </a:pPr>
+            <a:r>
+              <a:rPr sz="1500" b="1">
+                <a:solidFill>
+                  <a:srgbClr val="1F40CB"/>
+                </a:solidFill>
+              </a:rPr>
+              <a:t>2. A. Provenance</a:t>
+            </a:r>
+          </a:p>
+        </p:txBody>
+      </p:sp>
+      <p:sp>
+        <p:nvSpPr>
+          <p:cNvPr id="11" name="quiz-explanation-2">
+            <a:extLst xmlns:a="http://schemas.openxmlformats.org/drawingml/2006/main">
+              <a:ext uri="{FF2B5EF4-FFF2-40B4-BE49-F238E27FC236}">
+                <a16:creationId xmlns:a16="http://schemas.microsoft.com/office/drawing/2014/main" id="{80F9E211-E235-4B33-89A3-60C3B361E886}"/>
+              </a:ext>
+            </a:extLst>
+          </p:cNvPr>
+          <p:cNvSpPr>
+            <a:spLocks xmlns:a="http://schemas.openxmlformats.org/drawingml/2006/main" noGrp="1"/>
+          </p:cNvSpPr>
+          <p:nvPr/>
+        </p:nvSpPr>
+        <p:spPr>
+          <a:xfrm xmlns:a="http://schemas.openxmlformats.org/drawingml/2006/main">
+            <a:off x="1257300" y="5391150"/>
+            <a:ext cx="13011150" cy="247650"/>
+          </a:xfrm>
+          <a:prstGeom xmlns:a="http://schemas.openxmlformats.org/drawingml/2006/main" prst="rect">
+            <a:avLst/>
+          </a:prstGeom>
+          <a:noFill xmlns:a="http://schemas.openxmlformats.org/drawingml/2006/main"/>
+          <a:ln xmlns:a="http://schemas.openxmlformats.org/drawingml/2006/main" w="0">
+            <a:noFill/>
+            <a:prstDash val="solid"/>
+          </a:ln>
+        </p:spPr>
+        <p:txBody>
+          <a:bodyPr xmlns:a="http://schemas.openxmlformats.org/drawingml/2006/main"/>
+          <a:lstStyle xmlns:a="http://schemas.openxmlformats.org/drawingml/2006/main"/>
+          <a:p xmlns:a="http://schemas.openxmlformats.org/drawingml/2006/main">
+            <a:pPr>
+              <a:defRPr sz="1200" b="0">
+                <a:solidFill>
+                  <a:srgbClr val="334155"/>
+                </a:solidFill>
+              </a:defRPr>
+            </a:pPr>
+            <a:r>
+              <a:rPr sz="1200" b="0">
+                <a:solidFill>
+                  <a:srgbClr val="334155"/>
+                </a:solidFill>
+              </a:rPr>
+              <a:t>Stable IDs, pages and sources keep evidence traceable.</a:t>
+            </a:r>
+          </a:p>
+        </p:txBody>
+      </p:sp>
+      <p:sp>
+        <p:nvSpPr>
+          <p:cNvPr id="12" name="quiz-answer-3">
+            <a:extLst xmlns:a="http://schemas.openxmlformats.org/drawingml/2006/main">
+              <a:ext uri="{FF2B5EF4-FFF2-40B4-BE49-F238E27FC236}">
+                <a16:creationId xmlns:a16="http://schemas.microsoft.com/office/drawing/2014/main" id="{A55EF1BA-75A5-46E9-87A8-5B9962F07CA5}"/>
+              </a:ext>
+            </a:extLst>
+          </p:cNvPr>
+          <p:cNvSpPr>
+            <a:spLocks xmlns:a="http://schemas.openxmlformats.org/drawingml/2006/main" noGrp="1"/>
+          </p:cNvSpPr>
+          <p:nvPr/>
+        </p:nvSpPr>
+        <p:spPr>
+          <a:xfrm xmlns:a="http://schemas.openxmlformats.org/drawingml/2006/main">
+            <a:off x="971550" y="5772150"/>
+            <a:ext cx="13296900" cy="285750"/>
+          </a:xfrm>
+          <a:prstGeom xmlns:a="http://schemas.openxmlformats.org/drawingml/2006/main" prst="rect">
+            <a:avLst/>
+          </a:prstGeom>
+          <a:noFill xmlns:a="http://schemas.openxmlformats.org/drawingml/2006/main"/>
+          <a:ln xmlns:a="http://schemas.openxmlformats.org/drawingml/2006/main" w="0">
+            <a:noFill/>
+            <a:prstDash val="solid"/>
+          </a:ln>
+        </p:spPr>
+        <p:txBody>
+          <a:bodyPr xmlns:a="http://schemas.openxmlformats.org/drawingml/2006/main"/>
+          <a:lstStyle xmlns:a="http://schemas.openxmlformats.org/drawingml/2006/main"/>
+          <a:p xmlns:a="http://schemas.openxmlformats.org/drawingml/2006/main">
+            <a:pPr>
+              <a:defRPr sz="1500" b="1">
+                <a:solidFill>
+                  <a:srgbClr val="1F40CB"/>
+                </a:solidFill>
+              </a:defRPr>
+            </a:pPr>
+            <a:r>
+              <a:rPr sz="1500" b="1">
+                <a:solidFill>
+                  <a:srgbClr val="1F40CB"/>
+                </a:solidFill>
+              </a:rPr>
+              <a:t>3. A. Retrieval and reading context</a:t>
+            </a:r>
+          </a:p>
+        </p:txBody>
+      </p:sp>
+      <p:sp>
+        <p:nvSpPr>
+          <p:cNvPr id="13" name="quiz-explanation-3">
+            <a:extLst xmlns:a="http://schemas.openxmlformats.org/drawingml/2006/main">
+              <a:ext uri="{FF2B5EF4-FFF2-40B4-BE49-F238E27FC236}">
+                <a16:creationId xmlns:a16="http://schemas.microsoft.com/office/drawing/2014/main" id="{478F71FA-44B6-4830-BC4D-2D20DBDDBA46}"/>
+              </a:ext>
+            </a:extLst>
+          </p:cNvPr>
+          <p:cNvSpPr>
+            <a:spLocks xmlns:a="http://schemas.openxmlformats.org/drawingml/2006/main" noGrp="1"/>
+          </p:cNvSpPr>
+          <p:nvPr/>
+        </p:nvSpPr>
+        <p:spPr>
+          <a:xfrm xmlns:a="http://schemas.openxmlformats.org/drawingml/2006/main">
+            <a:off x="1257300" y="6076950"/>
+            <a:ext cx="13011150" cy="247650"/>
+          </a:xfrm>
+          <a:prstGeom xmlns:a="http://schemas.openxmlformats.org/drawingml/2006/main" prst="rect">
+            <a:avLst/>
+          </a:prstGeom>
+          <a:noFill xmlns:a="http://schemas.openxmlformats.org/drawingml/2006/main"/>
+          <a:ln xmlns:a="http://schemas.openxmlformats.org/drawingml/2006/main" w="0">
+            <a:noFill/>
+            <a:prstDash val="solid"/>
+          </a:ln>
+        </p:spPr>
+        <p:txBody>
+          <a:bodyPr xmlns:a="http://schemas.openxmlformats.org/drawingml/2006/main"/>
+          <a:lstStyle xmlns:a="http://schemas.openxmlformats.org/drawingml/2006/main"/>
+          <a:p xmlns:a="http://schemas.openxmlformats.org/drawingml/2006/main">
+            <a:pPr>
+              <a:defRPr sz="1200" b="0">
+                <a:solidFill>
+                  <a:srgbClr val="334155"/>
+                </a:solidFill>
+              </a:defRPr>
+            </a:pPr>
+            <a:r>
+              <a:rPr sz="1200" b="0">
+                <a:solidFill>
+                  <a:srgbClr val="334155"/>
+                </a:solidFill>
+              </a:rPr>
+              <a:t>Small children retrieve precisely while parents restore context.</a:t>
+            </a:r>
+          </a:p>
+        </p:txBody>
+      </p:sp>
+    </p:spTree>
+    <p:extLst>
+      <p:ext uri="{BB962C8B-B14F-4D97-AF65-F5344CB8AC3E}">
+        <p14:creationId xmlns:p14="http://schemas.microsoft.com/office/powerpoint/2010/main" val="1316229138"/>
+      </p:ext>
+    </p:extLst>
+  </p:cSld>
+</p:sld>
+</file>
+
 <file path=ppt/slides/slide2.xml><?xml version="1.0" encoding="utf-8"?>
 <p:sld xmlns:p="http://schemas.openxmlformats.org/presentationml/2006/main">
   <p:cSld>
@@ -3974,7 +4838,7 @@
       </p:sp>
       <p:cxnSp>
         <p:nvCxnSpPr>
-          <p:cNvPr id="191" name=""/>
+          <p:cNvPr id="265" name=""/>
           <p:cNvCxnSpPr>
             <a:stCxn xmlns:a="http://schemas.openxmlformats.org/drawingml/2006/main" id="4" idx="3"/>
             <a:endCxn xmlns:a="http://schemas.openxmlformats.org/drawingml/2006/main" id="30" idx="1"/>
@@ -5572,7 +6436,7 @@
       </p:sp>
       <p:cxnSp>
         <p:nvCxnSpPr>
-          <p:cNvPr id="135" name=""/>
+          <p:cNvPr id="187" name=""/>
           <p:cNvCxnSpPr>
             <a:stCxn xmlns:a="http://schemas.openxmlformats.org/drawingml/2006/main" id="3" idx="3"/>
             <a:endCxn xmlns:a="http://schemas.openxmlformats.org/drawingml/2006/main" id="7" idx="1"/>
@@ -5598,7 +6462,7 @@
       </p:cxnSp>
       <p:cxnSp>
         <p:nvCxnSpPr>
-          <p:cNvPr id="136" name=""/>
+          <p:cNvPr id="188" name=""/>
           <p:cNvCxnSpPr>
             <a:stCxn xmlns:a="http://schemas.openxmlformats.org/drawingml/2006/main" id="7" idx="3"/>
             <a:endCxn xmlns:a="http://schemas.openxmlformats.org/drawingml/2006/main" id="11" idx="1"/>
@@ -5624,7 +6488,7 @@
       </p:cxnSp>
       <p:cxnSp>
         <p:nvCxnSpPr>
-          <p:cNvPr id="137" name=""/>
+          <p:cNvPr id="189" name=""/>
           <p:cNvCxnSpPr>
             <a:stCxn xmlns:a="http://schemas.openxmlformats.org/drawingml/2006/main" id="11" idx="3"/>
             <a:endCxn xmlns:a="http://schemas.openxmlformats.org/drawingml/2006/main" id="15" idx="1"/>
@@ -5650,7 +6514,7 @@
       </p:cxnSp>
       <p:cxnSp>
         <p:nvCxnSpPr>
-          <p:cNvPr id="138" name=""/>
+          <p:cNvPr id="190" name=""/>
           <p:cNvCxnSpPr>
             <a:stCxn xmlns:a="http://schemas.openxmlformats.org/drawingml/2006/main" id="15" idx="3"/>
             <a:endCxn xmlns:a="http://schemas.openxmlformats.org/drawingml/2006/main" id="19" idx="1"/>
@@ -7502,7 +8366,7 @@
       </p:sp>
       <p:cxnSp>
         <p:nvCxnSpPr>
-          <p:cNvPr id="156" name=""/>
+          <p:cNvPr id="218" name=""/>
           <p:cNvCxnSpPr>
             <a:stCxn xmlns:a="http://schemas.openxmlformats.org/drawingml/2006/main" id="8" idx="3"/>
             <a:endCxn xmlns:a="http://schemas.openxmlformats.org/drawingml/2006/main" id="3" idx="1"/>
@@ -7528,7 +8392,7 @@
       </p:cxnSp>
       <p:cxnSp>
         <p:nvCxnSpPr>
-          <p:cNvPr id="157" name=""/>
+          <p:cNvPr id="219" name=""/>
           <p:cNvCxnSpPr>
             <a:stCxn xmlns:a="http://schemas.openxmlformats.org/drawingml/2006/main" id="11" idx="3"/>
             <a:endCxn xmlns:a="http://schemas.openxmlformats.org/drawingml/2006/main" id="3" idx="1"/>
@@ -7554,7 +8418,7 @@
       </p:cxnSp>
       <p:cxnSp>
         <p:nvCxnSpPr>
-          <p:cNvPr id="158" name=""/>
+          <p:cNvPr id="220" name=""/>
           <p:cNvCxnSpPr>
             <a:stCxn xmlns:a="http://schemas.openxmlformats.org/drawingml/2006/main" id="14" idx="3"/>
             <a:endCxn xmlns:a="http://schemas.openxmlformats.org/drawingml/2006/main" id="3" idx="1"/>
@@ -7580,7 +8444,7 @@
       </p:cxnSp>
       <p:cxnSp>
         <p:nvCxnSpPr>
-          <p:cNvPr id="159" name=""/>
+          <p:cNvPr id="221" name=""/>
           <p:cNvCxnSpPr>
             <a:stCxn xmlns:a="http://schemas.openxmlformats.org/drawingml/2006/main" id="3" idx="3"/>
             <a:endCxn xmlns:a="http://schemas.openxmlformats.org/drawingml/2006/main" id="17" idx="1"/>
@@ -7606,7 +8470,7 @@
       </p:cxnSp>
       <p:cxnSp>
         <p:nvCxnSpPr>
-          <p:cNvPr id="160" name=""/>
+          <p:cNvPr id="222" name=""/>
           <p:cNvCxnSpPr>
             <a:stCxn xmlns:a="http://schemas.openxmlformats.org/drawingml/2006/main" id="3" idx="3"/>
             <a:endCxn xmlns:a="http://schemas.openxmlformats.org/drawingml/2006/main" id="20" idx="1"/>
@@ -7632,7 +8496,7 @@
       </p:cxnSp>
       <p:cxnSp>
         <p:nvCxnSpPr>
-          <p:cNvPr id="161" name=""/>
+          <p:cNvPr id="223" name=""/>
           <p:cNvCxnSpPr>
             <a:stCxn xmlns:a="http://schemas.openxmlformats.org/drawingml/2006/main" id="3" idx="3"/>
             <a:endCxn xmlns:a="http://schemas.openxmlformats.org/drawingml/2006/main" id="23" idx="1"/>
@@ -10743,7 +11607,7 @@
       </p:sp>
       <p:cxnSp>
         <p:nvCxnSpPr>
-          <p:cNvPr id="134" name=""/>
+          <p:cNvPr id="182" name=""/>
           <p:cNvCxnSpPr>
             <a:stCxn xmlns:a="http://schemas.openxmlformats.org/drawingml/2006/main" id="14" idx="2"/>
             <a:endCxn xmlns:a="http://schemas.openxmlformats.org/drawingml/2006/main" id="16" idx="0"/>
@@ -10769,7 +11633,7 @@
       </p:cxnSp>
       <p:cxnSp>
         <p:nvCxnSpPr>
-          <p:cNvPr id="135" name=""/>
+          <p:cNvPr id="183" name=""/>
           <p:cNvCxnSpPr>
             <a:stCxn xmlns:a="http://schemas.openxmlformats.org/drawingml/2006/main" id="14" idx="2"/>
             <a:endCxn xmlns:a="http://schemas.openxmlformats.org/drawingml/2006/main" id="18" idx="0"/>
@@ -10795,7 +11659,7 @@
       </p:cxnSp>
       <p:cxnSp>
         <p:nvCxnSpPr>
-          <p:cNvPr id="136" name=""/>
+          <p:cNvPr id="184" name=""/>
           <p:cNvCxnSpPr>
             <a:stCxn xmlns:a="http://schemas.openxmlformats.org/drawingml/2006/main" id="14" idx="2"/>
             <a:endCxn xmlns:a="http://schemas.openxmlformats.org/drawingml/2006/main" id="20" idx="0"/>
@@ -14839,7 +15703,7 @@
       </p:sp>
       <p:cxnSp>
         <p:nvCxnSpPr>
-          <p:cNvPr id="82" name=""/>
+          <p:cNvPr id="110" name=""/>
           <p:cNvCxnSpPr>
             <a:stCxn xmlns:a="http://schemas.openxmlformats.org/drawingml/2006/main" id="3" idx="3"/>
             <a:endCxn xmlns:a="http://schemas.openxmlformats.org/drawingml/2006/main" id="6" idx="1"/>
@@ -14865,7 +15729,7 @@
       </p:cxnSp>
       <p:cxnSp>
         <p:nvCxnSpPr>
-          <p:cNvPr id="83" name=""/>
+          <p:cNvPr id="111" name=""/>
           <p:cNvCxnSpPr>
             <a:stCxn xmlns:a="http://schemas.openxmlformats.org/drawingml/2006/main" id="6" idx="3"/>
             <a:endCxn xmlns:a="http://schemas.openxmlformats.org/drawingml/2006/main" id="10" idx="1"/>
@@ -15585,6 +16449,678 @@
     <p:extLst>
       <p:ext uri="{BB962C8B-B14F-4D97-AF65-F5344CB8AC3E}">
         <p14:creationId xmlns:p14="http://schemas.microsoft.com/office/powerpoint/2010/main" val="1663571577"/>
+      </p:ext>
+    </p:extLst>
+  </p:cSld>
+</p:sld>
+</file>
+
+<file path=ppt/slides/slide9.xml><?xml version="1.0" encoding="utf-8"?>
+<p:sld xmlns:p="http://schemas.openxmlformats.org/presentationml/2006/main">
+  <p:cSld>
+    <p:bg>
+      <p:bgPr>
+        <a:solidFill xmlns:a="http://schemas.openxmlformats.org/drawingml/2006/main">
+          <a:srgbClr val="F5F5F5"/>
+        </a:solidFill>
+      </p:bgPr>
+    </p:bg>
+    <p:spTree>
+      <p:nvGrpSpPr>
+        <p:cNvPr id="1" name=""/>
+        <p:cNvGrpSpPr/>
+        <p:nvPr/>
+      </p:nvGrpSpPr>
+      <p:grpSpPr>
+        <a:xfrm xmlns:a="http://schemas.openxmlformats.org/drawingml/2006/main"/>
+      </p:grpSpPr>
+      <p:sp>
+        <p:nvSpPr>
+          <p:cNvPr id="7" name="">
+            <a:extLst xmlns:a="http://schemas.openxmlformats.org/drawingml/2006/main">
+              <a:ext uri="{FF2B5EF4-FFF2-40B4-BE49-F238E27FC236}">
+                <a16:creationId xmlns:a16="http://schemas.microsoft.com/office/drawing/2014/main" id="{2E1E88F9-4976-411E-8732-D45BE311BBD2}"/>
+              </a:ext>
+            </a:extLst>
+          </p:cNvPr>
+          <p:cNvSpPr>
+            <a:spLocks xmlns:a="http://schemas.openxmlformats.org/drawingml/2006/main" noGrp="1"/>
+          </p:cNvSpPr>
+          <p:nvPr/>
+        </p:nvSpPr>
+        <p:spPr>
+          <a:xfrm xmlns:a="http://schemas.openxmlformats.org/drawingml/2006/main">
+            <a:off x="971550" y="781050"/>
+            <a:ext cx="1257300" cy="76200"/>
+          </a:xfrm>
+          <a:prstGeom xmlns:a="http://schemas.openxmlformats.org/drawingml/2006/main" prst="rect">
+            <a:avLst/>
+          </a:prstGeom>
+          <a:solidFill xmlns:a="http://schemas.openxmlformats.org/drawingml/2006/main">
+            <a:srgbClr val="00A2EB"/>
+          </a:solidFill>
+          <a:ln xmlns:a="http://schemas.openxmlformats.org/drawingml/2006/main" w="0">
+            <a:solidFill>
+              <a:srgbClr val="00A2EB"/>
+            </a:solidFill>
+            <a:prstDash val="solid"/>
+          </a:ln>
+        </p:spPr>
+      </p:sp>
+      <p:sp>
+        <p:nvSpPr>
+          <p:cNvPr id="2" name="">
+            <a:extLst xmlns:a="http://schemas.openxmlformats.org/drawingml/2006/main">
+              <a:ext uri="{FF2B5EF4-FFF2-40B4-BE49-F238E27FC236}">
+                <a16:creationId xmlns:a16="http://schemas.microsoft.com/office/drawing/2014/main" id="{35C43047-00B1-4B7A-BB36-D272D2C9B6CA}"/>
+              </a:ext>
+            </a:extLst>
+          </p:cNvPr>
+          <p:cNvSpPr>
+            <a:spLocks xmlns:a="http://schemas.openxmlformats.org/drawingml/2006/main" noGrp="1"/>
+          </p:cNvSpPr>
+          <p:nvPr/>
+        </p:nvSpPr>
+        <p:spPr>
+          <a:xfrm xmlns:a="http://schemas.openxmlformats.org/drawingml/2006/main">
+            <a:off x="971550" y="1066800"/>
+            <a:ext cx="2857500" cy="419100"/>
+          </a:xfrm>
+          <a:prstGeom xmlns:a="http://schemas.openxmlformats.org/drawingml/2006/main" prst="rect">
+            <a:avLst/>
+          </a:prstGeom>
+          <a:noFill xmlns:a="http://schemas.openxmlformats.org/drawingml/2006/main"/>
+          <a:ln xmlns:a="http://schemas.openxmlformats.org/drawingml/2006/main" w="0">
+            <a:noFill/>
+            <a:prstDash val="solid"/>
+          </a:ln>
+        </p:spPr>
+        <p:txBody>
+          <a:bodyPr xmlns:a="http://schemas.openxmlformats.org/drawingml/2006/main" wrap="square" lIns="0" tIns="0" rIns="0" bIns="0" anchor="ctr">
+            <a:normAutofit fontScale="100000"/>
+          </a:bodyPr>
+          <a:lstStyle xmlns:a="http://schemas.openxmlformats.org/drawingml/2006/main"/>
+          <a:p xmlns:a="http://schemas.openxmlformats.org/drawingml/2006/main">
+            <a:pPr algn="l">
+              <a:lnSpc>
+                <a:spcPct val="100000"/>
+              </a:lnSpc>
+              <a:buNone/>
+              <a:defRPr sz="1575" b="1">
+                <a:solidFill>
+                  <a:srgbClr val="1F40CB"/>
+                </a:solidFill>
+                <a:latin typeface="Calibri"/>
+                <a:ea typeface="Calibri"/>
+                <a:cs typeface="Calibri"/>
+              </a:defRPr>
+            </a:pPr>
+            <a:r>
+              <a:rPr sz="1575" b="1">
+                <a:solidFill>
+                  <a:srgbClr val="1F40CB"/>
+                </a:solidFill>
+                <a:latin typeface="Calibri"/>
+                <a:ea typeface="Calibri"/>
+                <a:cs typeface="Calibri"/>
+              </a:rPr>
+              <a:t>FIRST FINANCE</a:t>
+            </a:r>
+          </a:p>
+        </p:txBody>
+      </p:sp>
+      <p:sp>
+        <p:nvSpPr>
+          <p:cNvPr id="3" name="">
+            <a:extLst xmlns:a="http://schemas.openxmlformats.org/drawingml/2006/main">
+              <a:ext uri="{FF2B5EF4-FFF2-40B4-BE49-F238E27FC236}">
+                <a16:creationId xmlns:a16="http://schemas.microsoft.com/office/drawing/2014/main" id="{2EBB9B00-5773-4D90-9774-8BB7FE35221F}"/>
+              </a:ext>
+            </a:extLst>
+          </p:cNvPr>
+          <p:cNvSpPr>
+            <a:spLocks xmlns:a="http://schemas.openxmlformats.org/drawingml/2006/main" noGrp="1"/>
+          </p:cNvSpPr>
+          <p:nvPr/>
+        </p:nvSpPr>
+        <p:spPr>
+          <a:xfrm xmlns:a="http://schemas.openxmlformats.org/drawingml/2006/main">
+            <a:off x="971550" y="2362200"/>
+            <a:ext cx="13296900" cy="895350"/>
+          </a:xfrm>
+          <a:prstGeom xmlns:a="http://schemas.openxmlformats.org/drawingml/2006/main" prst="rect">
+            <a:avLst/>
+          </a:prstGeom>
+          <a:noFill xmlns:a="http://schemas.openxmlformats.org/drawingml/2006/main"/>
+          <a:ln xmlns:a="http://schemas.openxmlformats.org/drawingml/2006/main" w="0">
+            <a:noFill/>
+            <a:prstDash val="solid"/>
+          </a:ln>
+        </p:spPr>
+        <p:txBody>
+          <a:bodyPr xmlns:a="http://schemas.openxmlformats.org/drawingml/2006/main" wrap="none" lIns="0" tIns="0" rIns="0" bIns="0" anchor="ctr">
+            <a:normAutofit fontScale="100000"/>
+          </a:bodyPr>
+          <a:lstStyle xmlns:a="http://schemas.openxmlformats.org/drawingml/2006/main"/>
+          <a:p xmlns:a="http://schemas.openxmlformats.org/drawingml/2006/main">
+            <a:pPr algn="l">
+              <a:lnSpc>
+                <a:spcPct val="100000"/>
+              </a:lnSpc>
+              <a:buNone/>
+              <a:defRPr sz="4800" b="1">
+                <a:solidFill>
+                  <a:srgbClr val="051C2A"/>
+                </a:solidFill>
+                <a:latin typeface="Calibri"/>
+                <a:ea typeface="Calibri"/>
+                <a:cs typeface="Calibri"/>
+              </a:defRPr>
+            </a:pPr>
+            <a:r>
+              <a:rPr sz="4800" b="1">
+                <a:solidFill>
+                  <a:srgbClr val="051C2A"/>
+                </a:solidFill>
+                <a:latin typeface="Calibri"/>
+                <a:ea typeface="Calibri"/>
+                <a:cs typeface="Calibri"/>
+              </a:rPr>
+              <a:t>Quick quiz</a:t>
+            </a:r>
+          </a:p>
+        </p:txBody>
+      </p:sp>
+      <p:sp>
+        <p:nvSpPr>
+          <p:cNvPr id="4" name="">
+            <a:extLst xmlns:a="http://schemas.openxmlformats.org/drawingml/2006/main">
+              <a:ext uri="{FF2B5EF4-FFF2-40B4-BE49-F238E27FC236}">
+                <a16:creationId xmlns:a16="http://schemas.microsoft.com/office/drawing/2014/main" id="{601F96F8-8EA3-4B69-A3AF-EBD5CBCD09C1}"/>
+              </a:ext>
+            </a:extLst>
+          </p:cNvPr>
+          <p:cNvSpPr>
+            <a:spLocks xmlns:a="http://schemas.openxmlformats.org/drawingml/2006/main" noGrp="1"/>
+          </p:cNvSpPr>
+          <p:nvPr/>
+        </p:nvSpPr>
+        <p:spPr>
+          <a:xfrm xmlns:a="http://schemas.openxmlformats.org/drawingml/2006/main">
+            <a:off x="971550" y="3562350"/>
+            <a:ext cx="11239500" cy="514350"/>
+          </a:xfrm>
+          <a:prstGeom xmlns:a="http://schemas.openxmlformats.org/drawingml/2006/main" prst="rect">
+            <a:avLst/>
+          </a:prstGeom>
+          <a:noFill xmlns:a="http://schemas.openxmlformats.org/drawingml/2006/main"/>
+          <a:ln xmlns:a="http://schemas.openxmlformats.org/drawingml/2006/main" w="0">
+            <a:noFill/>
+            <a:prstDash val="solid"/>
+          </a:ln>
+        </p:spPr>
+        <p:txBody>
+          <a:bodyPr xmlns:a="http://schemas.openxmlformats.org/drawingml/2006/main" wrap="square" lIns="0" tIns="0" rIns="0" bIns="0" anchor="ctr">
+            <a:normAutofit fontScale="100000"/>
+          </a:bodyPr>
+          <a:lstStyle xmlns:a="http://schemas.openxmlformats.org/drawingml/2006/main"/>
+          <a:p xmlns:a="http://schemas.openxmlformats.org/drawingml/2006/main">
+            <a:pPr algn="l">
+              <a:lnSpc>
+                <a:spcPct val="100000"/>
+              </a:lnSpc>
+              <a:buNone/>
+              <a:defRPr sz="2400" b="0">
+                <a:solidFill>
+                  <a:srgbClr val="3F3F42"/>
+                </a:solidFill>
+                <a:latin typeface="Calibri"/>
+                <a:ea typeface="Calibri"/>
+                <a:cs typeface="Calibri"/>
+              </a:defRPr>
+            </a:pPr>
+            <a:r>
+              <a:rPr sz="2400" b="0">
+                <a:solidFill>
+                  <a:srgbClr val="3F3F42"/>
+                </a:solidFill>
+                <a:latin typeface="Calibri"/>
+                <a:ea typeface="Calibri"/>
+                <a:cs typeface="Calibri"/>
+              </a:rPr>
+              <a:t>Choose one answer for each question.</a:t>
+            </a:r>
+          </a:p>
+        </p:txBody>
+      </p:sp>
+      <p:sp>
+        <p:nvSpPr>
+          <p:cNvPr id="5" name="">
+            <a:extLst xmlns:a="http://schemas.openxmlformats.org/drawingml/2006/main">
+              <a:ext uri="{FF2B5EF4-FFF2-40B4-BE49-F238E27FC236}">
+                <a16:creationId xmlns:a16="http://schemas.microsoft.com/office/drawing/2014/main" id="{D4A6E89B-2708-4600-B820-727EF660DE6B}"/>
+              </a:ext>
+            </a:extLst>
+          </p:cNvPr>
+          <p:cNvSpPr>
+            <a:spLocks xmlns:a="http://schemas.openxmlformats.org/drawingml/2006/main" noGrp="1"/>
+          </p:cNvSpPr>
+          <p:nvPr/>
+        </p:nvSpPr>
+        <p:spPr>
+          <a:xfrm xmlns:a="http://schemas.openxmlformats.org/drawingml/2006/main">
+            <a:off x="971550" y="6477000"/>
+            <a:ext cx="9525000" cy="400050"/>
+          </a:xfrm>
+          <a:prstGeom xmlns:a="http://schemas.openxmlformats.org/drawingml/2006/main" prst="rect">
+            <a:avLst/>
+          </a:prstGeom>
+          <a:noFill xmlns:a="http://schemas.openxmlformats.org/drawingml/2006/main"/>
+          <a:ln xmlns:a="http://schemas.openxmlformats.org/drawingml/2006/main" w="0">
+            <a:noFill/>
+            <a:prstDash val="solid"/>
+          </a:ln>
+        </p:spPr>
+        <p:txBody>
+          <a:bodyPr xmlns:a="http://schemas.openxmlformats.org/drawingml/2006/main" wrap="square" lIns="0" tIns="0" rIns="0" bIns="0" anchor="ctr">
+            <a:normAutofit fontScale="100000"/>
+          </a:bodyPr>
+          <a:lstStyle xmlns:a="http://schemas.openxmlformats.org/drawingml/2006/main"/>
+          <a:p xmlns:a="http://schemas.openxmlformats.org/drawingml/2006/main">
+            <a:pPr algn="l">
+              <a:lnSpc>
+                <a:spcPct val="100000"/>
+              </a:lnSpc>
+              <a:buNone/>
+              <a:defRPr sz="1350" b="1">
+                <a:solidFill>
+                  <a:srgbClr val="1F40CB"/>
+                </a:solidFill>
+                <a:latin typeface="Calibri"/>
+                <a:ea typeface="Calibri"/>
+                <a:cs typeface="Calibri"/>
+              </a:defRPr>
+            </a:pPr>
+            <a:r>
+              <a:rPr sz="1350" b="1">
+                <a:solidFill>
+                  <a:srgbClr val="1F40CB"/>
+                </a:solidFill>
+                <a:latin typeface="Calibri"/>
+                <a:ea typeface="Calibri"/>
+                <a:cs typeface="Calibri"/>
+              </a:rPr>
+              <a:t>LESSON 05  ·  3 QUESTIONS  ·  3 MINUTES</a:t>
+            </a:r>
+          </a:p>
+        </p:txBody>
+      </p:sp>
+      <p:sp>
+        <p:nvSpPr>
+          <p:cNvPr id="6" name="">
+            <a:extLst xmlns:a="http://schemas.openxmlformats.org/drawingml/2006/main">
+              <a:ext uri="{FF2B5EF4-FFF2-40B4-BE49-F238E27FC236}">
+                <a16:creationId xmlns:a16="http://schemas.microsoft.com/office/drawing/2014/main" id="{053831D6-7D46-4F1A-929F-D2CAD97F1627}"/>
+              </a:ext>
+            </a:extLst>
+          </p:cNvPr>
+          <p:cNvSpPr>
+            <a:spLocks xmlns:a="http://schemas.openxmlformats.org/drawingml/2006/main" noGrp="1"/>
+          </p:cNvSpPr>
+          <p:nvPr/>
+        </p:nvSpPr>
+        <p:spPr>
+          <a:xfrm xmlns:a="http://schemas.openxmlformats.org/drawingml/2006/main">
+            <a:off x="971550" y="7067550"/>
+            <a:ext cx="4762500" cy="381000"/>
+          </a:xfrm>
+          <a:prstGeom xmlns:a="http://schemas.openxmlformats.org/drawingml/2006/main" prst="rect">
+            <a:avLst/>
+          </a:prstGeom>
+          <a:noFill xmlns:a="http://schemas.openxmlformats.org/drawingml/2006/main"/>
+          <a:ln xmlns:a="http://schemas.openxmlformats.org/drawingml/2006/main" w="0">
+            <a:noFill/>
+            <a:prstDash val="solid"/>
+          </a:ln>
+        </p:spPr>
+        <p:txBody>
+          <a:bodyPr xmlns:a="http://schemas.openxmlformats.org/drawingml/2006/main" wrap="square" lIns="0" tIns="0" rIns="0" bIns="0" anchor="ctr">
+            <a:normAutofit fontScale="100000"/>
+          </a:bodyPr>
+          <a:lstStyle xmlns:a="http://schemas.openxmlformats.org/drawingml/2006/main"/>
+          <a:p xmlns:a="http://schemas.openxmlformats.org/drawingml/2006/main">
+            <a:pPr algn="l">
+              <a:lnSpc>
+                <a:spcPct val="100000"/>
+              </a:lnSpc>
+              <a:buNone/>
+              <a:defRPr sz="1725" b="0">
+                <a:solidFill>
+                  <a:srgbClr val="051C2A"/>
+                </a:solidFill>
+                <a:latin typeface="Calibri"/>
+                <a:ea typeface="Calibri"/>
+                <a:cs typeface="Calibri"/>
+              </a:defRPr>
+            </a:pPr>
+            <a:r>
+              <a:rPr sz="1725" b="0">
+                <a:solidFill>
+                  <a:srgbClr val="051C2A"/>
+                </a:solidFill>
+                <a:latin typeface="Calibri"/>
+                <a:ea typeface="Calibri"/>
+                <a:cs typeface="Calibri"/>
+              </a:rPr>
+              <a:t>First Finance - Arnaud Demes</a:t>
+            </a:r>
+          </a:p>
+        </p:txBody>
+      </p:sp>
+      <p:sp>
+        <p:nvSpPr>
+          <p:cNvPr id="8" name="quiz-question-1">
+            <a:extLst xmlns:a="http://schemas.openxmlformats.org/drawingml/2006/main">
+              <a:ext uri="{FF2B5EF4-FFF2-40B4-BE49-F238E27FC236}">
+                <a16:creationId xmlns:a16="http://schemas.microsoft.com/office/drawing/2014/main" id="{CCF312FD-5D18-44FB-9239-E2804709D1A1}"/>
+              </a:ext>
+            </a:extLst>
+          </p:cNvPr>
+          <p:cNvSpPr>
+            <a:spLocks xmlns:a="http://schemas.openxmlformats.org/drawingml/2006/main" noGrp="1"/>
+          </p:cNvSpPr>
+          <p:nvPr/>
+        </p:nvSpPr>
+        <p:spPr>
+          <a:xfrm xmlns:a="http://schemas.openxmlformats.org/drawingml/2006/main">
+            <a:off x="971550" y="4400550"/>
+            <a:ext cx="13296900" cy="285750"/>
+          </a:xfrm>
+          <a:prstGeom xmlns:a="http://schemas.openxmlformats.org/drawingml/2006/main" prst="rect">
+            <a:avLst/>
+          </a:prstGeom>
+          <a:noFill xmlns:a="http://schemas.openxmlformats.org/drawingml/2006/main"/>
+          <a:ln xmlns:a="http://schemas.openxmlformats.org/drawingml/2006/main" w="0">
+            <a:noFill/>
+            <a:prstDash val="solid"/>
+          </a:ln>
+        </p:spPr>
+        <p:txBody>
+          <a:bodyPr xmlns:a="http://schemas.openxmlformats.org/drawingml/2006/main"/>
+          <a:lstStyle xmlns:a="http://schemas.openxmlformats.org/drawingml/2006/main"/>
+          <a:p xmlns:a="http://schemas.openxmlformats.org/drawingml/2006/main">
+            <a:pPr>
+              <a:defRPr sz="1500" b="1">
+                <a:solidFill>
+                  <a:srgbClr val="001B2E"/>
+                </a:solidFill>
+              </a:defRPr>
+            </a:pPr>
+            <a:r>
+              <a:rPr sz="1500" b="1">
+                <a:solidFill>
+                  <a:srgbClr val="001B2E"/>
+                </a:solidFill>
+              </a:rPr>
+              <a:t>1. What should be checked before choosing chunks?</a:t>
+            </a:r>
+          </a:p>
+        </p:txBody>
+      </p:sp>
+      <p:sp>
+        <p:nvSpPr>
+          <p:cNvPr id="9" name="quiz-options-1">
+            <a:extLst xmlns:a="http://schemas.openxmlformats.org/drawingml/2006/main">
+              <a:ext uri="{FF2B5EF4-FFF2-40B4-BE49-F238E27FC236}">
+                <a16:creationId xmlns:a16="http://schemas.microsoft.com/office/drawing/2014/main" id="{91C20658-E792-40FF-9A7B-FCC6BB31FC4A}"/>
+              </a:ext>
+            </a:extLst>
+          </p:cNvPr>
+          <p:cNvSpPr>
+            <a:spLocks xmlns:a="http://schemas.openxmlformats.org/drawingml/2006/main" noGrp="1"/>
+          </p:cNvSpPr>
+          <p:nvPr/>
+        </p:nvSpPr>
+        <p:spPr>
+          <a:xfrm xmlns:a="http://schemas.openxmlformats.org/drawingml/2006/main">
+            <a:off x="1257300" y="4705350"/>
+            <a:ext cx="13011150" cy="247650"/>
+          </a:xfrm>
+          <a:prstGeom xmlns:a="http://schemas.openxmlformats.org/drawingml/2006/main" prst="rect">
+            <a:avLst/>
+          </a:prstGeom>
+          <a:noFill xmlns:a="http://schemas.openxmlformats.org/drawingml/2006/main"/>
+          <a:ln xmlns:a="http://schemas.openxmlformats.org/drawingml/2006/main" w="0">
+            <a:noFill/>
+            <a:prstDash val="solid"/>
+          </a:ln>
+        </p:spPr>
+        <p:txBody>
+          <a:bodyPr xmlns:a="http://schemas.openxmlformats.org/drawingml/2006/main"/>
+          <a:lstStyle xmlns:a="http://schemas.openxmlformats.org/drawingml/2006/main"/>
+          <a:p xmlns:a="http://schemas.openxmlformats.org/drawingml/2006/main">
+            <a:pPr>
+              <a:defRPr sz="1200" b="0">
+                <a:solidFill>
+                  <a:srgbClr val="334155"/>
+                </a:solidFill>
+              </a:defRPr>
+            </a:pPr>
+            <a:r>
+              <a:rPr sz="1200" b="0">
+                <a:solidFill>
+                  <a:srgbClr val="334155"/>
+                </a:solidFill>
+              </a:rPr>
+              <a:t>A  Extraction quality     |     B  Agent retries     |     C  Model price</a:t>
+            </a:r>
+          </a:p>
+        </p:txBody>
+      </p:sp>
+      <p:sp>
+        <p:nvSpPr>
+          <p:cNvPr id="10" name="quiz-question-2">
+            <a:extLst xmlns:a="http://schemas.openxmlformats.org/drawingml/2006/main">
+              <a:ext uri="{FF2B5EF4-FFF2-40B4-BE49-F238E27FC236}">
+                <a16:creationId xmlns:a16="http://schemas.microsoft.com/office/drawing/2014/main" id="{0E005EFD-4F28-450F-B187-742C4EB14DF5}"/>
+              </a:ext>
+            </a:extLst>
+          </p:cNvPr>
+          <p:cNvSpPr>
+            <a:spLocks xmlns:a="http://schemas.openxmlformats.org/drawingml/2006/main" noGrp="1"/>
+          </p:cNvSpPr>
+          <p:nvPr/>
+        </p:nvSpPr>
+        <p:spPr>
+          <a:xfrm xmlns:a="http://schemas.openxmlformats.org/drawingml/2006/main">
+            <a:off x="971550" y="5086350"/>
+            <a:ext cx="13296900" cy="285750"/>
+          </a:xfrm>
+          <a:prstGeom xmlns:a="http://schemas.openxmlformats.org/drawingml/2006/main" prst="rect">
+            <a:avLst/>
+          </a:prstGeom>
+          <a:noFill xmlns:a="http://schemas.openxmlformats.org/drawingml/2006/main"/>
+          <a:ln xmlns:a="http://schemas.openxmlformats.org/drawingml/2006/main" w="0">
+            <a:noFill/>
+            <a:prstDash val="solid"/>
+          </a:ln>
+        </p:spPr>
+        <p:txBody>
+          <a:bodyPr xmlns:a="http://schemas.openxmlformats.org/drawingml/2006/main"/>
+          <a:lstStyle xmlns:a="http://schemas.openxmlformats.org/drawingml/2006/main"/>
+          <a:p xmlns:a="http://schemas.openxmlformats.org/drawingml/2006/main">
+            <a:pPr>
+              <a:defRPr sz="1500" b="1">
+                <a:solidFill>
+                  <a:srgbClr val="001B2E"/>
+                </a:solidFill>
+              </a:defRPr>
+            </a:pPr>
+            <a:r>
+              <a:rPr sz="1500" b="1">
+                <a:solidFill>
+                  <a:srgbClr val="001B2E"/>
+                </a:solidFill>
+              </a:rPr>
+              <a:t>2. What must survive every document transformation?</a:t>
+            </a:r>
+          </a:p>
+        </p:txBody>
+      </p:sp>
+      <p:sp>
+        <p:nvSpPr>
+          <p:cNvPr id="11" name="quiz-options-2">
+            <a:extLst xmlns:a="http://schemas.openxmlformats.org/drawingml/2006/main">
+              <a:ext uri="{FF2B5EF4-FFF2-40B4-BE49-F238E27FC236}">
+                <a16:creationId xmlns:a16="http://schemas.microsoft.com/office/drawing/2014/main" id="{D38B3ADE-4F6A-422E-A583-4D1F01F6BBEA}"/>
+              </a:ext>
+            </a:extLst>
+          </p:cNvPr>
+          <p:cNvSpPr>
+            <a:spLocks xmlns:a="http://schemas.openxmlformats.org/drawingml/2006/main" noGrp="1"/>
+          </p:cNvSpPr>
+          <p:nvPr/>
+        </p:nvSpPr>
+        <p:spPr>
+          <a:xfrm xmlns:a="http://schemas.openxmlformats.org/drawingml/2006/main">
+            <a:off x="1257300" y="5391150"/>
+            <a:ext cx="13011150" cy="247650"/>
+          </a:xfrm>
+          <a:prstGeom xmlns:a="http://schemas.openxmlformats.org/drawingml/2006/main" prst="rect">
+            <a:avLst/>
+          </a:prstGeom>
+          <a:noFill xmlns:a="http://schemas.openxmlformats.org/drawingml/2006/main"/>
+          <a:ln xmlns:a="http://schemas.openxmlformats.org/drawingml/2006/main" w="0">
+            <a:noFill/>
+            <a:prstDash val="solid"/>
+          </a:ln>
+        </p:spPr>
+        <p:txBody>
+          <a:bodyPr xmlns:a="http://schemas.openxmlformats.org/drawingml/2006/main"/>
+          <a:lstStyle xmlns:a="http://schemas.openxmlformats.org/drawingml/2006/main"/>
+          <a:p xmlns:a="http://schemas.openxmlformats.org/drawingml/2006/main">
+            <a:pPr>
+              <a:defRPr sz="1200" b="0">
+                <a:solidFill>
+                  <a:srgbClr val="334155"/>
+                </a:solidFill>
+              </a:defRPr>
+            </a:pPr>
+            <a:r>
+              <a:rPr sz="1200" b="0">
+                <a:solidFill>
+                  <a:srgbClr val="334155"/>
+                </a:solidFill>
+              </a:rPr>
+              <a:t>A  Provenance     |     B  Font colour     |     C  Chat history</a:t>
+            </a:r>
+          </a:p>
+        </p:txBody>
+      </p:sp>
+      <p:sp>
+        <p:nvSpPr>
+          <p:cNvPr id="12" name="quiz-question-3">
+            <a:extLst xmlns:a="http://schemas.openxmlformats.org/drawingml/2006/main">
+              <a:ext uri="{FF2B5EF4-FFF2-40B4-BE49-F238E27FC236}">
+                <a16:creationId xmlns:a16="http://schemas.microsoft.com/office/drawing/2014/main" id="{C164F298-52DA-4C17-9E6C-5BE6F4198761}"/>
+              </a:ext>
+            </a:extLst>
+          </p:cNvPr>
+          <p:cNvSpPr>
+            <a:spLocks xmlns:a="http://schemas.openxmlformats.org/drawingml/2006/main" noGrp="1"/>
+          </p:cNvSpPr>
+          <p:nvPr/>
+        </p:nvSpPr>
+        <p:spPr>
+          <a:xfrm xmlns:a="http://schemas.openxmlformats.org/drawingml/2006/main">
+            <a:off x="971550" y="5772150"/>
+            <a:ext cx="13296900" cy="285750"/>
+          </a:xfrm>
+          <a:prstGeom xmlns:a="http://schemas.openxmlformats.org/drawingml/2006/main" prst="rect">
+            <a:avLst/>
+          </a:prstGeom>
+          <a:noFill xmlns:a="http://schemas.openxmlformats.org/drawingml/2006/main"/>
+          <a:ln xmlns:a="http://schemas.openxmlformats.org/drawingml/2006/main" w="0">
+            <a:noFill/>
+            <a:prstDash val="solid"/>
+          </a:ln>
+        </p:spPr>
+        <p:txBody>
+          <a:bodyPr xmlns:a="http://schemas.openxmlformats.org/drawingml/2006/main"/>
+          <a:lstStyle xmlns:a="http://schemas.openxmlformats.org/drawingml/2006/main"/>
+          <a:p xmlns:a="http://schemas.openxmlformats.org/drawingml/2006/main">
+            <a:pPr>
+              <a:defRPr sz="1500" b="1">
+                <a:solidFill>
+                  <a:srgbClr val="001B2E"/>
+                </a:solidFill>
+              </a:defRPr>
+            </a:pPr>
+            <a:r>
+              <a:rPr sz="1500" b="1">
+                <a:solidFill>
+                  <a:srgbClr val="001B2E"/>
+                </a:solidFill>
+              </a:rPr>
+              <a:t>3. What do hierarchical chunks separate?</a:t>
+            </a:r>
+          </a:p>
+        </p:txBody>
+      </p:sp>
+      <p:sp>
+        <p:nvSpPr>
+          <p:cNvPr id="13" name="quiz-options-3">
+            <a:extLst xmlns:a="http://schemas.openxmlformats.org/drawingml/2006/main">
+              <a:ext uri="{FF2B5EF4-FFF2-40B4-BE49-F238E27FC236}">
+                <a16:creationId xmlns:a16="http://schemas.microsoft.com/office/drawing/2014/main" id="{DF1DAFEC-C8CC-4C9F-967F-28860A39269F}"/>
+              </a:ext>
+            </a:extLst>
+          </p:cNvPr>
+          <p:cNvSpPr>
+            <a:spLocks xmlns:a="http://schemas.openxmlformats.org/drawingml/2006/main" noGrp="1"/>
+          </p:cNvSpPr>
+          <p:nvPr/>
+        </p:nvSpPr>
+        <p:spPr>
+          <a:xfrm xmlns:a="http://schemas.openxmlformats.org/drawingml/2006/main">
+            <a:off x="1257300" y="6076950"/>
+            <a:ext cx="13011150" cy="247650"/>
+          </a:xfrm>
+          <a:prstGeom xmlns:a="http://schemas.openxmlformats.org/drawingml/2006/main" prst="rect">
+            <a:avLst/>
+          </a:prstGeom>
+          <a:noFill xmlns:a="http://schemas.openxmlformats.org/drawingml/2006/main"/>
+          <a:ln xmlns:a="http://schemas.openxmlformats.org/drawingml/2006/main" w="0">
+            <a:noFill/>
+            <a:prstDash val="solid"/>
+          </a:ln>
+        </p:spPr>
+        <p:txBody>
+          <a:bodyPr xmlns:a="http://schemas.openxmlformats.org/drawingml/2006/main"/>
+          <a:lstStyle xmlns:a="http://schemas.openxmlformats.org/drawingml/2006/main"/>
+          <a:p xmlns:a="http://schemas.openxmlformats.org/drawingml/2006/main">
+            <a:pPr>
+              <a:defRPr sz="1200" b="0">
+                <a:solidFill>
+                  <a:srgbClr val="334155"/>
+                </a:solidFill>
+              </a:defRPr>
+            </a:pPr>
+            <a:r>
+              <a:rPr sz="1200" b="0">
+                <a:solidFill>
+                  <a:srgbClr val="334155"/>
+                </a:solidFill>
+              </a:rPr>
+              <a:t>A  Retrieval and reading context     |     B  Users and roles     |     C  Models and APIs</a:t>
+            </a:r>
+          </a:p>
+        </p:txBody>
+      </p:sp>
+    </p:spTree>
+    <p:extLst>
+      <p:ext uri="{BB962C8B-B14F-4D97-AF65-F5344CB8AC3E}">
+        <p14:creationId xmlns:p14="http://schemas.microsoft.com/office/powerpoint/2010/main" val="1316229138"/>
       </p:ext>
     </p:extLst>
   </p:cSld>

--- a/decks/05-document-and-chunking-lab.pptx
+++ b/decks/05-document-and-chunking-lab.pptx
@@ -2,22 +2,22 @@
 <file path=ppt/presentation.xml><?xml version="1.0" encoding="utf-8"?>
 <p:presentation xmlns:p="http://schemas.openxmlformats.org/presentationml/2006/main">
   <p:sldMasterIdLst>
-    <p:sldMasterId xmlns:r="http://schemas.openxmlformats.org/officeDocument/2006/relationships" id="2147483648" r:id="Rd5df414d6cd94959"/>
+    <p:sldMasterId xmlns:r="http://schemas.openxmlformats.org/officeDocument/2006/relationships" id="2147483648" r:id="R50cbbad6929948f2"/>
   </p:sldMasterIdLst>
   <p:notesMasterIdLst>
-    <p:notesMasterId xmlns:r="http://schemas.openxmlformats.org/officeDocument/2006/relationships" r:id="Re5c21e1998f94f17"/>
+    <p:notesMasterId xmlns:r="http://schemas.openxmlformats.org/officeDocument/2006/relationships" r:id="R8924fa58b7c24f24"/>
   </p:notesMasterIdLst>
   <p:sldIdLst>
-    <p:sldId xmlns:r="http://schemas.openxmlformats.org/officeDocument/2006/relationships" id="256" r:id="R6f8288c3715744ec"/>
-    <p:sldId xmlns:r="http://schemas.openxmlformats.org/officeDocument/2006/relationships" id="257" r:id="R92fa83841cb54286"/>
-    <p:sldId xmlns:r="http://schemas.openxmlformats.org/officeDocument/2006/relationships" id="258" r:id="Rcb380a960478469f"/>
-    <p:sldId xmlns:r="http://schemas.openxmlformats.org/officeDocument/2006/relationships" id="259" r:id="Rf5557cb082484401"/>
-    <p:sldId xmlns:r="http://schemas.openxmlformats.org/officeDocument/2006/relationships" id="260" r:id="R0d78293708484ef7"/>
-    <p:sldId xmlns:r="http://schemas.openxmlformats.org/officeDocument/2006/relationships" id="261" r:id="R64b5fbbed1f94184"/>
-    <p:sldId xmlns:r="http://schemas.openxmlformats.org/officeDocument/2006/relationships" id="262" r:id="Rc367652ed26d42e8"/>
-    <p:sldId xmlns:r="http://schemas.openxmlformats.org/officeDocument/2006/relationships" id="263" r:id="Rd03abfd28ab94cc5"/>
-    <p:sldId xmlns:r="http://schemas.openxmlformats.org/officeDocument/2006/relationships" id="264" r:id="R4371685353c84940"/>
-    <p:sldId xmlns:r="http://schemas.openxmlformats.org/officeDocument/2006/relationships" id="265" r:id="Raa296bcd3abf4963"/>
+    <p:sldId xmlns:r="http://schemas.openxmlformats.org/officeDocument/2006/relationships" id="256" r:id="Rd305875f89f34583"/>
+    <p:sldId xmlns:r="http://schemas.openxmlformats.org/officeDocument/2006/relationships" id="257" r:id="R7b467bf831674bc9"/>
+    <p:sldId xmlns:r="http://schemas.openxmlformats.org/officeDocument/2006/relationships" id="258" r:id="R34c11be655fe4aae"/>
+    <p:sldId xmlns:r="http://schemas.openxmlformats.org/officeDocument/2006/relationships" id="259" r:id="R74ea21b8bceb4d9c"/>
+    <p:sldId xmlns:r="http://schemas.openxmlformats.org/officeDocument/2006/relationships" id="260" r:id="R62fc7705625247ff"/>
+    <p:sldId xmlns:r="http://schemas.openxmlformats.org/officeDocument/2006/relationships" id="261" r:id="R6aef0c7c67004e30"/>
+    <p:sldId xmlns:r="http://schemas.openxmlformats.org/officeDocument/2006/relationships" id="262" r:id="R86096fac6f824221"/>
+    <p:sldId xmlns:r="http://schemas.openxmlformats.org/officeDocument/2006/relationships" id="263" r:id="Re155b4e23b884325"/>
+    <p:sldId xmlns:r="http://schemas.openxmlformats.org/officeDocument/2006/relationships" id="264" r:id="R543d218000d243bd"/>
+    <p:sldId xmlns:r="http://schemas.openxmlformats.org/officeDocument/2006/relationships" id="265" r:id="R8f9ec9676bfd4323"/>
   </p:sldIdLst>
   <p:sldSz cx="15240000" cy="8572500"/>
   <p:notesSz cx="6858000" cy="9144000"/>
@@ -641,17 +641,12 @@
           <a:lstStyle xmlns:a="http://schemas.openxmlformats.org/drawingml/2006/main"/>
           <a:p xmlns:a="http://schemas.openxmlformats.org/drawingml/2006/main">
             <a:r>
-              <a:t>Use the table to show that EUR 40.2bn depends on row and column context.</a:t>
-            </a:r>
-          </a:p>
-          <a:p xmlns:a="http://schemas.openxmlformats.org/drawingml/2006/main">
-            <a:r>
-              <a:t>The compact Schneider fixture is machine-generated and parsed with pdfplumber.</a:t>
-            </a:r>
-          </a:p>
-          <a:p xmlns:a="http://schemas.openxmlformats.org/drawingml/2006/main">
-            <a:r>
-              <a:t/>
+              <a:t>Use the real Schneider Electric FY2025 table to show that visual clarity is not the same as machine-readable structure.</a:t>
+            </a:r>
+          </a:p>
+          <a:p xmlns:a="http://schemas.openxmlformats.org/drawingml/2006/main">
+            <a:r>
+              <a:t>The default pdfplumber detector identifies geometry, but the returned 9 × 15 matrix contains blank separator cells and ambiguous headers. The learning objective is to validate the schema before trusting extracted numbers.</a:t>
             </a:r>
           </a:p>
           <a:p xmlns:a="http://schemas.openxmlformats.org/drawingml/2006/main">
@@ -661,12 +656,12 @@
           </a:p>
           <a:p xmlns:a="http://schemas.openxmlformats.org/drawingml/2006/main">
             <a:r>
-              <a:t>- https://www.se.com/ww/en/assets/564/document/528237/release-fy-results-2025.pdf</a:t>
-            </a:r>
-          </a:p>
-          <a:p xmlns:a="http://schemas.openxmlformats.org/drawingml/2006/main">
-            <a:r>
-              <a:t>- https://github.com/jsvine/pdfplumber</a:t>
+              <a:t>- https://www.se.com/ww/en/assets/564/document/528237/release-fy-results-2025.pdf (official Schneider Electric FY2025 results; table image on slide)</a:t>
+            </a:r>
+          </a:p>
+          <a:p xmlns:a="http://schemas.openxmlformats.org/drawingml/2006/main">
+            <a:r>
+              <a:t>- https://github.com/jsvine/pdfplumber (official pdfplumber documentation; extraction behavior described on slide)</a:t>
             </a:r>
           </a:p>
           <a:p xmlns:a="http://schemas.openxmlformats.org/drawingml/2006/main">
@@ -741,12 +736,12 @@
           <a:lstStyle xmlns:a="http://schemas.openxmlformats.org/drawingml/2006/main"/>
           <a:p xmlns:a="http://schemas.openxmlformats.org/drawingml/2006/main">
             <a:r>
-              <a:t>Use the five stages as a parser-quality ladder: source bytes, text extraction, layout recovery, canonical blocks, then a quality gate. Chunking starts only after the evidence unit is trustworthy.</a:t>
-            </a:r>
-          </a:p>
-          <a:p xmlns:a="http://schemas.openxmlformats.org/drawingml/2006/main">
-            <a:r>
-              <a:t/>
+              <a:t>The red and blue overlay is generated by pdfplumber's tablefinder debug view on the same official Schneider Electric table used on slide 2.</a:t>
+            </a:r>
+          </a:p>
+          <a:p xmlns:a="http://schemas.openxmlformats.org/drawingml/2006/main">
+            <a:r>
+              <a:t>Teach the baseline first: inspect geometry, validate headers/row widths/units, and only then create a DocumentBlock. If the quality gate fails, tune pdfplumber settings or escalate to an optional heavier parser such as Docling, OCR, or a vision-language model.</a:t>
             </a:r>
           </a:p>
           <a:p xmlns:a="http://schemas.openxmlformats.org/drawingml/2006/main">
@@ -756,12 +751,12 @@
           </a:p>
           <a:p xmlns:a="http://schemas.openxmlformats.org/drawingml/2006/main">
             <a:r>
-              <a:t>- https://github.com/jsvine/pdfplumber</a:t>
-            </a:r>
-          </a:p>
-          <a:p xmlns:a="http://schemas.openxmlformats.org/drawingml/2006/main">
-            <a:r>
-              <a:t>- https://www.crummy.com/software/BeautifulSoup/bs4/doc/</a:t>
+              <a:t>- https://github.com/jsvine/pdfplumber (official pdfplumber documentation; tablefinder debug overlay)</a:t>
+            </a:r>
+          </a:p>
+          <a:p xmlns:a="http://schemas.openxmlformats.org/drawingml/2006/main">
+            <a:r>
+              <a:t>- https://github.com/docling-project/docling/blob/main/docs/getting_started/installation.md (official Docling installation guide; optional escalation path)</a:t>
             </a:r>
           </a:p>
           <a:p xmlns:a="http://schemas.openxmlformats.org/drawingml/2006/main">
@@ -836,17 +831,12 @@
           <a:lstStyle xmlns:a="http://schemas.openxmlformats.org/drawingml/2006/main"/>
           <a:p xmlns:a="http://schemas.openxmlformats.org/drawingml/2006/main">
             <a:r>
-              <a:t>Walk around the block from source identity to structure and content.</a:t>
-            </a:r>
-          </a:p>
-          <a:p xmlns:a="http://schemas.openxmlformats.org/drawingml/2006/main">
-            <a:r>
-              <a:t>Page and section metadata are created during parsing, not after retrieval.</a:t>
-            </a:r>
-          </a:p>
-          <a:p xmlns:a="http://schemas.openxmlformats.org/drawingml/2006/main">
-            <a:r>
-              <a:t/>
+              <a:t>This is the executed Figure 3 from the Lesson 05 notebook. The left side shows the linear text returned from the PDF teaching extract; the right side shows the normalized table block with row/column relationships and provenance.</a:t>
+            </a:r>
+          </a:p>
+          <a:p xmlns:a="http://schemas.openxmlformats.org/drawingml/2006/main">
+            <a:r>
+              <a:t>Ask learners to identify what becomes machine-checkable on the right: headers, rows, units, page, source ID and block ID.</a:t>
             </a:r>
           </a:p>
           <a:p xmlns:a="http://schemas.openxmlformats.org/drawingml/2006/main">
@@ -856,7 +846,12 @@
           </a:p>
           <a:p xmlns:a="http://schemas.openxmlformats.org/drawingml/2006/main">
             <a:r>
-              <a:t>- https://www.se.com/ww/en/assets/564/document/528237/release-fy-results-2025.pdf</a:t>
+              <a:t>- notebooks/05_document_and_chunking_lab.ipynb (executed offline Figure 3)</a:t>
+            </a:r>
+          </a:p>
+          <a:p xmlns:a="http://schemas.openxmlformats.org/drawingml/2006/main">
+            <a:r>
+              <a:t>- https://www.se.com/ww/en/assets/564/document/528237/release-fy-results-2025.pdf (official Schneider Electric FY2025 results underlying the teaching extract)</a:t>
             </a:r>
           </a:p>
           <a:p xmlns:a="http://schemas.openxmlformats.org/drawingml/2006/main">
@@ -931,22 +926,12 @@
           <a:lstStyle xmlns:a="http://schemas.openxmlformats.org/drawingml/2006/main"/>
           <a:p xmlns:a="http://schemas.openxmlformats.org/drawingml/2006/main">
             <a:r>
-              <a:t>Ask learners to predict which fixed window separates the final Gaming cells.</a:t>
-            </a:r>
-          </a:p>
-          <a:p xmlns:a="http://schemas.openxmlformats.org/drawingml/2006/main">
-            <a:r>
-              <a:t>Recursive splitting improves natural text boundaries but does not inherently understand tables.</a:t>
-            </a:r>
-          </a:p>
-          <a:p xmlns:a="http://schemas.openxmlformats.org/drawingml/2006/main">
-            <a:r>
-              <a:t>Structure-aware chunking keeps parsed tables atomic.</a:t>
-            </a:r>
-          </a:p>
-          <a:p xmlns:a="http://schemas.openxmlformats.org/drawingml/2006/main">
-            <a:r>
-              <a:t/>
+              <a:t>This is the executed Figure 11 from the Lesson 05 notebook. The fixed 90-character window cuts the word Gaming and separates the final cells; the structure-aware strategy keeps the complete table atomic.</a:t>
+            </a:r>
+          </a:p>
+          <a:p xmlns:a="http://schemas.openxmlformats.org/drawingml/2006/main">
+            <a:r>
+              <a:t>The point is diagnostic: retrieval can still find USD 16.0 billion, but the selected fragment no longer proves that the value belongs to Gaming or that 41% is its year-on-year growth.</a:t>
             </a:r>
           </a:p>
           <a:p xmlns:a="http://schemas.openxmlformats.org/drawingml/2006/main">
@@ -956,7 +941,12 @@
           </a:p>
           <a:p xmlns:a="http://schemas.openxmlformats.org/drawingml/2006/main">
             <a:r>
-              <a:t>- https://www.sec.gov/Archives/edgar/data/1045810/000104581026000021/nvda-20260125.htm</a:t>
+              <a:t>- notebooks/05_document_and_chunking_lab.ipynb (executed offline Figure 11)</a:t>
+            </a:r>
+          </a:p>
+          <a:p xmlns:a="http://schemas.openxmlformats.org/drawingml/2006/main">
+            <a:r>
+              <a:t>- https://www.sec.gov/Archives/edgar/data/1045810/000104581026000029/nvda-20260125.htm (official NVIDIA fiscal 2026 Form 10-K underlying the teaching extract)</a:t>
             </a:r>
           </a:p>
           <a:p xmlns:a="http://schemas.openxmlformats.org/drawingml/2006/main">
@@ -1419,7 +1409,7 @@
   </p:cSld>
   <p:clrMap bg1="lt1" tx1="dk1" bg2="lt2" tx2="dk2" accent1="accent1" accent2="accent2" accent3="accent3" accent4="accent4" accent5="accent5" accent6="accent6" hlink="hlink" folHlink="folHlink"/>
   <p:sldLayoutIdLst>
-    <p:sldLayoutId xmlns:r="http://schemas.openxmlformats.org/officeDocument/2006/relationships" id="2147483649" r:id="R449ddde6f2404151"/>
+    <p:sldLayoutId xmlns:r="http://schemas.openxmlformats.org/officeDocument/2006/relationships" id="2147483649" r:id="Rdd6281e67fac4171"/>
   </p:sldLayoutIdLst>
   <p:txStyles>
     <p:titleStyle>
@@ -2713,6 +2703,7 @@
           <a:lstStyle xmlns:a="http://schemas.openxmlformats.org/drawingml/2006/main"/>
           <a:p xmlns:a="http://schemas.openxmlformats.org/drawingml/2006/main">
             <a:pPr>
+              <a:buNone/>
               <a:defRPr sz="1500" b="1">
                 <a:solidFill>
                   <a:srgbClr val="1F40CB"/>
@@ -2763,6 +2754,7 @@
           <a:lstStyle xmlns:a="http://schemas.openxmlformats.org/drawingml/2006/main"/>
           <a:p xmlns:a="http://schemas.openxmlformats.org/drawingml/2006/main">
             <a:pPr>
+              <a:buNone/>
               <a:defRPr sz="1200" b="0">
                 <a:solidFill>
                   <a:srgbClr val="334155"/>
@@ -2813,6 +2805,7 @@
           <a:lstStyle xmlns:a="http://schemas.openxmlformats.org/drawingml/2006/main"/>
           <a:p xmlns:a="http://schemas.openxmlformats.org/drawingml/2006/main">
             <a:pPr>
+              <a:buNone/>
               <a:defRPr sz="1500" b="1">
                 <a:solidFill>
                   <a:srgbClr val="1F40CB"/>
@@ -2863,6 +2856,7 @@
           <a:lstStyle xmlns:a="http://schemas.openxmlformats.org/drawingml/2006/main"/>
           <a:p xmlns:a="http://schemas.openxmlformats.org/drawingml/2006/main">
             <a:pPr>
+              <a:buNone/>
               <a:defRPr sz="1200" b="0">
                 <a:solidFill>
                   <a:srgbClr val="334155"/>
@@ -2913,6 +2907,7 @@
           <a:lstStyle xmlns:a="http://schemas.openxmlformats.org/drawingml/2006/main"/>
           <a:p xmlns:a="http://schemas.openxmlformats.org/drawingml/2006/main">
             <a:pPr>
+              <a:buNone/>
               <a:defRPr sz="1500" b="1">
                 <a:solidFill>
                   <a:srgbClr val="1F40CB"/>
@@ -2963,6 +2958,7 @@
           <a:lstStyle xmlns:a="http://schemas.openxmlformats.org/drawingml/2006/main"/>
           <a:p xmlns:a="http://schemas.openxmlformats.org/drawingml/2006/main">
             <a:pPr>
+              <a:buNone/>
               <a:defRPr sz="1200" b="0">
                 <a:solidFill>
                   <a:srgbClr val="334155"/>
@@ -3066,7 +3062,7 @@
                 <a:ea typeface="Calibri"/>
                 <a:cs typeface="Calibri"/>
               </a:rPr>
-              <a:t>DOCUMENT REALITY</a:t>
+              <a:t>REAL DOCUMENT</a:t>
             </a:r>
           </a:p>
         </p:txBody>
@@ -3101,7 +3097,7 @@
         </p:spPr>
         <p:txBody>
           <a:bodyPr xmlns:a="http://schemas.openxmlformats.org/drawingml/2006/main" wrap="none" lIns="0" tIns="0" rIns="0" bIns="0" anchor="ctr">
-            <a:normAutofit fontScale="100000"/>
+            <a:normAutofit fontScale="94676"/>
           </a:bodyPr>
           <a:lstStyle xmlns:a="http://schemas.openxmlformats.org/drawingml/2006/main"/>
           <a:p xmlns:a="http://schemas.openxmlformats.org/drawingml/2006/main">
@@ -3128,7 +3124,7 @@
                 <a:ea typeface="Calibri"/>
                 <a:cs typeface="Calibri"/>
               </a:rPr>
-              <a:t>Financial meaning is visual; extraction is often linear</a:t>
+              <a:t>A financial table can look obvious—and still extract ambiguously</a:t>
             </a:r>
           </a:p>
         </p:txBody>
@@ -3190,7 +3186,7 @@
                 <a:ea typeface="Calibri"/>
                 <a:cs typeface="Calibri"/>
               </a:rPr>
-              <a:t>VISIBLE REPORT</a:t>
+              <a:t>OFFICIAL TABLE</a:t>
             </a:r>
           </a:p>
         </p:txBody>
@@ -3232,57 +3228,22 @@
       </p:sp>
       <p:sp>
         <p:nvSpPr>
-          <p:cNvPr id="5" name="">
-            <a:extLst xmlns:a="http://schemas.openxmlformats.org/drawingml/2006/main">
-              <a:ext uri="{FF2B5EF4-FFF2-40B4-BE49-F238E27FC236}">
-                <a16:creationId xmlns:a16="http://schemas.microsoft.com/office/drawing/2014/main" id="{61B2ADA4-F920-4232-9DA2-D9793FAD7558}"/>
-              </a:ext>
-            </a:extLst>
-          </p:cNvPr>
-          <p:cNvSpPr>
-            <a:spLocks xmlns:a="http://schemas.openxmlformats.org/drawingml/2006/main" noGrp="1"/>
-          </p:cNvSpPr>
-          <p:nvPr/>
-        </p:nvSpPr>
-        <p:spPr>
-          <a:xfrm xmlns:a="http://schemas.openxmlformats.org/drawingml/2006/main">
-            <a:off x="1257300" y="3086100"/>
-            <a:ext cx="2000250" cy="609600"/>
-          </a:xfrm>
-          <a:prstGeom xmlns:a="http://schemas.openxmlformats.org/drawingml/2006/main" prst="roundRect">
-            <a:avLst>
-              <a:gd name="adj" fmla="val 3125"/>
-            </a:avLst>
-          </a:prstGeom>
-          <a:solidFill xmlns:a="http://schemas.openxmlformats.org/drawingml/2006/main">
-            <a:srgbClr val="E8F6FB"/>
-          </a:solidFill>
-          <a:ln xmlns:a="http://schemas.openxmlformats.org/drawingml/2006/main" w="9525">
-            <a:solidFill>
-              <a:srgbClr val="FFFFFF"/>
-            </a:solidFill>
-            <a:prstDash val="solid"/>
-          </a:ln>
-        </p:spPr>
-      </p:sp>
-      <p:sp>
-        <p:nvSpPr>
-          <p:cNvPr id="6" name="">
-            <a:extLst xmlns:a="http://schemas.openxmlformats.org/drawingml/2006/main">
-              <a:ext uri="{FF2B5EF4-FFF2-40B4-BE49-F238E27FC236}">
-                <a16:creationId xmlns:a16="http://schemas.microsoft.com/office/drawing/2014/main" id="{42FF9963-0F9F-4886-AB57-EF4C2E67D224}"/>
-              </a:ext>
-            </a:extLst>
-          </p:cNvPr>
-          <p:cNvSpPr>
-            <a:spLocks xmlns:a="http://schemas.openxmlformats.org/drawingml/2006/main" noGrp="1"/>
-          </p:cNvSpPr>
-          <p:nvPr/>
-        </p:nvSpPr>
-        <p:spPr>
-          <a:xfrm xmlns:a="http://schemas.openxmlformats.org/drawingml/2006/main">
-            <a:off x="1352550" y="3181350"/>
-            <a:ext cx="1809750" cy="419100"/>
+          <p:cNvPr id="29" name="">
+            <a:extLst xmlns:a="http://schemas.openxmlformats.org/drawingml/2006/main">
+              <a:ext uri="{FF2B5EF4-FFF2-40B4-BE49-F238E27FC236}">
+                <a16:creationId xmlns:a16="http://schemas.microsoft.com/office/drawing/2014/main" id="{DB32E82F-D354-4D7C-A51F-92A2FFCBA73D}"/>
+              </a:ext>
+            </a:extLst>
+          </p:cNvPr>
+          <p:cNvSpPr>
+            <a:spLocks xmlns:a="http://schemas.openxmlformats.org/drawingml/2006/main" noGrp="1"/>
+          </p:cNvSpPr>
+          <p:nvPr/>
+        </p:nvSpPr>
+        <p:spPr>
+          <a:xfrm xmlns:a="http://schemas.openxmlformats.org/drawingml/2006/main">
+            <a:off x="7924800" y="2324100"/>
+            <a:ext cx="2952750" cy="304800"/>
           </a:xfrm>
           <a:prstGeom xmlns:a="http://schemas.openxmlformats.org/drawingml/2006/main" prst="rect">
             <a:avLst/>
@@ -3306,7 +3267,7 @@
               <a:buNone/>
               <a:defRPr sz="1350" b="1">
                 <a:solidFill>
-                  <a:srgbClr val="051C2A"/>
+                  <a:srgbClr val="1F40CB"/>
                 </a:solidFill>
                 <a:latin typeface="Calibri"/>
                 <a:ea typeface="Calibri"/>
@@ -3316,1142 +3277,13 @@
             <a:r>
               <a:rPr sz="1350" b="1">
                 <a:solidFill>
-                  <a:srgbClr val="051C2A"/>
-                </a:solidFill>
-                <a:latin typeface="Calibri"/>
-                <a:ea typeface="Calibri"/>
-                <a:cs typeface="Calibri"/>
-              </a:rPr>
-              <a:t>Metric</a:t>
-            </a:r>
-          </a:p>
-        </p:txBody>
-      </p:sp>
-      <p:sp>
-        <p:nvSpPr>
-          <p:cNvPr id="7" name="">
-            <a:extLst xmlns:a="http://schemas.openxmlformats.org/drawingml/2006/main">
-              <a:ext uri="{FF2B5EF4-FFF2-40B4-BE49-F238E27FC236}">
-                <a16:creationId xmlns:a16="http://schemas.microsoft.com/office/drawing/2014/main" id="{237D9C1E-00D7-4159-B73B-01D34D7FF0C7}"/>
-              </a:ext>
-            </a:extLst>
-          </p:cNvPr>
-          <p:cNvSpPr>
-            <a:spLocks xmlns:a="http://schemas.openxmlformats.org/drawingml/2006/main" noGrp="1"/>
-          </p:cNvSpPr>
-          <p:nvPr/>
-        </p:nvSpPr>
-        <p:spPr>
-          <a:xfrm xmlns:a="http://schemas.openxmlformats.org/drawingml/2006/main">
-            <a:off x="3314700" y="3086100"/>
-            <a:ext cx="1466850" cy="609600"/>
-          </a:xfrm>
-          <a:prstGeom xmlns:a="http://schemas.openxmlformats.org/drawingml/2006/main" prst="roundRect">
-            <a:avLst>
-              <a:gd name="adj" fmla="val 3125"/>
-            </a:avLst>
-          </a:prstGeom>
-          <a:solidFill xmlns:a="http://schemas.openxmlformats.org/drawingml/2006/main">
-            <a:srgbClr val="E8F6FB"/>
-          </a:solidFill>
-          <a:ln xmlns:a="http://schemas.openxmlformats.org/drawingml/2006/main" w="9525">
-            <a:solidFill>
-              <a:srgbClr val="FFFFFF"/>
-            </a:solidFill>
-            <a:prstDash val="solid"/>
-          </a:ln>
-        </p:spPr>
-      </p:sp>
-      <p:sp>
-        <p:nvSpPr>
-          <p:cNvPr id="8" name="">
-            <a:extLst xmlns:a="http://schemas.openxmlformats.org/drawingml/2006/main">
-              <a:ext uri="{FF2B5EF4-FFF2-40B4-BE49-F238E27FC236}">
-                <a16:creationId xmlns:a16="http://schemas.microsoft.com/office/drawing/2014/main" id="{E97DFBB9-A001-4B0E-AA71-86682FCE1160}"/>
-              </a:ext>
-            </a:extLst>
-          </p:cNvPr>
-          <p:cNvSpPr>
-            <a:spLocks xmlns:a="http://schemas.openxmlformats.org/drawingml/2006/main" noGrp="1"/>
-          </p:cNvSpPr>
-          <p:nvPr/>
-        </p:nvSpPr>
-        <p:spPr>
-          <a:xfrm xmlns:a="http://schemas.openxmlformats.org/drawingml/2006/main">
-            <a:off x="3409950" y="3181350"/>
-            <a:ext cx="1276350" cy="419100"/>
-          </a:xfrm>
-          <a:prstGeom xmlns:a="http://schemas.openxmlformats.org/drawingml/2006/main" prst="rect">
-            <a:avLst/>
-          </a:prstGeom>
-          <a:noFill xmlns:a="http://schemas.openxmlformats.org/drawingml/2006/main"/>
-          <a:ln xmlns:a="http://schemas.openxmlformats.org/drawingml/2006/main" w="0">
-            <a:noFill/>
-            <a:prstDash val="solid"/>
-          </a:ln>
-        </p:spPr>
-        <p:txBody>
-          <a:bodyPr xmlns:a="http://schemas.openxmlformats.org/drawingml/2006/main" wrap="square" lIns="0" tIns="0" rIns="0" bIns="0" anchor="ctr">
-            <a:normAutofit fontScale="100000"/>
-          </a:bodyPr>
-          <a:lstStyle xmlns:a="http://schemas.openxmlformats.org/drawingml/2006/main"/>
-          <a:p xmlns:a="http://schemas.openxmlformats.org/drawingml/2006/main">
-            <a:pPr algn="l">
-              <a:lnSpc>
-                <a:spcPct val="100000"/>
-              </a:lnSpc>
-              <a:buNone/>
-              <a:defRPr sz="1350" b="1">
-                <a:solidFill>
-                  <a:srgbClr val="051C2A"/>
-                </a:solidFill>
-                <a:latin typeface="Calibri"/>
-                <a:ea typeface="Calibri"/>
-                <a:cs typeface="Calibri"/>
-              </a:defRPr>
-            </a:pPr>
-            <a:r>
-              <a:rPr sz="1350" b="1">
-                <a:solidFill>
-                  <a:srgbClr val="051C2A"/>
-                </a:solidFill>
-                <a:latin typeface="Calibri"/>
-                <a:ea typeface="Calibri"/>
-                <a:cs typeface="Calibri"/>
-              </a:rPr>
-              <a:t>FY2025</a:t>
-            </a:r>
-          </a:p>
-        </p:txBody>
-      </p:sp>
-      <p:sp>
-        <p:nvSpPr>
-          <p:cNvPr id="9" name="">
-            <a:extLst xmlns:a="http://schemas.openxmlformats.org/drawingml/2006/main">
-              <a:ext uri="{FF2B5EF4-FFF2-40B4-BE49-F238E27FC236}">
-                <a16:creationId xmlns:a16="http://schemas.microsoft.com/office/drawing/2014/main" id="{7FD21544-212A-4A0D-B9F7-FCC0D1BF709F}"/>
-              </a:ext>
-            </a:extLst>
-          </p:cNvPr>
-          <p:cNvSpPr>
-            <a:spLocks xmlns:a="http://schemas.openxmlformats.org/drawingml/2006/main" noGrp="1"/>
-          </p:cNvSpPr>
-          <p:nvPr/>
-        </p:nvSpPr>
-        <p:spPr>
-          <a:xfrm xmlns:a="http://schemas.openxmlformats.org/drawingml/2006/main">
-            <a:off x="4838700" y="3086100"/>
-            <a:ext cx="1695450" cy="609600"/>
-          </a:xfrm>
-          <a:prstGeom xmlns:a="http://schemas.openxmlformats.org/drawingml/2006/main" prst="roundRect">
-            <a:avLst>
-              <a:gd name="adj" fmla="val 3125"/>
-            </a:avLst>
-          </a:prstGeom>
-          <a:solidFill xmlns:a="http://schemas.openxmlformats.org/drawingml/2006/main">
-            <a:srgbClr val="E8F6FB"/>
-          </a:solidFill>
-          <a:ln xmlns:a="http://schemas.openxmlformats.org/drawingml/2006/main" w="9525">
-            <a:solidFill>
-              <a:srgbClr val="FFFFFF"/>
-            </a:solidFill>
-            <a:prstDash val="solid"/>
-          </a:ln>
-        </p:spPr>
-      </p:sp>
-      <p:sp>
-        <p:nvSpPr>
-          <p:cNvPr id="10" name="">
-            <a:extLst xmlns:a="http://schemas.openxmlformats.org/drawingml/2006/main">
-              <a:ext uri="{FF2B5EF4-FFF2-40B4-BE49-F238E27FC236}">
-                <a16:creationId xmlns:a16="http://schemas.microsoft.com/office/drawing/2014/main" id="{06AB4578-E8A6-43AE-A2C2-CEA0324C049D}"/>
-              </a:ext>
-            </a:extLst>
-          </p:cNvPr>
-          <p:cNvSpPr>
-            <a:spLocks xmlns:a="http://schemas.openxmlformats.org/drawingml/2006/main" noGrp="1"/>
-          </p:cNvSpPr>
-          <p:nvPr/>
-        </p:nvSpPr>
-        <p:spPr>
-          <a:xfrm xmlns:a="http://schemas.openxmlformats.org/drawingml/2006/main">
-            <a:off x="4933950" y="3181350"/>
-            <a:ext cx="1504950" cy="419100"/>
-          </a:xfrm>
-          <a:prstGeom xmlns:a="http://schemas.openxmlformats.org/drawingml/2006/main" prst="rect">
-            <a:avLst/>
-          </a:prstGeom>
-          <a:noFill xmlns:a="http://schemas.openxmlformats.org/drawingml/2006/main"/>
-          <a:ln xmlns:a="http://schemas.openxmlformats.org/drawingml/2006/main" w="0">
-            <a:noFill/>
-            <a:prstDash val="solid"/>
-          </a:ln>
-        </p:spPr>
-        <p:txBody>
-          <a:bodyPr xmlns:a="http://schemas.openxmlformats.org/drawingml/2006/main" wrap="square" lIns="0" tIns="0" rIns="0" bIns="0" anchor="ctr">
-            <a:normAutofit fontScale="100000"/>
-          </a:bodyPr>
-          <a:lstStyle xmlns:a="http://schemas.openxmlformats.org/drawingml/2006/main"/>
-          <a:p xmlns:a="http://schemas.openxmlformats.org/drawingml/2006/main">
-            <a:pPr algn="l">
-              <a:lnSpc>
-                <a:spcPct val="100000"/>
-              </a:lnSpc>
-              <a:buNone/>
-              <a:defRPr sz="1350" b="1">
-                <a:solidFill>
-                  <a:srgbClr val="051C2A"/>
-                </a:solidFill>
-                <a:latin typeface="Calibri"/>
-                <a:ea typeface="Calibri"/>
-                <a:cs typeface="Calibri"/>
-              </a:defRPr>
-            </a:pPr>
-            <a:r>
-              <a:rPr sz="1350" b="1">
-                <a:solidFill>
-                  <a:srgbClr val="051C2A"/>
-                </a:solidFill>
-                <a:latin typeface="Calibri"/>
-                <a:ea typeface="Calibri"/>
-                <a:cs typeface="Calibri"/>
-              </a:rPr>
-              <a:t>Change</a:t>
-            </a:r>
-          </a:p>
-        </p:txBody>
-      </p:sp>
-      <p:sp>
-        <p:nvSpPr>
-          <p:cNvPr id="11" name="">
-            <a:extLst xmlns:a="http://schemas.openxmlformats.org/drawingml/2006/main">
-              <a:ext uri="{FF2B5EF4-FFF2-40B4-BE49-F238E27FC236}">
-                <a16:creationId xmlns:a16="http://schemas.microsoft.com/office/drawing/2014/main" id="{14D04ECC-09F8-456C-879E-7691A5B320B1}"/>
-              </a:ext>
-            </a:extLst>
-          </p:cNvPr>
-          <p:cNvSpPr>
-            <a:spLocks xmlns:a="http://schemas.openxmlformats.org/drawingml/2006/main" noGrp="1"/>
-          </p:cNvSpPr>
-          <p:nvPr/>
-        </p:nvSpPr>
-        <p:spPr>
-          <a:xfrm xmlns:a="http://schemas.openxmlformats.org/drawingml/2006/main">
-            <a:off x="1257300" y="3733800"/>
-            <a:ext cx="2000250" cy="628650"/>
-          </a:xfrm>
-          <a:prstGeom xmlns:a="http://schemas.openxmlformats.org/drawingml/2006/main" prst="roundRect">
-            <a:avLst>
-              <a:gd name="adj" fmla="val 3030"/>
-            </a:avLst>
-          </a:prstGeom>
-          <a:solidFill xmlns:a="http://schemas.openxmlformats.org/drawingml/2006/main">
-            <a:srgbClr val="FAFBFC"/>
-          </a:solidFill>
-          <a:ln xmlns:a="http://schemas.openxmlformats.org/drawingml/2006/main" w="9525">
-            <a:solidFill>
-              <a:srgbClr val="FFFFFF"/>
-            </a:solidFill>
-            <a:prstDash val="solid"/>
-          </a:ln>
-        </p:spPr>
-      </p:sp>
-      <p:sp>
-        <p:nvSpPr>
-          <p:cNvPr id="12" name="">
-            <a:extLst xmlns:a="http://schemas.openxmlformats.org/drawingml/2006/main">
-              <a:ext uri="{FF2B5EF4-FFF2-40B4-BE49-F238E27FC236}">
-                <a16:creationId xmlns:a16="http://schemas.microsoft.com/office/drawing/2014/main" id="{18DF2230-F0C0-4DBC-BB47-7BADFC8CF54F}"/>
-              </a:ext>
-            </a:extLst>
-          </p:cNvPr>
-          <p:cNvSpPr>
-            <a:spLocks xmlns:a="http://schemas.openxmlformats.org/drawingml/2006/main" noGrp="1"/>
-          </p:cNvSpPr>
-          <p:nvPr/>
-        </p:nvSpPr>
-        <p:spPr>
-          <a:xfrm xmlns:a="http://schemas.openxmlformats.org/drawingml/2006/main">
-            <a:off x="1352550" y="3838575"/>
-            <a:ext cx="1809750" cy="419100"/>
-          </a:xfrm>
-          <a:prstGeom xmlns:a="http://schemas.openxmlformats.org/drawingml/2006/main" prst="rect">
-            <a:avLst/>
-          </a:prstGeom>
-          <a:noFill xmlns:a="http://schemas.openxmlformats.org/drawingml/2006/main"/>
-          <a:ln xmlns:a="http://schemas.openxmlformats.org/drawingml/2006/main" w="0">
-            <a:noFill/>
-            <a:prstDash val="solid"/>
-          </a:ln>
-        </p:spPr>
-        <p:txBody>
-          <a:bodyPr xmlns:a="http://schemas.openxmlformats.org/drawingml/2006/main" wrap="square" lIns="0" tIns="0" rIns="0" bIns="0" anchor="ctr">
-            <a:normAutofit fontScale="100000"/>
-          </a:bodyPr>
-          <a:lstStyle xmlns:a="http://schemas.openxmlformats.org/drawingml/2006/main"/>
-          <a:p xmlns:a="http://schemas.openxmlformats.org/drawingml/2006/main">
-            <a:pPr algn="l">
-              <a:lnSpc>
-                <a:spcPct val="100000"/>
-              </a:lnSpc>
-              <a:buNone/>
-              <a:defRPr sz="1275" b="0">
-                <a:solidFill>
-                  <a:srgbClr val="051C2A"/>
-                </a:solidFill>
-                <a:latin typeface="Calibri"/>
-                <a:ea typeface="Calibri"/>
-                <a:cs typeface="Calibri"/>
-              </a:defRPr>
-            </a:pPr>
-            <a:r>
-              <a:rPr sz="1275" b="0">
-                <a:solidFill>
-                  <a:srgbClr val="051C2A"/>
-                </a:solidFill>
-                <a:latin typeface="Calibri"/>
-                <a:ea typeface="Calibri"/>
-                <a:cs typeface="Calibri"/>
-              </a:rPr>
-              <a:t>Revenue</a:t>
-            </a:r>
-          </a:p>
-        </p:txBody>
-      </p:sp>
-      <p:sp>
-        <p:nvSpPr>
-          <p:cNvPr id="13" name="">
-            <a:extLst xmlns:a="http://schemas.openxmlformats.org/drawingml/2006/main">
-              <a:ext uri="{FF2B5EF4-FFF2-40B4-BE49-F238E27FC236}">
-                <a16:creationId xmlns:a16="http://schemas.microsoft.com/office/drawing/2014/main" id="{F154DA14-31F7-4D96-B8DD-9152DF44DE97}"/>
-              </a:ext>
-            </a:extLst>
-          </p:cNvPr>
-          <p:cNvSpPr>
-            <a:spLocks xmlns:a="http://schemas.openxmlformats.org/drawingml/2006/main" noGrp="1"/>
-          </p:cNvSpPr>
-          <p:nvPr/>
-        </p:nvSpPr>
-        <p:spPr>
-          <a:xfrm xmlns:a="http://schemas.openxmlformats.org/drawingml/2006/main">
-            <a:off x="3314700" y="3733800"/>
-            <a:ext cx="1466850" cy="628650"/>
-          </a:xfrm>
-          <a:prstGeom xmlns:a="http://schemas.openxmlformats.org/drawingml/2006/main" prst="roundRect">
-            <a:avLst>
-              <a:gd name="adj" fmla="val 3030"/>
-            </a:avLst>
-          </a:prstGeom>
-          <a:solidFill xmlns:a="http://schemas.openxmlformats.org/drawingml/2006/main">
-            <a:srgbClr val="FAFBFC"/>
-          </a:solidFill>
-          <a:ln xmlns:a="http://schemas.openxmlformats.org/drawingml/2006/main" w="9525">
-            <a:solidFill>
-              <a:srgbClr val="FFFFFF"/>
-            </a:solidFill>
-            <a:prstDash val="solid"/>
-          </a:ln>
-        </p:spPr>
-      </p:sp>
-      <p:sp>
-        <p:nvSpPr>
-          <p:cNvPr id="14" name="">
-            <a:extLst xmlns:a="http://schemas.openxmlformats.org/drawingml/2006/main">
-              <a:ext uri="{FF2B5EF4-FFF2-40B4-BE49-F238E27FC236}">
-                <a16:creationId xmlns:a16="http://schemas.microsoft.com/office/drawing/2014/main" id="{704648FD-7DFC-4761-A04A-3AC1852BC0AB}"/>
-              </a:ext>
-            </a:extLst>
-          </p:cNvPr>
-          <p:cNvSpPr>
-            <a:spLocks xmlns:a="http://schemas.openxmlformats.org/drawingml/2006/main" noGrp="1"/>
-          </p:cNvSpPr>
-          <p:nvPr/>
-        </p:nvSpPr>
-        <p:spPr>
-          <a:xfrm xmlns:a="http://schemas.openxmlformats.org/drawingml/2006/main">
-            <a:off x="3409950" y="3838575"/>
-            <a:ext cx="1276350" cy="419100"/>
-          </a:xfrm>
-          <a:prstGeom xmlns:a="http://schemas.openxmlformats.org/drawingml/2006/main" prst="rect">
-            <a:avLst/>
-          </a:prstGeom>
-          <a:noFill xmlns:a="http://schemas.openxmlformats.org/drawingml/2006/main"/>
-          <a:ln xmlns:a="http://schemas.openxmlformats.org/drawingml/2006/main" w="0">
-            <a:noFill/>
-            <a:prstDash val="solid"/>
-          </a:ln>
-        </p:spPr>
-        <p:txBody>
-          <a:bodyPr xmlns:a="http://schemas.openxmlformats.org/drawingml/2006/main" wrap="square" lIns="0" tIns="0" rIns="0" bIns="0" anchor="ctr">
-            <a:normAutofit fontScale="100000"/>
-          </a:bodyPr>
-          <a:lstStyle xmlns:a="http://schemas.openxmlformats.org/drawingml/2006/main"/>
-          <a:p xmlns:a="http://schemas.openxmlformats.org/drawingml/2006/main">
-            <a:pPr algn="l">
-              <a:lnSpc>
-                <a:spcPct val="100000"/>
-              </a:lnSpc>
-              <a:buNone/>
-              <a:defRPr sz="1275" b="0">
-                <a:solidFill>
-                  <a:srgbClr val="051C2A"/>
-                </a:solidFill>
-                <a:latin typeface="Calibri"/>
-                <a:ea typeface="Calibri"/>
-                <a:cs typeface="Calibri"/>
-              </a:defRPr>
-            </a:pPr>
-            <a:r>
-              <a:rPr sz="1275" b="0">
-                <a:solidFill>
-                  <a:srgbClr val="051C2A"/>
-                </a:solidFill>
-                <a:latin typeface="Calibri"/>
-                <a:ea typeface="Calibri"/>
-                <a:cs typeface="Calibri"/>
-              </a:rPr>
-              <a:t>EUR 40.2bn</a:t>
-            </a:r>
-          </a:p>
-        </p:txBody>
-      </p:sp>
-      <p:sp>
-        <p:nvSpPr>
-          <p:cNvPr id="15" name="">
-            <a:extLst xmlns:a="http://schemas.openxmlformats.org/drawingml/2006/main">
-              <a:ext uri="{FF2B5EF4-FFF2-40B4-BE49-F238E27FC236}">
-                <a16:creationId xmlns:a16="http://schemas.microsoft.com/office/drawing/2014/main" id="{C31CF715-7C9A-4BB8-BE5A-15D7CE0577F9}"/>
-              </a:ext>
-            </a:extLst>
-          </p:cNvPr>
-          <p:cNvSpPr>
-            <a:spLocks xmlns:a="http://schemas.openxmlformats.org/drawingml/2006/main" noGrp="1"/>
-          </p:cNvSpPr>
-          <p:nvPr/>
-        </p:nvSpPr>
-        <p:spPr>
-          <a:xfrm xmlns:a="http://schemas.openxmlformats.org/drawingml/2006/main">
-            <a:off x="4838700" y="3733800"/>
-            <a:ext cx="1695450" cy="628650"/>
-          </a:xfrm>
-          <a:prstGeom xmlns:a="http://schemas.openxmlformats.org/drawingml/2006/main" prst="roundRect">
-            <a:avLst>
-              <a:gd name="adj" fmla="val 3030"/>
-            </a:avLst>
-          </a:prstGeom>
-          <a:solidFill xmlns:a="http://schemas.openxmlformats.org/drawingml/2006/main">
-            <a:srgbClr val="FAFBFC"/>
-          </a:solidFill>
-          <a:ln xmlns:a="http://schemas.openxmlformats.org/drawingml/2006/main" w="9525">
-            <a:solidFill>
-              <a:srgbClr val="FFFFFF"/>
-            </a:solidFill>
-            <a:prstDash val="solid"/>
-          </a:ln>
-        </p:spPr>
-      </p:sp>
-      <p:sp>
-        <p:nvSpPr>
-          <p:cNvPr id="16" name="">
-            <a:extLst xmlns:a="http://schemas.openxmlformats.org/drawingml/2006/main">
-              <a:ext uri="{FF2B5EF4-FFF2-40B4-BE49-F238E27FC236}">
-                <a16:creationId xmlns:a16="http://schemas.microsoft.com/office/drawing/2014/main" id="{1C86DE64-6FD8-4C5C-BD04-C629704B8048}"/>
-              </a:ext>
-            </a:extLst>
-          </p:cNvPr>
-          <p:cNvSpPr>
-            <a:spLocks xmlns:a="http://schemas.openxmlformats.org/drawingml/2006/main" noGrp="1"/>
-          </p:cNvSpPr>
-          <p:nvPr/>
-        </p:nvSpPr>
-        <p:spPr>
-          <a:xfrm xmlns:a="http://schemas.openxmlformats.org/drawingml/2006/main">
-            <a:off x="4933950" y="3838575"/>
-            <a:ext cx="1504950" cy="419100"/>
-          </a:xfrm>
-          <a:prstGeom xmlns:a="http://schemas.openxmlformats.org/drawingml/2006/main" prst="rect">
-            <a:avLst/>
-          </a:prstGeom>
-          <a:noFill xmlns:a="http://schemas.openxmlformats.org/drawingml/2006/main"/>
-          <a:ln xmlns:a="http://schemas.openxmlformats.org/drawingml/2006/main" w="0">
-            <a:noFill/>
-            <a:prstDash val="solid"/>
-          </a:ln>
-        </p:spPr>
-        <p:txBody>
-          <a:bodyPr xmlns:a="http://schemas.openxmlformats.org/drawingml/2006/main" wrap="square" lIns="0" tIns="0" rIns="0" bIns="0" anchor="ctr">
-            <a:normAutofit fontScale="100000"/>
-          </a:bodyPr>
-          <a:lstStyle xmlns:a="http://schemas.openxmlformats.org/drawingml/2006/main"/>
-          <a:p xmlns:a="http://schemas.openxmlformats.org/drawingml/2006/main">
-            <a:pPr algn="l">
-              <a:lnSpc>
-                <a:spcPct val="100000"/>
-              </a:lnSpc>
-              <a:buNone/>
-              <a:defRPr sz="1275" b="0">
-                <a:solidFill>
-                  <a:srgbClr val="051C2A"/>
-                </a:solidFill>
-                <a:latin typeface="Calibri"/>
-                <a:ea typeface="Calibri"/>
-                <a:cs typeface="Calibri"/>
-              </a:defRPr>
-            </a:pPr>
-            <a:r>
-              <a:rPr sz="1275" b="0">
-                <a:solidFill>
-                  <a:srgbClr val="051C2A"/>
-                </a:solidFill>
-                <a:latin typeface="Calibri"/>
-                <a:ea typeface="Calibri"/>
-                <a:cs typeface="Calibri"/>
-              </a:rPr>
-              <a:t>+8.9%</a:t>
-            </a:r>
-          </a:p>
-        </p:txBody>
-      </p:sp>
-      <p:sp>
-        <p:nvSpPr>
-          <p:cNvPr id="17" name="">
-            <a:extLst xmlns:a="http://schemas.openxmlformats.org/drawingml/2006/main">
-              <a:ext uri="{FF2B5EF4-FFF2-40B4-BE49-F238E27FC236}">
-                <a16:creationId xmlns:a16="http://schemas.microsoft.com/office/drawing/2014/main" id="{54FD23F7-5A32-49C6-A602-C4B97B293766}"/>
-              </a:ext>
-            </a:extLst>
-          </p:cNvPr>
-          <p:cNvSpPr>
-            <a:spLocks xmlns:a="http://schemas.openxmlformats.org/drawingml/2006/main" noGrp="1"/>
-          </p:cNvSpPr>
-          <p:nvPr/>
-        </p:nvSpPr>
-        <p:spPr>
-          <a:xfrm xmlns:a="http://schemas.openxmlformats.org/drawingml/2006/main">
-            <a:off x="1257300" y="4419600"/>
-            <a:ext cx="2000250" cy="628650"/>
-          </a:xfrm>
-          <a:prstGeom xmlns:a="http://schemas.openxmlformats.org/drawingml/2006/main" prst="roundRect">
-            <a:avLst>
-              <a:gd name="adj" fmla="val 3030"/>
-            </a:avLst>
-          </a:prstGeom>
-          <a:solidFill xmlns:a="http://schemas.openxmlformats.org/drawingml/2006/main">
-            <a:srgbClr val="FAFBFC"/>
-          </a:solidFill>
-          <a:ln xmlns:a="http://schemas.openxmlformats.org/drawingml/2006/main" w="9525">
-            <a:solidFill>
-              <a:srgbClr val="FFFFFF"/>
-            </a:solidFill>
-            <a:prstDash val="solid"/>
-          </a:ln>
-        </p:spPr>
-      </p:sp>
-      <p:sp>
-        <p:nvSpPr>
-          <p:cNvPr id="18" name="">
-            <a:extLst xmlns:a="http://schemas.openxmlformats.org/drawingml/2006/main">
-              <a:ext uri="{FF2B5EF4-FFF2-40B4-BE49-F238E27FC236}">
-                <a16:creationId xmlns:a16="http://schemas.microsoft.com/office/drawing/2014/main" id="{8334CF0D-0658-422B-8F55-E98FD0DDB9E2}"/>
-              </a:ext>
-            </a:extLst>
-          </p:cNvPr>
-          <p:cNvSpPr>
-            <a:spLocks xmlns:a="http://schemas.openxmlformats.org/drawingml/2006/main" noGrp="1"/>
-          </p:cNvSpPr>
-          <p:nvPr/>
-        </p:nvSpPr>
-        <p:spPr>
-          <a:xfrm xmlns:a="http://schemas.openxmlformats.org/drawingml/2006/main">
-            <a:off x="1352550" y="4524375"/>
-            <a:ext cx="1809750" cy="419100"/>
-          </a:xfrm>
-          <a:prstGeom xmlns:a="http://schemas.openxmlformats.org/drawingml/2006/main" prst="rect">
-            <a:avLst/>
-          </a:prstGeom>
-          <a:noFill xmlns:a="http://schemas.openxmlformats.org/drawingml/2006/main"/>
-          <a:ln xmlns:a="http://schemas.openxmlformats.org/drawingml/2006/main" w="0">
-            <a:noFill/>
-            <a:prstDash val="solid"/>
-          </a:ln>
-        </p:spPr>
-        <p:txBody>
-          <a:bodyPr xmlns:a="http://schemas.openxmlformats.org/drawingml/2006/main" wrap="square" lIns="0" tIns="0" rIns="0" bIns="0" anchor="ctr">
-            <a:normAutofit fontScale="100000"/>
-          </a:bodyPr>
-          <a:lstStyle xmlns:a="http://schemas.openxmlformats.org/drawingml/2006/main"/>
-          <a:p xmlns:a="http://schemas.openxmlformats.org/drawingml/2006/main">
-            <a:pPr algn="l">
-              <a:lnSpc>
-                <a:spcPct val="100000"/>
-              </a:lnSpc>
-              <a:buNone/>
-              <a:defRPr sz="1275" b="0">
-                <a:solidFill>
-                  <a:srgbClr val="051C2A"/>
-                </a:solidFill>
-                <a:latin typeface="Calibri"/>
-                <a:ea typeface="Calibri"/>
-                <a:cs typeface="Calibri"/>
-              </a:defRPr>
-            </a:pPr>
-            <a:r>
-              <a:rPr sz="1275" b="0">
-                <a:solidFill>
-                  <a:srgbClr val="051C2A"/>
-                </a:solidFill>
-                <a:latin typeface="Calibri"/>
-                <a:ea typeface="Calibri"/>
-                <a:cs typeface="Calibri"/>
-              </a:rPr>
-              <a:t>Energy Management</a:t>
-            </a:r>
-          </a:p>
-        </p:txBody>
-      </p:sp>
-      <p:sp>
-        <p:nvSpPr>
-          <p:cNvPr id="19" name="">
-            <a:extLst xmlns:a="http://schemas.openxmlformats.org/drawingml/2006/main">
-              <a:ext uri="{FF2B5EF4-FFF2-40B4-BE49-F238E27FC236}">
-                <a16:creationId xmlns:a16="http://schemas.microsoft.com/office/drawing/2014/main" id="{F035550F-4912-4A3E-9B6B-EEFB53BC2A71}"/>
-              </a:ext>
-            </a:extLst>
-          </p:cNvPr>
-          <p:cNvSpPr>
-            <a:spLocks xmlns:a="http://schemas.openxmlformats.org/drawingml/2006/main" noGrp="1"/>
-          </p:cNvSpPr>
-          <p:nvPr/>
-        </p:nvSpPr>
-        <p:spPr>
-          <a:xfrm xmlns:a="http://schemas.openxmlformats.org/drawingml/2006/main">
-            <a:off x="3314700" y="4419600"/>
-            <a:ext cx="1466850" cy="628650"/>
-          </a:xfrm>
-          <a:prstGeom xmlns:a="http://schemas.openxmlformats.org/drawingml/2006/main" prst="roundRect">
-            <a:avLst>
-              <a:gd name="adj" fmla="val 3030"/>
-            </a:avLst>
-          </a:prstGeom>
-          <a:solidFill xmlns:a="http://schemas.openxmlformats.org/drawingml/2006/main">
-            <a:srgbClr val="FAFBFC"/>
-          </a:solidFill>
-          <a:ln xmlns:a="http://schemas.openxmlformats.org/drawingml/2006/main" w="9525">
-            <a:solidFill>
-              <a:srgbClr val="FFFFFF"/>
-            </a:solidFill>
-            <a:prstDash val="solid"/>
-          </a:ln>
-        </p:spPr>
-      </p:sp>
-      <p:sp>
-        <p:nvSpPr>
-          <p:cNvPr id="20" name="">
-            <a:extLst xmlns:a="http://schemas.openxmlformats.org/drawingml/2006/main">
-              <a:ext uri="{FF2B5EF4-FFF2-40B4-BE49-F238E27FC236}">
-                <a16:creationId xmlns:a16="http://schemas.microsoft.com/office/drawing/2014/main" id="{70145470-037A-4684-9A06-4900C017FA97}"/>
-              </a:ext>
-            </a:extLst>
-          </p:cNvPr>
-          <p:cNvSpPr>
-            <a:spLocks xmlns:a="http://schemas.openxmlformats.org/drawingml/2006/main" noGrp="1"/>
-          </p:cNvSpPr>
-          <p:nvPr/>
-        </p:nvSpPr>
-        <p:spPr>
-          <a:xfrm xmlns:a="http://schemas.openxmlformats.org/drawingml/2006/main">
-            <a:off x="3409950" y="4524375"/>
-            <a:ext cx="1276350" cy="419100"/>
-          </a:xfrm>
-          <a:prstGeom xmlns:a="http://schemas.openxmlformats.org/drawingml/2006/main" prst="rect">
-            <a:avLst/>
-          </a:prstGeom>
-          <a:noFill xmlns:a="http://schemas.openxmlformats.org/drawingml/2006/main"/>
-          <a:ln xmlns:a="http://schemas.openxmlformats.org/drawingml/2006/main" w="0">
-            <a:noFill/>
-            <a:prstDash val="solid"/>
-          </a:ln>
-        </p:spPr>
-        <p:txBody>
-          <a:bodyPr xmlns:a="http://schemas.openxmlformats.org/drawingml/2006/main" wrap="square" lIns="0" tIns="0" rIns="0" bIns="0" anchor="ctr">
-            <a:normAutofit fontScale="100000"/>
-          </a:bodyPr>
-          <a:lstStyle xmlns:a="http://schemas.openxmlformats.org/drawingml/2006/main"/>
-          <a:p xmlns:a="http://schemas.openxmlformats.org/drawingml/2006/main">
-            <a:pPr algn="l">
-              <a:lnSpc>
-                <a:spcPct val="100000"/>
-              </a:lnSpc>
-              <a:buNone/>
-              <a:defRPr sz="1275" b="0">
-                <a:solidFill>
-                  <a:srgbClr val="051C2A"/>
-                </a:solidFill>
-                <a:latin typeface="Calibri"/>
-                <a:ea typeface="Calibri"/>
-                <a:cs typeface="Calibri"/>
-              </a:defRPr>
-            </a:pPr>
-            <a:r>
-              <a:rPr sz="1275" b="0">
-                <a:solidFill>
-                  <a:srgbClr val="051C2A"/>
-                </a:solidFill>
-                <a:latin typeface="Calibri"/>
-                <a:ea typeface="Calibri"/>
-                <a:cs typeface="Calibri"/>
-              </a:rPr>
-              <a:t>n/a</a:t>
-            </a:r>
-          </a:p>
-        </p:txBody>
-      </p:sp>
-      <p:sp>
-        <p:nvSpPr>
-          <p:cNvPr id="21" name="">
-            <a:extLst xmlns:a="http://schemas.openxmlformats.org/drawingml/2006/main">
-              <a:ext uri="{FF2B5EF4-FFF2-40B4-BE49-F238E27FC236}">
-                <a16:creationId xmlns:a16="http://schemas.microsoft.com/office/drawing/2014/main" id="{6025294A-6942-4B54-BB28-F9F69395556C}"/>
-              </a:ext>
-            </a:extLst>
-          </p:cNvPr>
-          <p:cNvSpPr>
-            <a:spLocks xmlns:a="http://schemas.openxmlformats.org/drawingml/2006/main" noGrp="1"/>
-          </p:cNvSpPr>
-          <p:nvPr/>
-        </p:nvSpPr>
-        <p:spPr>
-          <a:xfrm xmlns:a="http://schemas.openxmlformats.org/drawingml/2006/main">
-            <a:off x="4838700" y="4419600"/>
-            <a:ext cx="1695450" cy="628650"/>
-          </a:xfrm>
-          <a:prstGeom xmlns:a="http://schemas.openxmlformats.org/drawingml/2006/main" prst="roundRect">
-            <a:avLst>
-              <a:gd name="adj" fmla="val 3030"/>
-            </a:avLst>
-          </a:prstGeom>
-          <a:solidFill xmlns:a="http://schemas.openxmlformats.org/drawingml/2006/main">
-            <a:srgbClr val="FAFBFC"/>
-          </a:solidFill>
-          <a:ln xmlns:a="http://schemas.openxmlformats.org/drawingml/2006/main" w="9525">
-            <a:solidFill>
-              <a:srgbClr val="FFFFFF"/>
-            </a:solidFill>
-            <a:prstDash val="solid"/>
-          </a:ln>
-        </p:spPr>
-      </p:sp>
-      <p:sp>
-        <p:nvSpPr>
-          <p:cNvPr id="22" name="">
-            <a:extLst xmlns:a="http://schemas.openxmlformats.org/drawingml/2006/main">
-              <a:ext uri="{FF2B5EF4-FFF2-40B4-BE49-F238E27FC236}">
-                <a16:creationId xmlns:a16="http://schemas.microsoft.com/office/drawing/2014/main" id="{3DA1BB70-EBAC-4335-A161-4048795C421A}"/>
-              </a:ext>
-            </a:extLst>
-          </p:cNvPr>
-          <p:cNvSpPr>
-            <a:spLocks xmlns:a="http://schemas.openxmlformats.org/drawingml/2006/main" noGrp="1"/>
-          </p:cNvSpPr>
-          <p:nvPr/>
-        </p:nvSpPr>
-        <p:spPr>
-          <a:xfrm xmlns:a="http://schemas.openxmlformats.org/drawingml/2006/main">
-            <a:off x="4933950" y="4524375"/>
-            <a:ext cx="1504950" cy="419100"/>
-          </a:xfrm>
-          <a:prstGeom xmlns:a="http://schemas.openxmlformats.org/drawingml/2006/main" prst="rect">
-            <a:avLst/>
-          </a:prstGeom>
-          <a:noFill xmlns:a="http://schemas.openxmlformats.org/drawingml/2006/main"/>
-          <a:ln xmlns:a="http://schemas.openxmlformats.org/drawingml/2006/main" w="0">
-            <a:noFill/>
-            <a:prstDash val="solid"/>
-          </a:ln>
-        </p:spPr>
-        <p:txBody>
-          <a:bodyPr xmlns:a="http://schemas.openxmlformats.org/drawingml/2006/main" wrap="square" lIns="0" tIns="0" rIns="0" bIns="0" anchor="ctr">
-            <a:normAutofit fontScale="100000"/>
-          </a:bodyPr>
-          <a:lstStyle xmlns:a="http://schemas.openxmlformats.org/drawingml/2006/main"/>
-          <a:p xmlns:a="http://schemas.openxmlformats.org/drawingml/2006/main">
-            <a:pPr algn="l">
-              <a:lnSpc>
-                <a:spcPct val="100000"/>
-              </a:lnSpc>
-              <a:buNone/>
-              <a:defRPr sz="1275" b="0">
-                <a:solidFill>
-                  <a:srgbClr val="051C2A"/>
-                </a:solidFill>
-                <a:latin typeface="Calibri"/>
-                <a:ea typeface="Calibri"/>
-                <a:cs typeface="Calibri"/>
-              </a:defRPr>
-            </a:pPr>
-            <a:r>
-              <a:rPr sz="1275" b="0">
-                <a:solidFill>
-                  <a:srgbClr val="051C2A"/>
-                </a:solidFill>
-                <a:latin typeface="Calibri"/>
-                <a:ea typeface="Calibri"/>
-                <a:cs typeface="Calibri"/>
-              </a:rPr>
-              <a:t>+10%</a:t>
-            </a:r>
-          </a:p>
-        </p:txBody>
-      </p:sp>
-      <p:sp>
-        <p:nvSpPr>
-          <p:cNvPr id="23" name="">
-            <a:extLst xmlns:a="http://schemas.openxmlformats.org/drawingml/2006/main">
-              <a:ext uri="{FF2B5EF4-FFF2-40B4-BE49-F238E27FC236}">
-                <a16:creationId xmlns:a16="http://schemas.microsoft.com/office/drawing/2014/main" id="{90126131-F324-4F38-9DC5-28160EE0C5E0}"/>
-              </a:ext>
-            </a:extLst>
-          </p:cNvPr>
-          <p:cNvSpPr>
-            <a:spLocks xmlns:a="http://schemas.openxmlformats.org/drawingml/2006/main" noGrp="1"/>
-          </p:cNvSpPr>
-          <p:nvPr/>
-        </p:nvSpPr>
-        <p:spPr>
-          <a:xfrm xmlns:a="http://schemas.openxmlformats.org/drawingml/2006/main">
-            <a:off x="1257300" y="5105400"/>
-            <a:ext cx="2000250" cy="628650"/>
-          </a:xfrm>
-          <a:prstGeom xmlns:a="http://schemas.openxmlformats.org/drawingml/2006/main" prst="roundRect">
-            <a:avLst>
-              <a:gd name="adj" fmla="val 3030"/>
-            </a:avLst>
-          </a:prstGeom>
-          <a:solidFill xmlns:a="http://schemas.openxmlformats.org/drawingml/2006/main">
-            <a:srgbClr val="FAFBFC"/>
-          </a:solidFill>
-          <a:ln xmlns:a="http://schemas.openxmlformats.org/drawingml/2006/main" w="9525">
-            <a:solidFill>
-              <a:srgbClr val="FFFFFF"/>
-            </a:solidFill>
-            <a:prstDash val="solid"/>
-          </a:ln>
-        </p:spPr>
-      </p:sp>
-      <p:sp>
-        <p:nvSpPr>
-          <p:cNvPr id="24" name="">
-            <a:extLst xmlns:a="http://schemas.openxmlformats.org/drawingml/2006/main">
-              <a:ext uri="{FF2B5EF4-FFF2-40B4-BE49-F238E27FC236}">
-                <a16:creationId xmlns:a16="http://schemas.microsoft.com/office/drawing/2014/main" id="{101E636A-B914-45BB-B915-95E27AB80D07}"/>
-              </a:ext>
-            </a:extLst>
-          </p:cNvPr>
-          <p:cNvSpPr>
-            <a:spLocks xmlns:a="http://schemas.openxmlformats.org/drawingml/2006/main" noGrp="1"/>
-          </p:cNvSpPr>
-          <p:nvPr/>
-        </p:nvSpPr>
-        <p:spPr>
-          <a:xfrm xmlns:a="http://schemas.openxmlformats.org/drawingml/2006/main">
-            <a:off x="1352550" y="5210175"/>
-            <a:ext cx="1809750" cy="419100"/>
-          </a:xfrm>
-          <a:prstGeom xmlns:a="http://schemas.openxmlformats.org/drawingml/2006/main" prst="rect">
-            <a:avLst/>
-          </a:prstGeom>
-          <a:noFill xmlns:a="http://schemas.openxmlformats.org/drawingml/2006/main"/>
-          <a:ln xmlns:a="http://schemas.openxmlformats.org/drawingml/2006/main" w="0">
-            <a:noFill/>
-            <a:prstDash val="solid"/>
-          </a:ln>
-        </p:spPr>
-        <p:txBody>
-          <a:bodyPr xmlns:a="http://schemas.openxmlformats.org/drawingml/2006/main" wrap="square" lIns="0" tIns="0" rIns="0" bIns="0" anchor="ctr">
-            <a:normAutofit fontScale="100000"/>
-          </a:bodyPr>
-          <a:lstStyle xmlns:a="http://schemas.openxmlformats.org/drawingml/2006/main"/>
-          <a:p xmlns:a="http://schemas.openxmlformats.org/drawingml/2006/main">
-            <a:pPr algn="l">
-              <a:lnSpc>
-                <a:spcPct val="100000"/>
-              </a:lnSpc>
-              <a:buNone/>
-              <a:defRPr sz="1275" b="0">
-                <a:solidFill>
-                  <a:srgbClr val="051C2A"/>
-                </a:solidFill>
-                <a:latin typeface="Calibri"/>
-                <a:ea typeface="Calibri"/>
-                <a:cs typeface="Calibri"/>
-              </a:defRPr>
-            </a:pPr>
-            <a:r>
-              <a:rPr sz="1275" b="0">
-                <a:solidFill>
-                  <a:srgbClr val="051C2A"/>
-                </a:solidFill>
-                <a:latin typeface="Calibri"/>
-                <a:ea typeface="Calibri"/>
-                <a:cs typeface="Calibri"/>
-              </a:rPr>
-              <a:t>Adjusted EBITA</a:t>
-            </a:r>
-          </a:p>
-        </p:txBody>
-      </p:sp>
-      <p:sp>
-        <p:nvSpPr>
-          <p:cNvPr id="25" name="">
-            <a:extLst xmlns:a="http://schemas.openxmlformats.org/drawingml/2006/main">
-              <a:ext uri="{FF2B5EF4-FFF2-40B4-BE49-F238E27FC236}">
-                <a16:creationId xmlns:a16="http://schemas.microsoft.com/office/drawing/2014/main" id="{FDC2AAD8-6A48-44A3-AC4D-F49A66D8BE91}"/>
-              </a:ext>
-            </a:extLst>
-          </p:cNvPr>
-          <p:cNvSpPr>
-            <a:spLocks xmlns:a="http://schemas.openxmlformats.org/drawingml/2006/main" noGrp="1"/>
-          </p:cNvSpPr>
-          <p:nvPr/>
-        </p:nvSpPr>
-        <p:spPr>
-          <a:xfrm xmlns:a="http://schemas.openxmlformats.org/drawingml/2006/main">
-            <a:off x="3314700" y="5105400"/>
-            <a:ext cx="1466850" cy="628650"/>
-          </a:xfrm>
-          <a:prstGeom xmlns:a="http://schemas.openxmlformats.org/drawingml/2006/main" prst="roundRect">
-            <a:avLst>
-              <a:gd name="adj" fmla="val 3030"/>
-            </a:avLst>
-          </a:prstGeom>
-          <a:solidFill xmlns:a="http://schemas.openxmlformats.org/drawingml/2006/main">
-            <a:srgbClr val="FAFBFC"/>
-          </a:solidFill>
-          <a:ln xmlns:a="http://schemas.openxmlformats.org/drawingml/2006/main" w="9525">
-            <a:solidFill>
-              <a:srgbClr val="FFFFFF"/>
-            </a:solidFill>
-            <a:prstDash val="solid"/>
-          </a:ln>
-        </p:spPr>
-      </p:sp>
-      <p:sp>
-        <p:nvSpPr>
-          <p:cNvPr id="26" name="">
-            <a:extLst xmlns:a="http://schemas.openxmlformats.org/drawingml/2006/main">
-              <a:ext uri="{FF2B5EF4-FFF2-40B4-BE49-F238E27FC236}">
-                <a16:creationId xmlns:a16="http://schemas.microsoft.com/office/drawing/2014/main" id="{D54B5C18-A48F-4308-B6AF-C5700495C0D8}"/>
-              </a:ext>
-            </a:extLst>
-          </p:cNvPr>
-          <p:cNvSpPr>
-            <a:spLocks xmlns:a="http://schemas.openxmlformats.org/drawingml/2006/main" noGrp="1"/>
-          </p:cNvSpPr>
-          <p:nvPr/>
-        </p:nvSpPr>
-        <p:spPr>
-          <a:xfrm xmlns:a="http://schemas.openxmlformats.org/drawingml/2006/main">
-            <a:off x="3409950" y="5210175"/>
-            <a:ext cx="1276350" cy="419100"/>
-          </a:xfrm>
-          <a:prstGeom xmlns:a="http://schemas.openxmlformats.org/drawingml/2006/main" prst="rect">
-            <a:avLst/>
-          </a:prstGeom>
-          <a:noFill xmlns:a="http://schemas.openxmlformats.org/drawingml/2006/main"/>
-          <a:ln xmlns:a="http://schemas.openxmlformats.org/drawingml/2006/main" w="0">
-            <a:noFill/>
-            <a:prstDash val="solid"/>
-          </a:ln>
-        </p:spPr>
-        <p:txBody>
-          <a:bodyPr xmlns:a="http://schemas.openxmlformats.org/drawingml/2006/main" wrap="square" lIns="0" tIns="0" rIns="0" bIns="0" anchor="ctr">
-            <a:normAutofit fontScale="100000"/>
-          </a:bodyPr>
-          <a:lstStyle xmlns:a="http://schemas.openxmlformats.org/drawingml/2006/main"/>
-          <a:p xmlns:a="http://schemas.openxmlformats.org/drawingml/2006/main">
-            <a:pPr algn="l">
-              <a:lnSpc>
-                <a:spcPct val="100000"/>
-              </a:lnSpc>
-              <a:buNone/>
-              <a:defRPr sz="1275" b="0">
-                <a:solidFill>
-                  <a:srgbClr val="051C2A"/>
-                </a:solidFill>
-                <a:latin typeface="Calibri"/>
-                <a:ea typeface="Calibri"/>
-                <a:cs typeface="Calibri"/>
-              </a:defRPr>
-            </a:pPr>
-            <a:r>
-              <a:rPr sz="1275" b="0">
-                <a:solidFill>
-                  <a:srgbClr val="051C2A"/>
-                </a:solidFill>
-                <a:latin typeface="Calibri"/>
-                <a:ea typeface="Calibri"/>
-                <a:cs typeface="Calibri"/>
-              </a:rPr>
-              <a:t>EUR 7.5bn</a:t>
-            </a:r>
-          </a:p>
-        </p:txBody>
-      </p:sp>
-      <p:sp>
-        <p:nvSpPr>
-          <p:cNvPr id="27" name="">
-            <a:extLst xmlns:a="http://schemas.openxmlformats.org/drawingml/2006/main">
-              <a:ext uri="{FF2B5EF4-FFF2-40B4-BE49-F238E27FC236}">
-                <a16:creationId xmlns:a16="http://schemas.microsoft.com/office/drawing/2014/main" id="{B71C5F41-C037-43ED-84EF-03C95B7039B8}"/>
-              </a:ext>
-            </a:extLst>
-          </p:cNvPr>
-          <p:cNvSpPr>
-            <a:spLocks xmlns:a="http://schemas.openxmlformats.org/drawingml/2006/main" noGrp="1"/>
-          </p:cNvSpPr>
-          <p:nvPr/>
-        </p:nvSpPr>
-        <p:spPr>
-          <a:xfrm xmlns:a="http://schemas.openxmlformats.org/drawingml/2006/main">
-            <a:off x="4838700" y="5105400"/>
-            <a:ext cx="1695450" cy="628650"/>
-          </a:xfrm>
-          <a:prstGeom xmlns:a="http://schemas.openxmlformats.org/drawingml/2006/main" prst="roundRect">
-            <a:avLst>
-              <a:gd name="adj" fmla="val 3030"/>
-            </a:avLst>
-          </a:prstGeom>
-          <a:solidFill xmlns:a="http://schemas.openxmlformats.org/drawingml/2006/main">
-            <a:srgbClr val="FAFBFC"/>
-          </a:solidFill>
-          <a:ln xmlns:a="http://schemas.openxmlformats.org/drawingml/2006/main" w="9525">
-            <a:solidFill>
-              <a:srgbClr val="FFFFFF"/>
-            </a:solidFill>
-            <a:prstDash val="solid"/>
-          </a:ln>
-        </p:spPr>
-      </p:sp>
-      <p:sp>
-        <p:nvSpPr>
-          <p:cNvPr id="28" name="">
-            <a:extLst xmlns:a="http://schemas.openxmlformats.org/drawingml/2006/main">
-              <a:ext uri="{FF2B5EF4-FFF2-40B4-BE49-F238E27FC236}">
-                <a16:creationId xmlns:a16="http://schemas.microsoft.com/office/drawing/2014/main" id="{067AA279-8140-4E49-8397-71EAC9AB4D92}"/>
-              </a:ext>
-            </a:extLst>
-          </p:cNvPr>
-          <p:cNvSpPr>
-            <a:spLocks xmlns:a="http://schemas.openxmlformats.org/drawingml/2006/main" noGrp="1"/>
-          </p:cNvSpPr>
-          <p:nvPr/>
-        </p:nvSpPr>
-        <p:spPr>
-          <a:xfrm xmlns:a="http://schemas.openxmlformats.org/drawingml/2006/main">
-            <a:off x="4933950" y="5210175"/>
-            <a:ext cx="1504950" cy="419100"/>
-          </a:xfrm>
-          <a:prstGeom xmlns:a="http://schemas.openxmlformats.org/drawingml/2006/main" prst="rect">
-            <a:avLst/>
-          </a:prstGeom>
-          <a:noFill xmlns:a="http://schemas.openxmlformats.org/drawingml/2006/main"/>
-          <a:ln xmlns:a="http://schemas.openxmlformats.org/drawingml/2006/main" w="0">
-            <a:noFill/>
-            <a:prstDash val="solid"/>
-          </a:ln>
-        </p:spPr>
-        <p:txBody>
-          <a:bodyPr xmlns:a="http://schemas.openxmlformats.org/drawingml/2006/main" wrap="square" lIns="0" tIns="0" rIns="0" bIns="0" anchor="ctr">
-            <a:normAutofit fontScale="100000"/>
-          </a:bodyPr>
-          <a:lstStyle xmlns:a="http://schemas.openxmlformats.org/drawingml/2006/main"/>
-          <a:p xmlns:a="http://schemas.openxmlformats.org/drawingml/2006/main">
-            <a:pPr algn="l">
-              <a:lnSpc>
-                <a:spcPct val="100000"/>
-              </a:lnSpc>
-              <a:buNone/>
-              <a:defRPr sz="1275" b="0">
-                <a:solidFill>
-                  <a:srgbClr val="051C2A"/>
-                </a:solidFill>
-                <a:latin typeface="Calibri"/>
-                <a:ea typeface="Calibri"/>
-                <a:cs typeface="Calibri"/>
-              </a:defRPr>
-            </a:pPr>
-            <a:r>
-              <a:rPr sz="1275" b="0">
-                <a:solidFill>
-                  <a:srgbClr val="051C2A"/>
-                </a:solidFill>
-                <a:latin typeface="Calibri"/>
-                <a:ea typeface="Calibri"/>
-                <a:cs typeface="Calibri"/>
-              </a:rPr>
-              <a:t>18.7% margin</a:t>
-            </a:r>
-          </a:p>
-        </p:txBody>
-      </p:sp>
-      <p:sp>
-        <p:nvSpPr>
-          <p:cNvPr id="29" name="">
-            <a:extLst xmlns:a="http://schemas.openxmlformats.org/drawingml/2006/main">
-              <a:ext uri="{FF2B5EF4-FFF2-40B4-BE49-F238E27FC236}">
-                <a16:creationId xmlns:a16="http://schemas.microsoft.com/office/drawing/2014/main" id="{DB32E82F-D354-4D7C-A51F-92A2FFCBA73D}"/>
-              </a:ext>
-            </a:extLst>
-          </p:cNvPr>
-          <p:cNvSpPr>
-            <a:spLocks xmlns:a="http://schemas.openxmlformats.org/drawingml/2006/main" noGrp="1"/>
-          </p:cNvSpPr>
-          <p:nvPr/>
-        </p:nvSpPr>
-        <p:spPr>
-          <a:xfrm xmlns:a="http://schemas.openxmlformats.org/drawingml/2006/main">
-            <a:off x="7924800" y="2324100"/>
-            <a:ext cx="2952750" cy="304800"/>
-          </a:xfrm>
-          <a:prstGeom xmlns:a="http://schemas.openxmlformats.org/drawingml/2006/main" prst="rect">
-            <a:avLst/>
-          </a:prstGeom>
-          <a:noFill xmlns:a="http://schemas.openxmlformats.org/drawingml/2006/main"/>
-          <a:ln xmlns:a="http://schemas.openxmlformats.org/drawingml/2006/main" w="0">
-            <a:noFill/>
-            <a:prstDash val="solid"/>
-          </a:ln>
-        </p:spPr>
-        <p:txBody>
-          <a:bodyPr xmlns:a="http://schemas.openxmlformats.org/drawingml/2006/main" wrap="square" lIns="0" tIns="0" rIns="0" bIns="0" anchor="ctr">
-            <a:normAutofit fontScale="100000"/>
-          </a:bodyPr>
-          <a:lstStyle xmlns:a="http://schemas.openxmlformats.org/drawingml/2006/main"/>
-          <a:p xmlns:a="http://schemas.openxmlformats.org/drawingml/2006/main">
-            <a:pPr algn="l">
-              <a:lnSpc>
-                <a:spcPct val="100000"/>
-              </a:lnSpc>
-              <a:buNone/>
-              <a:defRPr sz="1350" b="1">
-                <a:solidFill>
                   <a:srgbClr val="1F40CB"/>
                 </a:solidFill>
                 <a:latin typeface="Calibri"/>
                 <a:ea typeface="Calibri"/>
                 <a:cs typeface="Calibri"/>
-              </a:defRPr>
-            </a:pPr>
-            <a:r>
-              <a:rPr sz="1350" b="1">
-                <a:solidFill>
-                  <a:srgbClr val="1F40CB"/>
-                </a:solidFill>
-                <a:latin typeface="Calibri"/>
-                <a:ea typeface="Calibri"/>
-                <a:cs typeface="Calibri"/>
-              </a:rPr>
-              <a:t>LINEAR EXTRACTION</a:t>
+              </a:rPr>
+              <a:t>DEFAULT PDFPLUMBER OUTPUT</a:t>
             </a:r>
           </a:p>
         </p:txBody>
@@ -4548,7 +3380,7 @@
                 <a:ea typeface="Courier New"/>
                 <a:cs typeface="Courier New"/>
               </a:rPr>
-              <a:t>01   Metric  FY2025  Change</a:t>
+              <a:t>DEFAULT: 9 rows × 15 columns</a:t>
             </a:r>
           </a:p>
         </p:txBody>
@@ -4610,7 +3442,7 @@
                 <a:ea typeface="Courier New"/>
                 <a:cs typeface="Courier New"/>
               </a:rPr>
-              <a:t>02   Revenue  EUR 40.2bn  +8.9%</a:t>
+              <a:t>Header: Key figures | ∅ | ∅ | 2024 FY | …</a:t>
             </a:r>
           </a:p>
         </p:txBody>
@@ -4672,7 +3504,7 @@
                 <a:ea typeface="Courier New"/>
                 <a:cs typeface="Courier New"/>
               </a:rPr>
-              <a:t>03   Energy Management  n/a  +10%</a:t>
+              <a:t>Revenue: ∅ | 38,153 | ∅ | 40,152 | …</a:t>
             </a:r>
           </a:p>
         </p:txBody>
@@ -4734,7 +3566,7 @@
                 <a:ea typeface="Courier New"/>
                 <a:cs typeface="Courier New"/>
               </a:rPr>
-              <a:t>04   Adjusted EBITA  EUR 7.5bn  18.7% margin</a:t>
+              <a:t>Result: visually plausible, structurally ambiguous</a:t>
             </a:r>
           </a:p>
         </p:txBody>
@@ -4831,14 +3663,14 @@
                 <a:ea typeface="Calibri"/>
                 <a:cs typeface="Calibri"/>
               </a:rPr>
-              <a:t>Reading order alone does not encode row/column meaning.</a:t>
+              <a:t>Geometry is detected; schema still needs validation.</a:t>
             </a:r>
           </a:p>
         </p:txBody>
       </p:sp>
       <p:cxnSp>
         <p:nvCxnSpPr>
-          <p:cNvPr id="265" name=""/>
+          <p:cNvPr id="345" name=""/>
           <p:cNvCxnSpPr>
             <a:stCxn xmlns:a="http://schemas.openxmlformats.org/drawingml/2006/main" id="4" idx="3"/>
             <a:endCxn xmlns:a="http://schemas.openxmlformats.org/drawingml/2006/main" id="30" idx="1"/>
@@ -4919,7 +3751,7 @@
                 <a:ea typeface="Calibri"/>
                 <a:cs typeface="Calibri"/>
               </a:rPr>
-              <a:t>A number is safe evidence only when its label, period, unit and source survive.</a:t>
+              <a:t>A table is evidence only after headers, rows, units and provenance pass.</a:t>
             </a:r>
           </a:p>
         </p:txBody>
@@ -5172,6 +4004,79 @@
                 <a:cs typeface="Calibri"/>
               </a:rPr>
               <a:t>02</a:t>
+            </a:r>
+          </a:p>
+        </p:txBody>
+      </p:sp>
+      <p:pic>
+        <p:nvPicPr>
+          <p:cNvPr id="352" name=""/>
+          <p:cNvPicPr>
+            <a:picLocks xmlns:a="http://schemas.openxmlformats.org/drawingml/2006/main" noChangeAspect="1"/>
+          </p:cNvPicPr>
+          <p:nvPr/>
+        </p:nvPicPr>
+        <p:blipFill>
+          <a:blip xmlns:r="http://schemas.openxmlformats.org/officeDocument/2006/relationships" xmlns:a="http://schemas.openxmlformats.org/drawingml/2006/main" r:embed="Rbdc0edfa33194915"/>
+          <a:stretch xmlns:a="http://schemas.openxmlformats.org/drawingml/2006/main"/>
+        </p:blipFill>
+        <p:spPr>
+          <a:xfrm xmlns:a="http://schemas.openxmlformats.org/drawingml/2006/main">
+            <a:off x="1162050" y="3404347"/>
+            <a:ext cx="5543550" cy="1630456"/>
+          </a:xfrm>
+          <a:prstGeom xmlns:a="http://schemas.openxmlformats.org/drawingml/2006/main" prst="rect">
+            <a:avLst/>
+          </a:prstGeom>
+        </p:spPr>
+      </p:pic>
+      <p:sp>
+        <p:nvSpPr>
+          <p:cNvPr id="304" name="">
+            <a:extLst xmlns:a="http://schemas.openxmlformats.org/drawingml/2006/main">
+              <a:ext uri="{FF2B5EF4-FFF2-40B4-BE49-F238E27FC236}">
+                <a16:creationId xmlns:a16="http://schemas.microsoft.com/office/drawing/2014/main" id="{E0AA8396-F9FE-4C7D-873C-1D8FAF451C00}"/>
+              </a:ext>
+            </a:extLst>
+          </p:cNvPr>
+          <p:cNvSpPr>
+            <a:spLocks xmlns:a="http://schemas.openxmlformats.org/drawingml/2006/main" noGrp="1"/>
+          </p:cNvSpPr>
+          <p:nvPr/>
+        </p:nvSpPr>
+        <p:spPr>
+          <a:xfrm xmlns:a="http://schemas.openxmlformats.org/drawingml/2006/main">
+            <a:off x="1257300" y="5600700"/>
+            <a:ext cx="5391150" cy="266700"/>
+          </a:xfrm>
+          <a:prstGeom xmlns:a="http://schemas.openxmlformats.org/drawingml/2006/main" prst="rect">
+            <a:avLst/>
+          </a:prstGeom>
+          <a:noFill xmlns:a="http://schemas.openxmlformats.org/drawingml/2006/main"/>
+          <a:ln xmlns:a="http://schemas.openxmlformats.org/drawingml/2006/main" w="0">
+            <a:noFill/>
+            <a:prstDash val="solid"/>
+          </a:ln>
+        </p:spPr>
+        <p:txBody>
+          <a:bodyPr xmlns:a="http://schemas.openxmlformats.org/drawingml/2006/main"/>
+          <a:lstStyle xmlns:a="http://schemas.openxmlformats.org/drawingml/2006/main"/>
+          <a:p xmlns:a="http://schemas.openxmlformats.org/drawingml/2006/main">
+            <a:pPr>
+              <a:buNone/>
+              <a:defRPr sz="975" i="1">
+                <a:solidFill>
+                  <a:srgbClr val="607085"/>
+                </a:solidFill>
+              </a:defRPr>
+            </a:pPr>
+            <a:r>
+              <a:rPr sz="975" i="1">
+                <a:solidFill>
+                  <a:srgbClr val="607085"/>
+                </a:solidFill>
+              </a:rPr>
+              <a:t>Official Schneider Electric FY2025 results · page 1</a:t>
             </a:r>
           </a:p>
         </p:txBody>
@@ -5262,7 +4167,7 @@
                 <a:ea typeface="Calibri"/>
                 <a:cs typeface="Calibri"/>
               </a:rPr>
-              <a:t>PARSER LADDER</a:t>
+              <a:t>TABLE QUALITY GATE</a:t>
             </a:r>
           </a:p>
         </p:txBody>
@@ -5324,7 +4229,7 @@
                 <a:ea typeface="Calibri"/>
                 <a:cs typeface="Calibri"/>
               </a:rPr>
-              <a:t>Verify extraction quality before choosing chunk boundaries</a:t>
+              <a:t>Table detection is not evidence until the schema passes</a:t>
             </a:r>
           </a:p>
         </p:txBody>
@@ -5483,7 +4388,7 @@
                 <a:ea typeface="Calibri"/>
                 <a:cs typeface="Calibri"/>
               </a:rPr>
-              <a:t>Raw source</a:t>
+              <a:t>Default extraction</a:t>
             </a:r>
           </a:p>
         </p:txBody>
@@ -5545,28 +4450,28 @@
                 <a:ea typeface="Calibri"/>
                 <a:cs typeface="Calibri"/>
               </a:rPr>
-              <a:t>HTML · PDF</a:t>
-            </a:r>
-          </a:p>
-        </p:txBody>
-      </p:sp>
-      <p:sp>
-        <p:nvSpPr>
-          <p:cNvPr id="7" name="ingestion-2">
-            <a:extLst xmlns:a="http://schemas.openxmlformats.org/drawingml/2006/main">
-              <a:ext uri="{FF2B5EF4-FFF2-40B4-BE49-F238E27FC236}">
-                <a16:creationId xmlns:a16="http://schemas.microsoft.com/office/drawing/2014/main" id="{B39DEECB-E0D1-415A-8F2A-C8075A6D97BA}"/>
-              </a:ext>
-            </a:extLst>
-          </p:cNvPr>
-          <p:cNvSpPr>
-            <a:spLocks xmlns:a="http://schemas.openxmlformats.org/drawingml/2006/main" noGrp="1"/>
-          </p:cNvSpPr>
-          <p:nvPr/>
-        </p:nvSpPr>
-        <p:spPr>
-          <a:xfrm xmlns:a="http://schemas.openxmlformats.org/drawingml/2006/main">
-            <a:off x="3810000" y="3086100"/>
+              <a:t>lines · coordinates</a:t>
+            </a:r>
+          </a:p>
+        </p:txBody>
+      </p:sp>
+      <p:sp>
+        <p:nvSpPr>
+          <p:cNvPr id="15" name="ingestion-4">
+            <a:extLst xmlns:a="http://schemas.openxmlformats.org/drawingml/2006/main">
+              <a:ext uri="{FF2B5EF4-FFF2-40B4-BE49-F238E27FC236}">
+                <a16:creationId xmlns:a16="http://schemas.microsoft.com/office/drawing/2014/main" id="{7952DE37-BD86-481C-A575-8709971DD74E}"/>
+              </a:ext>
+            </a:extLst>
+          </p:cNvPr>
+          <p:cNvSpPr>
+            <a:spLocks xmlns:a="http://schemas.openxmlformats.org/drawingml/2006/main" noGrp="1"/>
+          </p:cNvSpPr>
+          <p:nvPr/>
+        </p:nvSpPr>
+        <p:spPr>
+          <a:xfrm xmlns:a="http://schemas.openxmlformats.org/drawingml/2006/main">
+            <a:off x="9448800" y="3086100"/>
             <a:ext cx="2247900" cy="2266950"/>
           </a:xfrm>
           <a:prstGeom xmlns:a="http://schemas.openxmlformats.org/drawingml/2006/main" prst="roundRect">
@@ -5587,21 +4492,21 @@
       </p:sp>
       <p:sp>
         <p:nvSpPr>
-          <p:cNvPr id="8" name="">
-            <a:extLst xmlns:a="http://schemas.openxmlformats.org/drawingml/2006/main">
-              <a:ext uri="{FF2B5EF4-FFF2-40B4-BE49-F238E27FC236}">
-                <a16:creationId xmlns:a16="http://schemas.microsoft.com/office/drawing/2014/main" id="{18679081-8A68-4B7E-9199-340CF95714DE}"/>
-              </a:ext>
-            </a:extLst>
-          </p:cNvPr>
-          <p:cNvSpPr>
-            <a:spLocks xmlns:a="http://schemas.openxmlformats.org/drawingml/2006/main" noGrp="1"/>
-          </p:cNvSpPr>
-          <p:nvPr/>
-        </p:nvSpPr>
-        <p:spPr>
-          <a:xfrm xmlns:a="http://schemas.openxmlformats.org/drawingml/2006/main">
-            <a:off x="4000500" y="3295650"/>
+          <p:cNvPr id="16" name="">
+            <a:extLst xmlns:a="http://schemas.openxmlformats.org/drawingml/2006/main">
+              <a:ext uri="{FF2B5EF4-FFF2-40B4-BE49-F238E27FC236}">
+                <a16:creationId xmlns:a16="http://schemas.microsoft.com/office/drawing/2014/main" id="{62EC2EC9-18A1-4F72-A64D-AF536DDC8F61}"/>
+              </a:ext>
+            </a:extLst>
+          </p:cNvPr>
+          <p:cNvSpPr>
+            <a:spLocks xmlns:a="http://schemas.openxmlformats.org/drawingml/2006/main" noGrp="1"/>
+          </p:cNvSpPr>
+          <p:nvPr/>
+        </p:nvSpPr>
+        <p:spPr>
+          <a:xfrm xmlns:a="http://schemas.openxmlformats.org/drawingml/2006/main">
+            <a:off x="9639300" y="3295650"/>
             <a:ext cx="514350" cy="285750"/>
           </a:xfrm>
           <a:prstGeom xmlns:a="http://schemas.openxmlformats.org/drawingml/2006/main" prst="rect">
@@ -5642,28 +4547,28 @@
                 <a:ea typeface="Calibri"/>
                 <a:cs typeface="Calibri"/>
               </a:rPr>
-              <a:t>02</a:t>
-            </a:r>
-          </a:p>
-        </p:txBody>
-      </p:sp>
-      <p:sp>
-        <p:nvSpPr>
-          <p:cNvPr id="9" name="">
-            <a:extLst xmlns:a="http://schemas.openxmlformats.org/drawingml/2006/main">
-              <a:ext uri="{FF2B5EF4-FFF2-40B4-BE49-F238E27FC236}">
-                <a16:creationId xmlns:a16="http://schemas.microsoft.com/office/drawing/2014/main" id="{ED095E54-44DC-4092-9EB7-0C81E4B47710}"/>
-              </a:ext>
-            </a:extLst>
-          </p:cNvPr>
-          <p:cNvSpPr>
-            <a:spLocks xmlns:a="http://schemas.openxmlformats.org/drawingml/2006/main" noGrp="1"/>
-          </p:cNvSpPr>
-          <p:nvPr/>
-        </p:nvSpPr>
-        <p:spPr>
-          <a:xfrm xmlns:a="http://schemas.openxmlformats.org/drawingml/2006/main">
-            <a:off x="3924300" y="3752850"/>
+              <a:t>03</a:t>
+            </a:r>
+          </a:p>
+        </p:txBody>
+      </p:sp>
+      <p:sp>
+        <p:nvSpPr>
+          <p:cNvPr id="17" name="">
+            <a:extLst xmlns:a="http://schemas.openxmlformats.org/drawingml/2006/main">
+              <a:ext uri="{FF2B5EF4-FFF2-40B4-BE49-F238E27FC236}">
+                <a16:creationId xmlns:a16="http://schemas.microsoft.com/office/drawing/2014/main" id="{8540FD5A-1C0F-4BE1-B862-685F20D0F43C}"/>
+              </a:ext>
+            </a:extLst>
+          </p:cNvPr>
+          <p:cNvSpPr>
+            <a:spLocks xmlns:a="http://schemas.openxmlformats.org/drawingml/2006/main" noGrp="1"/>
+          </p:cNvSpPr>
+          <p:nvPr/>
+        </p:nvSpPr>
+        <p:spPr>
+          <a:xfrm xmlns:a="http://schemas.openxmlformats.org/drawingml/2006/main">
+            <a:off x="9563100" y="3752850"/>
             <a:ext cx="2019300" cy="685800"/>
           </a:xfrm>
           <a:prstGeom xmlns:a="http://schemas.openxmlformats.org/drawingml/2006/main" prst="rect">
@@ -5704,28 +4609,28 @@
                 <a:ea typeface="Calibri"/>
                 <a:cs typeface="Calibri"/>
               </a:rPr>
-              <a:t>Text extraction</a:t>
-            </a:r>
-          </a:p>
-        </p:txBody>
-      </p:sp>
-      <p:sp>
-        <p:nvSpPr>
-          <p:cNvPr id="10" name="">
-            <a:extLst xmlns:a="http://schemas.openxmlformats.org/drawingml/2006/main">
-              <a:ext uri="{FF2B5EF4-FFF2-40B4-BE49-F238E27FC236}">
-                <a16:creationId xmlns:a16="http://schemas.microsoft.com/office/drawing/2014/main" id="{4DB65E8E-6BA9-40DB-99F9-46D3397B13A3}"/>
-              </a:ext>
-            </a:extLst>
-          </p:cNvPr>
-          <p:cNvSpPr>
-            <a:spLocks xmlns:a="http://schemas.openxmlformats.org/drawingml/2006/main" noGrp="1"/>
-          </p:cNvSpPr>
-          <p:nvPr/>
-        </p:nvSpPr>
-        <p:spPr>
-          <a:xfrm xmlns:a="http://schemas.openxmlformats.org/drawingml/2006/main">
-            <a:off x="4000500" y="4610100"/>
+              <a:t>Validate schema</a:t>
+            </a:r>
+          </a:p>
+        </p:txBody>
+      </p:sp>
+      <p:sp>
+        <p:nvSpPr>
+          <p:cNvPr id="18" name="">
+            <a:extLst xmlns:a="http://schemas.openxmlformats.org/drawingml/2006/main">
+              <a:ext uri="{FF2B5EF4-FFF2-40B4-BE49-F238E27FC236}">
+                <a16:creationId xmlns:a16="http://schemas.microsoft.com/office/drawing/2014/main" id="{67E52B70-645C-40F7-B0DE-1D1D177875CC}"/>
+              </a:ext>
+            </a:extLst>
+          </p:cNvPr>
+          <p:cNvSpPr>
+            <a:spLocks xmlns:a="http://schemas.openxmlformats.org/drawingml/2006/main" noGrp="1"/>
+          </p:cNvSpPr>
+          <p:nvPr/>
+        </p:nvSpPr>
+        <p:spPr>
+          <a:xfrm xmlns:a="http://schemas.openxmlformats.org/drawingml/2006/main">
+            <a:off x="9639300" y="4610100"/>
             <a:ext cx="1866900" cy="514350"/>
           </a:xfrm>
           <a:prstGeom xmlns:a="http://schemas.openxmlformats.org/drawingml/2006/main" prst="rect">
@@ -5766,449 +4671,7 @@
                 <a:ea typeface="Calibri"/>
                 <a:cs typeface="Calibri"/>
               </a:rPr>
-              <a:t>characters · words · lines</a:t>
-            </a:r>
-          </a:p>
-        </p:txBody>
-      </p:sp>
-      <p:sp>
-        <p:nvSpPr>
-          <p:cNvPr id="11" name="ingestion-3">
-            <a:extLst xmlns:a="http://schemas.openxmlformats.org/drawingml/2006/main">
-              <a:ext uri="{FF2B5EF4-FFF2-40B4-BE49-F238E27FC236}">
-                <a16:creationId xmlns:a16="http://schemas.microsoft.com/office/drawing/2014/main" id="{D4342A97-3791-461F-A305-9671DA4948CE}"/>
-              </a:ext>
-            </a:extLst>
-          </p:cNvPr>
-          <p:cNvSpPr>
-            <a:spLocks xmlns:a="http://schemas.openxmlformats.org/drawingml/2006/main" noGrp="1"/>
-          </p:cNvSpPr>
-          <p:nvPr/>
-        </p:nvSpPr>
-        <p:spPr>
-          <a:xfrm xmlns:a="http://schemas.openxmlformats.org/drawingml/2006/main">
-            <a:off x="6629400" y="3086100"/>
-            <a:ext cx="2247900" cy="2266950"/>
-          </a:xfrm>
-          <a:prstGeom xmlns:a="http://schemas.openxmlformats.org/drawingml/2006/main" prst="roundRect">
-            <a:avLst>
-              <a:gd name="adj" fmla="val 5085"/>
-            </a:avLst>
-          </a:prstGeom>
-          <a:solidFill xmlns:a="http://schemas.openxmlformats.org/drawingml/2006/main">
-            <a:srgbClr val="062433"/>
-          </a:solidFill>
-          <a:ln xmlns:a="http://schemas.openxmlformats.org/drawingml/2006/main" w="9525">
-            <a:solidFill>
-              <a:srgbClr val="062433"/>
-            </a:solidFill>
-            <a:prstDash val="solid"/>
-          </a:ln>
-        </p:spPr>
-      </p:sp>
-      <p:sp>
-        <p:nvSpPr>
-          <p:cNvPr id="12" name="">
-            <a:extLst xmlns:a="http://schemas.openxmlformats.org/drawingml/2006/main">
-              <a:ext uri="{FF2B5EF4-FFF2-40B4-BE49-F238E27FC236}">
-                <a16:creationId xmlns:a16="http://schemas.microsoft.com/office/drawing/2014/main" id="{64E49A95-2D88-4387-8BD5-FA749ABD0960}"/>
-              </a:ext>
-            </a:extLst>
-          </p:cNvPr>
-          <p:cNvSpPr>
-            <a:spLocks xmlns:a="http://schemas.openxmlformats.org/drawingml/2006/main" noGrp="1"/>
-          </p:cNvSpPr>
-          <p:nvPr/>
-        </p:nvSpPr>
-        <p:spPr>
-          <a:xfrm xmlns:a="http://schemas.openxmlformats.org/drawingml/2006/main">
-            <a:off x="6819900" y="3295650"/>
-            <a:ext cx="514350" cy="285750"/>
-          </a:xfrm>
-          <a:prstGeom xmlns:a="http://schemas.openxmlformats.org/drawingml/2006/main" prst="rect">
-            <a:avLst/>
-          </a:prstGeom>
-          <a:noFill xmlns:a="http://schemas.openxmlformats.org/drawingml/2006/main"/>
-          <a:ln xmlns:a="http://schemas.openxmlformats.org/drawingml/2006/main" w="0">
-            <a:noFill/>
-            <a:prstDash val="solid"/>
-          </a:ln>
-        </p:spPr>
-        <p:txBody>
-          <a:bodyPr xmlns:a="http://schemas.openxmlformats.org/drawingml/2006/main" wrap="square" lIns="0" tIns="0" rIns="0" bIns="0" anchor="ctr">
-            <a:normAutofit fontScale="100000"/>
-          </a:bodyPr>
-          <a:lstStyle xmlns:a="http://schemas.openxmlformats.org/drawingml/2006/main"/>
-          <a:p xmlns:a="http://schemas.openxmlformats.org/drawingml/2006/main">
-            <a:pPr algn="l">
-              <a:lnSpc>
-                <a:spcPct val="100000"/>
-              </a:lnSpc>
-              <a:buNone/>
-              <a:defRPr sz="1350" b="1">
-                <a:solidFill>
-                  <a:srgbClr val="00A2EB"/>
-                </a:solidFill>
-                <a:latin typeface="Calibri"/>
-                <a:ea typeface="Calibri"/>
-                <a:cs typeface="Calibri"/>
-              </a:defRPr>
-            </a:pPr>
-            <a:r>
-              <a:rPr sz="1350" b="1">
-                <a:solidFill>
-                  <a:srgbClr val="00A2EB"/>
-                </a:solidFill>
-                <a:latin typeface="Calibri"/>
-                <a:ea typeface="Calibri"/>
-                <a:cs typeface="Calibri"/>
-              </a:rPr>
-              <a:t>03</a:t>
-            </a:r>
-          </a:p>
-        </p:txBody>
-      </p:sp>
-      <p:sp>
-        <p:nvSpPr>
-          <p:cNvPr id="13" name="">
-            <a:extLst xmlns:a="http://schemas.openxmlformats.org/drawingml/2006/main">
-              <a:ext uri="{FF2B5EF4-FFF2-40B4-BE49-F238E27FC236}">
-                <a16:creationId xmlns:a16="http://schemas.microsoft.com/office/drawing/2014/main" id="{572D3874-F985-4CD0-BBFF-D59F5B7B32BE}"/>
-              </a:ext>
-            </a:extLst>
-          </p:cNvPr>
-          <p:cNvSpPr>
-            <a:spLocks xmlns:a="http://schemas.openxmlformats.org/drawingml/2006/main" noGrp="1"/>
-          </p:cNvSpPr>
-          <p:nvPr/>
-        </p:nvSpPr>
-        <p:spPr>
-          <a:xfrm xmlns:a="http://schemas.openxmlformats.org/drawingml/2006/main">
-            <a:off x="6743700" y="3752850"/>
-            <a:ext cx="2019300" cy="685800"/>
-          </a:xfrm>
-          <a:prstGeom xmlns:a="http://schemas.openxmlformats.org/drawingml/2006/main" prst="rect">
-            <a:avLst/>
-          </a:prstGeom>
-          <a:noFill xmlns:a="http://schemas.openxmlformats.org/drawingml/2006/main"/>
-          <a:ln xmlns:a="http://schemas.openxmlformats.org/drawingml/2006/main" w="0">
-            <a:noFill/>
-            <a:prstDash val="solid"/>
-          </a:ln>
-        </p:spPr>
-        <p:txBody>
-          <a:bodyPr xmlns:a="http://schemas.openxmlformats.org/drawingml/2006/main" wrap="square" lIns="0" tIns="0" rIns="0" bIns="0" anchor="ctr">
-            <a:normAutofit fontScale="100000"/>
-          </a:bodyPr>
-          <a:lstStyle xmlns:a="http://schemas.openxmlformats.org/drawingml/2006/main"/>
-          <a:p xmlns:a="http://schemas.openxmlformats.org/drawingml/2006/main">
-            <a:pPr algn="l">
-              <a:lnSpc>
-                <a:spcPct val="100000"/>
-              </a:lnSpc>
-              <a:buNone/>
-              <a:defRPr sz="1650" b="1">
-                <a:solidFill>
-                  <a:srgbClr val="FFFFFF"/>
-                </a:solidFill>
-                <a:latin typeface="Calibri"/>
-                <a:ea typeface="Calibri"/>
-                <a:cs typeface="Calibri"/>
-              </a:defRPr>
-            </a:pPr>
-            <a:r>
-              <a:rPr sz="1650" b="1">
-                <a:solidFill>
-                  <a:srgbClr val="FFFFFF"/>
-                </a:solidFill>
-                <a:latin typeface="Calibri"/>
-                <a:ea typeface="Calibri"/>
-                <a:cs typeface="Calibri"/>
-              </a:rPr>
-              <a:t>Layout recovery</a:t>
-            </a:r>
-          </a:p>
-        </p:txBody>
-      </p:sp>
-      <p:sp>
-        <p:nvSpPr>
-          <p:cNvPr id="14" name="">
-            <a:extLst xmlns:a="http://schemas.openxmlformats.org/drawingml/2006/main">
-              <a:ext uri="{FF2B5EF4-FFF2-40B4-BE49-F238E27FC236}">
-                <a16:creationId xmlns:a16="http://schemas.microsoft.com/office/drawing/2014/main" id="{9599AF29-91DE-47C0-8189-B0778BB52724}"/>
-              </a:ext>
-            </a:extLst>
-          </p:cNvPr>
-          <p:cNvSpPr>
-            <a:spLocks xmlns:a="http://schemas.openxmlformats.org/drawingml/2006/main" noGrp="1"/>
-          </p:cNvSpPr>
-          <p:nvPr/>
-        </p:nvSpPr>
-        <p:spPr>
-          <a:xfrm xmlns:a="http://schemas.openxmlformats.org/drawingml/2006/main">
-            <a:off x="6819900" y="4610100"/>
-            <a:ext cx="1866900" cy="514350"/>
-          </a:xfrm>
-          <a:prstGeom xmlns:a="http://schemas.openxmlformats.org/drawingml/2006/main" prst="rect">
-            <a:avLst/>
-          </a:prstGeom>
-          <a:noFill xmlns:a="http://schemas.openxmlformats.org/drawingml/2006/main"/>
-          <a:ln xmlns:a="http://schemas.openxmlformats.org/drawingml/2006/main" w="0">
-            <a:noFill/>
-            <a:prstDash val="solid"/>
-          </a:ln>
-        </p:spPr>
-        <p:txBody>
-          <a:bodyPr xmlns:a="http://schemas.openxmlformats.org/drawingml/2006/main" wrap="square" lIns="0" tIns="0" rIns="0" bIns="0" anchor="ctr">
-            <a:normAutofit fontScale="100000"/>
-          </a:bodyPr>
-          <a:lstStyle xmlns:a="http://schemas.openxmlformats.org/drawingml/2006/main"/>
-          <a:p xmlns:a="http://schemas.openxmlformats.org/drawingml/2006/main">
-            <a:pPr algn="l">
-              <a:lnSpc>
-                <a:spcPct val="100000"/>
-              </a:lnSpc>
-              <a:buNone/>
-              <a:defRPr sz="1200" b="0">
-                <a:solidFill>
-                  <a:srgbClr val="00A2EB"/>
-                </a:solidFill>
-                <a:latin typeface="Calibri"/>
-                <a:ea typeface="Calibri"/>
-                <a:cs typeface="Calibri"/>
-              </a:defRPr>
-            </a:pPr>
-            <a:r>
-              <a:rPr sz="1200" b="0">
-                <a:solidFill>
-                  <a:srgbClr val="00A2EB"/>
-                </a:solidFill>
-                <a:latin typeface="Calibri"/>
-                <a:ea typeface="Calibri"/>
-                <a:cs typeface="Calibri"/>
-              </a:rPr>
-              <a:t>tables · headings · order</a:t>
-            </a:r>
-          </a:p>
-        </p:txBody>
-      </p:sp>
-      <p:sp>
-        <p:nvSpPr>
-          <p:cNvPr id="15" name="ingestion-4">
-            <a:extLst xmlns:a="http://schemas.openxmlformats.org/drawingml/2006/main">
-              <a:ext uri="{FF2B5EF4-FFF2-40B4-BE49-F238E27FC236}">
-                <a16:creationId xmlns:a16="http://schemas.microsoft.com/office/drawing/2014/main" id="{7952DE37-BD86-481C-A575-8709971DD74E}"/>
-              </a:ext>
-            </a:extLst>
-          </p:cNvPr>
-          <p:cNvSpPr>
-            <a:spLocks xmlns:a="http://schemas.openxmlformats.org/drawingml/2006/main" noGrp="1"/>
-          </p:cNvSpPr>
-          <p:nvPr/>
-        </p:nvSpPr>
-        <p:spPr>
-          <a:xfrm xmlns:a="http://schemas.openxmlformats.org/drawingml/2006/main">
-            <a:off x="9448800" y="3086100"/>
-            <a:ext cx="2247900" cy="2266950"/>
-          </a:xfrm>
-          <a:prstGeom xmlns:a="http://schemas.openxmlformats.org/drawingml/2006/main" prst="roundRect">
-            <a:avLst>
-              <a:gd name="adj" fmla="val 5085"/>
-            </a:avLst>
-          </a:prstGeom>
-          <a:solidFill xmlns:a="http://schemas.openxmlformats.org/drawingml/2006/main">
-            <a:srgbClr val="FFFFFF"/>
-          </a:solidFill>
-          <a:ln xmlns:a="http://schemas.openxmlformats.org/drawingml/2006/main" w="9525">
-            <a:solidFill>
-              <a:srgbClr val="E4E7E9"/>
-            </a:solidFill>
-            <a:prstDash val="solid"/>
-          </a:ln>
-        </p:spPr>
-      </p:sp>
-      <p:sp>
-        <p:nvSpPr>
-          <p:cNvPr id="16" name="">
-            <a:extLst xmlns:a="http://schemas.openxmlformats.org/drawingml/2006/main">
-              <a:ext uri="{FF2B5EF4-FFF2-40B4-BE49-F238E27FC236}">
-                <a16:creationId xmlns:a16="http://schemas.microsoft.com/office/drawing/2014/main" id="{62EC2EC9-18A1-4F72-A64D-AF536DDC8F61}"/>
-              </a:ext>
-            </a:extLst>
-          </p:cNvPr>
-          <p:cNvSpPr>
-            <a:spLocks xmlns:a="http://schemas.openxmlformats.org/drawingml/2006/main" noGrp="1"/>
-          </p:cNvSpPr>
-          <p:nvPr/>
-        </p:nvSpPr>
-        <p:spPr>
-          <a:xfrm xmlns:a="http://schemas.openxmlformats.org/drawingml/2006/main">
-            <a:off x="9639300" y="3295650"/>
-            <a:ext cx="514350" cy="285750"/>
-          </a:xfrm>
-          <a:prstGeom xmlns:a="http://schemas.openxmlformats.org/drawingml/2006/main" prst="rect">
-            <a:avLst/>
-          </a:prstGeom>
-          <a:noFill xmlns:a="http://schemas.openxmlformats.org/drawingml/2006/main"/>
-          <a:ln xmlns:a="http://schemas.openxmlformats.org/drawingml/2006/main" w="0">
-            <a:noFill/>
-            <a:prstDash val="solid"/>
-          </a:ln>
-        </p:spPr>
-        <p:txBody>
-          <a:bodyPr xmlns:a="http://schemas.openxmlformats.org/drawingml/2006/main" wrap="square" lIns="0" tIns="0" rIns="0" bIns="0" anchor="ctr">
-            <a:normAutofit fontScale="100000"/>
-          </a:bodyPr>
-          <a:lstStyle xmlns:a="http://schemas.openxmlformats.org/drawingml/2006/main"/>
-          <a:p xmlns:a="http://schemas.openxmlformats.org/drawingml/2006/main">
-            <a:pPr algn="l">
-              <a:lnSpc>
-                <a:spcPct val="100000"/>
-              </a:lnSpc>
-              <a:buNone/>
-              <a:defRPr sz="1350" b="1">
-                <a:solidFill>
-                  <a:srgbClr val="00A2EB"/>
-                </a:solidFill>
-                <a:latin typeface="Calibri"/>
-                <a:ea typeface="Calibri"/>
-                <a:cs typeface="Calibri"/>
-              </a:defRPr>
-            </a:pPr>
-            <a:r>
-              <a:rPr sz="1350" b="1">
-                <a:solidFill>
-                  <a:srgbClr val="00A2EB"/>
-                </a:solidFill>
-                <a:latin typeface="Calibri"/>
-                <a:ea typeface="Calibri"/>
-                <a:cs typeface="Calibri"/>
-              </a:rPr>
-              <a:t>04</a:t>
-            </a:r>
-          </a:p>
-        </p:txBody>
-      </p:sp>
-      <p:sp>
-        <p:nvSpPr>
-          <p:cNvPr id="17" name="">
-            <a:extLst xmlns:a="http://schemas.openxmlformats.org/drawingml/2006/main">
-              <a:ext uri="{FF2B5EF4-FFF2-40B4-BE49-F238E27FC236}">
-                <a16:creationId xmlns:a16="http://schemas.microsoft.com/office/drawing/2014/main" id="{8540FD5A-1C0F-4BE1-B862-685F20D0F43C}"/>
-              </a:ext>
-            </a:extLst>
-          </p:cNvPr>
-          <p:cNvSpPr>
-            <a:spLocks xmlns:a="http://schemas.openxmlformats.org/drawingml/2006/main" noGrp="1"/>
-          </p:cNvSpPr>
-          <p:nvPr/>
-        </p:nvSpPr>
-        <p:spPr>
-          <a:xfrm xmlns:a="http://schemas.openxmlformats.org/drawingml/2006/main">
-            <a:off x="9563100" y="3752850"/>
-            <a:ext cx="2019300" cy="685800"/>
-          </a:xfrm>
-          <a:prstGeom xmlns:a="http://schemas.openxmlformats.org/drawingml/2006/main" prst="rect">
-            <a:avLst/>
-          </a:prstGeom>
-          <a:noFill xmlns:a="http://schemas.openxmlformats.org/drawingml/2006/main"/>
-          <a:ln xmlns:a="http://schemas.openxmlformats.org/drawingml/2006/main" w="0">
-            <a:noFill/>
-            <a:prstDash val="solid"/>
-          </a:ln>
-        </p:spPr>
-        <p:txBody>
-          <a:bodyPr xmlns:a="http://schemas.openxmlformats.org/drawingml/2006/main" wrap="square" lIns="0" tIns="0" rIns="0" bIns="0" anchor="ctr">
-            <a:normAutofit fontScale="100000"/>
-          </a:bodyPr>
-          <a:lstStyle xmlns:a="http://schemas.openxmlformats.org/drawingml/2006/main"/>
-          <a:p xmlns:a="http://schemas.openxmlformats.org/drawingml/2006/main">
-            <a:pPr algn="l">
-              <a:lnSpc>
-                <a:spcPct val="100000"/>
-              </a:lnSpc>
-              <a:buNone/>
-              <a:defRPr sz="1950" b="1">
-                <a:solidFill>
-                  <a:srgbClr val="051C2A"/>
-                </a:solidFill>
-                <a:latin typeface="Calibri"/>
-                <a:ea typeface="Calibri"/>
-                <a:cs typeface="Calibri"/>
-              </a:defRPr>
-            </a:pPr>
-            <a:r>
-              <a:rPr sz="1950" b="1">
-                <a:solidFill>
-                  <a:srgbClr val="051C2A"/>
-                </a:solidFill>
-                <a:latin typeface="Calibri"/>
-                <a:ea typeface="Calibri"/>
-                <a:cs typeface="Calibri"/>
-              </a:rPr>
-              <a:t>DocumentBlock</a:t>
-            </a:r>
-          </a:p>
-        </p:txBody>
-      </p:sp>
-      <p:sp>
-        <p:nvSpPr>
-          <p:cNvPr id="18" name="">
-            <a:extLst xmlns:a="http://schemas.openxmlformats.org/drawingml/2006/main">
-              <a:ext uri="{FF2B5EF4-FFF2-40B4-BE49-F238E27FC236}">
-                <a16:creationId xmlns:a16="http://schemas.microsoft.com/office/drawing/2014/main" id="{67E52B70-645C-40F7-B0DE-1D1D177875CC}"/>
-              </a:ext>
-            </a:extLst>
-          </p:cNvPr>
-          <p:cNvSpPr>
-            <a:spLocks xmlns:a="http://schemas.openxmlformats.org/drawingml/2006/main" noGrp="1"/>
-          </p:cNvSpPr>
-          <p:nvPr/>
-        </p:nvSpPr>
-        <p:spPr>
-          <a:xfrm xmlns:a="http://schemas.openxmlformats.org/drawingml/2006/main">
-            <a:off x="9639300" y="4610100"/>
-            <a:ext cx="1866900" cy="514350"/>
-          </a:xfrm>
-          <a:prstGeom xmlns:a="http://schemas.openxmlformats.org/drawingml/2006/main" prst="rect">
-            <a:avLst/>
-          </a:prstGeom>
-          <a:noFill xmlns:a="http://schemas.openxmlformats.org/drawingml/2006/main"/>
-          <a:ln xmlns:a="http://schemas.openxmlformats.org/drawingml/2006/main" w="0">
-            <a:noFill/>
-            <a:prstDash val="solid"/>
-          </a:ln>
-        </p:spPr>
-        <p:txBody>
-          <a:bodyPr xmlns:a="http://schemas.openxmlformats.org/drawingml/2006/main" wrap="square" lIns="0" tIns="0" rIns="0" bIns="0" anchor="ctr">
-            <a:normAutofit fontScale="100000"/>
-          </a:bodyPr>
-          <a:lstStyle xmlns:a="http://schemas.openxmlformats.org/drawingml/2006/main"/>
-          <a:p xmlns:a="http://schemas.openxmlformats.org/drawingml/2006/main">
-            <a:pPr algn="l">
-              <a:lnSpc>
-                <a:spcPct val="100000"/>
-              </a:lnSpc>
-              <a:buNone/>
-              <a:defRPr sz="1200" b="0">
-                <a:solidFill>
-                  <a:srgbClr val="1F40CB"/>
-                </a:solidFill>
-                <a:latin typeface="Calibri"/>
-                <a:ea typeface="Calibri"/>
-                <a:cs typeface="Calibri"/>
-              </a:defRPr>
-            </a:pPr>
-            <a:r>
-              <a:rPr sz="1200" b="0">
-                <a:solidFill>
-                  <a:srgbClr val="1F40CB"/>
-                </a:solidFill>
-                <a:latin typeface="Calibri"/>
-                <a:ea typeface="Calibri"/>
-                <a:cs typeface="Calibri"/>
-              </a:rPr>
-              <a:t>text · structure · provenance</a:t>
+              <a:t>headers · row widths · units</a:t>
             </a:r>
           </a:p>
         </p:txBody>
@@ -6305,7 +4768,7 @@
                 <a:ea typeface="Calibri"/>
                 <a:cs typeface="Calibri"/>
               </a:rPr>
-              <a:t>05</a:t>
+              <a:t>04</a:t>
             </a:r>
           </a:p>
         </p:txBody>
@@ -6367,7 +4830,7 @@
                 <a:ea typeface="Calibri"/>
                 <a:cs typeface="Calibri"/>
               </a:rPr>
-              <a:t>Quality gate</a:t>
+              <a:t>Optional parser</a:t>
             </a:r>
           </a:p>
         </p:txBody>
@@ -6429,23 +4892,23 @@
                 <a:ea typeface="Calibri"/>
                 <a:cs typeface="Calibri"/>
               </a:rPr>
-              <a:t>visual checks · integrity</a:t>
+              <a:t>Docling · OCR · VLM</a:t>
             </a:r>
           </a:p>
         </p:txBody>
       </p:sp>
       <p:cxnSp>
         <p:nvCxnSpPr>
-          <p:cNvPr id="187" name=""/>
+          <p:cNvPr id="266" name=""/>
           <p:cNvCxnSpPr>
-            <a:stCxn xmlns:a="http://schemas.openxmlformats.org/drawingml/2006/main" id="3" idx="3"/>
-            <a:endCxn xmlns:a="http://schemas.openxmlformats.org/drawingml/2006/main" id="7" idx="1"/>
+            <a:stCxn xmlns:a="http://schemas.openxmlformats.org/drawingml/2006/main" id="15" idx="3"/>
+            <a:endCxn xmlns:a="http://schemas.openxmlformats.org/drawingml/2006/main" id="19" idx="1"/>
           </p:cNvCxnSpPr>
           <p:nvPr/>
         </p:nvCxnSpPr>
         <p:spPr>
           <a:xfrm xmlns:a="http://schemas.openxmlformats.org/drawingml/2006/main">
-            <a:off x="3238500" y="4219575"/>
+            <a:off x="11696700" y="4219575"/>
             <a:ext cx="571500" cy="0"/>
           </a:xfrm>
           <a:prstGeom xmlns:a="http://schemas.openxmlformats.org/drawingml/2006/main" prst="straightConnector1">
@@ -6460,84 +4923,6 @@
           </a:ln>
         </p:spPr>
       </p:cxnSp>
-      <p:cxnSp>
-        <p:nvCxnSpPr>
-          <p:cNvPr id="188" name=""/>
-          <p:cNvCxnSpPr>
-            <a:stCxn xmlns:a="http://schemas.openxmlformats.org/drawingml/2006/main" id="7" idx="3"/>
-            <a:endCxn xmlns:a="http://schemas.openxmlformats.org/drawingml/2006/main" id="11" idx="1"/>
-          </p:cNvCxnSpPr>
-          <p:nvPr/>
-        </p:nvCxnSpPr>
-        <p:spPr>
-          <a:xfrm xmlns:a="http://schemas.openxmlformats.org/drawingml/2006/main">
-            <a:off x="6057900" y="4219575"/>
-            <a:ext cx="571500" cy="0"/>
-          </a:xfrm>
-          <a:prstGeom xmlns:a="http://schemas.openxmlformats.org/drawingml/2006/main" prst="straightConnector1">
-            <a:avLst/>
-          </a:prstGeom>
-          <a:ln xmlns:a="http://schemas.openxmlformats.org/drawingml/2006/main" w="28575">
-            <a:solidFill>
-              <a:srgbClr val="9A9A9F"/>
-            </a:solidFill>
-            <a:prstDash val="solid"/>
-            <a:tailEnd type="triangle" w="med" len="med"/>
-          </a:ln>
-        </p:spPr>
-      </p:cxnSp>
-      <p:cxnSp>
-        <p:nvCxnSpPr>
-          <p:cNvPr id="189" name=""/>
-          <p:cNvCxnSpPr>
-            <a:stCxn xmlns:a="http://schemas.openxmlformats.org/drawingml/2006/main" id="11" idx="3"/>
-            <a:endCxn xmlns:a="http://schemas.openxmlformats.org/drawingml/2006/main" id="15" idx="1"/>
-          </p:cNvCxnSpPr>
-          <p:nvPr/>
-        </p:nvCxnSpPr>
-        <p:spPr>
-          <a:xfrm xmlns:a="http://schemas.openxmlformats.org/drawingml/2006/main">
-            <a:off x="8877300" y="4219575"/>
-            <a:ext cx="571500" cy="0"/>
-          </a:xfrm>
-          <a:prstGeom xmlns:a="http://schemas.openxmlformats.org/drawingml/2006/main" prst="straightConnector1">
-            <a:avLst/>
-          </a:prstGeom>
-          <a:ln xmlns:a="http://schemas.openxmlformats.org/drawingml/2006/main" w="28575">
-            <a:solidFill>
-              <a:srgbClr val="9A9A9F"/>
-            </a:solidFill>
-            <a:prstDash val="solid"/>
-            <a:tailEnd type="triangle" w="med" len="med"/>
-          </a:ln>
-        </p:spPr>
-      </p:cxnSp>
-      <p:cxnSp>
-        <p:nvCxnSpPr>
-          <p:cNvPr id="190" name=""/>
-          <p:cNvCxnSpPr>
-            <a:stCxn xmlns:a="http://schemas.openxmlformats.org/drawingml/2006/main" id="15" idx="3"/>
-            <a:endCxn xmlns:a="http://schemas.openxmlformats.org/drawingml/2006/main" id="19" idx="1"/>
-          </p:cNvCxnSpPr>
-          <p:nvPr/>
-        </p:nvCxnSpPr>
-        <p:spPr>
-          <a:xfrm xmlns:a="http://schemas.openxmlformats.org/drawingml/2006/main">
-            <a:off x="11696700" y="4219575"/>
-            <a:ext cx="571500" cy="0"/>
-          </a:xfrm>
-          <a:prstGeom xmlns:a="http://schemas.openxmlformats.org/drawingml/2006/main" prst="straightConnector1">
-            <a:avLst/>
-          </a:prstGeom>
-          <a:ln xmlns:a="http://schemas.openxmlformats.org/drawingml/2006/main" w="28575">
-            <a:solidFill>
-              <a:srgbClr val="9A9A9F"/>
-            </a:solidFill>
-            <a:prstDash val="solid"/>
-            <a:tailEnd type="triangle" w="med" len="med"/>
-          </a:ln>
-        </p:spPr>
-      </p:cxnSp>
       <p:sp>
         <p:nvSpPr>
           <p:cNvPr id="27" name="">
@@ -6595,7 +4980,7 @@
                 <a:ea typeface="Calibri"/>
                 <a:cs typeface="Calibri"/>
               </a:rPr>
-              <a:t>Chunking begins only after extraction, layout and provenance pass.</a:t>
+              <a:t>Pass → create DocumentBlock. Fail → tune pdfplumber or escalate.</a:t>
             </a:r>
           </a:p>
         </p:txBody>
@@ -6657,7 +5042,7 @@
                 <a:ea typeface="Calibri"/>
                 <a:cs typeface="Calibri"/>
               </a:rPr>
-              <a:t>Extraction recovers document signals</a:t>
+              <a:t>Baseline runs everywhere</a:t>
             </a:r>
           </a:p>
         </p:txBody>
@@ -6719,7 +5104,7 @@
                 <a:ea typeface="Calibri"/>
                 <a:cs typeface="Calibri"/>
               </a:rPr>
-              <a:t>Quality gate protects evidence units</a:t>
+              <a:t>Docling remains optional</a:t>
             </a:r>
           </a:p>
         </p:txBody>
@@ -6909,7 +5294,7 @@
                 <a:ea typeface="Calibri"/>
                 <a:cs typeface="Calibri"/>
               </a:rPr>
-              <a:t>PIPELINE</a:t>
+              <a:t>QUALITY GATE</a:t>
             </a:r>
           </a:p>
         </p:txBody>
@@ -6975,6 +5360,92 @@
             </a:r>
           </a:p>
         </p:txBody>
+      </p:sp>
+      <p:pic>
+        <p:nvPicPr>
+          <p:cNvPr id="275" name=""/>
+          <p:cNvPicPr>
+            <a:picLocks xmlns:a="http://schemas.openxmlformats.org/drawingml/2006/main" noChangeAspect="1"/>
+          </p:cNvPicPr>
+          <p:nvPr/>
+        </p:nvPicPr>
+        <p:blipFill>
+          <a:blip xmlns:r="http://schemas.openxmlformats.org/officeDocument/2006/relationships" xmlns:a="http://schemas.openxmlformats.org/drawingml/2006/main" r:embed="Rb628d102e8464268"/>
+          <a:stretch xmlns:a="http://schemas.openxmlformats.org/drawingml/2006/main"/>
+        </p:blipFill>
+        <p:spPr>
+          <a:xfrm xmlns:a="http://schemas.openxmlformats.org/drawingml/2006/main">
+            <a:off x="3810000" y="3474384"/>
+            <a:ext cx="5067300" cy="1490382"/>
+          </a:xfrm>
+          <a:prstGeom xmlns:a="http://schemas.openxmlformats.org/drawingml/2006/main" prst="roundRect">
+            <a:avLst>
+              <a:gd name="adj" fmla="val 3361"/>
+            </a:avLst>
+          </a:prstGeom>
+        </p:spPr>
+      </p:pic>
+      <p:sp>
+        <p:nvSpPr>
+          <p:cNvPr id="218" name="">
+            <a:extLst xmlns:a="http://schemas.openxmlformats.org/drawingml/2006/main">
+              <a:ext uri="{FF2B5EF4-FFF2-40B4-BE49-F238E27FC236}">
+                <a16:creationId xmlns:a16="http://schemas.microsoft.com/office/drawing/2014/main" id="{CE842334-AF45-4583-9770-10890959BAED}"/>
+              </a:ext>
+            </a:extLst>
+          </p:cNvPr>
+          <p:cNvSpPr>
+            <a:spLocks xmlns:a="http://schemas.openxmlformats.org/drawingml/2006/main" noGrp="1"/>
+          </p:cNvSpPr>
+          <p:nvPr/>
+        </p:nvSpPr>
+        <p:spPr>
+          <a:xfrm xmlns:a="http://schemas.openxmlformats.org/drawingml/2006/main">
+            <a:off x="3238500" y="4162425"/>
+            <a:ext cx="571500" cy="133350"/>
+          </a:xfrm>
+          <a:prstGeom xmlns:a="http://schemas.openxmlformats.org/drawingml/2006/main" prst="rightArrow">
+            <a:avLst/>
+          </a:prstGeom>
+          <a:solidFill xmlns:a="http://schemas.openxmlformats.org/drawingml/2006/main">
+            <a:srgbClr val="0EA5E9"/>
+          </a:solidFill>
+          <a:ln xmlns:a="http://schemas.openxmlformats.org/drawingml/2006/main" w="0">
+            <a:noFill/>
+            <a:prstDash val="solid"/>
+          </a:ln>
+        </p:spPr>
+      </p:sp>
+      <p:sp>
+        <p:nvSpPr>
+          <p:cNvPr id="219" name="">
+            <a:extLst xmlns:a="http://schemas.openxmlformats.org/drawingml/2006/main">
+              <a:ext uri="{FF2B5EF4-FFF2-40B4-BE49-F238E27FC236}">
+                <a16:creationId xmlns:a16="http://schemas.microsoft.com/office/drawing/2014/main" id="{C974AEA8-A57C-49CF-B24A-A3C3DBB3BC4D}"/>
+              </a:ext>
+            </a:extLst>
+          </p:cNvPr>
+          <p:cNvSpPr>
+            <a:spLocks xmlns:a="http://schemas.openxmlformats.org/drawingml/2006/main" noGrp="1"/>
+          </p:cNvSpPr>
+          <p:nvPr/>
+        </p:nvSpPr>
+        <p:spPr>
+          <a:xfrm xmlns:a="http://schemas.openxmlformats.org/drawingml/2006/main">
+            <a:off x="8877300" y="4162425"/>
+            <a:ext cx="571500" cy="133350"/>
+          </a:xfrm>
+          <a:prstGeom xmlns:a="http://schemas.openxmlformats.org/drawingml/2006/main" prst="rightArrow">
+            <a:avLst/>
+          </a:prstGeom>
+          <a:solidFill xmlns:a="http://schemas.openxmlformats.org/drawingml/2006/main">
+            <a:srgbClr val="0EA5E9"/>
+          </a:solidFill>
+          <a:ln xmlns:a="http://schemas.openxmlformats.org/drawingml/2006/main" w="0">
+            <a:noFill/>
+            <a:prstDash val="solid"/>
+          </a:ln>
+        </p:spPr>
       </p:sp>
     </p:spTree>
     <p:extLst>
@@ -7062,7 +5533,7 @@
                 <a:ea typeface="Calibri"/>
                 <a:cs typeface="Calibri"/>
               </a:rPr>
-              <a:t>CANONICAL BLOCK</a:t>
+              <a:t>PARSING QUALITY</a:t>
             </a:r>
           </a:p>
         </p:txBody>
@@ -7097,7 +5568,7 @@
         </p:spPr>
         <p:txBody>
           <a:bodyPr xmlns:a="http://schemas.openxmlformats.org/drawingml/2006/main" wrap="none" lIns="0" tIns="0" rIns="0" bIns="0" anchor="ctr">
-            <a:normAutofit fontScale="100000"/>
+            <a:normAutofit fontScale="87416"/>
           </a:bodyPr>
           <a:lstStyle xmlns:a="http://schemas.openxmlformats.org/drawingml/2006/main"/>
           <a:p xmlns:a="http://schemas.openxmlformats.org/drawingml/2006/main">
@@ -7124,64 +5595,29 @@
                 <a:ea typeface="Calibri"/>
                 <a:cs typeface="Calibri"/>
               </a:rPr>
-              <a:t>Provenance must survive every transformation</a:t>
-            </a:r>
-          </a:p>
-        </p:txBody>
-      </p:sp>
-      <p:sp>
-        <p:nvSpPr>
-          <p:cNvPr id="3" name="canonical-block">
-            <a:extLst xmlns:a="http://schemas.openxmlformats.org/drawingml/2006/main">
-              <a:ext uri="{FF2B5EF4-FFF2-40B4-BE49-F238E27FC236}">
-                <a16:creationId xmlns:a16="http://schemas.microsoft.com/office/drawing/2014/main" id="{02D02DA8-4C0F-400F-BD3D-E5C1B80C7686}"/>
-              </a:ext>
-            </a:extLst>
-          </p:cNvPr>
-          <p:cNvSpPr>
-            <a:spLocks xmlns:a="http://schemas.openxmlformats.org/drawingml/2006/main" noGrp="1"/>
-          </p:cNvSpPr>
-          <p:nvPr/>
-        </p:nvSpPr>
-        <p:spPr>
-          <a:xfrm xmlns:a="http://schemas.openxmlformats.org/drawingml/2006/main">
-            <a:off x="5314950" y="2819400"/>
-            <a:ext cx="4610100" cy="3105150"/>
-          </a:xfrm>
-          <a:prstGeom xmlns:a="http://schemas.openxmlformats.org/drawingml/2006/main" prst="roundRect">
-            <a:avLst>
-              <a:gd name="adj" fmla="val 3681"/>
-            </a:avLst>
-          </a:prstGeom>
-          <a:solidFill xmlns:a="http://schemas.openxmlformats.org/drawingml/2006/main">
-            <a:srgbClr val="062433"/>
-          </a:solidFill>
-          <a:ln xmlns:a="http://schemas.openxmlformats.org/drawingml/2006/main" w="9525">
-            <a:solidFill>
-              <a:srgbClr val="062433"/>
-            </a:solidFill>
-            <a:prstDash val="solid"/>
-          </a:ln>
-        </p:spPr>
-      </p:sp>
-      <p:sp>
-        <p:nvSpPr>
-          <p:cNvPr id="4" name="">
-            <a:extLst xmlns:a="http://schemas.openxmlformats.org/drawingml/2006/main">
-              <a:ext uri="{FF2B5EF4-FFF2-40B4-BE49-F238E27FC236}">
-                <a16:creationId xmlns:a16="http://schemas.microsoft.com/office/drawing/2014/main" id="{38094F27-A4E9-43D6-91FC-255B527DEDAE}"/>
-              </a:ext>
-            </a:extLst>
-          </p:cNvPr>
-          <p:cNvSpPr>
-            <a:spLocks xmlns:a="http://schemas.openxmlformats.org/drawingml/2006/main" noGrp="1"/>
-          </p:cNvSpPr>
-          <p:nvPr/>
-        </p:nvSpPr>
-        <p:spPr>
-          <a:xfrm xmlns:a="http://schemas.openxmlformats.org/drawingml/2006/main">
-            <a:off x="5753100" y="3124200"/>
-            <a:ext cx="3733800" cy="514350"/>
+              <a:t>Good parsing preserves relationships; bad parsing leaves a text dump</a:t>
+            </a:r>
+          </a:p>
+        </p:txBody>
+      </p:sp>
+      <p:sp>
+        <p:nvSpPr>
+          <p:cNvPr id="32" name="">
+            <a:extLst xmlns:a="http://schemas.openxmlformats.org/drawingml/2006/main">
+              <a:ext uri="{FF2B5EF4-FFF2-40B4-BE49-F238E27FC236}">
+                <a16:creationId xmlns:a16="http://schemas.microsoft.com/office/drawing/2014/main" id="{3C75D1AF-F6AB-4A2D-841A-C9B511F5D15C}"/>
+              </a:ext>
+            </a:extLst>
+          </p:cNvPr>
+          <p:cNvSpPr>
+            <a:spLocks xmlns:a="http://schemas.openxmlformats.org/drawingml/2006/main" noGrp="1"/>
+          </p:cNvSpPr>
+          <p:nvPr/>
+        </p:nvSpPr>
+        <p:spPr>
+          <a:xfrm xmlns:a="http://schemas.openxmlformats.org/drawingml/2006/main">
+            <a:off x="2343150" y="6705600"/>
+            <a:ext cx="10553700" cy="438150"/>
           </a:xfrm>
           <a:prstGeom xmlns:a="http://schemas.openxmlformats.org/drawingml/2006/main" prst="rect">
             <a:avLst/>
@@ -7203,109 +5639,80 @@
                 <a:spcPct val="100000"/>
               </a:lnSpc>
               <a:buNone/>
-              <a:defRPr sz="2550" b="1">
-                <a:solidFill>
-                  <a:srgbClr val="FFFFFF"/>
-                </a:solidFill>
-                <a:latin typeface="Calibri"/>
-                <a:ea typeface="Calibri"/>
-                <a:cs typeface="Calibri"/>
-              </a:defRPr>
-            </a:pPr>
-            <a:r>
-              <a:rPr sz="2550" b="1">
-                <a:solidFill>
-                  <a:srgbClr val="FFFFFF"/>
-                </a:solidFill>
-                <a:latin typeface="Calibri"/>
-                <a:ea typeface="Calibri"/>
-                <a:cs typeface="Calibri"/>
-              </a:rPr>
-              <a:t>DocumentBlock</a:t>
-            </a:r>
-          </a:p>
-        </p:txBody>
-      </p:sp>
-      <p:sp>
-        <p:nvSpPr>
-          <p:cNvPr id="5" name="">
-            <a:extLst xmlns:a="http://schemas.openxmlformats.org/drawingml/2006/main">
-              <a:ext uri="{FF2B5EF4-FFF2-40B4-BE49-F238E27FC236}">
-                <a16:creationId xmlns:a16="http://schemas.microsoft.com/office/drawing/2014/main" id="{44840549-C1BA-4343-8D7C-0F20981F0C4F}"/>
-              </a:ext>
-            </a:extLst>
-          </p:cNvPr>
-          <p:cNvSpPr>
-            <a:spLocks xmlns:a="http://schemas.openxmlformats.org/drawingml/2006/main" noGrp="1"/>
-          </p:cNvSpPr>
-          <p:nvPr/>
-        </p:nvSpPr>
-        <p:spPr>
-          <a:xfrm xmlns:a="http://schemas.openxmlformats.org/drawingml/2006/main">
-            <a:off x="5753100" y="3790950"/>
-            <a:ext cx="3733800" cy="323850"/>
-          </a:xfrm>
-          <a:prstGeom xmlns:a="http://schemas.openxmlformats.org/drawingml/2006/main" prst="rect">
-            <a:avLst/>
-          </a:prstGeom>
-          <a:noFill xmlns:a="http://schemas.openxmlformats.org/drawingml/2006/main"/>
-          <a:ln xmlns:a="http://schemas.openxmlformats.org/drawingml/2006/main" w="0">
-            <a:noFill/>
-            <a:prstDash val="solid"/>
-          </a:ln>
-        </p:spPr>
-        <p:txBody>
-          <a:bodyPr xmlns:a="http://schemas.openxmlformats.org/drawingml/2006/main" wrap="square" lIns="0" tIns="0" rIns="0" bIns="0" anchor="ctr">
-            <a:normAutofit fontScale="100000"/>
-          </a:bodyPr>
-          <a:lstStyle xmlns:a="http://schemas.openxmlformats.org/drawingml/2006/main"/>
-          <a:p xmlns:a="http://schemas.openxmlformats.org/drawingml/2006/main">
-            <a:pPr algn="ctr">
-              <a:lnSpc>
-                <a:spcPct val="100000"/>
-              </a:lnSpc>
-              <a:buNone/>
-              <a:defRPr sz="1425" b="0">
-                <a:solidFill>
-                  <a:srgbClr val="00A2EB"/>
-                </a:solidFill>
-                <a:latin typeface="Calibri"/>
-                <a:ea typeface="Calibri"/>
-                <a:cs typeface="Calibri"/>
-              </a:defRPr>
-            </a:pPr>
-            <a:r>
-              <a:rPr sz="1425" b="0">
-                <a:solidFill>
-                  <a:srgbClr val="00A2EB"/>
-                </a:solidFill>
-                <a:latin typeface="Calibri"/>
-                <a:ea typeface="Calibri"/>
-                <a:cs typeface="Calibri"/>
-              </a:rPr>
-              <a:t>SU-2025-FY-EXCERPT-B004</a:t>
-            </a:r>
-          </a:p>
-        </p:txBody>
-      </p:sp>
-      <p:sp>
-        <p:nvSpPr>
-          <p:cNvPr id="6" name="">
-            <a:extLst xmlns:a="http://schemas.openxmlformats.org/drawingml/2006/main">
-              <a:ext uri="{FF2B5EF4-FFF2-40B4-BE49-F238E27FC236}">
-                <a16:creationId xmlns:a16="http://schemas.microsoft.com/office/drawing/2014/main" id="{548ED5F6-048D-47C9-84A8-2C0DBB8EFE6A}"/>
-              </a:ext>
-            </a:extLst>
-          </p:cNvPr>
-          <p:cNvSpPr>
-            <a:spLocks xmlns:a="http://schemas.openxmlformats.org/drawingml/2006/main" noGrp="1"/>
-          </p:cNvSpPr>
-          <p:nvPr/>
-        </p:nvSpPr>
-        <p:spPr>
-          <a:xfrm xmlns:a="http://schemas.openxmlformats.org/drawingml/2006/main">
-            <a:off x="5772150" y="4362450"/>
-            <a:ext cx="3695700" cy="19050"/>
+              <a:defRPr sz="1950" b="1">
+                <a:solidFill>
+                  <a:srgbClr val="051C2A"/>
+                </a:solidFill>
+                <a:latin typeface="Calibri"/>
+                <a:ea typeface="Calibri"/>
+                <a:cs typeface="Calibri"/>
+              </a:defRPr>
+            </a:pPr>
+            <a:r>
+              <a:rPr sz="1950" b="1">
+                <a:solidFill>
+                  <a:srgbClr val="051C2A"/>
+                </a:solidFill>
+                <a:latin typeface="Calibri"/>
+                <a:ea typeface="Calibri"/>
+                <a:cs typeface="Calibri"/>
+              </a:rPr>
+              <a:t>Trust the parse only when rows, units, page and source IDs survive together.</a:t>
+            </a:r>
+          </a:p>
+        </p:txBody>
+      </p:sp>
+      <p:sp>
+        <p:nvSpPr>
+          <p:cNvPr id="33" name="">
+            <a:extLst xmlns:a="http://schemas.openxmlformats.org/drawingml/2006/main">
+              <a:ext uri="{FF2B5EF4-FFF2-40B4-BE49-F238E27FC236}">
+                <a16:creationId xmlns:a16="http://schemas.microsoft.com/office/drawing/2014/main" id="{207CAB67-18B2-45B8-A6D3-DDBE52558E5C}"/>
+              </a:ext>
+            </a:extLst>
+          </p:cNvPr>
+          <p:cNvSpPr>
+            <a:spLocks xmlns:a="http://schemas.openxmlformats.org/drawingml/2006/main" noGrp="1"/>
+          </p:cNvSpPr>
+          <p:nvPr/>
+        </p:nvSpPr>
+        <p:spPr>
+          <a:xfrm xmlns:a="http://schemas.openxmlformats.org/drawingml/2006/main">
+            <a:off x="857250" y="7896225"/>
+            <a:ext cx="13525500" cy="28575"/>
+          </a:xfrm>
+          <a:prstGeom xmlns:a="http://schemas.openxmlformats.org/drawingml/2006/main" prst="rect">
+            <a:avLst/>
+          </a:prstGeom>
+          <a:solidFill xmlns:a="http://schemas.openxmlformats.org/drawingml/2006/main">
+            <a:srgbClr val="E4E7E9"/>
+          </a:solidFill>
+          <a:ln xmlns:a="http://schemas.openxmlformats.org/drawingml/2006/main" w="0">
+            <a:solidFill>
+              <a:srgbClr val="E4E7E9"/>
+            </a:solidFill>
+            <a:prstDash val="solid"/>
+          </a:ln>
+        </p:spPr>
+      </p:sp>
+      <p:sp>
+        <p:nvSpPr>
+          <p:cNvPr id="34" name="">
+            <a:extLst xmlns:a="http://schemas.openxmlformats.org/drawingml/2006/main">
+              <a:ext uri="{FF2B5EF4-FFF2-40B4-BE49-F238E27FC236}">
+                <a16:creationId xmlns:a16="http://schemas.microsoft.com/office/drawing/2014/main" id="{7CAE100F-4D6F-45A8-A34A-47F11D77390B}"/>
+              </a:ext>
+            </a:extLst>
+          </p:cNvPr>
+          <p:cNvSpPr>
+            <a:spLocks xmlns:a="http://schemas.openxmlformats.org/drawingml/2006/main" noGrp="1"/>
+          </p:cNvSpPr>
+          <p:nvPr/>
+        </p:nvSpPr>
+        <p:spPr>
+          <a:xfrm xmlns:a="http://schemas.openxmlformats.org/drawingml/2006/main">
+            <a:off x="857250" y="7896225"/>
+            <a:ext cx="8001000" cy="38100"/>
           </a:xfrm>
           <a:prstGeom xmlns:a="http://schemas.openxmlformats.org/drawingml/2006/main" prst="rect">
             <a:avLst/>
@@ -7323,146 +5730,22 @@
       </p:sp>
       <p:sp>
         <p:nvSpPr>
-          <p:cNvPr id="7" name="">
-            <a:extLst xmlns:a="http://schemas.openxmlformats.org/drawingml/2006/main">
-              <a:ext uri="{FF2B5EF4-FFF2-40B4-BE49-F238E27FC236}">
-                <a16:creationId xmlns:a16="http://schemas.microsoft.com/office/drawing/2014/main" id="{09548304-EC73-4226-BDEE-2B1DF0C78324}"/>
-              </a:ext>
-            </a:extLst>
-          </p:cNvPr>
-          <p:cNvSpPr>
-            <a:spLocks xmlns:a="http://schemas.openxmlformats.org/drawingml/2006/main" noGrp="1"/>
-          </p:cNvSpPr>
-          <p:nvPr/>
-        </p:nvSpPr>
-        <p:spPr>
-          <a:xfrm xmlns:a="http://schemas.openxmlformats.org/drawingml/2006/main">
-            <a:off x="5848350" y="4591050"/>
-            <a:ext cx="3543300" cy="876300"/>
-          </a:xfrm>
-          <a:prstGeom xmlns:a="http://schemas.openxmlformats.org/drawingml/2006/main" prst="rect">
-            <a:avLst/>
-          </a:prstGeom>
-          <a:noFill xmlns:a="http://schemas.openxmlformats.org/drawingml/2006/main"/>
-          <a:ln xmlns:a="http://schemas.openxmlformats.org/drawingml/2006/main" w="0">
-            <a:noFill/>
-            <a:prstDash val="solid"/>
-          </a:ln>
-        </p:spPr>
-        <p:txBody>
-          <a:bodyPr xmlns:a="http://schemas.openxmlformats.org/drawingml/2006/main" wrap="square" lIns="0" tIns="0" rIns="0" bIns="0" anchor="ctr">
-            <a:normAutofit fontScale="100000"/>
-          </a:bodyPr>
-          <a:lstStyle xmlns:a="http://schemas.openxmlformats.org/drawingml/2006/main"/>
-          <a:p xmlns:a="http://schemas.openxmlformats.org/drawingml/2006/main">
-            <a:pPr algn="ctr">
-              <a:lnSpc>
-                <a:spcPct val="100000"/>
-              </a:lnSpc>
-              <a:buNone/>
-              <a:defRPr sz="1725" b="1">
-                <a:solidFill>
-                  <a:srgbClr val="FFFFFF"/>
-                </a:solidFill>
-                <a:latin typeface="Calibri"/>
-                <a:ea typeface="Calibri"/>
-                <a:cs typeface="Calibri"/>
-              </a:defRPr>
-            </a:pPr>
-            <a:r>
-              <a:rPr sz="1725" b="1">
-                <a:solidFill>
-                  <a:srgbClr val="FFFFFF"/>
-                </a:solidFill>
-                <a:latin typeface="Calibri"/>
-                <a:ea typeface="Calibri"/>
-                <a:cs typeface="Calibri"/>
-              </a:rPr>
-              <a:t>TABLE · PAGE 2</a:t>
-            </a:r>
-          </a:p>
-          <a:p xmlns:a="http://schemas.openxmlformats.org/drawingml/2006/main">
-            <a:pPr algn="ctr">
-              <a:lnSpc>
-                <a:spcPct val="100000"/>
-              </a:lnSpc>
-              <a:buNone/>
-              <a:defRPr sz="1725" b="1">
-                <a:solidFill>
-                  <a:srgbClr val="FFFFFF"/>
-                </a:solidFill>
-                <a:latin typeface="Calibri"/>
-                <a:ea typeface="Calibri"/>
-                <a:cs typeface="Calibri"/>
-              </a:defRPr>
-            </a:pPr>
-            <a:r>
-              <a:rPr sz="1725" b="1">
-                <a:solidFill>
-                  <a:srgbClr val="FFFFFF"/>
-                </a:solidFill>
-                <a:latin typeface="Calibri"/>
-                <a:ea typeface="Calibri"/>
-                <a:cs typeface="Calibri"/>
-              </a:rPr>
-              <a:t>Metric | FY2025 | Change</a:t>
-            </a:r>
-          </a:p>
-        </p:txBody>
-      </p:sp>
-      <p:sp>
-        <p:nvSpPr>
-          <p:cNvPr id="8" name="left-field-0">
-            <a:extLst xmlns:a="http://schemas.openxmlformats.org/drawingml/2006/main">
-              <a:ext uri="{FF2B5EF4-FFF2-40B4-BE49-F238E27FC236}">
-                <a16:creationId xmlns:a16="http://schemas.microsoft.com/office/drawing/2014/main" id="{720AE8BF-AA92-49DE-8E2A-99C0FB631A14}"/>
-              </a:ext>
-            </a:extLst>
-          </p:cNvPr>
-          <p:cNvSpPr>
-            <a:spLocks xmlns:a="http://schemas.openxmlformats.org/drawingml/2006/main" noGrp="1"/>
-          </p:cNvSpPr>
-          <p:nvPr/>
-        </p:nvSpPr>
-        <p:spPr>
-          <a:xfrm xmlns:a="http://schemas.openxmlformats.org/drawingml/2006/main">
-            <a:off x="1028700" y="2724150"/>
-            <a:ext cx="3238500" cy="895350"/>
-          </a:xfrm>
-          <a:prstGeom xmlns:a="http://schemas.openxmlformats.org/drawingml/2006/main" prst="roundRect">
-            <a:avLst>
-              <a:gd name="adj" fmla="val 12766"/>
-            </a:avLst>
-          </a:prstGeom>
-          <a:solidFill xmlns:a="http://schemas.openxmlformats.org/drawingml/2006/main">
-            <a:srgbClr val="FFFFFF"/>
-          </a:solidFill>
-          <a:ln xmlns:a="http://schemas.openxmlformats.org/drawingml/2006/main" w="9525">
-            <a:solidFill>
-              <a:srgbClr val="E4E7E9"/>
-            </a:solidFill>
-            <a:prstDash val="solid"/>
-          </a:ln>
-        </p:spPr>
-      </p:sp>
-      <p:sp>
-        <p:nvSpPr>
-          <p:cNvPr id="9" name="">
-            <a:extLst xmlns:a="http://schemas.openxmlformats.org/drawingml/2006/main">
-              <a:ext uri="{FF2B5EF4-FFF2-40B4-BE49-F238E27FC236}">
-                <a16:creationId xmlns:a16="http://schemas.microsoft.com/office/drawing/2014/main" id="{7CBACEB0-7877-4121-958A-EABE328189DC}"/>
-              </a:ext>
-            </a:extLst>
-          </p:cNvPr>
-          <p:cNvSpPr>
-            <a:spLocks xmlns:a="http://schemas.openxmlformats.org/drawingml/2006/main" noGrp="1"/>
-          </p:cNvSpPr>
-          <p:nvPr/>
-        </p:nvSpPr>
-        <p:spPr>
-          <a:xfrm xmlns:a="http://schemas.openxmlformats.org/drawingml/2006/main">
-            <a:off x="1257300" y="2838450"/>
-            <a:ext cx="2781300" cy="266700"/>
+          <p:cNvPr id="35" name="">
+            <a:extLst xmlns:a="http://schemas.openxmlformats.org/drawingml/2006/main">
+              <a:ext uri="{FF2B5EF4-FFF2-40B4-BE49-F238E27FC236}">
+                <a16:creationId xmlns:a16="http://schemas.microsoft.com/office/drawing/2014/main" id="{E9579015-04F7-4D6F-9134-8D10D8D764A3}"/>
+              </a:ext>
+            </a:extLst>
+          </p:cNvPr>
+          <p:cNvSpPr>
+            <a:spLocks xmlns:a="http://schemas.openxmlformats.org/drawingml/2006/main" noGrp="1"/>
+          </p:cNvSpPr>
+          <p:nvPr/>
+        </p:nvSpPr>
+        <p:spPr>
+          <a:xfrm xmlns:a="http://schemas.openxmlformats.org/drawingml/2006/main">
+            <a:off x="971550" y="8058150"/>
+            <a:ext cx="3714750" cy="323850"/>
           </a:xfrm>
           <a:prstGeom xmlns:a="http://schemas.openxmlformats.org/drawingml/2006/main" prst="rect">
             <a:avLst/>
@@ -7484,1209 +5767,6 @@
                 <a:spcPct val="100000"/>
               </a:lnSpc>
               <a:buNone/>
-              <a:defRPr sz="1200" b="1">
-                <a:solidFill>
-                  <a:srgbClr val="1F40CB"/>
-                </a:solidFill>
-                <a:latin typeface="Calibri"/>
-                <a:ea typeface="Calibri"/>
-                <a:cs typeface="Calibri"/>
-              </a:defRPr>
-            </a:pPr>
-            <a:r>
-              <a:rPr sz="1200" b="1">
-                <a:solidFill>
-                  <a:srgbClr val="1F40CB"/>
-                </a:solidFill>
-                <a:latin typeface="Calibri"/>
-                <a:ea typeface="Calibri"/>
-                <a:cs typeface="Calibri"/>
-              </a:rPr>
-              <a:t>SOURCE</a:t>
-            </a:r>
-          </a:p>
-        </p:txBody>
-      </p:sp>
-      <p:sp>
-        <p:nvSpPr>
-          <p:cNvPr id="10" name="">
-            <a:extLst xmlns:a="http://schemas.openxmlformats.org/drawingml/2006/main">
-              <a:ext uri="{FF2B5EF4-FFF2-40B4-BE49-F238E27FC236}">
-                <a16:creationId xmlns:a16="http://schemas.microsoft.com/office/drawing/2014/main" id="{5077E674-7E6C-4E95-A44F-3D0874CD58BC}"/>
-              </a:ext>
-            </a:extLst>
-          </p:cNvPr>
-          <p:cNvSpPr>
-            <a:spLocks xmlns:a="http://schemas.openxmlformats.org/drawingml/2006/main" noGrp="1"/>
-          </p:cNvSpPr>
-          <p:nvPr/>
-        </p:nvSpPr>
-        <p:spPr>
-          <a:xfrm xmlns:a="http://schemas.openxmlformats.org/drawingml/2006/main">
-            <a:off x="1257300" y="3124200"/>
-            <a:ext cx="2781300" cy="361950"/>
-          </a:xfrm>
-          <a:prstGeom xmlns:a="http://schemas.openxmlformats.org/drawingml/2006/main" prst="rect">
-            <a:avLst/>
-          </a:prstGeom>
-          <a:noFill xmlns:a="http://schemas.openxmlformats.org/drawingml/2006/main"/>
-          <a:ln xmlns:a="http://schemas.openxmlformats.org/drawingml/2006/main" w="0">
-            <a:noFill/>
-            <a:prstDash val="solid"/>
-          </a:ln>
-        </p:spPr>
-        <p:txBody>
-          <a:bodyPr xmlns:a="http://schemas.openxmlformats.org/drawingml/2006/main" wrap="square" lIns="0" tIns="0" rIns="0" bIns="0" anchor="ctr">
-            <a:normAutofit fontScale="100000"/>
-          </a:bodyPr>
-          <a:lstStyle xmlns:a="http://schemas.openxmlformats.org/drawingml/2006/main"/>
-          <a:p xmlns:a="http://schemas.openxmlformats.org/drawingml/2006/main">
-            <a:pPr algn="l">
-              <a:lnSpc>
-                <a:spcPct val="100000"/>
-              </a:lnSpc>
-              <a:buNone/>
-              <a:defRPr sz="1500" b="1">
-                <a:solidFill>
-                  <a:srgbClr val="051C2A"/>
-                </a:solidFill>
-                <a:latin typeface="Calibri"/>
-                <a:ea typeface="Calibri"/>
-                <a:cs typeface="Calibri"/>
-              </a:defRPr>
-            </a:pPr>
-            <a:r>
-              <a:rPr sz="1500" b="1">
-                <a:solidFill>
-                  <a:srgbClr val="051C2A"/>
-                </a:solidFill>
-                <a:latin typeface="Calibri"/>
-                <a:ea typeface="Calibri"/>
-                <a:cs typeface="Calibri"/>
-              </a:rPr>
-              <a:t>company · document · URL</a:t>
-            </a:r>
-          </a:p>
-        </p:txBody>
-      </p:sp>
-      <p:sp>
-        <p:nvSpPr>
-          <p:cNvPr id="11" name="left-field-1">
-            <a:extLst xmlns:a="http://schemas.openxmlformats.org/drawingml/2006/main">
-              <a:ext uri="{FF2B5EF4-FFF2-40B4-BE49-F238E27FC236}">
-                <a16:creationId xmlns:a16="http://schemas.microsoft.com/office/drawing/2014/main" id="{EB85D765-CD85-4A47-9B4D-BE4F254EF9A9}"/>
-              </a:ext>
-            </a:extLst>
-          </p:cNvPr>
-          <p:cNvSpPr>
-            <a:spLocks xmlns:a="http://schemas.openxmlformats.org/drawingml/2006/main" noGrp="1"/>
-          </p:cNvSpPr>
-          <p:nvPr/>
-        </p:nvSpPr>
-        <p:spPr>
-          <a:xfrm xmlns:a="http://schemas.openxmlformats.org/drawingml/2006/main">
-            <a:off x="1028700" y="3924300"/>
-            <a:ext cx="3238500" cy="895350"/>
-          </a:xfrm>
-          <a:prstGeom xmlns:a="http://schemas.openxmlformats.org/drawingml/2006/main" prst="roundRect">
-            <a:avLst>
-              <a:gd name="adj" fmla="val 12766"/>
-            </a:avLst>
-          </a:prstGeom>
-          <a:solidFill xmlns:a="http://schemas.openxmlformats.org/drawingml/2006/main">
-            <a:srgbClr val="FFFFFF"/>
-          </a:solidFill>
-          <a:ln xmlns:a="http://schemas.openxmlformats.org/drawingml/2006/main" w="9525">
-            <a:solidFill>
-              <a:srgbClr val="E4E7E9"/>
-            </a:solidFill>
-            <a:prstDash val="solid"/>
-          </a:ln>
-        </p:spPr>
-      </p:sp>
-      <p:sp>
-        <p:nvSpPr>
-          <p:cNvPr id="12" name="">
-            <a:extLst xmlns:a="http://schemas.openxmlformats.org/drawingml/2006/main">
-              <a:ext uri="{FF2B5EF4-FFF2-40B4-BE49-F238E27FC236}">
-                <a16:creationId xmlns:a16="http://schemas.microsoft.com/office/drawing/2014/main" id="{1A7C1F3D-0AC2-4377-B5F6-24B12E250B5C}"/>
-              </a:ext>
-            </a:extLst>
-          </p:cNvPr>
-          <p:cNvSpPr>
-            <a:spLocks xmlns:a="http://schemas.openxmlformats.org/drawingml/2006/main" noGrp="1"/>
-          </p:cNvSpPr>
-          <p:nvPr/>
-        </p:nvSpPr>
-        <p:spPr>
-          <a:xfrm xmlns:a="http://schemas.openxmlformats.org/drawingml/2006/main">
-            <a:off x="1257300" y="4038600"/>
-            <a:ext cx="2781300" cy="266700"/>
-          </a:xfrm>
-          <a:prstGeom xmlns:a="http://schemas.openxmlformats.org/drawingml/2006/main" prst="rect">
-            <a:avLst/>
-          </a:prstGeom>
-          <a:noFill xmlns:a="http://schemas.openxmlformats.org/drawingml/2006/main"/>
-          <a:ln xmlns:a="http://schemas.openxmlformats.org/drawingml/2006/main" w="0">
-            <a:noFill/>
-            <a:prstDash val="solid"/>
-          </a:ln>
-        </p:spPr>
-        <p:txBody>
-          <a:bodyPr xmlns:a="http://schemas.openxmlformats.org/drawingml/2006/main" wrap="square" lIns="0" tIns="0" rIns="0" bIns="0" anchor="ctr">
-            <a:normAutofit fontScale="100000"/>
-          </a:bodyPr>
-          <a:lstStyle xmlns:a="http://schemas.openxmlformats.org/drawingml/2006/main"/>
-          <a:p xmlns:a="http://schemas.openxmlformats.org/drawingml/2006/main">
-            <a:pPr algn="l">
-              <a:lnSpc>
-                <a:spcPct val="100000"/>
-              </a:lnSpc>
-              <a:buNone/>
-              <a:defRPr sz="1200" b="1">
-                <a:solidFill>
-                  <a:srgbClr val="1F40CB"/>
-                </a:solidFill>
-                <a:latin typeface="Calibri"/>
-                <a:ea typeface="Calibri"/>
-                <a:cs typeface="Calibri"/>
-              </a:defRPr>
-            </a:pPr>
-            <a:r>
-              <a:rPr sz="1200" b="1">
-                <a:solidFill>
-                  <a:srgbClr val="1F40CB"/>
-                </a:solidFill>
-                <a:latin typeface="Calibri"/>
-                <a:ea typeface="Calibri"/>
-                <a:cs typeface="Calibri"/>
-              </a:rPr>
-              <a:t>LOCATION</a:t>
-            </a:r>
-          </a:p>
-        </p:txBody>
-      </p:sp>
-      <p:sp>
-        <p:nvSpPr>
-          <p:cNvPr id="13" name="">
-            <a:extLst xmlns:a="http://schemas.openxmlformats.org/drawingml/2006/main">
-              <a:ext uri="{FF2B5EF4-FFF2-40B4-BE49-F238E27FC236}">
-                <a16:creationId xmlns:a16="http://schemas.microsoft.com/office/drawing/2014/main" id="{88F3BE42-D27D-4E49-97D3-2DA03AC894C9}"/>
-              </a:ext>
-            </a:extLst>
-          </p:cNvPr>
-          <p:cNvSpPr>
-            <a:spLocks xmlns:a="http://schemas.openxmlformats.org/drawingml/2006/main" noGrp="1"/>
-          </p:cNvSpPr>
-          <p:nvPr/>
-        </p:nvSpPr>
-        <p:spPr>
-          <a:xfrm xmlns:a="http://schemas.openxmlformats.org/drawingml/2006/main">
-            <a:off x="1257300" y="4324350"/>
-            <a:ext cx="2781300" cy="361950"/>
-          </a:xfrm>
-          <a:prstGeom xmlns:a="http://schemas.openxmlformats.org/drawingml/2006/main" prst="rect">
-            <a:avLst/>
-          </a:prstGeom>
-          <a:noFill xmlns:a="http://schemas.openxmlformats.org/drawingml/2006/main"/>
-          <a:ln xmlns:a="http://schemas.openxmlformats.org/drawingml/2006/main" w="0">
-            <a:noFill/>
-            <a:prstDash val="solid"/>
-          </a:ln>
-        </p:spPr>
-        <p:txBody>
-          <a:bodyPr xmlns:a="http://schemas.openxmlformats.org/drawingml/2006/main" wrap="square" lIns="0" tIns="0" rIns="0" bIns="0" anchor="ctr">
-            <a:normAutofit fontScale="100000"/>
-          </a:bodyPr>
-          <a:lstStyle xmlns:a="http://schemas.openxmlformats.org/drawingml/2006/main"/>
-          <a:p xmlns:a="http://schemas.openxmlformats.org/drawingml/2006/main">
-            <a:pPr algn="l">
-              <a:lnSpc>
-                <a:spcPct val="100000"/>
-              </a:lnSpc>
-              <a:buNone/>
-              <a:defRPr sz="1500" b="1">
-                <a:solidFill>
-                  <a:srgbClr val="051C2A"/>
-                </a:solidFill>
-                <a:latin typeface="Calibri"/>
-                <a:ea typeface="Calibri"/>
-                <a:cs typeface="Calibri"/>
-              </a:defRPr>
-            </a:pPr>
-            <a:r>
-              <a:rPr sz="1500" b="1">
-                <a:solidFill>
-                  <a:srgbClr val="051C2A"/>
-                </a:solidFill>
-                <a:latin typeface="Calibri"/>
-                <a:ea typeface="Calibri"/>
-                <a:cs typeface="Calibri"/>
-              </a:rPr>
-              <a:t>ordinal · page · section path</a:t>
-            </a:r>
-          </a:p>
-        </p:txBody>
-      </p:sp>
-      <p:sp>
-        <p:nvSpPr>
-          <p:cNvPr id="14" name="left-field-2">
-            <a:extLst xmlns:a="http://schemas.openxmlformats.org/drawingml/2006/main">
-              <a:ext uri="{FF2B5EF4-FFF2-40B4-BE49-F238E27FC236}">
-                <a16:creationId xmlns:a16="http://schemas.microsoft.com/office/drawing/2014/main" id="{D38A806E-0157-47C3-A918-4210A4D05F3A}"/>
-              </a:ext>
-            </a:extLst>
-          </p:cNvPr>
-          <p:cNvSpPr>
-            <a:spLocks xmlns:a="http://schemas.openxmlformats.org/drawingml/2006/main" noGrp="1"/>
-          </p:cNvSpPr>
-          <p:nvPr/>
-        </p:nvSpPr>
-        <p:spPr>
-          <a:xfrm xmlns:a="http://schemas.openxmlformats.org/drawingml/2006/main">
-            <a:off x="1028700" y="5124450"/>
-            <a:ext cx="3238500" cy="895350"/>
-          </a:xfrm>
-          <a:prstGeom xmlns:a="http://schemas.openxmlformats.org/drawingml/2006/main" prst="roundRect">
-            <a:avLst>
-              <a:gd name="adj" fmla="val 12766"/>
-            </a:avLst>
-          </a:prstGeom>
-          <a:solidFill xmlns:a="http://schemas.openxmlformats.org/drawingml/2006/main">
-            <a:srgbClr val="FFFFFF"/>
-          </a:solidFill>
-          <a:ln xmlns:a="http://schemas.openxmlformats.org/drawingml/2006/main" w="9525">
-            <a:solidFill>
-              <a:srgbClr val="E4E7E9"/>
-            </a:solidFill>
-            <a:prstDash val="solid"/>
-          </a:ln>
-        </p:spPr>
-      </p:sp>
-      <p:sp>
-        <p:nvSpPr>
-          <p:cNvPr id="15" name="">
-            <a:extLst xmlns:a="http://schemas.openxmlformats.org/drawingml/2006/main">
-              <a:ext uri="{FF2B5EF4-FFF2-40B4-BE49-F238E27FC236}">
-                <a16:creationId xmlns:a16="http://schemas.microsoft.com/office/drawing/2014/main" id="{B183342E-199A-44AF-A318-336CAE10AB78}"/>
-              </a:ext>
-            </a:extLst>
-          </p:cNvPr>
-          <p:cNvSpPr>
-            <a:spLocks xmlns:a="http://schemas.openxmlformats.org/drawingml/2006/main" noGrp="1"/>
-          </p:cNvSpPr>
-          <p:nvPr/>
-        </p:nvSpPr>
-        <p:spPr>
-          <a:xfrm xmlns:a="http://schemas.openxmlformats.org/drawingml/2006/main">
-            <a:off x="1257300" y="5238750"/>
-            <a:ext cx="2781300" cy="266700"/>
-          </a:xfrm>
-          <a:prstGeom xmlns:a="http://schemas.openxmlformats.org/drawingml/2006/main" prst="rect">
-            <a:avLst/>
-          </a:prstGeom>
-          <a:noFill xmlns:a="http://schemas.openxmlformats.org/drawingml/2006/main"/>
-          <a:ln xmlns:a="http://schemas.openxmlformats.org/drawingml/2006/main" w="0">
-            <a:noFill/>
-            <a:prstDash val="solid"/>
-          </a:ln>
-        </p:spPr>
-        <p:txBody>
-          <a:bodyPr xmlns:a="http://schemas.openxmlformats.org/drawingml/2006/main" wrap="square" lIns="0" tIns="0" rIns="0" bIns="0" anchor="ctr">
-            <a:normAutofit fontScale="100000"/>
-          </a:bodyPr>
-          <a:lstStyle xmlns:a="http://schemas.openxmlformats.org/drawingml/2006/main"/>
-          <a:p xmlns:a="http://schemas.openxmlformats.org/drawingml/2006/main">
-            <a:pPr algn="l">
-              <a:lnSpc>
-                <a:spcPct val="100000"/>
-              </a:lnSpc>
-              <a:buNone/>
-              <a:defRPr sz="1200" b="1">
-                <a:solidFill>
-                  <a:srgbClr val="1F40CB"/>
-                </a:solidFill>
-                <a:latin typeface="Calibri"/>
-                <a:ea typeface="Calibri"/>
-                <a:cs typeface="Calibri"/>
-              </a:defRPr>
-            </a:pPr>
-            <a:r>
-              <a:rPr sz="1200" b="1">
-                <a:solidFill>
-                  <a:srgbClr val="1F40CB"/>
-                </a:solidFill>
-                <a:latin typeface="Calibri"/>
-                <a:ea typeface="Calibri"/>
-                <a:cs typeface="Calibri"/>
-              </a:rPr>
-              <a:t>TYPE</a:t>
-            </a:r>
-          </a:p>
-        </p:txBody>
-      </p:sp>
-      <p:sp>
-        <p:nvSpPr>
-          <p:cNvPr id="16" name="">
-            <a:extLst xmlns:a="http://schemas.openxmlformats.org/drawingml/2006/main">
-              <a:ext uri="{FF2B5EF4-FFF2-40B4-BE49-F238E27FC236}">
-                <a16:creationId xmlns:a16="http://schemas.microsoft.com/office/drawing/2014/main" id="{ECB5DA57-E61B-4C94-B0C3-378EC5FEECDD}"/>
-              </a:ext>
-            </a:extLst>
-          </p:cNvPr>
-          <p:cNvSpPr>
-            <a:spLocks xmlns:a="http://schemas.openxmlformats.org/drawingml/2006/main" noGrp="1"/>
-          </p:cNvSpPr>
-          <p:nvPr/>
-        </p:nvSpPr>
-        <p:spPr>
-          <a:xfrm xmlns:a="http://schemas.openxmlformats.org/drawingml/2006/main">
-            <a:off x="1257300" y="5524500"/>
-            <a:ext cx="2781300" cy="361950"/>
-          </a:xfrm>
-          <a:prstGeom xmlns:a="http://schemas.openxmlformats.org/drawingml/2006/main" prst="rect">
-            <a:avLst/>
-          </a:prstGeom>
-          <a:noFill xmlns:a="http://schemas.openxmlformats.org/drawingml/2006/main"/>
-          <a:ln xmlns:a="http://schemas.openxmlformats.org/drawingml/2006/main" w="0">
-            <a:noFill/>
-            <a:prstDash val="solid"/>
-          </a:ln>
-        </p:spPr>
-        <p:txBody>
-          <a:bodyPr xmlns:a="http://schemas.openxmlformats.org/drawingml/2006/main" wrap="square" lIns="0" tIns="0" rIns="0" bIns="0" anchor="ctr">
-            <a:normAutofit fontScale="100000"/>
-          </a:bodyPr>
-          <a:lstStyle xmlns:a="http://schemas.openxmlformats.org/drawingml/2006/main"/>
-          <a:p xmlns:a="http://schemas.openxmlformats.org/drawingml/2006/main">
-            <a:pPr algn="l">
-              <a:lnSpc>
-                <a:spcPct val="100000"/>
-              </a:lnSpc>
-              <a:buNone/>
-              <a:defRPr sz="1500" b="1">
-                <a:solidFill>
-                  <a:srgbClr val="051C2A"/>
-                </a:solidFill>
-                <a:latin typeface="Calibri"/>
-                <a:ea typeface="Calibri"/>
-                <a:cs typeface="Calibri"/>
-              </a:defRPr>
-            </a:pPr>
-            <a:r>
-              <a:rPr sz="1500" b="1">
-                <a:solidFill>
-                  <a:srgbClr val="051C2A"/>
-                </a:solidFill>
-                <a:latin typeface="Calibri"/>
-                <a:ea typeface="Calibri"/>
-                <a:cs typeface="Calibri"/>
-              </a:rPr>
-              <a:t>heading · paragraph · table</a:t>
-            </a:r>
-          </a:p>
-        </p:txBody>
-      </p:sp>
-      <p:sp>
-        <p:nvSpPr>
-          <p:cNvPr id="17" name="right-field-0">
-            <a:extLst xmlns:a="http://schemas.openxmlformats.org/drawingml/2006/main">
-              <a:ext uri="{FF2B5EF4-FFF2-40B4-BE49-F238E27FC236}">
-                <a16:creationId xmlns:a16="http://schemas.microsoft.com/office/drawing/2014/main" id="{ED066AEE-EA4B-4DB1-B7D7-DA8623309EC7}"/>
-              </a:ext>
-            </a:extLst>
-          </p:cNvPr>
-          <p:cNvSpPr>
-            <a:spLocks xmlns:a="http://schemas.openxmlformats.org/drawingml/2006/main" noGrp="1"/>
-          </p:cNvSpPr>
-          <p:nvPr/>
-        </p:nvSpPr>
-        <p:spPr>
-          <a:xfrm xmlns:a="http://schemas.openxmlformats.org/drawingml/2006/main">
-            <a:off x="10972800" y="2724150"/>
-            <a:ext cx="3238500" cy="895350"/>
-          </a:xfrm>
-          <a:prstGeom xmlns:a="http://schemas.openxmlformats.org/drawingml/2006/main" prst="roundRect">
-            <a:avLst>
-              <a:gd name="adj" fmla="val 12766"/>
-            </a:avLst>
-          </a:prstGeom>
-          <a:solidFill xmlns:a="http://schemas.openxmlformats.org/drawingml/2006/main">
-            <a:srgbClr val="FFFFFF"/>
-          </a:solidFill>
-          <a:ln xmlns:a="http://schemas.openxmlformats.org/drawingml/2006/main" w="9525">
-            <a:solidFill>
-              <a:srgbClr val="E4E7E9"/>
-            </a:solidFill>
-            <a:prstDash val="solid"/>
-          </a:ln>
-        </p:spPr>
-      </p:sp>
-      <p:sp>
-        <p:nvSpPr>
-          <p:cNvPr id="18" name="">
-            <a:extLst xmlns:a="http://schemas.openxmlformats.org/drawingml/2006/main">
-              <a:ext uri="{FF2B5EF4-FFF2-40B4-BE49-F238E27FC236}">
-                <a16:creationId xmlns:a16="http://schemas.microsoft.com/office/drawing/2014/main" id="{40072D8D-E329-4E1A-A744-1D6F1EA5762F}"/>
-              </a:ext>
-            </a:extLst>
-          </p:cNvPr>
-          <p:cNvSpPr>
-            <a:spLocks xmlns:a="http://schemas.openxmlformats.org/drawingml/2006/main" noGrp="1"/>
-          </p:cNvSpPr>
-          <p:nvPr/>
-        </p:nvSpPr>
-        <p:spPr>
-          <a:xfrm xmlns:a="http://schemas.openxmlformats.org/drawingml/2006/main">
-            <a:off x="11201400" y="2838450"/>
-            <a:ext cx="2781300" cy="266700"/>
-          </a:xfrm>
-          <a:prstGeom xmlns:a="http://schemas.openxmlformats.org/drawingml/2006/main" prst="rect">
-            <a:avLst/>
-          </a:prstGeom>
-          <a:noFill xmlns:a="http://schemas.openxmlformats.org/drawingml/2006/main"/>
-          <a:ln xmlns:a="http://schemas.openxmlformats.org/drawingml/2006/main" w="0">
-            <a:noFill/>
-            <a:prstDash val="solid"/>
-          </a:ln>
-        </p:spPr>
-        <p:txBody>
-          <a:bodyPr xmlns:a="http://schemas.openxmlformats.org/drawingml/2006/main" wrap="square" lIns="0" tIns="0" rIns="0" bIns="0" anchor="ctr">
-            <a:normAutofit fontScale="100000"/>
-          </a:bodyPr>
-          <a:lstStyle xmlns:a="http://schemas.openxmlformats.org/drawingml/2006/main"/>
-          <a:p xmlns:a="http://schemas.openxmlformats.org/drawingml/2006/main">
-            <a:pPr algn="l">
-              <a:lnSpc>
-                <a:spcPct val="100000"/>
-              </a:lnSpc>
-              <a:buNone/>
-              <a:defRPr sz="1200" b="1">
-                <a:solidFill>
-                  <a:srgbClr val="1F40CB"/>
-                </a:solidFill>
-                <a:latin typeface="Calibri"/>
-                <a:ea typeface="Calibri"/>
-                <a:cs typeface="Calibri"/>
-              </a:defRPr>
-            </a:pPr>
-            <a:r>
-              <a:rPr sz="1200" b="1">
-                <a:solidFill>
-                  <a:srgbClr val="1F40CB"/>
-                </a:solidFill>
-                <a:latin typeface="Calibri"/>
-                <a:ea typeface="Calibri"/>
-                <a:cs typeface="Calibri"/>
-              </a:rPr>
-              <a:t>CONTENT</a:t>
-            </a:r>
-          </a:p>
-        </p:txBody>
-      </p:sp>
-      <p:sp>
-        <p:nvSpPr>
-          <p:cNvPr id="19" name="">
-            <a:extLst xmlns:a="http://schemas.openxmlformats.org/drawingml/2006/main">
-              <a:ext uri="{FF2B5EF4-FFF2-40B4-BE49-F238E27FC236}">
-                <a16:creationId xmlns:a16="http://schemas.microsoft.com/office/drawing/2014/main" id="{040576CD-3A76-4FED-92A9-5CC11BA9C639}"/>
-              </a:ext>
-            </a:extLst>
-          </p:cNvPr>
-          <p:cNvSpPr>
-            <a:spLocks xmlns:a="http://schemas.openxmlformats.org/drawingml/2006/main" noGrp="1"/>
-          </p:cNvSpPr>
-          <p:nvPr/>
-        </p:nvSpPr>
-        <p:spPr>
-          <a:xfrm xmlns:a="http://schemas.openxmlformats.org/drawingml/2006/main">
-            <a:off x="11201400" y="3124200"/>
-            <a:ext cx="2781300" cy="361950"/>
-          </a:xfrm>
-          <a:prstGeom xmlns:a="http://schemas.openxmlformats.org/drawingml/2006/main" prst="rect">
-            <a:avLst/>
-          </a:prstGeom>
-          <a:noFill xmlns:a="http://schemas.openxmlformats.org/drawingml/2006/main"/>
-          <a:ln xmlns:a="http://schemas.openxmlformats.org/drawingml/2006/main" w="0">
-            <a:noFill/>
-            <a:prstDash val="solid"/>
-          </a:ln>
-        </p:spPr>
-        <p:txBody>
-          <a:bodyPr xmlns:a="http://schemas.openxmlformats.org/drawingml/2006/main" wrap="square" lIns="0" tIns="0" rIns="0" bIns="0" anchor="ctr">
-            <a:normAutofit fontScale="100000"/>
-          </a:bodyPr>
-          <a:lstStyle xmlns:a="http://schemas.openxmlformats.org/drawingml/2006/main"/>
-          <a:p xmlns:a="http://schemas.openxmlformats.org/drawingml/2006/main">
-            <a:pPr algn="l">
-              <a:lnSpc>
-                <a:spcPct val="100000"/>
-              </a:lnSpc>
-              <a:buNone/>
-              <a:defRPr sz="1500" b="1">
-                <a:solidFill>
-                  <a:srgbClr val="051C2A"/>
-                </a:solidFill>
-                <a:latin typeface="Calibri"/>
-                <a:ea typeface="Calibri"/>
-                <a:cs typeface="Calibri"/>
-              </a:defRPr>
-            </a:pPr>
-            <a:r>
-              <a:rPr sz="1500" b="1">
-                <a:solidFill>
-                  <a:srgbClr val="051C2A"/>
-                </a:solidFill>
-                <a:latin typeface="Calibri"/>
-                <a:ea typeface="Calibri"/>
-                <a:cs typeface="Calibri"/>
-              </a:rPr>
-              <a:t>normalized text · table rows</a:t>
-            </a:r>
-          </a:p>
-        </p:txBody>
-      </p:sp>
-      <p:sp>
-        <p:nvSpPr>
-          <p:cNvPr id="20" name="right-field-1">
-            <a:extLst xmlns:a="http://schemas.openxmlformats.org/drawingml/2006/main">
-              <a:ext uri="{FF2B5EF4-FFF2-40B4-BE49-F238E27FC236}">
-                <a16:creationId xmlns:a16="http://schemas.microsoft.com/office/drawing/2014/main" id="{13EC72A3-15F5-4C75-A76D-0D6BA5AA2734}"/>
-              </a:ext>
-            </a:extLst>
-          </p:cNvPr>
-          <p:cNvSpPr>
-            <a:spLocks xmlns:a="http://schemas.openxmlformats.org/drawingml/2006/main" noGrp="1"/>
-          </p:cNvSpPr>
-          <p:nvPr/>
-        </p:nvSpPr>
-        <p:spPr>
-          <a:xfrm xmlns:a="http://schemas.openxmlformats.org/drawingml/2006/main">
-            <a:off x="10972800" y="3924300"/>
-            <a:ext cx="3238500" cy="895350"/>
-          </a:xfrm>
-          <a:prstGeom xmlns:a="http://schemas.openxmlformats.org/drawingml/2006/main" prst="roundRect">
-            <a:avLst>
-              <a:gd name="adj" fmla="val 12766"/>
-            </a:avLst>
-          </a:prstGeom>
-          <a:solidFill xmlns:a="http://schemas.openxmlformats.org/drawingml/2006/main">
-            <a:srgbClr val="FFFFFF"/>
-          </a:solidFill>
-          <a:ln xmlns:a="http://schemas.openxmlformats.org/drawingml/2006/main" w="9525">
-            <a:solidFill>
-              <a:srgbClr val="E4E7E9"/>
-            </a:solidFill>
-            <a:prstDash val="solid"/>
-          </a:ln>
-        </p:spPr>
-      </p:sp>
-      <p:sp>
-        <p:nvSpPr>
-          <p:cNvPr id="21" name="">
-            <a:extLst xmlns:a="http://schemas.openxmlformats.org/drawingml/2006/main">
-              <a:ext uri="{FF2B5EF4-FFF2-40B4-BE49-F238E27FC236}">
-                <a16:creationId xmlns:a16="http://schemas.microsoft.com/office/drawing/2014/main" id="{E7C9EE2B-9704-4AB7-AB65-DBB12C984C03}"/>
-              </a:ext>
-            </a:extLst>
-          </p:cNvPr>
-          <p:cNvSpPr>
-            <a:spLocks xmlns:a="http://schemas.openxmlformats.org/drawingml/2006/main" noGrp="1"/>
-          </p:cNvSpPr>
-          <p:nvPr/>
-        </p:nvSpPr>
-        <p:spPr>
-          <a:xfrm xmlns:a="http://schemas.openxmlformats.org/drawingml/2006/main">
-            <a:off x="11201400" y="4038600"/>
-            <a:ext cx="2781300" cy="266700"/>
-          </a:xfrm>
-          <a:prstGeom xmlns:a="http://schemas.openxmlformats.org/drawingml/2006/main" prst="rect">
-            <a:avLst/>
-          </a:prstGeom>
-          <a:noFill xmlns:a="http://schemas.openxmlformats.org/drawingml/2006/main"/>
-          <a:ln xmlns:a="http://schemas.openxmlformats.org/drawingml/2006/main" w="0">
-            <a:noFill/>
-            <a:prstDash val="solid"/>
-          </a:ln>
-        </p:spPr>
-        <p:txBody>
-          <a:bodyPr xmlns:a="http://schemas.openxmlformats.org/drawingml/2006/main" wrap="square" lIns="0" tIns="0" rIns="0" bIns="0" anchor="ctr">
-            <a:normAutofit fontScale="100000"/>
-          </a:bodyPr>
-          <a:lstStyle xmlns:a="http://schemas.openxmlformats.org/drawingml/2006/main"/>
-          <a:p xmlns:a="http://schemas.openxmlformats.org/drawingml/2006/main">
-            <a:pPr algn="l">
-              <a:lnSpc>
-                <a:spcPct val="100000"/>
-              </a:lnSpc>
-              <a:buNone/>
-              <a:defRPr sz="1200" b="1">
-                <a:solidFill>
-                  <a:srgbClr val="1F40CB"/>
-                </a:solidFill>
-                <a:latin typeface="Calibri"/>
-                <a:ea typeface="Calibri"/>
-                <a:cs typeface="Calibri"/>
-              </a:defRPr>
-            </a:pPr>
-            <a:r>
-              <a:rPr sz="1200" b="1">
-                <a:solidFill>
-                  <a:srgbClr val="1F40CB"/>
-                </a:solidFill>
-                <a:latin typeface="Calibri"/>
-                <a:ea typeface="Calibri"/>
-                <a:cs typeface="Calibri"/>
-              </a:rPr>
-              <a:t>PERIOD</a:t>
-            </a:r>
-          </a:p>
-        </p:txBody>
-      </p:sp>
-      <p:sp>
-        <p:nvSpPr>
-          <p:cNvPr id="22" name="">
-            <a:extLst xmlns:a="http://schemas.openxmlformats.org/drawingml/2006/main">
-              <a:ext uri="{FF2B5EF4-FFF2-40B4-BE49-F238E27FC236}">
-                <a16:creationId xmlns:a16="http://schemas.microsoft.com/office/drawing/2014/main" id="{D4B680EC-1257-4D06-9C48-5CABC3AD6582}"/>
-              </a:ext>
-            </a:extLst>
-          </p:cNvPr>
-          <p:cNvSpPr>
-            <a:spLocks xmlns:a="http://schemas.openxmlformats.org/drawingml/2006/main" noGrp="1"/>
-          </p:cNvSpPr>
-          <p:nvPr/>
-        </p:nvSpPr>
-        <p:spPr>
-          <a:xfrm xmlns:a="http://schemas.openxmlformats.org/drawingml/2006/main">
-            <a:off x="11201400" y="4324350"/>
-            <a:ext cx="2781300" cy="361950"/>
-          </a:xfrm>
-          <a:prstGeom xmlns:a="http://schemas.openxmlformats.org/drawingml/2006/main" prst="rect">
-            <a:avLst/>
-          </a:prstGeom>
-          <a:noFill xmlns:a="http://schemas.openxmlformats.org/drawingml/2006/main"/>
-          <a:ln xmlns:a="http://schemas.openxmlformats.org/drawingml/2006/main" w="0">
-            <a:noFill/>
-            <a:prstDash val="solid"/>
-          </a:ln>
-        </p:spPr>
-        <p:txBody>
-          <a:bodyPr xmlns:a="http://schemas.openxmlformats.org/drawingml/2006/main" wrap="square" lIns="0" tIns="0" rIns="0" bIns="0" anchor="ctr">
-            <a:normAutofit fontScale="100000"/>
-          </a:bodyPr>
-          <a:lstStyle xmlns:a="http://schemas.openxmlformats.org/drawingml/2006/main"/>
-          <a:p xmlns:a="http://schemas.openxmlformats.org/drawingml/2006/main">
-            <a:pPr algn="l">
-              <a:lnSpc>
-                <a:spcPct val="100000"/>
-              </a:lnSpc>
-              <a:buNone/>
-              <a:defRPr sz="1500" b="1">
-                <a:solidFill>
-                  <a:srgbClr val="051C2A"/>
-                </a:solidFill>
-                <a:latin typeface="Calibri"/>
-                <a:ea typeface="Calibri"/>
-                <a:cs typeface="Calibri"/>
-              </a:defRPr>
-            </a:pPr>
-            <a:r>
-              <a:rPr sz="1500" b="1">
-                <a:solidFill>
-                  <a:srgbClr val="051C2A"/>
-                </a:solidFill>
-                <a:latin typeface="Calibri"/>
-                <a:ea typeface="Calibri"/>
-                <a:cs typeface="Calibri"/>
-              </a:rPr>
-              <a:t>FY2025 · language · units</a:t>
-            </a:r>
-          </a:p>
-        </p:txBody>
-      </p:sp>
-      <p:sp>
-        <p:nvSpPr>
-          <p:cNvPr id="23" name="right-field-2">
-            <a:extLst xmlns:a="http://schemas.openxmlformats.org/drawingml/2006/main">
-              <a:ext uri="{FF2B5EF4-FFF2-40B4-BE49-F238E27FC236}">
-                <a16:creationId xmlns:a16="http://schemas.microsoft.com/office/drawing/2014/main" id="{A0E0710B-A185-4D6C-B16D-6B16D9A997C0}"/>
-              </a:ext>
-            </a:extLst>
-          </p:cNvPr>
-          <p:cNvSpPr>
-            <a:spLocks xmlns:a="http://schemas.openxmlformats.org/drawingml/2006/main" noGrp="1"/>
-          </p:cNvSpPr>
-          <p:nvPr/>
-        </p:nvSpPr>
-        <p:spPr>
-          <a:xfrm xmlns:a="http://schemas.openxmlformats.org/drawingml/2006/main">
-            <a:off x="10972800" y="5124450"/>
-            <a:ext cx="3238500" cy="895350"/>
-          </a:xfrm>
-          <a:prstGeom xmlns:a="http://schemas.openxmlformats.org/drawingml/2006/main" prst="roundRect">
-            <a:avLst>
-              <a:gd name="adj" fmla="val 12766"/>
-            </a:avLst>
-          </a:prstGeom>
-          <a:solidFill xmlns:a="http://schemas.openxmlformats.org/drawingml/2006/main">
-            <a:srgbClr val="FFFFFF"/>
-          </a:solidFill>
-          <a:ln xmlns:a="http://schemas.openxmlformats.org/drawingml/2006/main" w="9525">
-            <a:solidFill>
-              <a:srgbClr val="E4E7E9"/>
-            </a:solidFill>
-            <a:prstDash val="solid"/>
-          </a:ln>
-        </p:spPr>
-      </p:sp>
-      <p:sp>
-        <p:nvSpPr>
-          <p:cNvPr id="24" name="">
-            <a:extLst xmlns:a="http://schemas.openxmlformats.org/drawingml/2006/main">
-              <a:ext uri="{FF2B5EF4-FFF2-40B4-BE49-F238E27FC236}">
-                <a16:creationId xmlns:a16="http://schemas.microsoft.com/office/drawing/2014/main" id="{BE678660-B347-4DEE-AD4B-E62AD2E01EB4}"/>
-              </a:ext>
-            </a:extLst>
-          </p:cNvPr>
-          <p:cNvSpPr>
-            <a:spLocks xmlns:a="http://schemas.openxmlformats.org/drawingml/2006/main" noGrp="1"/>
-          </p:cNvSpPr>
-          <p:nvPr/>
-        </p:nvSpPr>
-        <p:spPr>
-          <a:xfrm xmlns:a="http://schemas.openxmlformats.org/drawingml/2006/main">
-            <a:off x="11201400" y="5238750"/>
-            <a:ext cx="2781300" cy="266700"/>
-          </a:xfrm>
-          <a:prstGeom xmlns:a="http://schemas.openxmlformats.org/drawingml/2006/main" prst="rect">
-            <a:avLst/>
-          </a:prstGeom>
-          <a:noFill xmlns:a="http://schemas.openxmlformats.org/drawingml/2006/main"/>
-          <a:ln xmlns:a="http://schemas.openxmlformats.org/drawingml/2006/main" w="0">
-            <a:noFill/>
-            <a:prstDash val="solid"/>
-          </a:ln>
-        </p:spPr>
-        <p:txBody>
-          <a:bodyPr xmlns:a="http://schemas.openxmlformats.org/drawingml/2006/main" wrap="square" lIns="0" tIns="0" rIns="0" bIns="0" anchor="ctr">
-            <a:normAutofit fontScale="100000"/>
-          </a:bodyPr>
-          <a:lstStyle xmlns:a="http://schemas.openxmlformats.org/drawingml/2006/main"/>
-          <a:p xmlns:a="http://schemas.openxmlformats.org/drawingml/2006/main">
-            <a:pPr algn="l">
-              <a:lnSpc>
-                <a:spcPct val="100000"/>
-              </a:lnSpc>
-              <a:buNone/>
-              <a:defRPr sz="1200" b="1">
-                <a:solidFill>
-                  <a:srgbClr val="1F40CB"/>
-                </a:solidFill>
-                <a:latin typeface="Calibri"/>
-                <a:ea typeface="Calibri"/>
-                <a:cs typeface="Calibri"/>
-              </a:defRPr>
-            </a:pPr>
-            <a:r>
-              <a:rPr sz="1200" b="1">
-                <a:solidFill>
-                  <a:srgbClr val="1F40CB"/>
-                </a:solidFill>
-                <a:latin typeface="Calibri"/>
-                <a:ea typeface="Calibri"/>
-                <a:cs typeface="Calibri"/>
-              </a:rPr>
-              <a:t>IDENTITY</a:t>
-            </a:r>
-          </a:p>
-        </p:txBody>
-      </p:sp>
-      <p:sp>
-        <p:nvSpPr>
-          <p:cNvPr id="25" name="">
-            <a:extLst xmlns:a="http://schemas.openxmlformats.org/drawingml/2006/main">
-              <a:ext uri="{FF2B5EF4-FFF2-40B4-BE49-F238E27FC236}">
-                <a16:creationId xmlns:a16="http://schemas.microsoft.com/office/drawing/2014/main" id="{4B137DBE-0373-4B7D-89B2-62CEDDD2AF0A}"/>
-              </a:ext>
-            </a:extLst>
-          </p:cNvPr>
-          <p:cNvSpPr>
-            <a:spLocks xmlns:a="http://schemas.openxmlformats.org/drawingml/2006/main" noGrp="1"/>
-          </p:cNvSpPr>
-          <p:nvPr/>
-        </p:nvSpPr>
-        <p:spPr>
-          <a:xfrm xmlns:a="http://schemas.openxmlformats.org/drawingml/2006/main">
-            <a:off x="11201400" y="5524500"/>
-            <a:ext cx="2781300" cy="361950"/>
-          </a:xfrm>
-          <a:prstGeom xmlns:a="http://schemas.openxmlformats.org/drawingml/2006/main" prst="rect">
-            <a:avLst/>
-          </a:prstGeom>
-          <a:noFill xmlns:a="http://schemas.openxmlformats.org/drawingml/2006/main"/>
-          <a:ln xmlns:a="http://schemas.openxmlformats.org/drawingml/2006/main" w="0">
-            <a:noFill/>
-            <a:prstDash val="solid"/>
-          </a:ln>
-        </p:spPr>
-        <p:txBody>
-          <a:bodyPr xmlns:a="http://schemas.openxmlformats.org/drawingml/2006/main" wrap="square" lIns="0" tIns="0" rIns="0" bIns="0" anchor="ctr">
-            <a:normAutofit fontScale="100000"/>
-          </a:bodyPr>
-          <a:lstStyle xmlns:a="http://schemas.openxmlformats.org/drawingml/2006/main"/>
-          <a:p xmlns:a="http://schemas.openxmlformats.org/drawingml/2006/main">
-            <a:pPr algn="l">
-              <a:lnSpc>
-                <a:spcPct val="100000"/>
-              </a:lnSpc>
-              <a:buNone/>
-              <a:defRPr sz="1500" b="1">
-                <a:solidFill>
-                  <a:srgbClr val="051C2A"/>
-                </a:solidFill>
-                <a:latin typeface="Calibri"/>
-                <a:ea typeface="Calibri"/>
-                <a:cs typeface="Calibri"/>
-              </a:defRPr>
-            </a:pPr>
-            <a:r>
-              <a:rPr sz="1500" b="1">
-                <a:solidFill>
-                  <a:srgbClr val="051C2A"/>
-                </a:solidFill>
-                <a:latin typeface="Calibri"/>
-                <a:ea typeface="Calibri"/>
-                <a:cs typeface="Calibri"/>
-              </a:rPr>
-              <a:t>stable source + block IDs</a:t>
-            </a:r>
-          </a:p>
-        </p:txBody>
-      </p:sp>
-      <p:cxnSp>
-        <p:nvCxnSpPr>
-          <p:cNvPr id="218" name=""/>
-          <p:cNvCxnSpPr>
-            <a:stCxn xmlns:a="http://schemas.openxmlformats.org/drawingml/2006/main" id="8" idx="3"/>
-            <a:endCxn xmlns:a="http://schemas.openxmlformats.org/drawingml/2006/main" id="3" idx="1"/>
-          </p:cNvCxnSpPr>
-          <p:nvPr/>
-        </p:nvCxnSpPr>
-        <p:spPr>
-          <a:xfrm xmlns:a="http://schemas.openxmlformats.org/drawingml/2006/main">
-            <a:off x="4267200" y="3171825"/>
-            <a:ext cx="1047750" cy="1200150"/>
-          </a:xfrm>
-          <a:prstGeom xmlns:a="http://schemas.openxmlformats.org/drawingml/2006/main" prst="straightConnector1">
-            <a:avLst/>
-          </a:prstGeom>
-          <a:ln xmlns:a="http://schemas.openxmlformats.org/drawingml/2006/main" w="19050">
-            <a:solidFill>
-              <a:srgbClr val="9A9A9F"/>
-            </a:solidFill>
-            <a:prstDash val="solid"/>
-            <a:tailEnd type="triangle" w="med" len="med"/>
-          </a:ln>
-        </p:spPr>
-      </p:cxnSp>
-      <p:cxnSp>
-        <p:nvCxnSpPr>
-          <p:cNvPr id="219" name=""/>
-          <p:cNvCxnSpPr>
-            <a:stCxn xmlns:a="http://schemas.openxmlformats.org/drawingml/2006/main" id="11" idx="3"/>
-            <a:endCxn xmlns:a="http://schemas.openxmlformats.org/drawingml/2006/main" id="3" idx="1"/>
-          </p:cNvCxnSpPr>
-          <p:nvPr/>
-        </p:nvCxnSpPr>
-        <p:spPr>
-          <a:xfrm xmlns:a="http://schemas.openxmlformats.org/drawingml/2006/main">
-            <a:off x="4267200" y="4371975"/>
-            <a:ext cx="1047750" cy="0"/>
-          </a:xfrm>
-          <a:prstGeom xmlns:a="http://schemas.openxmlformats.org/drawingml/2006/main" prst="straightConnector1">
-            <a:avLst/>
-          </a:prstGeom>
-          <a:ln xmlns:a="http://schemas.openxmlformats.org/drawingml/2006/main" w="19050">
-            <a:solidFill>
-              <a:srgbClr val="9A9A9F"/>
-            </a:solidFill>
-            <a:prstDash val="solid"/>
-            <a:tailEnd type="triangle" w="med" len="med"/>
-          </a:ln>
-        </p:spPr>
-      </p:cxnSp>
-      <p:cxnSp>
-        <p:nvCxnSpPr>
-          <p:cNvPr id="220" name=""/>
-          <p:cNvCxnSpPr>
-            <a:stCxn xmlns:a="http://schemas.openxmlformats.org/drawingml/2006/main" id="14" idx="3"/>
-            <a:endCxn xmlns:a="http://schemas.openxmlformats.org/drawingml/2006/main" id="3" idx="1"/>
-          </p:cNvCxnSpPr>
-          <p:nvPr/>
-        </p:nvCxnSpPr>
-        <p:spPr>
-          <a:xfrm xmlns:a="http://schemas.openxmlformats.org/drawingml/2006/main" flipV="1">
-            <a:off x="4267200" y="4371975"/>
-            <a:ext cx="1047750" cy="1200150"/>
-          </a:xfrm>
-          <a:prstGeom xmlns:a="http://schemas.openxmlformats.org/drawingml/2006/main" prst="straightConnector1">
-            <a:avLst/>
-          </a:prstGeom>
-          <a:ln xmlns:a="http://schemas.openxmlformats.org/drawingml/2006/main" w="19050">
-            <a:solidFill>
-              <a:srgbClr val="9A9A9F"/>
-            </a:solidFill>
-            <a:prstDash val="solid"/>
-            <a:tailEnd type="triangle" w="med" len="med"/>
-          </a:ln>
-        </p:spPr>
-      </p:cxnSp>
-      <p:cxnSp>
-        <p:nvCxnSpPr>
-          <p:cNvPr id="221" name=""/>
-          <p:cNvCxnSpPr>
-            <a:stCxn xmlns:a="http://schemas.openxmlformats.org/drawingml/2006/main" id="3" idx="3"/>
-            <a:endCxn xmlns:a="http://schemas.openxmlformats.org/drawingml/2006/main" id="17" idx="1"/>
-          </p:cNvCxnSpPr>
-          <p:nvPr/>
-        </p:nvCxnSpPr>
-        <p:spPr>
-          <a:xfrm xmlns:a="http://schemas.openxmlformats.org/drawingml/2006/main" flipV="1">
-            <a:off x="9925050" y="3171825"/>
-            <a:ext cx="1047750" cy="1200150"/>
-          </a:xfrm>
-          <a:prstGeom xmlns:a="http://schemas.openxmlformats.org/drawingml/2006/main" prst="straightConnector1">
-            <a:avLst/>
-          </a:prstGeom>
-          <a:ln xmlns:a="http://schemas.openxmlformats.org/drawingml/2006/main" w="19050">
-            <a:solidFill>
-              <a:srgbClr val="9A9A9F"/>
-            </a:solidFill>
-            <a:prstDash val="solid"/>
-            <a:tailEnd type="triangle" w="sm" len="sm"/>
-          </a:ln>
-        </p:spPr>
-      </p:cxnSp>
-      <p:cxnSp>
-        <p:nvCxnSpPr>
-          <p:cNvPr id="222" name=""/>
-          <p:cNvCxnSpPr>
-            <a:stCxn xmlns:a="http://schemas.openxmlformats.org/drawingml/2006/main" id="3" idx="3"/>
-            <a:endCxn xmlns:a="http://schemas.openxmlformats.org/drawingml/2006/main" id="20" idx="1"/>
-          </p:cNvCxnSpPr>
-          <p:nvPr/>
-        </p:nvCxnSpPr>
-        <p:spPr>
-          <a:xfrm xmlns:a="http://schemas.openxmlformats.org/drawingml/2006/main">
-            <a:off x="9925050" y="4371975"/>
-            <a:ext cx="1047750" cy="0"/>
-          </a:xfrm>
-          <a:prstGeom xmlns:a="http://schemas.openxmlformats.org/drawingml/2006/main" prst="straightConnector1">
-            <a:avLst/>
-          </a:prstGeom>
-          <a:ln xmlns:a="http://schemas.openxmlformats.org/drawingml/2006/main" w="19050">
-            <a:solidFill>
-              <a:srgbClr val="9A9A9F"/>
-            </a:solidFill>
-            <a:prstDash val="solid"/>
-            <a:tailEnd type="triangle" w="sm" len="sm"/>
-          </a:ln>
-        </p:spPr>
-      </p:cxnSp>
-      <p:cxnSp>
-        <p:nvCxnSpPr>
-          <p:cNvPr id="223" name=""/>
-          <p:cNvCxnSpPr>
-            <a:stCxn xmlns:a="http://schemas.openxmlformats.org/drawingml/2006/main" id="3" idx="3"/>
-            <a:endCxn xmlns:a="http://schemas.openxmlformats.org/drawingml/2006/main" id="23" idx="1"/>
-          </p:cNvCxnSpPr>
-          <p:nvPr/>
-        </p:nvCxnSpPr>
-        <p:spPr>
-          <a:xfrm xmlns:a="http://schemas.openxmlformats.org/drawingml/2006/main">
-            <a:off x="9925050" y="4371975"/>
-            <a:ext cx="1047750" cy="1200150"/>
-          </a:xfrm>
-          <a:prstGeom xmlns:a="http://schemas.openxmlformats.org/drawingml/2006/main" prst="straightConnector1">
-            <a:avLst/>
-          </a:prstGeom>
-          <a:ln xmlns:a="http://schemas.openxmlformats.org/drawingml/2006/main" w="19050">
-            <a:solidFill>
-              <a:srgbClr val="9A9A9F"/>
-            </a:solidFill>
-            <a:prstDash val="solid"/>
-            <a:tailEnd type="triangle" w="sm" len="sm"/>
-          </a:ln>
-        </p:spPr>
-      </p:cxnSp>
-      <p:sp>
-        <p:nvSpPr>
-          <p:cNvPr id="32" name="">
-            <a:extLst xmlns:a="http://schemas.openxmlformats.org/drawingml/2006/main">
-              <a:ext uri="{FF2B5EF4-FFF2-40B4-BE49-F238E27FC236}">
-                <a16:creationId xmlns:a16="http://schemas.microsoft.com/office/drawing/2014/main" id="{3C75D1AF-F6AB-4A2D-841A-C9B511F5D15C}"/>
-              </a:ext>
-            </a:extLst>
-          </p:cNvPr>
-          <p:cNvSpPr>
-            <a:spLocks xmlns:a="http://schemas.openxmlformats.org/drawingml/2006/main" noGrp="1"/>
-          </p:cNvSpPr>
-          <p:nvPr/>
-        </p:nvSpPr>
-        <p:spPr>
-          <a:xfrm xmlns:a="http://schemas.openxmlformats.org/drawingml/2006/main">
-            <a:off x="2343150" y="6705600"/>
-            <a:ext cx="10553700" cy="438150"/>
-          </a:xfrm>
-          <a:prstGeom xmlns:a="http://schemas.openxmlformats.org/drawingml/2006/main" prst="rect">
-            <a:avLst/>
-          </a:prstGeom>
-          <a:noFill xmlns:a="http://schemas.openxmlformats.org/drawingml/2006/main"/>
-          <a:ln xmlns:a="http://schemas.openxmlformats.org/drawingml/2006/main" w="0">
-            <a:noFill/>
-            <a:prstDash val="solid"/>
-          </a:ln>
-        </p:spPr>
-        <p:txBody>
-          <a:bodyPr xmlns:a="http://schemas.openxmlformats.org/drawingml/2006/main" wrap="square" lIns="0" tIns="0" rIns="0" bIns="0" anchor="ctr">
-            <a:normAutofit fontScale="100000"/>
-          </a:bodyPr>
-          <a:lstStyle xmlns:a="http://schemas.openxmlformats.org/drawingml/2006/main"/>
-          <a:p xmlns:a="http://schemas.openxmlformats.org/drawingml/2006/main">
-            <a:pPr algn="ctr">
-              <a:lnSpc>
-                <a:spcPct val="100000"/>
-              </a:lnSpc>
-              <a:buNone/>
-              <a:defRPr sz="1950" b="1">
-                <a:solidFill>
-                  <a:srgbClr val="051C2A"/>
-                </a:solidFill>
-                <a:latin typeface="Calibri"/>
-                <a:ea typeface="Calibri"/>
-                <a:cs typeface="Calibri"/>
-              </a:defRPr>
-            </a:pPr>
-            <a:r>
-              <a:rPr sz="1950" b="1">
-                <a:solidFill>
-                  <a:srgbClr val="051C2A"/>
-                </a:solidFill>
-                <a:latin typeface="Calibri"/>
-                <a:ea typeface="Calibri"/>
-                <a:cs typeface="Calibri"/>
-              </a:rPr>
-              <a:t>If provenance is absent here, citations and metadata filters cannot recover it safely later.</a:t>
-            </a:r>
-          </a:p>
-        </p:txBody>
-      </p:sp>
-      <p:sp>
-        <p:nvSpPr>
-          <p:cNvPr id="33" name="">
-            <a:extLst xmlns:a="http://schemas.openxmlformats.org/drawingml/2006/main">
-              <a:ext uri="{FF2B5EF4-FFF2-40B4-BE49-F238E27FC236}">
-                <a16:creationId xmlns:a16="http://schemas.microsoft.com/office/drawing/2014/main" id="{207CAB67-18B2-45B8-A6D3-DDBE52558E5C}"/>
-              </a:ext>
-            </a:extLst>
-          </p:cNvPr>
-          <p:cNvSpPr>
-            <a:spLocks xmlns:a="http://schemas.openxmlformats.org/drawingml/2006/main" noGrp="1"/>
-          </p:cNvSpPr>
-          <p:nvPr/>
-        </p:nvSpPr>
-        <p:spPr>
-          <a:xfrm xmlns:a="http://schemas.openxmlformats.org/drawingml/2006/main">
-            <a:off x="857250" y="7896225"/>
-            <a:ext cx="13525500" cy="28575"/>
-          </a:xfrm>
-          <a:prstGeom xmlns:a="http://schemas.openxmlformats.org/drawingml/2006/main" prst="rect">
-            <a:avLst/>
-          </a:prstGeom>
-          <a:solidFill xmlns:a="http://schemas.openxmlformats.org/drawingml/2006/main">
-            <a:srgbClr val="E4E7E9"/>
-          </a:solidFill>
-          <a:ln xmlns:a="http://schemas.openxmlformats.org/drawingml/2006/main" w="0">
-            <a:solidFill>
-              <a:srgbClr val="E4E7E9"/>
-            </a:solidFill>
-            <a:prstDash val="solid"/>
-          </a:ln>
-        </p:spPr>
-      </p:sp>
-      <p:sp>
-        <p:nvSpPr>
-          <p:cNvPr id="34" name="">
-            <a:extLst xmlns:a="http://schemas.openxmlformats.org/drawingml/2006/main">
-              <a:ext uri="{FF2B5EF4-FFF2-40B4-BE49-F238E27FC236}">
-                <a16:creationId xmlns:a16="http://schemas.microsoft.com/office/drawing/2014/main" id="{7CAE100F-4D6F-45A8-A34A-47F11D77390B}"/>
-              </a:ext>
-            </a:extLst>
-          </p:cNvPr>
-          <p:cNvSpPr>
-            <a:spLocks xmlns:a="http://schemas.openxmlformats.org/drawingml/2006/main" noGrp="1"/>
-          </p:cNvSpPr>
-          <p:nvPr/>
-        </p:nvSpPr>
-        <p:spPr>
-          <a:xfrm xmlns:a="http://schemas.openxmlformats.org/drawingml/2006/main">
-            <a:off x="857250" y="7896225"/>
-            <a:ext cx="8001000" cy="38100"/>
-          </a:xfrm>
-          <a:prstGeom xmlns:a="http://schemas.openxmlformats.org/drawingml/2006/main" prst="rect">
-            <a:avLst/>
-          </a:prstGeom>
-          <a:solidFill xmlns:a="http://schemas.openxmlformats.org/drawingml/2006/main">
-            <a:srgbClr val="00A2EB"/>
-          </a:solidFill>
-          <a:ln xmlns:a="http://schemas.openxmlformats.org/drawingml/2006/main" w="0">
-            <a:solidFill>
-              <a:srgbClr val="00A2EB"/>
-            </a:solidFill>
-            <a:prstDash val="solid"/>
-          </a:ln>
-        </p:spPr>
-      </p:sp>
-      <p:sp>
-        <p:nvSpPr>
-          <p:cNvPr id="35" name="">
-            <a:extLst xmlns:a="http://schemas.openxmlformats.org/drawingml/2006/main">
-              <a:ext uri="{FF2B5EF4-FFF2-40B4-BE49-F238E27FC236}">
-                <a16:creationId xmlns:a16="http://schemas.microsoft.com/office/drawing/2014/main" id="{E9579015-04F7-4D6F-9134-8D10D8D764A3}"/>
-              </a:ext>
-            </a:extLst>
-          </p:cNvPr>
-          <p:cNvSpPr>
-            <a:spLocks xmlns:a="http://schemas.openxmlformats.org/drawingml/2006/main" noGrp="1"/>
-          </p:cNvSpPr>
-          <p:nvPr/>
-        </p:nvSpPr>
-        <p:spPr>
-          <a:xfrm xmlns:a="http://schemas.openxmlformats.org/drawingml/2006/main">
-            <a:off x="971550" y="8058150"/>
-            <a:ext cx="3714750" cy="323850"/>
-          </a:xfrm>
-          <a:prstGeom xmlns:a="http://schemas.openxmlformats.org/drawingml/2006/main" prst="rect">
-            <a:avLst/>
-          </a:prstGeom>
-          <a:noFill xmlns:a="http://schemas.openxmlformats.org/drawingml/2006/main"/>
-          <a:ln xmlns:a="http://schemas.openxmlformats.org/drawingml/2006/main" w="0">
-            <a:noFill/>
-            <a:prstDash val="solid"/>
-          </a:ln>
-        </p:spPr>
-        <p:txBody>
-          <a:bodyPr xmlns:a="http://schemas.openxmlformats.org/drawingml/2006/main" wrap="square" lIns="0" tIns="0" rIns="0" bIns="0" anchor="ctr">
-            <a:normAutofit fontScale="100000"/>
-          </a:bodyPr>
-          <a:lstStyle xmlns:a="http://schemas.openxmlformats.org/drawingml/2006/main"/>
-          <a:p xmlns:a="http://schemas.openxmlformats.org/drawingml/2006/main">
-            <a:pPr algn="l">
-              <a:lnSpc>
-                <a:spcPct val="100000"/>
-              </a:lnSpc>
-              <a:buNone/>
               <a:defRPr sz="1200" b="0">
                 <a:solidFill>
                   <a:srgbClr val="9A9A9F"/>
@@ -8834,6 +5914,28 @@
           </a:p>
         </p:txBody>
       </p:sp>
+      <p:pic>
+        <p:nvPicPr>
+          <p:cNvPr id="48" name=""/>
+          <p:cNvPicPr>
+            <a:picLocks xmlns:a="http://schemas.openxmlformats.org/drawingml/2006/main" noChangeAspect="1"/>
+          </p:cNvPicPr>
+          <p:nvPr/>
+        </p:nvPicPr>
+        <p:blipFill>
+          <a:blip xmlns:r="http://schemas.openxmlformats.org/officeDocument/2006/relationships" xmlns:a="http://schemas.openxmlformats.org/drawingml/2006/main" r:embed="Rf0ed14b8d7104f66"/>
+          <a:stretch xmlns:a="http://schemas.openxmlformats.org/drawingml/2006/main"/>
+        </p:blipFill>
+        <p:spPr>
+          <a:xfrm xmlns:a="http://schemas.openxmlformats.org/drawingml/2006/main">
+            <a:off x="1178260" y="2266950"/>
+            <a:ext cx="12883480" cy="4248150"/>
+          </a:xfrm>
+          <a:prstGeom xmlns:a="http://schemas.openxmlformats.org/drawingml/2006/main" prst="rect">
+            <a:avLst/>
+          </a:prstGeom>
+        </p:spPr>
+      </p:pic>
     </p:spTree>
     <p:extLst>
       <p:ext uri="{BB962C8B-B14F-4D97-AF65-F5344CB8AC3E}">
@@ -8920,7 +6022,7 @@
                 <a:ea typeface="Calibri"/>
                 <a:cs typeface="Calibri"/>
               </a:rPr>
-              <a:t>CORE BOUNDARIES</a:t>
+              <a:t>CHUNK INTEGRITY</a:t>
             </a:r>
           </a:p>
         </p:txBody>
@@ -8982,1288 +6084,10 @@
                 <a:ea typeface="Calibri"/>
                 <a:cs typeface="Calibri"/>
               </a:rPr>
-              <a:t>The same evidence changes shape under each strategy</a:t>
-            </a:r>
-          </a:p>
-        </p:txBody>
-      </p:sp>
-      <p:sp>
-        <p:nvSpPr>
-          <p:cNvPr id="3" name="">
-            <a:extLst xmlns:a="http://schemas.openxmlformats.org/drawingml/2006/main">
-              <a:ext uri="{FF2B5EF4-FFF2-40B4-BE49-F238E27FC236}">
-                <a16:creationId xmlns:a16="http://schemas.microsoft.com/office/drawing/2014/main" id="{D7E8B752-5838-4084-A09E-2C38B9D5B30B}"/>
-              </a:ext>
-            </a:extLst>
-          </p:cNvPr>
-          <p:cNvSpPr>
-            <a:spLocks xmlns:a="http://schemas.openxmlformats.org/drawingml/2006/main" noGrp="1"/>
-          </p:cNvSpPr>
-          <p:nvPr/>
-        </p:nvSpPr>
-        <p:spPr>
-          <a:xfrm xmlns:a="http://schemas.openxmlformats.org/drawingml/2006/main">
-            <a:off x="1028700" y="2800350"/>
-            <a:ext cx="2476500" cy="361950"/>
-          </a:xfrm>
-          <a:prstGeom xmlns:a="http://schemas.openxmlformats.org/drawingml/2006/main" prst="rect">
-            <a:avLst/>
-          </a:prstGeom>
-          <a:noFill xmlns:a="http://schemas.openxmlformats.org/drawingml/2006/main"/>
-          <a:ln xmlns:a="http://schemas.openxmlformats.org/drawingml/2006/main" w="0">
-            <a:noFill/>
-            <a:prstDash val="solid"/>
-          </a:ln>
-        </p:spPr>
-        <p:txBody>
-          <a:bodyPr xmlns:a="http://schemas.openxmlformats.org/drawingml/2006/main" wrap="square" lIns="0" tIns="0" rIns="0" bIns="0" anchor="ctr">
-            <a:normAutofit fontScale="100000"/>
-          </a:bodyPr>
-          <a:lstStyle xmlns:a="http://schemas.openxmlformats.org/drawingml/2006/main"/>
-          <a:p xmlns:a="http://schemas.openxmlformats.org/drawingml/2006/main">
-            <a:pPr algn="l">
-              <a:lnSpc>
-                <a:spcPct val="100000"/>
-              </a:lnSpc>
-              <a:buNone/>
-              <a:defRPr sz="1350" b="1">
-                <a:solidFill>
-                  <a:srgbClr val="F07D00"/>
-                </a:solidFill>
-                <a:latin typeface="Calibri"/>
-                <a:ea typeface="Calibri"/>
-                <a:cs typeface="Calibri"/>
-              </a:defRPr>
-            </a:pPr>
-            <a:r>
-              <a:rPr sz="1350" b="1">
-                <a:solidFill>
-                  <a:srgbClr val="F07D00"/>
-                </a:solidFill>
-                <a:latin typeface="Calibri"/>
-                <a:ea typeface="Calibri"/>
-                <a:cs typeface="Calibri"/>
-              </a:rPr>
-              <a:t>FIXED · 90 chars</a:t>
-            </a:r>
-          </a:p>
-        </p:txBody>
-      </p:sp>
-      <p:sp>
-        <p:nvSpPr>
-          <p:cNvPr id="4" name="">
-            <a:extLst xmlns:a="http://schemas.openxmlformats.org/drawingml/2006/main">
-              <a:ext uri="{FF2B5EF4-FFF2-40B4-BE49-F238E27FC236}">
-                <a16:creationId xmlns:a16="http://schemas.microsoft.com/office/drawing/2014/main" id="{6CA53B89-6D78-4803-9B7F-A0162294F364}"/>
-              </a:ext>
-            </a:extLst>
-          </p:cNvPr>
-          <p:cNvSpPr>
-            <a:spLocks xmlns:a="http://schemas.openxmlformats.org/drawingml/2006/main" noGrp="1"/>
-          </p:cNvSpPr>
-          <p:nvPr/>
-        </p:nvSpPr>
-        <p:spPr>
-          <a:xfrm xmlns:a="http://schemas.openxmlformats.org/drawingml/2006/main">
-            <a:off x="3714750" y="2743200"/>
-            <a:ext cx="2381250" cy="647700"/>
-          </a:xfrm>
-          <a:prstGeom xmlns:a="http://schemas.openxmlformats.org/drawingml/2006/main" prst="roundRect">
-            <a:avLst>
-              <a:gd name="adj" fmla="val 5882"/>
-            </a:avLst>
-          </a:prstGeom>
-          <a:solidFill xmlns:a="http://schemas.openxmlformats.org/drawingml/2006/main">
-            <a:srgbClr val="1F40CB"/>
-          </a:solidFill>
-          <a:ln xmlns:a="http://schemas.openxmlformats.org/drawingml/2006/main" w="9525">
-            <a:solidFill>
-              <a:srgbClr val="FFFFFF"/>
-            </a:solidFill>
-            <a:prstDash val="solid"/>
-          </a:ln>
-        </p:spPr>
-      </p:sp>
-      <p:sp>
-        <p:nvSpPr>
-          <p:cNvPr id="5" name="">
-            <a:extLst xmlns:a="http://schemas.openxmlformats.org/drawingml/2006/main">
-              <a:ext uri="{FF2B5EF4-FFF2-40B4-BE49-F238E27FC236}">
-                <a16:creationId xmlns:a16="http://schemas.microsoft.com/office/drawing/2014/main" id="{132FC0D2-12CA-4723-B1F4-C8F21C5F174F}"/>
-              </a:ext>
-            </a:extLst>
-          </p:cNvPr>
-          <p:cNvSpPr>
-            <a:spLocks xmlns:a="http://schemas.openxmlformats.org/drawingml/2006/main" noGrp="1"/>
-          </p:cNvSpPr>
-          <p:nvPr/>
-        </p:nvSpPr>
-        <p:spPr>
-          <a:xfrm xmlns:a="http://schemas.openxmlformats.org/drawingml/2006/main">
-            <a:off x="3810000" y="2838450"/>
-            <a:ext cx="2190750" cy="457200"/>
-          </a:xfrm>
-          <a:prstGeom xmlns:a="http://schemas.openxmlformats.org/drawingml/2006/main" prst="rect">
-            <a:avLst/>
-          </a:prstGeom>
-          <a:noFill xmlns:a="http://schemas.openxmlformats.org/drawingml/2006/main"/>
-          <a:ln xmlns:a="http://schemas.openxmlformats.org/drawingml/2006/main" w="0">
-            <a:noFill/>
-            <a:prstDash val="solid"/>
-          </a:ln>
-        </p:spPr>
-        <p:txBody>
-          <a:bodyPr xmlns:a="http://schemas.openxmlformats.org/drawingml/2006/main" wrap="square" lIns="0" tIns="0" rIns="0" bIns="0" anchor="ctr">
-            <a:normAutofit fontScale="100000"/>
-          </a:bodyPr>
-          <a:lstStyle xmlns:a="http://schemas.openxmlformats.org/drawingml/2006/main"/>
-          <a:p xmlns:a="http://schemas.openxmlformats.org/drawingml/2006/main">
-            <a:pPr algn="ctr">
-              <a:lnSpc>
-                <a:spcPct val="100000"/>
-              </a:lnSpc>
-              <a:buNone/>
-              <a:defRPr sz="1275" b="1">
-                <a:solidFill>
-                  <a:srgbClr val="FFFFFF"/>
-                </a:solidFill>
-                <a:latin typeface="Calibri"/>
-                <a:ea typeface="Calibri"/>
-                <a:cs typeface="Calibri"/>
-              </a:defRPr>
-            </a:pPr>
-            <a:r>
-              <a:rPr sz="1275" b="1">
-                <a:solidFill>
-                  <a:srgbClr val="FFFFFF"/>
-                </a:solidFill>
-                <a:latin typeface="Calibri"/>
-                <a:ea typeface="Calibri"/>
-                <a:cs typeface="Calibri"/>
-              </a:rPr>
-              <a:t>Heading + revenue</a:t>
-            </a:r>
-          </a:p>
-        </p:txBody>
-      </p:sp>
-      <p:sp>
-        <p:nvSpPr>
-          <p:cNvPr id="6" name="">
-            <a:extLst xmlns:a="http://schemas.openxmlformats.org/drawingml/2006/main">
-              <a:ext uri="{FF2B5EF4-FFF2-40B4-BE49-F238E27FC236}">
-                <a16:creationId xmlns:a16="http://schemas.microsoft.com/office/drawing/2014/main" id="{3E9AAB83-2BB1-4A7A-84F9-1F2BE14A6F81}"/>
-              </a:ext>
-            </a:extLst>
-          </p:cNvPr>
-          <p:cNvSpPr>
-            <a:spLocks xmlns:a="http://schemas.openxmlformats.org/drawingml/2006/main" noGrp="1"/>
-          </p:cNvSpPr>
-          <p:nvPr/>
-        </p:nvSpPr>
-        <p:spPr>
-          <a:xfrm xmlns:a="http://schemas.openxmlformats.org/drawingml/2006/main">
-            <a:off x="6153150" y="2743200"/>
-            <a:ext cx="2000250" cy="647700"/>
-          </a:xfrm>
-          <a:prstGeom xmlns:a="http://schemas.openxmlformats.org/drawingml/2006/main" prst="roundRect">
-            <a:avLst>
-              <a:gd name="adj" fmla="val 5882"/>
-            </a:avLst>
-          </a:prstGeom>
-          <a:solidFill xmlns:a="http://schemas.openxmlformats.org/drawingml/2006/main">
-            <a:srgbClr val="F07D00"/>
-          </a:solidFill>
-          <a:ln xmlns:a="http://schemas.openxmlformats.org/drawingml/2006/main" w="9525">
-            <a:solidFill>
-              <a:srgbClr val="FFFFFF"/>
-            </a:solidFill>
-            <a:prstDash val="solid"/>
-          </a:ln>
-        </p:spPr>
-      </p:sp>
-      <p:sp>
-        <p:nvSpPr>
-          <p:cNvPr id="7" name="">
-            <a:extLst xmlns:a="http://schemas.openxmlformats.org/drawingml/2006/main">
-              <a:ext uri="{FF2B5EF4-FFF2-40B4-BE49-F238E27FC236}">
-                <a16:creationId xmlns:a16="http://schemas.microsoft.com/office/drawing/2014/main" id="{6740ED07-2E49-4E7A-9CBF-23CD3B8CFFB4}"/>
-              </a:ext>
-            </a:extLst>
-          </p:cNvPr>
-          <p:cNvSpPr>
-            <a:spLocks xmlns:a="http://schemas.openxmlformats.org/drawingml/2006/main" noGrp="1"/>
-          </p:cNvSpPr>
-          <p:nvPr/>
-        </p:nvSpPr>
-        <p:spPr>
-          <a:xfrm xmlns:a="http://schemas.openxmlformats.org/drawingml/2006/main">
-            <a:off x="6248400" y="2838450"/>
-            <a:ext cx="1809750" cy="457200"/>
-          </a:xfrm>
-          <a:prstGeom xmlns:a="http://schemas.openxmlformats.org/drawingml/2006/main" prst="rect">
-            <a:avLst/>
-          </a:prstGeom>
-          <a:noFill xmlns:a="http://schemas.openxmlformats.org/drawingml/2006/main"/>
-          <a:ln xmlns:a="http://schemas.openxmlformats.org/drawingml/2006/main" w="0">
-            <a:noFill/>
-            <a:prstDash val="solid"/>
-          </a:ln>
-        </p:spPr>
-        <p:txBody>
-          <a:bodyPr xmlns:a="http://schemas.openxmlformats.org/drawingml/2006/main" wrap="square" lIns="0" tIns="0" rIns="0" bIns="0" anchor="ctr">
-            <a:normAutofit fontScale="100000"/>
-          </a:bodyPr>
-          <a:lstStyle xmlns:a="http://schemas.openxmlformats.org/drawingml/2006/main"/>
-          <a:p xmlns:a="http://schemas.openxmlformats.org/drawingml/2006/main">
-            <a:pPr algn="ctr">
-              <a:lnSpc>
-                <a:spcPct val="100000"/>
-              </a:lnSpc>
-              <a:buNone/>
-              <a:defRPr sz="1275" b="1">
-                <a:solidFill>
-                  <a:srgbClr val="FFFFFF"/>
-                </a:solidFill>
-                <a:latin typeface="Calibri"/>
-                <a:ea typeface="Calibri"/>
-                <a:cs typeface="Calibri"/>
-              </a:defRPr>
-            </a:pPr>
-            <a:r>
-              <a:rPr sz="1275" b="1">
-                <a:solidFill>
-                  <a:srgbClr val="FFFFFF"/>
-                </a:solidFill>
-                <a:latin typeface="Calibri"/>
-                <a:ea typeface="Calibri"/>
-                <a:cs typeface="Calibri"/>
-              </a:rPr>
-              <a:t>Data Center</a:t>
-            </a:r>
-          </a:p>
-        </p:txBody>
-      </p:sp>
-      <p:sp>
-        <p:nvSpPr>
-          <p:cNvPr id="8" name="">
-            <a:extLst xmlns:a="http://schemas.openxmlformats.org/drawingml/2006/main">
-              <a:ext uri="{FF2B5EF4-FFF2-40B4-BE49-F238E27FC236}">
-                <a16:creationId xmlns:a16="http://schemas.microsoft.com/office/drawing/2014/main" id="{E5A5E176-BCBA-4C49-9196-B98EF7C59C62}"/>
-              </a:ext>
-            </a:extLst>
-          </p:cNvPr>
-          <p:cNvSpPr>
-            <a:spLocks xmlns:a="http://schemas.openxmlformats.org/drawingml/2006/main" noGrp="1"/>
-          </p:cNvSpPr>
-          <p:nvPr/>
-        </p:nvSpPr>
-        <p:spPr>
-          <a:xfrm xmlns:a="http://schemas.openxmlformats.org/drawingml/2006/main">
-            <a:off x="8210550" y="2743200"/>
-            <a:ext cx="1676400" cy="647700"/>
-          </a:xfrm>
-          <a:prstGeom xmlns:a="http://schemas.openxmlformats.org/drawingml/2006/main" prst="roundRect">
-            <a:avLst>
-              <a:gd name="adj" fmla="val 5882"/>
-            </a:avLst>
-          </a:prstGeom>
-          <a:solidFill xmlns:a="http://schemas.openxmlformats.org/drawingml/2006/main">
-            <a:srgbClr val="1F40CB"/>
-          </a:solidFill>
-          <a:ln xmlns:a="http://schemas.openxmlformats.org/drawingml/2006/main" w="9525">
-            <a:solidFill>
-              <a:srgbClr val="FFFFFF"/>
-            </a:solidFill>
-            <a:prstDash val="solid"/>
-          </a:ln>
-        </p:spPr>
-      </p:sp>
-      <p:sp>
-        <p:nvSpPr>
-          <p:cNvPr id="9" name="">
-            <a:extLst xmlns:a="http://schemas.openxmlformats.org/drawingml/2006/main">
-              <a:ext uri="{FF2B5EF4-FFF2-40B4-BE49-F238E27FC236}">
-                <a16:creationId xmlns:a16="http://schemas.microsoft.com/office/drawing/2014/main" id="{2D62C752-A7F9-4B50-9D20-A71CEAD8FABF}"/>
-              </a:ext>
-            </a:extLst>
-          </p:cNvPr>
-          <p:cNvSpPr>
-            <a:spLocks xmlns:a="http://schemas.openxmlformats.org/drawingml/2006/main" noGrp="1"/>
-          </p:cNvSpPr>
-          <p:nvPr/>
-        </p:nvSpPr>
-        <p:spPr>
-          <a:xfrm xmlns:a="http://schemas.openxmlformats.org/drawingml/2006/main">
-            <a:off x="8305800" y="2838450"/>
-            <a:ext cx="1485900" cy="457200"/>
-          </a:xfrm>
-          <a:prstGeom xmlns:a="http://schemas.openxmlformats.org/drawingml/2006/main" prst="rect">
-            <a:avLst/>
-          </a:prstGeom>
-          <a:noFill xmlns:a="http://schemas.openxmlformats.org/drawingml/2006/main"/>
-          <a:ln xmlns:a="http://schemas.openxmlformats.org/drawingml/2006/main" w="0">
-            <a:noFill/>
-            <a:prstDash val="solid"/>
-          </a:ln>
-        </p:spPr>
-        <p:txBody>
-          <a:bodyPr xmlns:a="http://schemas.openxmlformats.org/drawingml/2006/main" wrap="square" lIns="0" tIns="0" rIns="0" bIns="0" anchor="ctr">
-            <a:normAutofit fontScale="100000"/>
-          </a:bodyPr>
-          <a:lstStyle xmlns:a="http://schemas.openxmlformats.org/drawingml/2006/main"/>
-          <a:p xmlns:a="http://schemas.openxmlformats.org/drawingml/2006/main">
-            <a:pPr algn="ctr">
-              <a:lnSpc>
-                <a:spcPct val="100000"/>
-              </a:lnSpc>
-              <a:buNone/>
-              <a:defRPr sz="1275" b="1">
-                <a:solidFill>
-                  <a:srgbClr val="FFFFFF"/>
-                </a:solidFill>
-                <a:latin typeface="Calibri"/>
-                <a:ea typeface="Calibri"/>
-                <a:cs typeface="Calibri"/>
-              </a:defRPr>
-            </a:pPr>
-            <a:r>
-              <a:rPr sz="1275" b="1">
-                <a:solidFill>
-                  <a:srgbClr val="FFFFFF"/>
-                </a:solidFill>
-                <a:latin typeface="Calibri"/>
-                <a:ea typeface="Calibri"/>
-                <a:cs typeface="Calibri"/>
-              </a:rPr>
-              <a:t>Gaming | USD 16.0</a:t>
-            </a:r>
-          </a:p>
-        </p:txBody>
-      </p:sp>
-      <p:sp>
-        <p:nvSpPr>
-          <p:cNvPr id="10" name="">
-            <a:extLst xmlns:a="http://schemas.openxmlformats.org/drawingml/2006/main">
-              <a:ext uri="{FF2B5EF4-FFF2-40B4-BE49-F238E27FC236}">
-                <a16:creationId xmlns:a16="http://schemas.microsoft.com/office/drawing/2014/main" id="{F9A9A56C-9DB1-49FF-8E87-2C6B8DB8CE93}"/>
-              </a:ext>
-            </a:extLst>
-          </p:cNvPr>
-          <p:cNvSpPr>
-            <a:spLocks xmlns:a="http://schemas.openxmlformats.org/drawingml/2006/main" noGrp="1"/>
-          </p:cNvSpPr>
-          <p:nvPr/>
-        </p:nvSpPr>
-        <p:spPr>
-          <a:xfrm xmlns:a="http://schemas.openxmlformats.org/drawingml/2006/main">
-            <a:off x="9944100" y="2743200"/>
-            <a:ext cx="1066800" cy="647700"/>
-          </a:xfrm>
-          <a:prstGeom xmlns:a="http://schemas.openxmlformats.org/drawingml/2006/main" prst="roundRect">
-            <a:avLst>
-              <a:gd name="adj" fmla="val 5882"/>
-            </a:avLst>
-          </a:prstGeom>
-          <a:solidFill xmlns:a="http://schemas.openxmlformats.org/drawingml/2006/main">
-            <a:srgbClr val="F07D00"/>
-          </a:solidFill>
-          <a:ln xmlns:a="http://schemas.openxmlformats.org/drawingml/2006/main" w="9525">
-            <a:solidFill>
-              <a:srgbClr val="FFFFFF"/>
-            </a:solidFill>
-            <a:prstDash val="solid"/>
-          </a:ln>
-        </p:spPr>
-      </p:sp>
-      <p:sp>
-        <p:nvSpPr>
-          <p:cNvPr id="11" name="">
-            <a:extLst xmlns:a="http://schemas.openxmlformats.org/drawingml/2006/main">
-              <a:ext uri="{FF2B5EF4-FFF2-40B4-BE49-F238E27FC236}">
-                <a16:creationId xmlns:a16="http://schemas.microsoft.com/office/drawing/2014/main" id="{D9D4F50D-12C3-4331-801A-91C1EC1A4D30}"/>
-              </a:ext>
-            </a:extLst>
-          </p:cNvPr>
-          <p:cNvSpPr>
-            <a:spLocks xmlns:a="http://schemas.openxmlformats.org/drawingml/2006/main" noGrp="1"/>
-          </p:cNvSpPr>
-          <p:nvPr/>
-        </p:nvSpPr>
-        <p:spPr>
-          <a:xfrm xmlns:a="http://schemas.openxmlformats.org/drawingml/2006/main">
-            <a:off x="10039350" y="2838450"/>
-            <a:ext cx="876300" cy="457200"/>
-          </a:xfrm>
-          <a:prstGeom xmlns:a="http://schemas.openxmlformats.org/drawingml/2006/main" prst="rect">
-            <a:avLst/>
-          </a:prstGeom>
-          <a:noFill xmlns:a="http://schemas.openxmlformats.org/drawingml/2006/main"/>
-          <a:ln xmlns:a="http://schemas.openxmlformats.org/drawingml/2006/main" w="0">
-            <a:noFill/>
-            <a:prstDash val="solid"/>
-          </a:ln>
-        </p:spPr>
-        <p:txBody>
-          <a:bodyPr xmlns:a="http://schemas.openxmlformats.org/drawingml/2006/main" wrap="square" lIns="0" tIns="0" rIns="0" bIns="0" anchor="ctr">
-            <a:normAutofit fontScale="100000"/>
-          </a:bodyPr>
-          <a:lstStyle xmlns:a="http://schemas.openxmlformats.org/drawingml/2006/main"/>
-          <a:p xmlns:a="http://schemas.openxmlformats.org/drawingml/2006/main">
-            <a:pPr algn="ctr">
-              <a:lnSpc>
-                <a:spcPct val="100000"/>
-              </a:lnSpc>
-              <a:buNone/>
-              <a:defRPr sz="1275" b="1">
-                <a:solidFill>
-                  <a:srgbClr val="FFFFFF"/>
-                </a:solidFill>
-                <a:latin typeface="Calibri"/>
-                <a:ea typeface="Calibri"/>
-                <a:cs typeface="Calibri"/>
-              </a:defRPr>
-            </a:pPr>
-            <a:r>
-              <a:rPr sz="1275" b="1">
-                <a:solidFill>
-                  <a:srgbClr val="FFFFFF"/>
-                </a:solidFill>
-                <a:latin typeface="Calibri"/>
-                <a:ea typeface="Calibri"/>
-                <a:cs typeface="Calibri"/>
-              </a:rPr>
-              <a:t>bn | 41%</a:t>
-            </a:r>
-          </a:p>
-        </p:txBody>
-      </p:sp>
-      <p:sp>
-        <p:nvSpPr>
-          <p:cNvPr id="12" name="">
-            <a:extLst xmlns:a="http://schemas.openxmlformats.org/drawingml/2006/main">
-              <a:ext uri="{FF2B5EF4-FFF2-40B4-BE49-F238E27FC236}">
-                <a16:creationId xmlns:a16="http://schemas.microsoft.com/office/drawing/2014/main" id="{194D2954-A4C1-482E-AAB1-42DAC0BB1957}"/>
-              </a:ext>
-            </a:extLst>
-          </p:cNvPr>
-          <p:cNvSpPr>
-            <a:spLocks xmlns:a="http://schemas.openxmlformats.org/drawingml/2006/main" noGrp="1"/>
-          </p:cNvSpPr>
-          <p:nvPr/>
-        </p:nvSpPr>
-        <p:spPr>
-          <a:xfrm xmlns:a="http://schemas.openxmlformats.org/drawingml/2006/main">
-            <a:off x="12001500" y="2800350"/>
-            <a:ext cx="2190750" cy="361950"/>
-          </a:xfrm>
-          <a:prstGeom xmlns:a="http://schemas.openxmlformats.org/drawingml/2006/main" prst="rect">
-            <a:avLst/>
-          </a:prstGeom>
-          <a:noFill xmlns:a="http://schemas.openxmlformats.org/drawingml/2006/main"/>
-          <a:ln xmlns:a="http://schemas.openxmlformats.org/drawingml/2006/main" w="0">
-            <a:noFill/>
-            <a:prstDash val="solid"/>
-          </a:ln>
-        </p:spPr>
-        <p:txBody>
-          <a:bodyPr xmlns:a="http://schemas.openxmlformats.org/drawingml/2006/main" wrap="square" lIns="0" tIns="0" rIns="0" bIns="0" anchor="ctr">
-            <a:normAutofit fontScale="100000"/>
-          </a:bodyPr>
-          <a:lstStyle xmlns:a="http://schemas.openxmlformats.org/drawingml/2006/main"/>
-          <a:p xmlns:a="http://schemas.openxmlformats.org/drawingml/2006/main">
-            <a:pPr algn="r">
-              <a:lnSpc>
-                <a:spcPct val="100000"/>
-              </a:lnSpc>
-              <a:buNone/>
-              <a:defRPr sz="1350" b="1">
-                <a:solidFill>
-                  <a:srgbClr val="F07D00"/>
-                </a:solidFill>
-                <a:latin typeface="Calibri"/>
-                <a:ea typeface="Calibri"/>
-                <a:cs typeface="Calibri"/>
-              </a:defRPr>
-            </a:pPr>
-            <a:r>
-              <a:rPr sz="1350" b="1">
-                <a:solidFill>
-                  <a:srgbClr val="F07D00"/>
-                </a:solidFill>
-                <a:latin typeface="Calibri"/>
-                <a:ea typeface="Calibri"/>
-                <a:cs typeface="Calibri"/>
-              </a:rPr>
-              <a:t>can split anywhere</a:t>
-            </a:r>
-          </a:p>
-        </p:txBody>
-      </p:sp>
-      <p:sp>
-        <p:nvSpPr>
-          <p:cNvPr id="13" name="">
-            <a:extLst xmlns:a="http://schemas.openxmlformats.org/drawingml/2006/main">
-              <a:ext uri="{FF2B5EF4-FFF2-40B4-BE49-F238E27FC236}">
-                <a16:creationId xmlns:a16="http://schemas.microsoft.com/office/drawing/2014/main" id="{B3122776-3C69-478E-8B1D-4E859ACC8602}"/>
-              </a:ext>
-            </a:extLst>
-          </p:cNvPr>
-          <p:cNvSpPr>
-            <a:spLocks xmlns:a="http://schemas.openxmlformats.org/drawingml/2006/main" noGrp="1"/>
-          </p:cNvSpPr>
-          <p:nvPr/>
-        </p:nvSpPr>
-        <p:spPr>
-          <a:xfrm xmlns:a="http://schemas.openxmlformats.org/drawingml/2006/main">
-            <a:off x="1028700" y="4267200"/>
-            <a:ext cx="2476500" cy="361950"/>
-          </a:xfrm>
-          <a:prstGeom xmlns:a="http://schemas.openxmlformats.org/drawingml/2006/main" prst="rect">
-            <a:avLst/>
-          </a:prstGeom>
-          <a:noFill xmlns:a="http://schemas.openxmlformats.org/drawingml/2006/main"/>
-          <a:ln xmlns:a="http://schemas.openxmlformats.org/drawingml/2006/main" w="0">
-            <a:noFill/>
-            <a:prstDash val="solid"/>
-          </a:ln>
-        </p:spPr>
-        <p:txBody>
-          <a:bodyPr xmlns:a="http://schemas.openxmlformats.org/drawingml/2006/main" wrap="square" lIns="0" tIns="0" rIns="0" bIns="0" anchor="ctr">
-            <a:normAutofit fontScale="100000"/>
-          </a:bodyPr>
-          <a:lstStyle xmlns:a="http://schemas.openxmlformats.org/drawingml/2006/main"/>
-          <a:p xmlns:a="http://schemas.openxmlformats.org/drawingml/2006/main">
-            <a:pPr algn="l">
-              <a:lnSpc>
-                <a:spcPct val="100000"/>
-              </a:lnSpc>
-              <a:buNone/>
-              <a:defRPr sz="1350" b="1">
-                <a:solidFill>
-                  <a:srgbClr val="00A2EB"/>
-                </a:solidFill>
-                <a:latin typeface="Calibri"/>
-                <a:ea typeface="Calibri"/>
-                <a:cs typeface="Calibri"/>
-              </a:defRPr>
-            </a:pPr>
-            <a:r>
-              <a:rPr sz="1350" b="1">
-                <a:solidFill>
-                  <a:srgbClr val="00A2EB"/>
-                </a:solidFill>
-                <a:latin typeface="Calibri"/>
-                <a:ea typeface="Calibri"/>
-                <a:cs typeface="Calibri"/>
-              </a:rPr>
-              <a:t>RECURSIVE · 180 chars</a:t>
-            </a:r>
-          </a:p>
-        </p:txBody>
-      </p:sp>
-      <p:sp>
-        <p:nvSpPr>
-          <p:cNvPr id="14" name="">
-            <a:extLst xmlns:a="http://schemas.openxmlformats.org/drawingml/2006/main">
-              <a:ext uri="{FF2B5EF4-FFF2-40B4-BE49-F238E27FC236}">
-                <a16:creationId xmlns:a16="http://schemas.microsoft.com/office/drawing/2014/main" id="{0020E4D2-1B72-432A-AD48-61D3EF9BCCA8}"/>
-              </a:ext>
-            </a:extLst>
-          </p:cNvPr>
-          <p:cNvSpPr>
-            <a:spLocks xmlns:a="http://schemas.openxmlformats.org/drawingml/2006/main" noGrp="1"/>
-          </p:cNvSpPr>
-          <p:nvPr/>
-        </p:nvSpPr>
-        <p:spPr>
-          <a:xfrm xmlns:a="http://schemas.openxmlformats.org/drawingml/2006/main">
-            <a:off x="3714750" y="4210050"/>
-            <a:ext cx="3143250" cy="647700"/>
-          </a:xfrm>
-          <a:prstGeom xmlns:a="http://schemas.openxmlformats.org/drawingml/2006/main" prst="roundRect">
-            <a:avLst>
-              <a:gd name="adj" fmla="val 5882"/>
-            </a:avLst>
-          </a:prstGeom>
-          <a:solidFill xmlns:a="http://schemas.openxmlformats.org/drawingml/2006/main">
-            <a:srgbClr val="1F40CB"/>
-          </a:solidFill>
-          <a:ln xmlns:a="http://schemas.openxmlformats.org/drawingml/2006/main" w="9525">
-            <a:solidFill>
-              <a:srgbClr val="FFFFFF"/>
-            </a:solidFill>
-            <a:prstDash val="solid"/>
-          </a:ln>
-        </p:spPr>
-      </p:sp>
-      <p:sp>
-        <p:nvSpPr>
-          <p:cNvPr id="15" name="">
-            <a:extLst xmlns:a="http://schemas.openxmlformats.org/drawingml/2006/main">
-              <a:ext uri="{FF2B5EF4-FFF2-40B4-BE49-F238E27FC236}">
-                <a16:creationId xmlns:a16="http://schemas.microsoft.com/office/drawing/2014/main" id="{499905A1-C4D3-46AB-A516-DCFB88A03736}"/>
-              </a:ext>
-            </a:extLst>
-          </p:cNvPr>
-          <p:cNvSpPr>
-            <a:spLocks xmlns:a="http://schemas.openxmlformats.org/drawingml/2006/main" noGrp="1"/>
-          </p:cNvSpPr>
-          <p:nvPr/>
-        </p:nvSpPr>
-        <p:spPr>
-          <a:xfrm xmlns:a="http://schemas.openxmlformats.org/drawingml/2006/main">
-            <a:off x="3810000" y="4305300"/>
-            <a:ext cx="2952750" cy="457200"/>
-          </a:xfrm>
-          <a:prstGeom xmlns:a="http://schemas.openxmlformats.org/drawingml/2006/main" prst="rect">
-            <a:avLst/>
-          </a:prstGeom>
-          <a:noFill xmlns:a="http://schemas.openxmlformats.org/drawingml/2006/main"/>
-          <a:ln xmlns:a="http://schemas.openxmlformats.org/drawingml/2006/main" w="0">
-            <a:noFill/>
-            <a:prstDash val="solid"/>
-          </a:ln>
-        </p:spPr>
-        <p:txBody>
-          <a:bodyPr xmlns:a="http://schemas.openxmlformats.org/drawingml/2006/main" wrap="square" lIns="0" tIns="0" rIns="0" bIns="0" anchor="ctr">
-            <a:normAutofit fontScale="100000"/>
-          </a:bodyPr>
-          <a:lstStyle xmlns:a="http://schemas.openxmlformats.org/drawingml/2006/main"/>
-          <a:p xmlns:a="http://schemas.openxmlformats.org/drawingml/2006/main">
-            <a:pPr algn="ctr">
-              <a:lnSpc>
-                <a:spcPct val="100000"/>
-              </a:lnSpc>
-              <a:buNone/>
-              <a:defRPr sz="1275" b="1">
-                <a:solidFill>
-                  <a:srgbClr val="FFFFFF"/>
-                </a:solidFill>
-                <a:latin typeface="Calibri"/>
-                <a:ea typeface="Calibri"/>
-                <a:cs typeface="Calibri"/>
-              </a:defRPr>
-            </a:pPr>
-            <a:r>
-              <a:rPr sz="1275" b="1">
-                <a:solidFill>
-                  <a:srgbClr val="FFFFFF"/>
-                </a:solidFill>
-                <a:latin typeface="Calibri"/>
-                <a:ea typeface="Calibri"/>
-                <a:cs typeface="Calibri"/>
-              </a:rPr>
-              <a:t>Revenue sentence</a:t>
-            </a:r>
-          </a:p>
-        </p:txBody>
-      </p:sp>
-      <p:sp>
-        <p:nvSpPr>
-          <p:cNvPr id="16" name="">
-            <a:extLst xmlns:a="http://schemas.openxmlformats.org/drawingml/2006/main">
-              <a:ext uri="{FF2B5EF4-FFF2-40B4-BE49-F238E27FC236}">
-                <a16:creationId xmlns:a16="http://schemas.microsoft.com/office/drawing/2014/main" id="{7C2240E6-0102-4064-B038-AB12EDED68BD}"/>
-              </a:ext>
-            </a:extLst>
-          </p:cNvPr>
-          <p:cNvSpPr>
-            <a:spLocks xmlns:a="http://schemas.openxmlformats.org/drawingml/2006/main" noGrp="1"/>
-          </p:cNvSpPr>
-          <p:nvPr/>
-        </p:nvSpPr>
-        <p:spPr>
-          <a:xfrm xmlns:a="http://schemas.openxmlformats.org/drawingml/2006/main">
-            <a:off x="6915150" y="4210050"/>
-            <a:ext cx="2952750" cy="647700"/>
-          </a:xfrm>
-          <a:prstGeom xmlns:a="http://schemas.openxmlformats.org/drawingml/2006/main" prst="roundRect">
-            <a:avLst>
-              <a:gd name="adj" fmla="val 5882"/>
-            </a:avLst>
-          </a:prstGeom>
-          <a:solidFill xmlns:a="http://schemas.openxmlformats.org/drawingml/2006/main">
-            <a:srgbClr val="00A2EB"/>
-          </a:solidFill>
-          <a:ln xmlns:a="http://schemas.openxmlformats.org/drawingml/2006/main" w="9525">
-            <a:solidFill>
-              <a:srgbClr val="FFFFFF"/>
-            </a:solidFill>
-            <a:prstDash val="solid"/>
-          </a:ln>
-        </p:spPr>
-      </p:sp>
-      <p:sp>
-        <p:nvSpPr>
-          <p:cNvPr id="17" name="">
-            <a:extLst xmlns:a="http://schemas.openxmlformats.org/drawingml/2006/main">
-              <a:ext uri="{FF2B5EF4-FFF2-40B4-BE49-F238E27FC236}">
-                <a16:creationId xmlns:a16="http://schemas.microsoft.com/office/drawing/2014/main" id="{7ECBA82F-0F85-40C1-9BE1-6E7847AE3FF4}"/>
-              </a:ext>
-            </a:extLst>
-          </p:cNvPr>
-          <p:cNvSpPr>
-            <a:spLocks xmlns:a="http://schemas.openxmlformats.org/drawingml/2006/main" noGrp="1"/>
-          </p:cNvSpPr>
-          <p:nvPr/>
-        </p:nvSpPr>
-        <p:spPr>
-          <a:xfrm xmlns:a="http://schemas.openxmlformats.org/drawingml/2006/main">
-            <a:off x="7010400" y="4305300"/>
-            <a:ext cx="2762250" cy="457200"/>
-          </a:xfrm>
-          <a:prstGeom xmlns:a="http://schemas.openxmlformats.org/drawingml/2006/main" prst="rect">
-            <a:avLst/>
-          </a:prstGeom>
-          <a:noFill xmlns:a="http://schemas.openxmlformats.org/drawingml/2006/main"/>
-          <a:ln xmlns:a="http://schemas.openxmlformats.org/drawingml/2006/main" w="0">
-            <a:noFill/>
-            <a:prstDash val="solid"/>
-          </a:ln>
-        </p:spPr>
-        <p:txBody>
-          <a:bodyPr xmlns:a="http://schemas.openxmlformats.org/drawingml/2006/main" wrap="square" lIns="0" tIns="0" rIns="0" bIns="0" anchor="ctr">
-            <a:normAutofit fontScale="100000"/>
-          </a:bodyPr>
-          <a:lstStyle xmlns:a="http://schemas.openxmlformats.org/drawingml/2006/main"/>
-          <a:p xmlns:a="http://schemas.openxmlformats.org/drawingml/2006/main">
-            <a:pPr algn="ctr">
-              <a:lnSpc>
-                <a:spcPct val="100000"/>
-              </a:lnSpc>
-              <a:buNone/>
-              <a:defRPr sz="1275" b="1">
-                <a:solidFill>
-                  <a:srgbClr val="FFFFFF"/>
-                </a:solidFill>
-                <a:latin typeface="Calibri"/>
-                <a:ea typeface="Calibri"/>
-                <a:cs typeface="Calibri"/>
-              </a:defRPr>
-            </a:pPr>
-            <a:r>
-              <a:rPr sz="1275" b="1">
-                <a:solidFill>
-                  <a:srgbClr val="FFFFFF"/>
-                </a:solidFill>
-                <a:latin typeface="Calibri"/>
-                <a:ea typeface="Calibri"/>
-                <a:cs typeface="Calibri"/>
-              </a:rPr>
-              <a:t>Data Center sentence</a:t>
-            </a:r>
-          </a:p>
-        </p:txBody>
-      </p:sp>
-      <p:sp>
-        <p:nvSpPr>
-          <p:cNvPr id="18" name="">
-            <a:extLst xmlns:a="http://schemas.openxmlformats.org/drawingml/2006/main">
-              <a:ext uri="{FF2B5EF4-FFF2-40B4-BE49-F238E27FC236}">
-                <a16:creationId xmlns:a16="http://schemas.microsoft.com/office/drawing/2014/main" id="{6BD7C7D4-5A09-43DC-B381-56DF305B4223}"/>
-              </a:ext>
-            </a:extLst>
-          </p:cNvPr>
-          <p:cNvSpPr>
-            <a:spLocks xmlns:a="http://schemas.openxmlformats.org/drawingml/2006/main" noGrp="1"/>
-          </p:cNvSpPr>
-          <p:nvPr/>
-        </p:nvSpPr>
-        <p:spPr>
-          <a:xfrm xmlns:a="http://schemas.openxmlformats.org/drawingml/2006/main">
-            <a:off x="9925050" y="4210050"/>
-            <a:ext cx="2000250" cy="647700"/>
-          </a:xfrm>
-          <a:prstGeom xmlns:a="http://schemas.openxmlformats.org/drawingml/2006/main" prst="roundRect">
-            <a:avLst>
-              <a:gd name="adj" fmla="val 5882"/>
-            </a:avLst>
-          </a:prstGeom>
-          <a:solidFill xmlns:a="http://schemas.openxmlformats.org/drawingml/2006/main">
-            <a:srgbClr val="1F40CB"/>
-          </a:solidFill>
-          <a:ln xmlns:a="http://schemas.openxmlformats.org/drawingml/2006/main" w="9525">
-            <a:solidFill>
-              <a:srgbClr val="FFFFFF"/>
-            </a:solidFill>
-            <a:prstDash val="solid"/>
-          </a:ln>
-        </p:spPr>
-      </p:sp>
-      <p:sp>
-        <p:nvSpPr>
-          <p:cNvPr id="19" name="">
-            <a:extLst xmlns:a="http://schemas.openxmlformats.org/drawingml/2006/main">
-              <a:ext uri="{FF2B5EF4-FFF2-40B4-BE49-F238E27FC236}">
-                <a16:creationId xmlns:a16="http://schemas.microsoft.com/office/drawing/2014/main" id="{9A2F20F1-CF35-4789-AC4A-62229AB1DDA9}"/>
-              </a:ext>
-            </a:extLst>
-          </p:cNvPr>
-          <p:cNvSpPr>
-            <a:spLocks xmlns:a="http://schemas.openxmlformats.org/drawingml/2006/main" noGrp="1"/>
-          </p:cNvSpPr>
-          <p:nvPr/>
-        </p:nvSpPr>
-        <p:spPr>
-          <a:xfrm xmlns:a="http://schemas.openxmlformats.org/drawingml/2006/main">
-            <a:off x="10020300" y="4305300"/>
-            <a:ext cx="1809750" cy="457200"/>
-          </a:xfrm>
-          <a:prstGeom xmlns:a="http://schemas.openxmlformats.org/drawingml/2006/main" prst="rect">
-            <a:avLst/>
-          </a:prstGeom>
-          <a:noFill xmlns:a="http://schemas.openxmlformats.org/drawingml/2006/main"/>
-          <a:ln xmlns:a="http://schemas.openxmlformats.org/drawingml/2006/main" w="0">
-            <a:noFill/>
-            <a:prstDash val="solid"/>
-          </a:ln>
-        </p:spPr>
-        <p:txBody>
-          <a:bodyPr xmlns:a="http://schemas.openxmlformats.org/drawingml/2006/main" wrap="square" lIns="0" tIns="0" rIns="0" bIns="0" anchor="ctr">
-            <a:normAutofit fontScale="100000"/>
-          </a:bodyPr>
-          <a:lstStyle xmlns:a="http://schemas.openxmlformats.org/drawingml/2006/main"/>
-          <a:p xmlns:a="http://schemas.openxmlformats.org/drawingml/2006/main">
-            <a:pPr algn="ctr">
-              <a:lnSpc>
-                <a:spcPct val="100000"/>
-              </a:lnSpc>
-              <a:buNone/>
-              <a:defRPr sz="1275" b="1">
-                <a:solidFill>
-                  <a:srgbClr val="FFFFFF"/>
-                </a:solidFill>
-                <a:latin typeface="Calibri"/>
-                <a:ea typeface="Calibri"/>
-                <a:cs typeface="Calibri"/>
-              </a:defRPr>
-            </a:pPr>
-            <a:r>
-              <a:rPr sz="1275" b="1">
-                <a:solidFill>
-                  <a:srgbClr val="FFFFFF"/>
-                </a:solidFill>
-                <a:latin typeface="Calibri"/>
-                <a:ea typeface="Calibri"/>
-                <a:cs typeface="Calibri"/>
-              </a:rPr>
-              <a:t>Gaming row</a:t>
-            </a:r>
-          </a:p>
-        </p:txBody>
-      </p:sp>
-      <p:sp>
-        <p:nvSpPr>
-          <p:cNvPr id="20" name="">
-            <a:extLst xmlns:a="http://schemas.openxmlformats.org/drawingml/2006/main">
-              <a:ext uri="{FF2B5EF4-FFF2-40B4-BE49-F238E27FC236}">
-                <a16:creationId xmlns:a16="http://schemas.microsoft.com/office/drawing/2014/main" id="{E58CD3E4-48E0-4421-8A8E-9A03948E1061}"/>
-              </a:ext>
-            </a:extLst>
-          </p:cNvPr>
-          <p:cNvSpPr>
-            <a:spLocks xmlns:a="http://schemas.openxmlformats.org/drawingml/2006/main" noGrp="1"/>
-          </p:cNvSpPr>
-          <p:nvPr/>
-        </p:nvSpPr>
-        <p:spPr>
-          <a:xfrm xmlns:a="http://schemas.openxmlformats.org/drawingml/2006/main">
-            <a:off x="12001500" y="4267200"/>
-            <a:ext cx="2190750" cy="361950"/>
-          </a:xfrm>
-          <a:prstGeom xmlns:a="http://schemas.openxmlformats.org/drawingml/2006/main" prst="rect">
-            <a:avLst/>
-          </a:prstGeom>
-          <a:noFill xmlns:a="http://schemas.openxmlformats.org/drawingml/2006/main"/>
-          <a:ln xmlns:a="http://schemas.openxmlformats.org/drawingml/2006/main" w="0">
-            <a:noFill/>
-            <a:prstDash val="solid"/>
-          </a:ln>
-        </p:spPr>
-        <p:txBody>
-          <a:bodyPr xmlns:a="http://schemas.openxmlformats.org/drawingml/2006/main" wrap="square" lIns="0" tIns="0" rIns="0" bIns="0" anchor="ctr">
-            <a:normAutofit fontScale="100000"/>
-          </a:bodyPr>
-          <a:lstStyle xmlns:a="http://schemas.openxmlformats.org/drawingml/2006/main"/>
-          <a:p xmlns:a="http://schemas.openxmlformats.org/drawingml/2006/main">
-            <a:pPr algn="r">
-              <a:lnSpc>
-                <a:spcPct val="100000"/>
-              </a:lnSpc>
-              <a:buNone/>
-              <a:defRPr sz="1350" b="1">
-                <a:solidFill>
-                  <a:srgbClr val="00A2EB"/>
-                </a:solidFill>
-                <a:latin typeface="Calibri"/>
-                <a:ea typeface="Calibri"/>
-                <a:cs typeface="Calibri"/>
-              </a:defRPr>
-            </a:pPr>
-            <a:r>
-              <a:rPr sz="1350" b="1">
-                <a:solidFill>
-                  <a:srgbClr val="00A2EB"/>
-                </a:solidFill>
-                <a:latin typeface="Calibri"/>
-                <a:ea typeface="Calibri"/>
-                <a:cs typeface="Calibri"/>
-              </a:rPr>
-              <a:t>prefers text boundaries</a:t>
-            </a:r>
-          </a:p>
-        </p:txBody>
-      </p:sp>
-      <p:sp>
-        <p:nvSpPr>
-          <p:cNvPr id="21" name="">
-            <a:extLst xmlns:a="http://schemas.openxmlformats.org/drawingml/2006/main">
-              <a:ext uri="{FF2B5EF4-FFF2-40B4-BE49-F238E27FC236}">
-                <a16:creationId xmlns:a16="http://schemas.microsoft.com/office/drawing/2014/main" id="{DA8DF2BD-542C-4821-AB60-F914C2D7D54D}"/>
-              </a:ext>
-            </a:extLst>
-          </p:cNvPr>
-          <p:cNvSpPr>
-            <a:spLocks xmlns:a="http://schemas.openxmlformats.org/drawingml/2006/main" noGrp="1"/>
-          </p:cNvSpPr>
-          <p:nvPr/>
-        </p:nvSpPr>
-        <p:spPr>
-          <a:xfrm xmlns:a="http://schemas.openxmlformats.org/drawingml/2006/main">
-            <a:off x="1028700" y="5734050"/>
-            <a:ext cx="2476500" cy="361950"/>
-          </a:xfrm>
-          <a:prstGeom xmlns:a="http://schemas.openxmlformats.org/drawingml/2006/main" prst="rect">
-            <a:avLst/>
-          </a:prstGeom>
-          <a:noFill xmlns:a="http://schemas.openxmlformats.org/drawingml/2006/main"/>
-          <a:ln xmlns:a="http://schemas.openxmlformats.org/drawingml/2006/main" w="0">
-            <a:noFill/>
-            <a:prstDash val="solid"/>
-          </a:ln>
-        </p:spPr>
-        <p:txBody>
-          <a:bodyPr xmlns:a="http://schemas.openxmlformats.org/drawingml/2006/main" wrap="square" lIns="0" tIns="0" rIns="0" bIns="0" anchor="ctr">
-            <a:normAutofit fontScale="100000"/>
-          </a:bodyPr>
-          <a:lstStyle xmlns:a="http://schemas.openxmlformats.org/drawingml/2006/main"/>
-          <a:p xmlns:a="http://schemas.openxmlformats.org/drawingml/2006/main">
-            <a:pPr algn="l">
-              <a:lnSpc>
-                <a:spcPct val="100000"/>
-              </a:lnSpc>
-              <a:buNone/>
-              <a:defRPr sz="1350" b="1">
-                <a:solidFill>
-                  <a:srgbClr val="2E8B57"/>
-                </a:solidFill>
-                <a:latin typeface="Calibri"/>
-                <a:ea typeface="Calibri"/>
-                <a:cs typeface="Calibri"/>
-              </a:defRPr>
-            </a:pPr>
-            <a:r>
-              <a:rPr sz="1350" b="1">
-                <a:solidFill>
-                  <a:srgbClr val="2E8B57"/>
-                </a:solidFill>
-                <a:latin typeface="Calibri"/>
-                <a:ea typeface="Calibri"/>
-                <a:cs typeface="Calibri"/>
-              </a:rPr>
-              <a:t>STRUCTURE-AWARE</a:t>
-            </a:r>
-          </a:p>
-        </p:txBody>
-      </p:sp>
-      <p:sp>
-        <p:nvSpPr>
-          <p:cNvPr id="22" name="">
-            <a:extLst xmlns:a="http://schemas.openxmlformats.org/drawingml/2006/main">
-              <a:ext uri="{FF2B5EF4-FFF2-40B4-BE49-F238E27FC236}">
-                <a16:creationId xmlns:a16="http://schemas.microsoft.com/office/drawing/2014/main" id="{80D1C47B-0B67-4AFB-8BDC-2F9D29D00182}"/>
-              </a:ext>
-            </a:extLst>
-          </p:cNvPr>
-          <p:cNvSpPr>
-            <a:spLocks xmlns:a="http://schemas.openxmlformats.org/drawingml/2006/main" noGrp="1"/>
-          </p:cNvSpPr>
-          <p:nvPr/>
-        </p:nvSpPr>
-        <p:spPr>
-          <a:xfrm xmlns:a="http://schemas.openxmlformats.org/drawingml/2006/main">
-            <a:off x="3714750" y="5676900"/>
-            <a:ext cx="3314700" cy="647700"/>
-          </a:xfrm>
-          <a:prstGeom xmlns:a="http://schemas.openxmlformats.org/drawingml/2006/main" prst="roundRect">
-            <a:avLst>
-              <a:gd name="adj" fmla="val 5882"/>
-            </a:avLst>
-          </a:prstGeom>
-          <a:solidFill xmlns:a="http://schemas.openxmlformats.org/drawingml/2006/main">
-            <a:srgbClr val="1F40CB"/>
-          </a:solidFill>
-          <a:ln xmlns:a="http://schemas.openxmlformats.org/drawingml/2006/main" w="9525">
-            <a:solidFill>
-              <a:srgbClr val="FFFFFF"/>
-            </a:solidFill>
-            <a:prstDash val="solid"/>
-          </a:ln>
-        </p:spPr>
-      </p:sp>
-      <p:sp>
-        <p:nvSpPr>
-          <p:cNvPr id="23" name="">
-            <a:extLst xmlns:a="http://schemas.openxmlformats.org/drawingml/2006/main">
-              <a:ext uri="{FF2B5EF4-FFF2-40B4-BE49-F238E27FC236}">
-                <a16:creationId xmlns:a16="http://schemas.microsoft.com/office/drawing/2014/main" id="{0E2F7603-BBFF-4854-9F2D-F8FF1E3B19D5}"/>
-              </a:ext>
-            </a:extLst>
-          </p:cNvPr>
-          <p:cNvSpPr>
-            <a:spLocks xmlns:a="http://schemas.openxmlformats.org/drawingml/2006/main" noGrp="1"/>
-          </p:cNvSpPr>
-          <p:nvPr/>
-        </p:nvSpPr>
-        <p:spPr>
-          <a:xfrm xmlns:a="http://schemas.openxmlformats.org/drawingml/2006/main">
-            <a:off x="3810000" y="5772150"/>
-            <a:ext cx="3124200" cy="457200"/>
-          </a:xfrm>
-          <a:prstGeom xmlns:a="http://schemas.openxmlformats.org/drawingml/2006/main" prst="rect">
-            <a:avLst/>
-          </a:prstGeom>
-          <a:noFill xmlns:a="http://schemas.openxmlformats.org/drawingml/2006/main"/>
-          <a:ln xmlns:a="http://schemas.openxmlformats.org/drawingml/2006/main" w="0">
-            <a:noFill/>
-            <a:prstDash val="solid"/>
-          </a:ln>
-        </p:spPr>
-        <p:txBody>
-          <a:bodyPr xmlns:a="http://schemas.openxmlformats.org/drawingml/2006/main" wrap="square" lIns="0" tIns="0" rIns="0" bIns="0" anchor="ctr">
-            <a:normAutofit fontScale="100000"/>
-          </a:bodyPr>
-          <a:lstStyle xmlns:a="http://schemas.openxmlformats.org/drawingml/2006/main"/>
-          <a:p xmlns:a="http://schemas.openxmlformats.org/drawingml/2006/main">
-            <a:pPr algn="ctr">
-              <a:lnSpc>
-                <a:spcPct val="100000"/>
-              </a:lnSpc>
-              <a:buNone/>
-              <a:defRPr sz="1275" b="1">
-                <a:solidFill>
-                  <a:srgbClr val="FFFFFF"/>
-                </a:solidFill>
-                <a:latin typeface="Calibri"/>
-                <a:ea typeface="Calibri"/>
-                <a:cs typeface="Calibri"/>
-              </a:defRPr>
-            </a:pPr>
-            <a:r>
-              <a:rPr sz="1275" b="1">
-                <a:solidFill>
-                  <a:srgbClr val="FFFFFF"/>
-                </a:solidFill>
-                <a:latin typeface="Calibri"/>
-                <a:ea typeface="Calibri"/>
-                <a:cs typeface="Calibri"/>
-              </a:rPr>
-              <a:t>Revenue paragraph</a:t>
-            </a:r>
-          </a:p>
-        </p:txBody>
-      </p:sp>
-      <p:sp>
-        <p:nvSpPr>
-          <p:cNvPr id="24" name="">
-            <a:extLst xmlns:a="http://schemas.openxmlformats.org/drawingml/2006/main">
-              <a:ext uri="{FF2B5EF4-FFF2-40B4-BE49-F238E27FC236}">
-                <a16:creationId xmlns:a16="http://schemas.microsoft.com/office/drawing/2014/main" id="{518F6C86-F0E1-4812-B3DD-797EA0ED5A4E}"/>
-              </a:ext>
-            </a:extLst>
-          </p:cNvPr>
-          <p:cNvSpPr>
-            <a:spLocks xmlns:a="http://schemas.openxmlformats.org/drawingml/2006/main" noGrp="1"/>
-          </p:cNvSpPr>
-          <p:nvPr/>
-        </p:nvSpPr>
-        <p:spPr>
-          <a:xfrm xmlns:a="http://schemas.openxmlformats.org/drawingml/2006/main">
-            <a:off x="7086600" y="5676900"/>
-            <a:ext cx="4781550" cy="647700"/>
-          </a:xfrm>
-          <a:prstGeom xmlns:a="http://schemas.openxmlformats.org/drawingml/2006/main" prst="roundRect">
-            <a:avLst>
-              <a:gd name="adj" fmla="val 5882"/>
-            </a:avLst>
-          </a:prstGeom>
-          <a:solidFill xmlns:a="http://schemas.openxmlformats.org/drawingml/2006/main">
-            <a:srgbClr val="2E8B57"/>
-          </a:solidFill>
-          <a:ln xmlns:a="http://schemas.openxmlformats.org/drawingml/2006/main" w="9525">
-            <a:solidFill>
-              <a:srgbClr val="FFFFFF"/>
-            </a:solidFill>
-            <a:prstDash val="solid"/>
-          </a:ln>
-        </p:spPr>
-      </p:sp>
-      <p:sp>
-        <p:nvSpPr>
-          <p:cNvPr id="25" name="">
-            <a:extLst xmlns:a="http://schemas.openxmlformats.org/drawingml/2006/main">
-              <a:ext uri="{FF2B5EF4-FFF2-40B4-BE49-F238E27FC236}">
-                <a16:creationId xmlns:a16="http://schemas.microsoft.com/office/drawing/2014/main" id="{B9A6A990-C3AB-4ED0-A029-B6138AA54242}"/>
-              </a:ext>
-            </a:extLst>
-          </p:cNvPr>
-          <p:cNvSpPr>
-            <a:spLocks xmlns:a="http://schemas.openxmlformats.org/drawingml/2006/main" noGrp="1"/>
-          </p:cNvSpPr>
-          <p:nvPr/>
-        </p:nvSpPr>
-        <p:spPr>
-          <a:xfrm xmlns:a="http://schemas.openxmlformats.org/drawingml/2006/main">
-            <a:off x="7181850" y="5772150"/>
-            <a:ext cx="4591050" cy="457200"/>
-          </a:xfrm>
-          <a:prstGeom xmlns:a="http://schemas.openxmlformats.org/drawingml/2006/main" prst="rect">
-            <a:avLst/>
-          </a:prstGeom>
-          <a:noFill xmlns:a="http://schemas.openxmlformats.org/drawingml/2006/main"/>
-          <a:ln xmlns:a="http://schemas.openxmlformats.org/drawingml/2006/main" w="0">
-            <a:noFill/>
-            <a:prstDash val="solid"/>
-          </a:ln>
-        </p:spPr>
-        <p:txBody>
-          <a:bodyPr xmlns:a="http://schemas.openxmlformats.org/drawingml/2006/main" wrap="square" lIns="0" tIns="0" rIns="0" bIns="0" anchor="ctr">
-            <a:normAutofit fontScale="100000"/>
-          </a:bodyPr>
-          <a:lstStyle xmlns:a="http://schemas.openxmlformats.org/drawingml/2006/main"/>
-          <a:p xmlns:a="http://schemas.openxmlformats.org/drawingml/2006/main">
-            <a:pPr algn="ctr">
-              <a:lnSpc>
-                <a:spcPct val="100000"/>
-              </a:lnSpc>
-              <a:buNone/>
-              <a:defRPr sz="1275" b="1">
-                <a:solidFill>
-                  <a:srgbClr val="FFFFFF"/>
-                </a:solidFill>
-                <a:latin typeface="Calibri"/>
-                <a:ea typeface="Calibri"/>
-                <a:cs typeface="Calibri"/>
-              </a:defRPr>
-            </a:pPr>
-            <a:r>
-              <a:rPr sz="1275" b="1">
-                <a:solidFill>
-                  <a:srgbClr val="FFFFFF"/>
-                </a:solidFill>
-                <a:latin typeface="Calibri"/>
-                <a:ea typeface="Calibri"/>
-                <a:cs typeface="Calibri"/>
-              </a:rPr>
-              <a:t>COMPLETE TABLE · headers + rows</a:t>
-            </a:r>
-          </a:p>
-        </p:txBody>
-      </p:sp>
-      <p:sp>
-        <p:nvSpPr>
-          <p:cNvPr id="26" name="">
-            <a:extLst xmlns:a="http://schemas.openxmlformats.org/drawingml/2006/main">
-              <a:ext uri="{FF2B5EF4-FFF2-40B4-BE49-F238E27FC236}">
-                <a16:creationId xmlns:a16="http://schemas.microsoft.com/office/drawing/2014/main" id="{24845B58-81DD-48AA-9B5B-C9CA27F8A4A0}"/>
-              </a:ext>
-            </a:extLst>
-          </p:cNvPr>
-          <p:cNvSpPr>
-            <a:spLocks xmlns:a="http://schemas.openxmlformats.org/drawingml/2006/main" noGrp="1"/>
-          </p:cNvSpPr>
-          <p:nvPr/>
-        </p:nvSpPr>
-        <p:spPr>
-          <a:xfrm xmlns:a="http://schemas.openxmlformats.org/drawingml/2006/main">
-            <a:off x="12001500" y="5734050"/>
-            <a:ext cx="2190750" cy="361950"/>
-          </a:xfrm>
-          <a:prstGeom xmlns:a="http://schemas.openxmlformats.org/drawingml/2006/main" prst="rect">
-            <a:avLst/>
-          </a:prstGeom>
-          <a:noFill xmlns:a="http://schemas.openxmlformats.org/drawingml/2006/main"/>
-          <a:ln xmlns:a="http://schemas.openxmlformats.org/drawingml/2006/main" w="0">
-            <a:noFill/>
-            <a:prstDash val="solid"/>
-          </a:ln>
-        </p:spPr>
-        <p:txBody>
-          <a:bodyPr xmlns:a="http://schemas.openxmlformats.org/drawingml/2006/main" wrap="square" lIns="0" tIns="0" rIns="0" bIns="0" anchor="ctr">
-            <a:normAutofit fontScale="94697"/>
-          </a:bodyPr>
-          <a:lstStyle xmlns:a="http://schemas.openxmlformats.org/drawingml/2006/main"/>
-          <a:p xmlns:a="http://schemas.openxmlformats.org/drawingml/2006/main">
-            <a:pPr algn="r">
-              <a:lnSpc>
-                <a:spcPct val="100000"/>
-              </a:lnSpc>
-              <a:buNone/>
-              <a:defRPr sz="1350" b="1">
-                <a:solidFill>
-                  <a:srgbClr val="2E8B57"/>
-                </a:solidFill>
-                <a:latin typeface="Calibri"/>
-                <a:ea typeface="Calibri"/>
-                <a:cs typeface="Calibri"/>
-              </a:defRPr>
-            </a:pPr>
-            <a:r>
-              <a:rPr sz="1350" b="1">
-                <a:solidFill>
-                  <a:srgbClr val="2E8B57"/>
-                </a:solidFill>
-                <a:latin typeface="Calibri"/>
-                <a:ea typeface="Calibri"/>
-                <a:cs typeface="Calibri"/>
-              </a:rPr>
-              <a:t>protects document meaning</a:t>
-            </a:r>
-          </a:p>
-        </p:txBody>
-      </p:sp>
-      <p:sp>
-        <p:nvSpPr>
-          <p:cNvPr id="27" name="">
-            <a:extLst xmlns:a="http://schemas.openxmlformats.org/drawingml/2006/main">
-              <a:ext uri="{FF2B5EF4-FFF2-40B4-BE49-F238E27FC236}">
-                <a16:creationId xmlns:a16="http://schemas.microsoft.com/office/drawing/2014/main" id="{1F021015-2BDE-427C-B7E6-89D40DC755A5}"/>
-              </a:ext>
-            </a:extLst>
-          </p:cNvPr>
-          <p:cNvSpPr>
-            <a:spLocks xmlns:a="http://schemas.openxmlformats.org/drawingml/2006/main" noGrp="1"/>
-          </p:cNvSpPr>
-          <p:nvPr/>
-        </p:nvSpPr>
-        <p:spPr>
-          <a:xfrm xmlns:a="http://schemas.openxmlformats.org/drawingml/2006/main">
-            <a:off x="3714750" y="2819400"/>
-            <a:ext cx="28575" cy="3486150"/>
-          </a:xfrm>
-          <a:prstGeom xmlns:a="http://schemas.openxmlformats.org/drawingml/2006/main" prst="rect">
-            <a:avLst/>
-          </a:prstGeom>
-          <a:solidFill xmlns:a="http://schemas.openxmlformats.org/drawingml/2006/main">
-            <a:srgbClr val="E4E7E9"/>
-          </a:solidFill>
-          <a:ln xmlns:a="http://schemas.openxmlformats.org/drawingml/2006/main" w="0">
-            <a:solidFill>
-              <a:srgbClr val="E4E7E9"/>
-            </a:solidFill>
-            <a:prstDash val="solid"/>
-          </a:ln>
-        </p:spPr>
+              <a:t>A number is unsafe when its row or header is missing</a:t>
+            </a:r>
+          </a:p>
+        </p:txBody>
       </p:sp>
       <p:sp>
         <p:nvSpPr>
@@ -10357,7 +6181,7 @@
                 <a:ea typeface="Calibri"/>
                 <a:cs typeface="Calibri"/>
               </a:rPr>
-              <a:t>Chunk size is an optimization parameter. Table and provenance integrity are constraints.</a:t>
+              <a:t>A chunk may retrieve the right number and still destroy the financial relationship.</a:t>
             </a:r>
           </a:p>
         </p:txBody>
@@ -10614,6 +6438,28 @@
           </a:p>
         </p:txBody>
       </p:sp>
+      <p:pic>
+        <p:nvPicPr>
+          <p:cNvPr id="46" name=""/>
+          <p:cNvPicPr>
+            <a:picLocks xmlns:a="http://schemas.openxmlformats.org/drawingml/2006/main" noChangeAspect="1"/>
+          </p:cNvPicPr>
+          <p:nvPr/>
+        </p:nvPicPr>
+        <p:blipFill>
+          <a:blip xmlns:r="http://schemas.openxmlformats.org/officeDocument/2006/relationships" xmlns:a="http://schemas.openxmlformats.org/drawingml/2006/main" r:embed="R054d5eb5608a4cd0"/>
+          <a:stretch xmlns:a="http://schemas.openxmlformats.org/drawingml/2006/main"/>
+        </p:blipFill>
+        <p:spPr>
+          <a:xfrm xmlns:a="http://schemas.openxmlformats.org/drawingml/2006/main">
+            <a:off x="1427871" y="2247900"/>
+            <a:ext cx="12384258" cy="4343400"/>
+          </a:xfrm>
+          <a:prstGeom xmlns:a="http://schemas.openxmlformats.org/drawingml/2006/main" prst="rect">
+            <a:avLst/>
+          </a:prstGeom>
+        </p:spPr>
+      </p:pic>
     </p:spTree>
     <p:extLst>
       <p:ext uri="{BB962C8B-B14F-4D97-AF65-F5344CB8AC3E}">
@@ -11607,7 +7453,7 @@
       </p:sp>
       <p:cxnSp>
         <p:nvCxnSpPr>
-          <p:cNvPr id="182" name=""/>
+          <p:cNvPr id="278" name=""/>
           <p:cNvCxnSpPr>
             <a:stCxn xmlns:a="http://schemas.openxmlformats.org/drawingml/2006/main" id="14" idx="2"/>
             <a:endCxn xmlns:a="http://schemas.openxmlformats.org/drawingml/2006/main" id="16" idx="0"/>
@@ -11633,7 +7479,7 @@
       </p:cxnSp>
       <p:cxnSp>
         <p:nvCxnSpPr>
-          <p:cNvPr id="183" name=""/>
+          <p:cNvPr id="279" name=""/>
           <p:cNvCxnSpPr>
             <a:stCxn xmlns:a="http://schemas.openxmlformats.org/drawingml/2006/main" id="14" idx="2"/>
             <a:endCxn xmlns:a="http://schemas.openxmlformats.org/drawingml/2006/main" id="18" idx="0"/>
@@ -11659,7 +7505,7 @@
       </p:cxnSp>
       <p:cxnSp>
         <p:nvCxnSpPr>
-          <p:cNvPr id="184" name=""/>
+          <p:cNvPr id="280" name=""/>
           <p:cNvCxnSpPr>
             <a:stCxn xmlns:a="http://schemas.openxmlformats.org/drawingml/2006/main" id="14" idx="2"/>
             <a:endCxn xmlns:a="http://schemas.openxmlformats.org/drawingml/2006/main" id="20" idx="0"/>
@@ -15703,7 +11549,7 @@
       </p:sp>
       <p:cxnSp>
         <p:nvCxnSpPr>
-          <p:cNvPr id="110" name=""/>
+          <p:cNvPr id="166" name=""/>
           <p:cNvCxnSpPr>
             <a:stCxn xmlns:a="http://schemas.openxmlformats.org/drawingml/2006/main" id="3" idx="3"/>
             <a:endCxn xmlns:a="http://schemas.openxmlformats.org/drawingml/2006/main" id="6" idx="1"/>
@@ -15729,7 +11575,7 @@
       </p:cxnSp>
       <p:cxnSp>
         <p:nvCxnSpPr>
-          <p:cNvPr id="111" name=""/>
+          <p:cNvPr id="167" name=""/>
           <p:cNvCxnSpPr>
             <a:stCxn xmlns:a="http://schemas.openxmlformats.org/drawingml/2006/main" id="6" idx="3"/>
             <a:endCxn xmlns:a="http://schemas.openxmlformats.org/drawingml/2006/main" id="10" idx="1"/>
@@ -16850,6 +12696,7 @@
           <a:lstStyle xmlns:a="http://schemas.openxmlformats.org/drawingml/2006/main"/>
           <a:p xmlns:a="http://schemas.openxmlformats.org/drawingml/2006/main">
             <a:pPr>
+              <a:buNone/>
               <a:defRPr sz="1500" b="1">
                 <a:solidFill>
                   <a:srgbClr val="001B2E"/>
@@ -16900,6 +12747,7 @@
           <a:lstStyle xmlns:a="http://schemas.openxmlformats.org/drawingml/2006/main"/>
           <a:p xmlns:a="http://schemas.openxmlformats.org/drawingml/2006/main">
             <a:pPr>
+              <a:buNone/>
               <a:defRPr sz="1200" b="0">
                 <a:solidFill>
                   <a:srgbClr val="334155"/>
@@ -16950,6 +12798,7 @@
           <a:lstStyle xmlns:a="http://schemas.openxmlformats.org/drawingml/2006/main"/>
           <a:p xmlns:a="http://schemas.openxmlformats.org/drawingml/2006/main">
             <a:pPr>
+              <a:buNone/>
               <a:defRPr sz="1500" b="1">
                 <a:solidFill>
                   <a:srgbClr val="001B2E"/>
@@ -17000,6 +12849,7 @@
           <a:lstStyle xmlns:a="http://schemas.openxmlformats.org/drawingml/2006/main"/>
           <a:p xmlns:a="http://schemas.openxmlformats.org/drawingml/2006/main">
             <a:pPr>
+              <a:buNone/>
               <a:defRPr sz="1200" b="0">
                 <a:solidFill>
                   <a:srgbClr val="334155"/>
@@ -17050,6 +12900,7 @@
           <a:lstStyle xmlns:a="http://schemas.openxmlformats.org/drawingml/2006/main"/>
           <a:p xmlns:a="http://schemas.openxmlformats.org/drawingml/2006/main">
             <a:pPr>
+              <a:buNone/>
               <a:defRPr sz="1500" b="1">
                 <a:solidFill>
                   <a:srgbClr val="001B2E"/>
@@ -17100,6 +12951,7 @@
           <a:lstStyle xmlns:a="http://schemas.openxmlformats.org/drawingml/2006/main"/>
           <a:p xmlns:a="http://schemas.openxmlformats.org/drawingml/2006/main">
             <a:pPr>
+              <a:buNone/>
               <a:defRPr sz="1200" b="0">
                 <a:solidFill>
                   <a:srgbClr val="334155"/>
